--- a/docs/seminar/slides/세션1_스레드모델과_주소매핑.pptx
+++ b/docs/seminar/slides/세션1_스레드모델과_주소매핑.pptx
@@ -16,9 +16,10 @@
     <p:sldId id="264" r:id="rId10"/>
     <p:sldId id="265" r:id="rId11"/>
     <p:sldId id="266" r:id="rId12"/>
+    <p:sldId id="267" r:id="rId13"/>
   </p:sldIdLst>
   <p:notesMasterIdLst>
-    <p:notesMasterId r:id="rId13"/>
+    <p:notesMasterId r:id="rId14"/>
   </p:notesMasterIdLst>
   <p:sldSz cx="12192000" cy="6858000"/>
   <p:notesSz cx="6858000" cy="12192000"/>
@@ -600,7 +601,7 @@
           <a:p>
             <a:r>
               <a:rPr lang="en-US" dirty="0"/>
-              <a:t>네 가지 목표(슬라이드 2)로 돌아가 자가 점검을 유도하세요.</a:t>
+              <a:t>launch = CPU 한 줄 → GPU가 블록을 SM에 분배 → 워프 실행 → 완료. 호스트는 비동기로 리턴한다는 점이 다음 세션들의 복선.</a:t>
             </a:r>
             <a:endParaRPr lang="en-US" dirty="0"/>
           </a:p>
@@ -688,7 +689,7 @@
           <a:p>
             <a:r>
               <a:rPr lang="en-US" dirty="0"/>
-              <a:t/>
+              <a:t>네 가지 목표(슬라이드 2)로 돌아가 자가 점검을 유도하세요.</a:t>
             </a:r>
             <a:endParaRPr lang="en-US" dirty="0"/>
           </a:p>
@@ -712,6 +713,94 @@
             <a:fld id="{F7021451-1387-4CA6-816F-3879F97B5CBC}" type="slidenum">
               <a:rPr lang="en-US"/>
               <a:t>11</a:t>
+            </a:fld>
+            <a:endParaRPr lang="en-US"/>
+          </a:p>
+        </p:txBody>
+      </p:sp>
+    </p:spTree>
+    <p:extLst>
+      <p:ext uri="{BB962C8B-B14F-4D97-AF65-F5344CB8AC3E}">
+        <p14:creationId xmlns:p14="http://schemas.microsoft.com/office/powerpoint/2010/main" val="1024086991"/>
+      </p:ext>
+    </p:extLst>
+  </p:cSld>
+  <p:clrMapOvr>
+    <a:masterClrMapping/>
+  </p:clrMapOvr>
+</p:notes>
+</file>
+
+<file path=ppt/notesSlides/notesSlide12.xml><?xml version="1.0" encoding="utf-8"?>
+<p:notes xmlns:a="http://schemas.openxmlformats.org/drawingml/2006/main" xmlns:r="http://schemas.openxmlformats.org/officeDocument/2006/relationships" xmlns:p="http://schemas.openxmlformats.org/presentationml/2006/main">
+  <p:cSld>
+    <p:spTree>
+      <p:nvGrpSpPr>
+        <p:cNvPr id="1" name=""/>
+        <p:cNvGrpSpPr/>
+        <p:nvPr/>
+      </p:nvGrpSpPr>
+      <p:grpSpPr>
+        <a:xfrm>
+          <a:off x="0" y="0"/>
+          <a:ext cx="0" cy="0"/>
+          <a:chOff x="0" y="0"/>
+          <a:chExt cx="0" cy="0"/>
+        </a:xfrm>
+      </p:grpSpPr>
+      <p:sp>
+        <p:nvSpPr>
+          <p:cNvPr id="2" name="Slide Image Placeholder 1"/>
+          <p:cNvSpPr>
+            <a:spLocks noGrp="1" noRot="1" noChangeAspect="1"/>
+          </p:cNvSpPr>
+          <p:nvPr>
+            <p:ph type="sldImg"/>
+          </p:nvPr>
+        </p:nvSpPr>
+        <p:spPr/>
+      </p:sp>
+      <p:sp>
+        <p:nvSpPr>
+          <p:cNvPr id="3" name="Notes Placeholder 2"/>
+          <p:cNvSpPr>
+            <a:spLocks noGrp="1"/>
+          </p:cNvSpPr>
+          <p:nvPr>
+            <p:ph type="body" idx="1"/>
+          </p:nvPr>
+        </p:nvSpPr>
+        <p:spPr/>
+        <p:txBody>
+          <a:bodyPr/>
+          <a:lstStyle/>
+          <a:p>
+            <a:r>
+              <a:rPr lang="en-US" dirty="0"/>
+              <a:t/>
+            </a:r>
+            <a:endParaRPr lang="en-US" dirty="0"/>
+          </a:p>
+        </p:txBody>
+      </p:sp>
+      <p:sp>
+        <p:nvSpPr>
+          <p:cNvPr id="4" name="Slide Number Placeholder 3"/>
+          <p:cNvSpPr>
+            <a:spLocks noGrp="1"/>
+          </p:cNvSpPr>
+          <p:nvPr>
+            <p:ph type="sldNum" sz="quarter" idx="10"/>
+          </p:nvPr>
+        </p:nvSpPr>
+        <p:spPr/>
+        <p:txBody>
+          <a:bodyPr/>
+          <a:lstStyle/>
+          <a:p>
+            <a:fld id="{F7021451-1387-4CA6-816F-3879F97B5CBC}" type="slidenum">
+              <a:rPr lang="en-US"/>
+              <a:t>12</a:t>
             </a:fld>
             <a:endParaRPr lang="en-US"/>
           </a:p>
@@ -2082,7 +2171,7 @@
             </a:avLst>
           </a:prstGeom>
           <a:solidFill>
-            <a:srgbClr val="E8A33D"/>
+            <a:srgbClr val="3FB8C4"/>
           </a:solidFill>
           <a:ln/>
         </p:spPr>
@@ -2102,7 +2191,7 @@
                 <a:ea typeface="Courier New" pitchFamily="34" charset="-122"/>
                 <a:cs typeface="Courier New" pitchFamily="34" charset="-120"/>
               </a:rPr>
-              <a:t>9</a:t>
+              <a:t>8</a:t>
             </a:r>
             <a:endParaRPr lang="en-US" sz="2200" dirty="0"/>
           </a:p>
@@ -2141,7 +2230,7 @@
                 <a:ea typeface="Malgun Gothic" pitchFamily="34" charset="-122"/>
                 <a:cs typeface="Malgun Gothic" pitchFamily="34" charset="-120"/>
               </a:rPr>
-              <a:t>핵심 정리 &amp; 자주 하는 실수</a:t>
+              <a:t>커널 launch 흐름 · 호출에서 완료까지</a:t>
             </a:r>
             <a:endParaRPr lang="en-US" sz="2900" dirty="0"/>
           </a:p>
@@ -2149,36 +2238,650 @@
       </p:sp>
       <p:sp>
         <p:nvSpPr>
-          <p:cNvPr id="4" name="Shape 2"/>
-          <p:cNvSpPr/>
-          <p:nvPr/>
-        </p:nvSpPr>
-        <p:spPr>
-          <a:xfrm>
-            <a:off x="548640" y="1600200"/>
-            <a:ext cx="5349240" cy="4114800"/>
+          <p:cNvPr id="4" name="Text 2"/>
+          <p:cNvSpPr/>
+          <p:nvPr/>
+        </p:nvSpPr>
+        <p:spPr>
+          <a:xfrm>
+            <a:off x="548640" y="1371600"/>
+            <a:ext cx="11064240" cy="411480"/>
+          </a:xfrm>
+          <a:prstGeom prst="rect">
+            <a:avLst/>
+          </a:prstGeom>
+          <a:noFill/>
+          <a:ln/>
+        </p:spPr>
+        <p:txBody>
+          <a:bodyPr wrap="square" lIns="0" tIns="0" rIns="0" bIns="0" rtlCol="0" anchor="ctr"/>
+          <a:lstStyle/>
+          <a:p>
+            <a:pPr indent="0" marL="0">
+              <a:buNone/>
+            </a:pPr>
+            <a:r>
+              <a:rPr lang="en-US" sz="1450" dirty="0">
+                <a:solidFill>
+                  <a:srgbClr val="9FB0C4"/>
+                </a:solidFill>
+                <a:latin typeface="Malgun Gothic" pitchFamily="34" charset="0"/>
+                <a:ea typeface="Malgun Gothic" pitchFamily="34" charset="-122"/>
+                <a:cs typeface="Malgun Gothic" pitchFamily="34" charset="-120"/>
+              </a:rPr>
+              <a:t>&lt;&lt;&lt;&gt;&gt;&gt; 한 줄을 실행하면, 요청이 GPU로 넘어가 블록이 SM에 분배되고 워프 단위로 실행됩니다.</a:t>
+            </a:r>
+            <a:endParaRPr lang="en-US" sz="1450" dirty="0"/>
+          </a:p>
+        </p:txBody>
+      </p:sp>
+      <p:sp>
+        <p:nvSpPr>
+          <p:cNvPr id="5" name="Shape 3"/>
+          <p:cNvSpPr/>
+          <p:nvPr/>
+        </p:nvSpPr>
+        <p:spPr>
+          <a:xfrm>
+            <a:off x="548640" y="1874520"/>
+            <a:ext cx="7040880" cy="841248"/>
           </a:xfrm>
           <a:prstGeom prst="roundRect">
             <a:avLst>
-              <a:gd name="adj" fmla="val 1778"/>
+              <a:gd name="adj" fmla="val 8696"/>
+            </a:avLst>
+          </a:prstGeom>
+          <a:solidFill>
+            <a:srgbClr val="16242C"/>
+          </a:solidFill>
+          <a:ln w="19050">
+            <a:solidFill>
+              <a:srgbClr val="3FB8C4"/>
+            </a:solidFill>
+            <a:prstDash val="solid"/>
+          </a:ln>
+        </p:spPr>
+      </p:sp>
+      <p:sp>
+        <p:nvSpPr>
+          <p:cNvPr id="6" name="Text 4"/>
+          <p:cNvSpPr/>
+          <p:nvPr/>
+        </p:nvSpPr>
+        <p:spPr>
+          <a:xfrm>
+            <a:off x="804672" y="1984248"/>
+            <a:ext cx="6583680" cy="365760"/>
+          </a:xfrm>
+          <a:prstGeom prst="rect">
+            <a:avLst/>
+          </a:prstGeom>
+          <a:noFill/>
+          <a:ln/>
+        </p:spPr>
+        <p:txBody>
+          <a:bodyPr wrap="square" lIns="0" tIns="0" rIns="0" bIns="0" rtlCol="0" anchor="ctr"/>
+          <a:lstStyle/>
+          <a:p>
+            <a:pPr indent="0" marL="0">
+              <a:buNone/>
+            </a:pPr>
+            <a:r>
+              <a:rPr lang="en-US" sz="1500" b="1" dirty="0">
+                <a:solidFill>
+                  <a:srgbClr val="3FB8C4"/>
+                </a:solidFill>
+                <a:latin typeface="Malgun Gothic" pitchFamily="34" charset="0"/>
+                <a:ea typeface="Malgun Gothic" pitchFamily="34" charset="-122"/>
+                <a:cs typeface="Malgun Gothic" pitchFamily="34" charset="-120"/>
+              </a:rPr>
+              <a:t>① 호스트(CPU) — 커널 실행 요청</a:t>
+            </a:r>
+            <a:endParaRPr lang="en-US" sz="1500" dirty="0"/>
+          </a:p>
+        </p:txBody>
+      </p:sp>
+      <p:sp>
+        <p:nvSpPr>
+          <p:cNvPr id="7" name="Text 5"/>
+          <p:cNvSpPr/>
+          <p:nvPr/>
+        </p:nvSpPr>
+        <p:spPr>
+          <a:xfrm>
+            <a:off x="804672" y="2331720"/>
+            <a:ext cx="6583680" cy="292608"/>
+          </a:xfrm>
+          <a:prstGeom prst="rect">
+            <a:avLst/>
+          </a:prstGeom>
+          <a:noFill/>
+          <a:ln/>
+        </p:spPr>
+        <p:txBody>
+          <a:bodyPr wrap="square" lIns="0" tIns="0" rIns="0" bIns="0" rtlCol="0" anchor="ctr"/>
+          <a:lstStyle/>
+          <a:p>
+            <a:pPr indent="0" marL="0">
+              <a:buNone/>
+            </a:pPr>
+            <a:r>
+              <a:rPr lang="en-US" sz="1100" dirty="0">
+                <a:solidFill>
+                  <a:srgbClr val="9FB0C4"/>
+                </a:solidFill>
+                <a:latin typeface="Courier New" pitchFamily="34" charset="0"/>
+                <a:ea typeface="Courier New" pitchFamily="34" charset="-122"/>
+                <a:cs typeface="Courier New" pitchFamily="34" charset="-120"/>
+              </a:rPr>
+              <a:t>deviceWriteConstant&lt;&lt;&lt;1024, 512&gt;&gt;&gt;(...)</a:t>
+            </a:r>
+            <a:endParaRPr lang="en-US" sz="1100" dirty="0"/>
+          </a:p>
+        </p:txBody>
+      </p:sp>
+      <p:sp>
+        <p:nvSpPr>
+          <p:cNvPr id="8" name="Shape 6"/>
+          <p:cNvSpPr/>
+          <p:nvPr/>
+        </p:nvSpPr>
+        <p:spPr>
+          <a:xfrm>
+            <a:off x="4069080" y="2734056"/>
+            <a:ext cx="0" cy="146304"/>
+          </a:xfrm>
+          <a:prstGeom prst="line">
+            <a:avLst/>
+          </a:prstGeom>
+          <a:noFill/>
+          <a:ln w="25400">
+            <a:solidFill>
+              <a:srgbClr val="6B7D94"/>
+            </a:solidFill>
+            <a:prstDash val="solid"/>
+            <a:tailEnd type="triangle"/>
+          </a:ln>
+        </p:spPr>
+      </p:sp>
+      <p:sp>
+        <p:nvSpPr>
+          <p:cNvPr id="9" name="Shape 7"/>
+          <p:cNvSpPr/>
+          <p:nvPr/>
+        </p:nvSpPr>
+        <p:spPr>
+          <a:xfrm>
+            <a:off x="548640" y="2898648"/>
+            <a:ext cx="7040880" cy="841248"/>
+          </a:xfrm>
+          <a:prstGeom prst="roundRect">
+            <a:avLst>
+              <a:gd name="adj" fmla="val 8696"/>
+            </a:avLst>
+          </a:prstGeom>
+          <a:solidFill>
+            <a:srgbClr val="241A16"/>
+          </a:solidFill>
+          <a:ln w="19050">
+            <a:solidFill>
+              <a:srgbClr val="E8A33D"/>
+            </a:solidFill>
+            <a:prstDash val="solid"/>
+          </a:ln>
+        </p:spPr>
+      </p:sp>
+      <p:sp>
+        <p:nvSpPr>
+          <p:cNvPr id="10" name="Text 8"/>
+          <p:cNvSpPr/>
+          <p:nvPr/>
+        </p:nvSpPr>
+        <p:spPr>
+          <a:xfrm>
+            <a:off x="804672" y="3008376"/>
+            <a:ext cx="6583680" cy="365760"/>
+          </a:xfrm>
+          <a:prstGeom prst="rect">
+            <a:avLst/>
+          </a:prstGeom>
+          <a:noFill/>
+          <a:ln/>
+        </p:spPr>
+        <p:txBody>
+          <a:bodyPr wrap="square" lIns="0" tIns="0" rIns="0" bIns="0" rtlCol="0" anchor="ctr"/>
+          <a:lstStyle/>
+          <a:p>
+            <a:pPr indent="0" marL="0">
+              <a:buNone/>
+            </a:pPr>
+            <a:r>
+              <a:rPr lang="en-US" sz="1500" b="1" dirty="0">
+                <a:solidFill>
+                  <a:srgbClr val="E8A33D"/>
+                </a:solidFill>
+                <a:latin typeface="Malgun Gothic" pitchFamily="34" charset="0"/>
+                <a:ea typeface="Malgun Gothic" pitchFamily="34" charset="-122"/>
+                <a:cs typeface="Malgun Gothic" pitchFamily="34" charset="-120"/>
+              </a:rPr>
+              <a:t>② GPU 스케줄러 — 블록을 SM에 분배</a:t>
+            </a:r>
+            <a:endParaRPr lang="en-US" sz="1500" dirty="0"/>
+          </a:p>
+        </p:txBody>
+      </p:sp>
+      <p:sp>
+        <p:nvSpPr>
+          <p:cNvPr id="11" name="Text 9"/>
+          <p:cNvSpPr/>
+          <p:nvPr/>
+        </p:nvSpPr>
+        <p:spPr>
+          <a:xfrm>
+            <a:off x="804672" y="3355848"/>
+            <a:ext cx="6583680" cy="292608"/>
+          </a:xfrm>
+          <a:prstGeom prst="rect">
+            <a:avLst/>
+          </a:prstGeom>
+          <a:noFill/>
+          <a:ln/>
+        </p:spPr>
+        <p:txBody>
+          <a:bodyPr wrap="square" lIns="0" tIns="0" rIns="0" bIns="0" rtlCol="0" anchor="ctr"/>
+          <a:lstStyle/>
+          <a:p>
+            <a:pPr indent="0" marL="0">
+              <a:buNone/>
+            </a:pPr>
+            <a:r>
+              <a:rPr lang="en-US" sz="1100" dirty="0">
+                <a:solidFill>
+                  <a:srgbClr val="9FB0C4"/>
+                </a:solidFill>
+                <a:latin typeface="Courier New" pitchFamily="34" charset="0"/>
+                <a:ea typeface="Courier New" pitchFamily="34" charset="-122"/>
+                <a:cs typeface="Courier New" pitchFamily="34" charset="-120"/>
+              </a:rPr>
+              <a:t>블록 1024개 → 여러 SM에 나눠 배정</a:t>
+            </a:r>
+            <a:endParaRPr lang="en-US" sz="1100" dirty="0"/>
+          </a:p>
+        </p:txBody>
+      </p:sp>
+      <p:sp>
+        <p:nvSpPr>
+          <p:cNvPr id="12" name="Shape 10"/>
+          <p:cNvSpPr/>
+          <p:nvPr/>
+        </p:nvSpPr>
+        <p:spPr>
+          <a:xfrm>
+            <a:off x="4069080" y="3758184"/>
+            <a:ext cx="0" cy="146304"/>
+          </a:xfrm>
+          <a:prstGeom prst="line">
+            <a:avLst/>
+          </a:prstGeom>
+          <a:noFill/>
+          <a:ln w="25400">
+            <a:solidFill>
+              <a:srgbClr val="6B7D94"/>
+            </a:solidFill>
+            <a:prstDash val="solid"/>
+            <a:tailEnd type="triangle"/>
+          </a:ln>
+        </p:spPr>
+      </p:sp>
+      <p:sp>
+        <p:nvSpPr>
+          <p:cNvPr id="13" name="Shape 11"/>
+          <p:cNvSpPr/>
+          <p:nvPr/>
+        </p:nvSpPr>
+        <p:spPr>
+          <a:xfrm>
+            <a:off x="548640" y="3922776"/>
+            <a:ext cx="7040880" cy="841248"/>
+          </a:xfrm>
+          <a:prstGeom prst="roundRect">
+            <a:avLst>
+              <a:gd name="adj" fmla="val 8696"/>
+            </a:avLst>
+          </a:prstGeom>
+          <a:solidFill>
+            <a:srgbClr val="241A16"/>
+          </a:solidFill>
+          <a:ln w="19050">
+            <a:solidFill>
+              <a:srgbClr val="E8A33D"/>
+            </a:solidFill>
+            <a:prstDash val="solid"/>
+          </a:ln>
+        </p:spPr>
+      </p:sp>
+      <p:sp>
+        <p:nvSpPr>
+          <p:cNvPr id="14" name="Text 12"/>
+          <p:cNvSpPr/>
+          <p:nvPr/>
+        </p:nvSpPr>
+        <p:spPr>
+          <a:xfrm>
+            <a:off x="804672" y="4032504"/>
+            <a:ext cx="6583680" cy="365760"/>
+          </a:xfrm>
+          <a:prstGeom prst="rect">
+            <a:avLst/>
+          </a:prstGeom>
+          <a:noFill/>
+          <a:ln/>
+        </p:spPr>
+        <p:txBody>
+          <a:bodyPr wrap="square" lIns="0" tIns="0" rIns="0" bIns="0" rtlCol="0" anchor="ctr"/>
+          <a:lstStyle/>
+          <a:p>
+            <a:pPr indent="0" marL="0">
+              <a:buNone/>
+            </a:pPr>
+            <a:r>
+              <a:rPr lang="en-US" sz="1500" b="1" dirty="0">
+                <a:solidFill>
+                  <a:srgbClr val="E8A33D"/>
+                </a:solidFill>
+                <a:latin typeface="Malgun Gothic" pitchFamily="34" charset="0"/>
+                <a:ea typeface="Malgun Gothic" pitchFamily="34" charset="-122"/>
+                <a:cs typeface="Malgun Gothic" pitchFamily="34" charset="-120"/>
+              </a:rPr>
+              <a:t>③ 각 SM — 워프(32 스레드) 단위로 실행</a:t>
+            </a:r>
+            <a:endParaRPr lang="en-US" sz="1500" dirty="0"/>
+          </a:p>
+        </p:txBody>
+      </p:sp>
+      <p:sp>
+        <p:nvSpPr>
+          <p:cNvPr id="15" name="Text 13"/>
+          <p:cNvSpPr/>
+          <p:nvPr/>
+        </p:nvSpPr>
+        <p:spPr>
+          <a:xfrm>
+            <a:off x="804672" y="4379976"/>
+            <a:ext cx="6583680" cy="292608"/>
+          </a:xfrm>
+          <a:prstGeom prst="rect">
+            <a:avLst/>
+          </a:prstGeom>
+          <a:noFill/>
+          <a:ln/>
+        </p:spPr>
+        <p:txBody>
+          <a:bodyPr wrap="square" lIns="0" tIns="0" rIns="0" bIns="0" rtlCol="0" anchor="ctr"/>
+          <a:lstStyle/>
+          <a:p>
+            <a:pPr indent="0" marL="0">
+              <a:buNone/>
+            </a:pPr>
+            <a:r>
+              <a:rPr lang="en-US" sz="1100" dirty="0">
+                <a:solidFill>
+                  <a:srgbClr val="9FB0C4"/>
+                </a:solidFill>
+                <a:latin typeface="Courier New" pitchFamily="34" charset="0"/>
+                <a:ea typeface="Courier New" pitchFamily="34" charset="-122"/>
+                <a:cs typeface="Courier New" pitchFamily="34" charset="-120"/>
+              </a:rPr>
+              <a:t>블록 안 512 스레드가 실제 연산 수행</a:t>
+            </a:r>
+            <a:endParaRPr lang="en-US" sz="1100" dirty="0"/>
+          </a:p>
+        </p:txBody>
+      </p:sp>
+      <p:sp>
+        <p:nvSpPr>
+          <p:cNvPr id="16" name="Shape 14"/>
+          <p:cNvSpPr/>
+          <p:nvPr/>
+        </p:nvSpPr>
+        <p:spPr>
+          <a:xfrm>
+            <a:off x="4069080" y="4782312"/>
+            <a:ext cx="0" cy="146304"/>
+          </a:xfrm>
+          <a:prstGeom prst="line">
+            <a:avLst/>
+          </a:prstGeom>
+          <a:noFill/>
+          <a:ln w="25400">
+            <a:solidFill>
+              <a:srgbClr val="6B7D94"/>
+            </a:solidFill>
+            <a:prstDash val="solid"/>
+            <a:tailEnd type="triangle"/>
+          </a:ln>
+        </p:spPr>
+      </p:sp>
+      <p:sp>
+        <p:nvSpPr>
+          <p:cNvPr id="17" name="Shape 15"/>
+          <p:cNvSpPr/>
+          <p:nvPr/>
+        </p:nvSpPr>
+        <p:spPr>
+          <a:xfrm>
+            <a:off x="548640" y="4946904"/>
+            <a:ext cx="7040880" cy="841248"/>
+          </a:xfrm>
+          <a:prstGeom prst="roundRect">
+            <a:avLst>
+              <a:gd name="adj" fmla="val 8696"/>
+            </a:avLst>
+          </a:prstGeom>
+          <a:solidFill>
+            <a:srgbClr val="241A16"/>
+          </a:solidFill>
+          <a:ln w="19050">
+            <a:solidFill>
+              <a:srgbClr val="E8A33D"/>
+            </a:solidFill>
+            <a:prstDash val="solid"/>
+          </a:ln>
+        </p:spPr>
+      </p:sp>
+      <p:sp>
+        <p:nvSpPr>
+          <p:cNvPr id="18" name="Text 16"/>
+          <p:cNvSpPr/>
+          <p:nvPr/>
+        </p:nvSpPr>
+        <p:spPr>
+          <a:xfrm>
+            <a:off x="804672" y="5056632"/>
+            <a:ext cx="6583680" cy="365760"/>
+          </a:xfrm>
+          <a:prstGeom prst="rect">
+            <a:avLst/>
+          </a:prstGeom>
+          <a:noFill/>
+          <a:ln/>
+        </p:spPr>
+        <p:txBody>
+          <a:bodyPr wrap="square" lIns="0" tIns="0" rIns="0" bIns="0" rtlCol="0" anchor="ctr"/>
+          <a:lstStyle/>
+          <a:p>
+            <a:pPr indent="0" marL="0">
+              <a:buNone/>
+            </a:pPr>
+            <a:r>
+              <a:rPr lang="en-US" sz="1500" b="1" dirty="0">
+                <a:solidFill>
+                  <a:srgbClr val="E8A33D"/>
+                </a:solidFill>
+                <a:latin typeface="Malgun Gothic" pitchFamily="34" charset="0"/>
+                <a:ea typeface="Malgun Gothic" pitchFamily="34" charset="-122"/>
+                <a:cs typeface="Malgun Gothic" pitchFamily="34" charset="-120"/>
+              </a:rPr>
+              <a:t>④ 커널 완료 — 결과는 전역 메모리에</a:t>
+            </a:r>
+            <a:endParaRPr lang="en-US" sz="1500" dirty="0"/>
+          </a:p>
+        </p:txBody>
+      </p:sp>
+      <p:sp>
+        <p:nvSpPr>
+          <p:cNvPr id="19" name="Text 17"/>
+          <p:cNvSpPr/>
+          <p:nvPr/>
+        </p:nvSpPr>
+        <p:spPr>
+          <a:xfrm>
+            <a:off x="804672" y="5404104"/>
+            <a:ext cx="6583680" cy="292608"/>
+          </a:xfrm>
+          <a:prstGeom prst="rect">
+            <a:avLst/>
+          </a:prstGeom>
+          <a:noFill/>
+          <a:ln/>
+        </p:spPr>
+        <p:txBody>
+          <a:bodyPr wrap="square" lIns="0" tIns="0" rIns="0" bIns="0" rtlCol="0" anchor="ctr"/>
+          <a:lstStyle/>
+          <a:p>
+            <a:pPr indent="0" marL="0">
+              <a:buNone/>
+            </a:pPr>
+            <a:r>
+              <a:rPr lang="en-US" sz="1100" dirty="0">
+                <a:solidFill>
+                  <a:srgbClr val="9FB0C4"/>
+                </a:solidFill>
+                <a:latin typeface="Courier New" pitchFamily="34" charset="0"/>
+                <a:ea typeface="Courier New" pitchFamily="34" charset="-122"/>
+                <a:cs typeface="Courier New" pitchFamily="34" charset="-120"/>
+              </a:rPr>
+              <a:t>호스트는 SOFTWAIT로 완료를 기다림</a:t>
+            </a:r>
+            <a:endParaRPr lang="en-US" sz="1100" dirty="0"/>
+          </a:p>
+        </p:txBody>
+      </p:sp>
+      <p:sp>
+        <p:nvSpPr>
+          <p:cNvPr id="20" name="Text 18"/>
+          <p:cNvSpPr/>
+          <p:nvPr/>
+        </p:nvSpPr>
+        <p:spPr>
+          <a:xfrm>
+            <a:off x="7726680" y="2057400"/>
+            <a:ext cx="1371600" cy="365760"/>
+          </a:xfrm>
+          <a:prstGeom prst="rect">
+            <a:avLst/>
+          </a:prstGeom>
+          <a:noFill/>
+          <a:ln/>
+        </p:spPr>
+        <p:txBody>
+          <a:bodyPr wrap="square" lIns="0" tIns="0" rIns="0" bIns="0" rtlCol="0" anchor="ctr"/>
+          <a:lstStyle/>
+          <a:p>
+            <a:pPr indent="0" marL="0">
+              <a:buNone/>
+            </a:pPr>
+            <a:r>
+              <a:rPr lang="en-US" sz="1200" b="1" dirty="0">
+                <a:solidFill>
+                  <a:srgbClr val="3FB8C4"/>
+                </a:solidFill>
+                <a:latin typeface="Malgun Gothic" pitchFamily="34" charset="0"/>
+                <a:ea typeface="Malgun Gothic" pitchFamily="34" charset="-122"/>
+                <a:cs typeface="Malgun Gothic" pitchFamily="34" charset="-120"/>
+              </a:rPr>
+              <a:t>호스트</a:t>
+            </a:r>
+            <a:endParaRPr lang="en-US" sz="1200" dirty="0"/>
+          </a:p>
+        </p:txBody>
+      </p:sp>
+      <p:sp>
+        <p:nvSpPr>
+          <p:cNvPr id="21" name="Text 19"/>
+          <p:cNvSpPr/>
+          <p:nvPr/>
+        </p:nvSpPr>
+        <p:spPr>
+          <a:xfrm>
+            <a:off x="7726680" y="3108960"/>
+            <a:ext cx="1737360" cy="365760"/>
+          </a:xfrm>
+          <a:prstGeom prst="rect">
+            <a:avLst/>
+          </a:prstGeom>
+          <a:noFill/>
+          <a:ln/>
+        </p:spPr>
+        <p:txBody>
+          <a:bodyPr wrap="square" lIns="0" tIns="0" rIns="0" bIns="0" rtlCol="0" anchor="ctr"/>
+          <a:lstStyle/>
+          <a:p>
+            <a:pPr indent="0" marL="0">
+              <a:buNone/>
+            </a:pPr>
+            <a:r>
+              <a:rPr lang="en-US" sz="1200" b="1" dirty="0">
+                <a:solidFill>
+                  <a:srgbClr val="E8A33D"/>
+                </a:solidFill>
+                <a:latin typeface="Malgun Gothic" pitchFamily="34" charset="0"/>
+                <a:ea typeface="Malgun Gothic" pitchFamily="34" charset="-122"/>
+                <a:cs typeface="Malgun Gothic" pitchFamily="34" charset="-120"/>
+              </a:rPr>
+              <a:t>디바이스(GPU)</a:t>
+            </a:r>
+            <a:endParaRPr lang="en-US" sz="1200" dirty="0"/>
+          </a:p>
+        </p:txBody>
+      </p:sp>
+      <p:sp>
+        <p:nvSpPr>
+          <p:cNvPr id="22" name="Shape 20"/>
+          <p:cNvSpPr/>
+          <p:nvPr/>
+        </p:nvSpPr>
+        <p:spPr>
+          <a:xfrm>
+            <a:off x="9692640" y="1874520"/>
+            <a:ext cx="1920240" cy="3977640"/>
+          </a:xfrm>
+          <a:prstGeom prst="roundRect">
+            <a:avLst>
+              <a:gd name="adj" fmla="val 3810"/>
             </a:avLst>
           </a:prstGeom>
           <a:solidFill>
             <a:srgbClr val="18212E"/>
           </a:solidFill>
-          <a:ln/>
-        </p:spPr>
-      </p:sp>
-      <p:sp>
-        <p:nvSpPr>
-          <p:cNvPr id="5" name="Text 3"/>
-          <p:cNvSpPr/>
-          <p:nvPr/>
-        </p:nvSpPr>
-        <p:spPr>
-          <a:xfrm>
-            <a:off x="822960" y="1828800"/>
-            <a:ext cx="4800600" cy="457200"/>
+          <a:ln w="19050">
+            <a:solidFill>
+              <a:srgbClr val="E6604F"/>
+            </a:solidFill>
+            <a:prstDash val="solid"/>
+          </a:ln>
+        </p:spPr>
+      </p:sp>
+      <p:sp>
+        <p:nvSpPr>
+          <p:cNvPr id="23" name="Text 21"/>
+          <p:cNvSpPr/>
+          <p:nvPr/>
+        </p:nvSpPr>
+        <p:spPr>
+          <a:xfrm>
+            <a:off x="9921240" y="2057400"/>
+            <a:ext cx="1463040" cy="411480"/>
           </a:xfrm>
           <a:prstGeom prst="rect">
             <a:avLst/>
@@ -2194,30 +2897,30 @@
               <a:buNone/>
             </a:pPr>
             <a:r>
-              <a:rPr lang="en-US" sz="2000" b="1" dirty="0">
-                <a:solidFill>
-                  <a:srgbClr val="E8A33D"/>
+              <a:rPr lang="en-US" sz="1600" b="1" dirty="0">
+                <a:solidFill>
+                  <a:srgbClr val="E6604F"/>
                 </a:solidFill>
                 <a:latin typeface="Malgun Gothic" pitchFamily="34" charset="0"/>
                 <a:ea typeface="Malgun Gothic" pitchFamily="34" charset="-122"/>
                 <a:cs typeface="Malgun Gothic" pitchFamily="34" charset="-120"/>
               </a:rPr>
-              <a:t>기억할 것</a:t>
-            </a:r>
-            <a:endParaRPr lang="en-US" sz="2000" dirty="0"/>
-          </a:p>
-        </p:txBody>
-      </p:sp>
-      <p:sp>
-        <p:nvSpPr>
-          <p:cNvPr id="6" name="Text 4"/>
-          <p:cNvSpPr/>
-          <p:nvPr/>
-        </p:nvSpPr>
-        <p:spPr>
-          <a:xfrm>
-            <a:off x="822960" y="2423160"/>
-            <a:ext cx="4800600" cy="3108960"/>
+              <a:t>비동기(async)</a:t>
+            </a:r>
+            <a:endParaRPr lang="en-US" sz="1600" dirty="0"/>
+          </a:p>
+        </p:txBody>
+      </p:sp>
+      <p:sp>
+        <p:nvSpPr>
+          <p:cNvPr id="24" name="Text 22"/>
+          <p:cNvSpPr/>
+          <p:nvPr/>
+        </p:nvSpPr>
+        <p:spPr>
+          <a:xfrm>
+            <a:off x="9921240" y="2606040"/>
+            <a:ext cx="1463040" cy="3063240"/>
           </a:xfrm>
           <a:prstGeom prst="rect">
             <a:avLst/>
@@ -2229,18 +2932,17 @@
           <a:bodyPr wrap="square" lIns="0" tIns="0" rIns="0" bIns="0" rtlCol="0" anchor="t"/>
           <a:lstStyle/>
           <a:p>
-            <a:pPr marL="342900" indent="-342900">
+            <a:pPr indent="0" marL="0">
               <a:lnSpc>
-                <a:spcPct val="105000"/>
+                <a:spcPct val="115000"/>
               </a:lnSpc>
               <a:spcAft>
-                <a:spcPts val="1200"/>
+                <a:spcPts val="1000"/>
               </a:spcAft>
-              <a:buSzPct val="100000"/>
-              <a:buChar char="✓"/>
-            </a:pPr>
-            <a:r>
-              <a:rPr lang="en-US" sz="1600" dirty="0">
+              <a:buNone/>
+            </a:pPr>
+            <a:r>
+              <a:rPr lang="en-US" sz="1350" dirty="0">
                 <a:solidFill>
                   <a:srgbClr val="E7EDF5"/>
                 </a:solidFill>
@@ -2248,23 +2950,22 @@
                 <a:ea typeface="Malgun Gothic" pitchFamily="34" charset="-122"/>
                 <a:cs typeface="Malgun Gothic" pitchFamily="34" charset="-120"/>
               </a:rPr>
-              <a:t>커널 = __global__, 반환형 void</a:t>
-            </a:r>
-            <a:endParaRPr lang="en-US" sz="1600" dirty="0"/>
-          </a:p>
-          <a:p>
-            <a:pPr marL="342900" indent="-342900">
+              <a:t>호스트는 ① 요청 후 곧바로 다음 코드로 갑니다.</a:t>
+            </a:r>
+            <a:endParaRPr lang="en-US" sz="1350" dirty="0"/>
+          </a:p>
+          <a:p>
+            <a:pPr indent="0" marL="0">
               <a:lnSpc>
-                <a:spcPct val="105000"/>
+                <a:spcPct val="115000"/>
               </a:lnSpc>
               <a:spcAft>
-                <a:spcPts val="1200"/>
+                <a:spcPts val="1000"/>
               </a:spcAft>
-              <a:buSzPct val="100000"/>
-              <a:buChar char="✓"/>
-            </a:pPr>
-            <a:r>
-              <a:rPr lang="en-US" sz="1600" dirty="0">
+              <a:buNone/>
+            </a:pPr>
+            <a:r>
+              <a:rPr lang="en-US" sz="1350" dirty="0">
                 <a:solidFill>
                   <a:srgbClr val="E7EDF5"/>
                 </a:solidFill>
@@ -2272,236 +2973,29 @@
                 <a:ea typeface="Malgun Gothic" pitchFamily="34" charset="-122"/>
                 <a:cs typeface="Malgun Gothic" pitchFamily="34" charset="-120"/>
               </a:rPr>
-              <a:t>&lt;&lt;&lt;1024, 512&gt;&gt;&gt; = 블록수, 블록당 스레드수</a:t>
-            </a:r>
-            <a:endParaRPr lang="en-US" sz="1600" dirty="0"/>
-          </a:p>
-          <a:p>
-            <a:pPr marL="342900" indent="-342900">
+              <a:t>결과가 필요하면 SOFTWAIT로 GPU 완료를 기다립니다.</a:t>
+            </a:r>
+            <a:endParaRPr lang="en-US" sz="1350" dirty="0"/>
+          </a:p>
+          <a:p>
+            <a:pPr indent="0" marL="0">
               <a:lnSpc>
-                <a:spcPct val="105000"/>
+                <a:spcPct val="115000"/>
               </a:lnSpc>
-              <a:spcAft>
-                <a:spcPts val="1200"/>
-              </a:spcAft>
-              <a:buSzPct val="100000"/>
-              <a:buChar char="✓"/>
-            </a:pPr>
-            <a:r>
-              <a:rPr lang="en-US" sz="1600" dirty="0">
-                <a:solidFill>
-                  <a:srgbClr val="E7EDF5"/>
+              <a:buNone/>
+            </a:pPr>
+            <a:r>
+              <a:rPr lang="en-US" sz="1350" i="1" dirty="0">
+                <a:solidFill>
+                  <a:srgbClr val="9FB0C4"/>
                 </a:solidFill>
                 <a:latin typeface="Malgun Gothic" pitchFamily="34" charset="0"/>
                 <a:ea typeface="Malgun Gothic" pitchFamily="34" charset="-122"/>
                 <a:cs typeface="Malgun Gothic" pitchFamily="34" charset="-120"/>
               </a:rPr>
-              <a:t>THREAD_ADDRESS로 겹치지 않는 자기 word 계산</a:t>
-            </a:r>
-            <a:endParaRPr lang="en-US" sz="1600" dirty="0"/>
-          </a:p>
-          <a:p>
-            <a:pPr marL="342900" indent="-342900">
-              <a:lnSpc>
-                <a:spcPct val="105000"/>
-              </a:lnSpc>
-              <a:spcAft>
-                <a:spcPts val="1200"/>
-              </a:spcAft>
-              <a:buSzPct val="100000"/>
-              <a:buChar char="✓"/>
-            </a:pPr>
-            <a:r>
-              <a:rPr lang="en-US" sz="1600" dirty="0">
-                <a:solidFill>
-                  <a:srgbClr val="E7EDF5"/>
-                </a:solidFill>
-                <a:latin typeface="Malgun Gothic" pitchFamily="34" charset="0"/>
-                <a:ea typeface="Malgun Gothic" pitchFamily="34" charset="-122"/>
-                <a:cs typeface="Malgun Gothic" pitchFamily="34" charset="-120"/>
-              </a:rPr>
-              <a:t>이웃 스레드 = 이웃 주소 → coalescing</a:t>
-            </a:r>
-            <a:endParaRPr lang="en-US" sz="1600" dirty="0"/>
-          </a:p>
-        </p:txBody>
-      </p:sp>
-      <p:sp>
-        <p:nvSpPr>
-          <p:cNvPr id="7" name="Shape 5"/>
-          <p:cNvSpPr/>
-          <p:nvPr/>
-        </p:nvSpPr>
-        <p:spPr>
-          <a:xfrm>
-            <a:off x="6263640" y="1600200"/>
-            <a:ext cx="5349240" cy="4114800"/>
-          </a:xfrm>
-          <a:prstGeom prst="roundRect">
-            <a:avLst>
-              <a:gd name="adj" fmla="val 1778"/>
-            </a:avLst>
-          </a:prstGeom>
-          <a:solidFill>
-            <a:srgbClr val="18212E"/>
-          </a:solidFill>
-          <a:ln/>
-        </p:spPr>
-      </p:sp>
-      <p:sp>
-        <p:nvSpPr>
-          <p:cNvPr id="8" name="Text 6"/>
-          <p:cNvSpPr/>
-          <p:nvPr/>
-        </p:nvSpPr>
-        <p:spPr>
-          <a:xfrm>
-            <a:off x="6537960" y="1828800"/>
-            <a:ext cx="4800600" cy="457200"/>
-          </a:xfrm>
-          <a:prstGeom prst="rect">
-            <a:avLst/>
-          </a:prstGeom>
-          <a:noFill/>
-          <a:ln/>
-        </p:spPr>
-        <p:txBody>
-          <a:bodyPr wrap="square" lIns="0" tIns="0" rIns="0" bIns="0" rtlCol="0" anchor="ctr"/>
-          <a:lstStyle/>
-          <a:p>
-            <a:pPr indent="0" marL="0">
-              <a:buNone/>
-            </a:pPr>
-            <a:r>
-              <a:rPr lang="en-US" sz="2000" b="1" dirty="0">
-                <a:solidFill>
-                  <a:srgbClr val="E6604F"/>
-                </a:solidFill>
-                <a:latin typeface="Malgun Gothic" pitchFamily="34" charset="0"/>
-                <a:ea typeface="Malgun Gothic" pitchFamily="34" charset="-122"/>
-                <a:cs typeface="Malgun Gothic" pitchFamily="34" charset="-120"/>
-              </a:rPr>
-              <a:t>입문자 함정</a:t>
-            </a:r>
-            <a:endParaRPr lang="en-US" sz="2000" dirty="0"/>
-          </a:p>
-        </p:txBody>
-      </p:sp>
-      <p:sp>
-        <p:nvSpPr>
-          <p:cNvPr id="9" name="Text 7"/>
-          <p:cNvSpPr/>
-          <p:nvPr/>
-        </p:nvSpPr>
-        <p:spPr>
-          <a:xfrm>
-            <a:off x="6537960" y="2423160"/>
-            <a:ext cx="4800600" cy="3108960"/>
-          </a:xfrm>
-          <a:prstGeom prst="rect">
-            <a:avLst/>
-          </a:prstGeom>
-          <a:noFill/>
-          <a:ln/>
-        </p:spPr>
-        <p:txBody>
-          <a:bodyPr wrap="square" lIns="0" tIns="0" rIns="0" bIns="0" rtlCol="0" anchor="t"/>
-          <a:lstStyle/>
-          <a:p>
-            <a:pPr marL="342900" indent="-342900">
-              <a:lnSpc>
-                <a:spcPct val="105000"/>
-              </a:lnSpc>
-              <a:spcAft>
-                <a:spcPts val="1200"/>
-              </a:spcAft>
-              <a:buSzPct val="100000"/>
-              <a:buChar char="✗"/>
-            </a:pPr>
-            <a:r>
-              <a:rPr lang="en-US" sz="1550" dirty="0">
-                <a:solidFill>
-                  <a:srgbClr val="E7EDF5"/>
-                </a:solidFill>
-                <a:latin typeface="Malgun Gothic" pitchFamily="34" charset="0"/>
-                <a:ea typeface="Malgun Gothic" pitchFamily="34" charset="-122"/>
-                <a:cs typeface="Malgun Gothic" pitchFamily="34" charset="-120"/>
-              </a:rPr>
-              <a:t>커널을 일반 함수처럼 () 로 호출 → &lt;&lt;&lt;&gt;&gt;&gt; 필수</a:t>
-            </a:r>
-            <a:endParaRPr lang="en-US" sz="1550" dirty="0"/>
-          </a:p>
-          <a:p>
-            <a:pPr marL="342900" indent="-342900">
-              <a:lnSpc>
-                <a:spcPct val="105000"/>
-              </a:lnSpc>
-              <a:spcAft>
-                <a:spcPts val="1200"/>
-              </a:spcAft>
-              <a:buSzPct val="100000"/>
-              <a:buChar char="✗"/>
-            </a:pPr>
-            <a:r>
-              <a:rPr lang="en-US" sz="1550" dirty="0">
-                <a:solidFill>
-                  <a:srgbClr val="E7EDF5"/>
-                </a:solidFill>
-                <a:latin typeface="Malgun Gothic" pitchFamily="34" charset="0"/>
-                <a:ea typeface="Malgun Gothic" pitchFamily="34" charset="-122"/>
-                <a:cs typeface="Malgun Gothic" pitchFamily="34" charset="-120"/>
-              </a:rPr>
-              <a:t>커널에서 값을 return 하려 함 → void, 결과는 메모리로</a:t>
-            </a:r>
-            <a:endParaRPr lang="en-US" sz="1550" dirty="0"/>
-          </a:p>
-          <a:p>
-            <a:pPr marL="342900" indent="-342900">
-              <a:lnSpc>
-                <a:spcPct val="105000"/>
-              </a:lnSpc>
-              <a:spcAft>
-                <a:spcPts val="1200"/>
-              </a:spcAft>
-              <a:buSzPct val="100000"/>
-              <a:buChar char="✗"/>
-            </a:pPr>
-            <a:r>
-              <a:rPr lang="en-US" sz="1550" dirty="0">
-                <a:solidFill>
-                  <a:srgbClr val="E7EDF5"/>
-                </a:solidFill>
-                <a:latin typeface="Malgun Gothic" pitchFamily="34" charset="0"/>
-                <a:ea typeface="Malgun Gothic" pitchFamily="34" charset="-122"/>
-                <a:cs typeface="Malgun Gothic" pitchFamily="34" charset="-120"/>
-              </a:rPr>
-              <a:t>호스트 포인터를 커널에 그대로 전달 → 디바이스 포인터여야</a:t>
-            </a:r>
-            <a:endParaRPr lang="en-US" sz="1550" dirty="0"/>
-          </a:p>
-          <a:p>
-            <a:pPr marL="342900" indent="-342900">
-              <a:lnSpc>
-                <a:spcPct val="105000"/>
-              </a:lnSpc>
-              <a:spcAft>
-                <a:spcPts val="1200"/>
-              </a:spcAft>
-              <a:buSzPct val="100000"/>
-              <a:buChar char="✗"/>
-            </a:pPr>
-            <a:r>
-              <a:rPr lang="en-US" sz="1550" dirty="0">
-                <a:solidFill>
-                  <a:srgbClr val="E7EDF5"/>
-                </a:solidFill>
-                <a:latin typeface="Malgun Gothic" pitchFamily="34" charset="0"/>
-                <a:ea typeface="Malgun Gothic" pitchFamily="34" charset="-122"/>
-                <a:cs typeface="Malgun Gothic" pitchFamily="34" charset="-120"/>
-              </a:rPr>
-              <a:t>blockDim을 스레드마다 다르다고 착각 → 모두 같은 값</a:t>
-            </a:r>
-            <a:endParaRPr lang="en-US" sz="1550" dirty="0"/>
+              <a:t>→ 이 비동기 특성은 세션 2(검증)·세션 4(타이밍)에서 자세히.</a:t>
+            </a:r>
+            <a:endParaRPr lang="en-US" sz="1350" dirty="0"/>
           </a:p>
         </p:txBody>
       </p:sp>
@@ -2516,6 +3010,478 @@
 <file path=ppt/slides/slide11.xml><?xml version="1.0" encoding="utf-8"?>
 <p:sld xmlns:a="http://schemas.openxmlformats.org/drawingml/2006/main" xmlns:r="http://schemas.openxmlformats.org/officeDocument/2006/relationships" xmlns:p="http://schemas.openxmlformats.org/presentationml/2006/main">
   <p:cSld name="Slide 11">
+    <p:bg>
+      <p:bgPr>
+        <a:solidFill>
+          <a:srgbClr val="101722"/>
+        </a:solidFill>
+      </p:bgPr>
+    </p:bg>
+    <p:spTree>
+      <p:nvGrpSpPr>
+        <p:cNvPr id="1" name=""/>
+        <p:cNvGrpSpPr/>
+        <p:nvPr/>
+      </p:nvGrpSpPr>
+      <p:grpSpPr>
+        <a:xfrm>
+          <a:off x="0" y="0"/>
+          <a:ext cx="0" cy="0"/>
+          <a:chOff x="0" y="0"/>
+          <a:chExt cx="0" cy="0"/>
+        </a:xfrm>
+      </p:grpSpPr>
+      <p:sp>
+        <p:nvSpPr>
+          <p:cNvPr id="2" name="Text 0"/>
+          <p:cNvSpPr/>
+          <p:nvPr/>
+        </p:nvSpPr>
+        <p:spPr>
+          <a:xfrm>
+            <a:off x="548640" y="411480"/>
+            <a:ext cx="658368" cy="658368"/>
+          </a:xfrm>
+          <a:prstGeom prst="roundRect">
+            <a:avLst>
+              <a:gd name="adj" fmla="val 13889"/>
+            </a:avLst>
+          </a:prstGeom>
+          <a:solidFill>
+            <a:srgbClr val="E8A33D"/>
+          </a:solidFill>
+          <a:ln/>
+        </p:spPr>
+        <p:txBody>
+          <a:bodyPr wrap="square" rtlCol="0" anchor="ctr"/>
+          <a:lstStyle/>
+          <a:p>
+            <a:pPr algn="ctr" indent="0" marL="0">
+              <a:buNone/>
+            </a:pPr>
+            <a:r>
+              <a:rPr lang="en-US" sz="2200" b="1" dirty="0">
+                <a:solidFill>
+                  <a:srgbClr val="101722"/>
+                </a:solidFill>
+                <a:latin typeface="Courier New" pitchFamily="34" charset="0"/>
+                <a:ea typeface="Courier New" pitchFamily="34" charset="-122"/>
+                <a:cs typeface="Courier New" pitchFamily="34" charset="-120"/>
+              </a:rPr>
+              <a:t>9</a:t>
+            </a:r>
+            <a:endParaRPr lang="en-US" sz="2200" dirty="0"/>
+          </a:p>
+        </p:txBody>
+      </p:sp>
+      <p:sp>
+        <p:nvSpPr>
+          <p:cNvPr id="3" name="Text 1"/>
+          <p:cNvSpPr/>
+          <p:nvPr/>
+        </p:nvSpPr>
+        <p:spPr>
+          <a:xfrm>
+            <a:off x="1371600" y="384048"/>
+            <a:ext cx="10241280" cy="713232"/>
+          </a:xfrm>
+          <a:prstGeom prst="rect">
+            <a:avLst/>
+          </a:prstGeom>
+          <a:noFill/>
+          <a:ln/>
+        </p:spPr>
+        <p:txBody>
+          <a:bodyPr wrap="square" lIns="0" tIns="0" rIns="0" bIns="0" rtlCol="0" anchor="ctr"/>
+          <a:lstStyle/>
+          <a:p>
+            <a:pPr algn="l" indent="0" marL="0">
+              <a:buNone/>
+            </a:pPr>
+            <a:r>
+              <a:rPr lang="en-US" sz="2900" b="1" dirty="0">
+                <a:solidFill>
+                  <a:srgbClr val="E7EDF5"/>
+                </a:solidFill>
+                <a:latin typeface="Malgun Gothic" pitchFamily="34" charset="0"/>
+                <a:ea typeface="Malgun Gothic" pitchFamily="34" charset="-122"/>
+                <a:cs typeface="Malgun Gothic" pitchFamily="34" charset="-120"/>
+              </a:rPr>
+              <a:t>핵심 정리 &amp; 자주 하는 실수</a:t>
+            </a:r>
+            <a:endParaRPr lang="en-US" sz="2900" dirty="0"/>
+          </a:p>
+        </p:txBody>
+      </p:sp>
+      <p:sp>
+        <p:nvSpPr>
+          <p:cNvPr id="4" name="Shape 2"/>
+          <p:cNvSpPr/>
+          <p:nvPr/>
+        </p:nvSpPr>
+        <p:spPr>
+          <a:xfrm>
+            <a:off x="548640" y="1600200"/>
+            <a:ext cx="5349240" cy="4114800"/>
+          </a:xfrm>
+          <a:prstGeom prst="roundRect">
+            <a:avLst>
+              <a:gd name="adj" fmla="val 1778"/>
+            </a:avLst>
+          </a:prstGeom>
+          <a:solidFill>
+            <a:srgbClr val="18212E"/>
+          </a:solidFill>
+          <a:ln/>
+        </p:spPr>
+      </p:sp>
+      <p:sp>
+        <p:nvSpPr>
+          <p:cNvPr id="5" name="Text 3"/>
+          <p:cNvSpPr/>
+          <p:nvPr/>
+        </p:nvSpPr>
+        <p:spPr>
+          <a:xfrm>
+            <a:off x="822960" y="1828800"/>
+            <a:ext cx="4800600" cy="457200"/>
+          </a:xfrm>
+          <a:prstGeom prst="rect">
+            <a:avLst/>
+          </a:prstGeom>
+          <a:noFill/>
+          <a:ln/>
+        </p:spPr>
+        <p:txBody>
+          <a:bodyPr wrap="square" lIns="0" tIns="0" rIns="0" bIns="0" rtlCol="0" anchor="ctr"/>
+          <a:lstStyle/>
+          <a:p>
+            <a:pPr indent="0" marL="0">
+              <a:buNone/>
+            </a:pPr>
+            <a:r>
+              <a:rPr lang="en-US" sz="2000" b="1" dirty="0">
+                <a:solidFill>
+                  <a:srgbClr val="E8A33D"/>
+                </a:solidFill>
+                <a:latin typeface="Malgun Gothic" pitchFamily="34" charset="0"/>
+                <a:ea typeface="Malgun Gothic" pitchFamily="34" charset="-122"/>
+                <a:cs typeface="Malgun Gothic" pitchFamily="34" charset="-120"/>
+              </a:rPr>
+              <a:t>기억할 것</a:t>
+            </a:r>
+            <a:endParaRPr lang="en-US" sz="2000" dirty="0"/>
+          </a:p>
+        </p:txBody>
+      </p:sp>
+      <p:sp>
+        <p:nvSpPr>
+          <p:cNvPr id="6" name="Text 4"/>
+          <p:cNvSpPr/>
+          <p:nvPr/>
+        </p:nvSpPr>
+        <p:spPr>
+          <a:xfrm>
+            <a:off x="822960" y="2423160"/>
+            <a:ext cx="4800600" cy="3108960"/>
+          </a:xfrm>
+          <a:prstGeom prst="rect">
+            <a:avLst/>
+          </a:prstGeom>
+          <a:noFill/>
+          <a:ln/>
+        </p:spPr>
+        <p:txBody>
+          <a:bodyPr wrap="square" lIns="0" tIns="0" rIns="0" bIns="0" rtlCol="0" anchor="t"/>
+          <a:lstStyle/>
+          <a:p>
+            <a:pPr marL="342900" indent="-342900">
+              <a:lnSpc>
+                <a:spcPct val="105000"/>
+              </a:lnSpc>
+              <a:spcAft>
+                <a:spcPts val="1200"/>
+              </a:spcAft>
+              <a:buSzPct val="100000"/>
+              <a:buChar char="✓"/>
+            </a:pPr>
+            <a:r>
+              <a:rPr lang="en-US" sz="1600" dirty="0">
+                <a:solidFill>
+                  <a:srgbClr val="E7EDF5"/>
+                </a:solidFill>
+                <a:latin typeface="Malgun Gothic" pitchFamily="34" charset="0"/>
+                <a:ea typeface="Malgun Gothic" pitchFamily="34" charset="-122"/>
+                <a:cs typeface="Malgun Gothic" pitchFamily="34" charset="-120"/>
+              </a:rPr>
+              <a:t>커널 = __global__, 반환형 void</a:t>
+            </a:r>
+            <a:endParaRPr lang="en-US" sz="1600" dirty="0"/>
+          </a:p>
+          <a:p>
+            <a:pPr marL="342900" indent="-342900">
+              <a:lnSpc>
+                <a:spcPct val="105000"/>
+              </a:lnSpc>
+              <a:spcAft>
+                <a:spcPts val="1200"/>
+              </a:spcAft>
+              <a:buSzPct val="100000"/>
+              <a:buChar char="✓"/>
+            </a:pPr>
+            <a:r>
+              <a:rPr lang="en-US" sz="1600" dirty="0">
+                <a:solidFill>
+                  <a:srgbClr val="E7EDF5"/>
+                </a:solidFill>
+                <a:latin typeface="Malgun Gothic" pitchFamily="34" charset="0"/>
+                <a:ea typeface="Malgun Gothic" pitchFamily="34" charset="-122"/>
+                <a:cs typeface="Malgun Gothic" pitchFamily="34" charset="-120"/>
+              </a:rPr>
+              <a:t>&lt;&lt;&lt;1024, 512&gt;&gt;&gt; = 블록수, 블록당 스레드수</a:t>
+            </a:r>
+            <a:endParaRPr lang="en-US" sz="1600" dirty="0"/>
+          </a:p>
+          <a:p>
+            <a:pPr marL="342900" indent="-342900">
+              <a:lnSpc>
+                <a:spcPct val="105000"/>
+              </a:lnSpc>
+              <a:spcAft>
+                <a:spcPts val="1200"/>
+              </a:spcAft>
+              <a:buSzPct val="100000"/>
+              <a:buChar char="✓"/>
+            </a:pPr>
+            <a:r>
+              <a:rPr lang="en-US" sz="1600" dirty="0">
+                <a:solidFill>
+                  <a:srgbClr val="E7EDF5"/>
+                </a:solidFill>
+                <a:latin typeface="Malgun Gothic" pitchFamily="34" charset="0"/>
+                <a:ea typeface="Malgun Gothic" pitchFamily="34" charset="-122"/>
+                <a:cs typeface="Malgun Gothic" pitchFamily="34" charset="-120"/>
+              </a:rPr>
+              <a:t>THREAD_ADDRESS로 겹치지 않는 자기 word 계산</a:t>
+            </a:r>
+            <a:endParaRPr lang="en-US" sz="1600" dirty="0"/>
+          </a:p>
+          <a:p>
+            <a:pPr marL="342900" indent="-342900">
+              <a:lnSpc>
+                <a:spcPct val="105000"/>
+              </a:lnSpc>
+              <a:spcAft>
+                <a:spcPts val="1200"/>
+              </a:spcAft>
+              <a:buSzPct val="100000"/>
+              <a:buChar char="✓"/>
+            </a:pPr>
+            <a:r>
+              <a:rPr lang="en-US" sz="1600" dirty="0">
+                <a:solidFill>
+                  <a:srgbClr val="E7EDF5"/>
+                </a:solidFill>
+                <a:latin typeface="Malgun Gothic" pitchFamily="34" charset="0"/>
+                <a:ea typeface="Malgun Gothic" pitchFamily="34" charset="-122"/>
+                <a:cs typeface="Malgun Gothic" pitchFamily="34" charset="-120"/>
+              </a:rPr>
+              <a:t>이웃 스레드 = 이웃 주소 → coalescing</a:t>
+            </a:r>
+            <a:endParaRPr lang="en-US" sz="1600" dirty="0"/>
+          </a:p>
+        </p:txBody>
+      </p:sp>
+      <p:sp>
+        <p:nvSpPr>
+          <p:cNvPr id="7" name="Shape 5"/>
+          <p:cNvSpPr/>
+          <p:nvPr/>
+        </p:nvSpPr>
+        <p:spPr>
+          <a:xfrm>
+            <a:off x="6263640" y="1600200"/>
+            <a:ext cx="5349240" cy="4114800"/>
+          </a:xfrm>
+          <a:prstGeom prst="roundRect">
+            <a:avLst>
+              <a:gd name="adj" fmla="val 1778"/>
+            </a:avLst>
+          </a:prstGeom>
+          <a:solidFill>
+            <a:srgbClr val="18212E"/>
+          </a:solidFill>
+          <a:ln/>
+        </p:spPr>
+      </p:sp>
+      <p:sp>
+        <p:nvSpPr>
+          <p:cNvPr id="8" name="Text 6"/>
+          <p:cNvSpPr/>
+          <p:nvPr/>
+        </p:nvSpPr>
+        <p:spPr>
+          <a:xfrm>
+            <a:off x="6537960" y="1828800"/>
+            <a:ext cx="4800600" cy="457200"/>
+          </a:xfrm>
+          <a:prstGeom prst="rect">
+            <a:avLst/>
+          </a:prstGeom>
+          <a:noFill/>
+          <a:ln/>
+        </p:spPr>
+        <p:txBody>
+          <a:bodyPr wrap="square" lIns="0" tIns="0" rIns="0" bIns="0" rtlCol="0" anchor="ctr"/>
+          <a:lstStyle/>
+          <a:p>
+            <a:pPr indent="0" marL="0">
+              <a:buNone/>
+            </a:pPr>
+            <a:r>
+              <a:rPr lang="en-US" sz="2000" b="1" dirty="0">
+                <a:solidFill>
+                  <a:srgbClr val="E6604F"/>
+                </a:solidFill>
+                <a:latin typeface="Malgun Gothic" pitchFamily="34" charset="0"/>
+                <a:ea typeface="Malgun Gothic" pitchFamily="34" charset="-122"/>
+                <a:cs typeface="Malgun Gothic" pitchFamily="34" charset="-120"/>
+              </a:rPr>
+              <a:t>입문자 함정</a:t>
+            </a:r>
+            <a:endParaRPr lang="en-US" sz="2000" dirty="0"/>
+          </a:p>
+        </p:txBody>
+      </p:sp>
+      <p:sp>
+        <p:nvSpPr>
+          <p:cNvPr id="9" name="Text 7"/>
+          <p:cNvSpPr/>
+          <p:nvPr/>
+        </p:nvSpPr>
+        <p:spPr>
+          <a:xfrm>
+            <a:off x="6537960" y="2423160"/>
+            <a:ext cx="4800600" cy="3108960"/>
+          </a:xfrm>
+          <a:prstGeom prst="rect">
+            <a:avLst/>
+          </a:prstGeom>
+          <a:noFill/>
+          <a:ln/>
+        </p:spPr>
+        <p:txBody>
+          <a:bodyPr wrap="square" lIns="0" tIns="0" rIns="0" bIns="0" rtlCol="0" anchor="t"/>
+          <a:lstStyle/>
+          <a:p>
+            <a:pPr marL="342900" indent="-342900">
+              <a:lnSpc>
+                <a:spcPct val="105000"/>
+              </a:lnSpc>
+              <a:spcAft>
+                <a:spcPts val="1200"/>
+              </a:spcAft>
+              <a:buSzPct val="100000"/>
+              <a:buChar char="✗"/>
+            </a:pPr>
+            <a:r>
+              <a:rPr lang="en-US" sz="1550" dirty="0">
+                <a:solidFill>
+                  <a:srgbClr val="E7EDF5"/>
+                </a:solidFill>
+                <a:latin typeface="Malgun Gothic" pitchFamily="34" charset="0"/>
+                <a:ea typeface="Malgun Gothic" pitchFamily="34" charset="-122"/>
+                <a:cs typeface="Malgun Gothic" pitchFamily="34" charset="-120"/>
+              </a:rPr>
+              <a:t>커널을 일반 함수처럼 () 로 호출 → &lt;&lt;&lt;&gt;&gt;&gt; 필수</a:t>
+            </a:r>
+            <a:endParaRPr lang="en-US" sz="1550" dirty="0"/>
+          </a:p>
+          <a:p>
+            <a:pPr marL="342900" indent="-342900">
+              <a:lnSpc>
+                <a:spcPct val="105000"/>
+              </a:lnSpc>
+              <a:spcAft>
+                <a:spcPts val="1200"/>
+              </a:spcAft>
+              <a:buSzPct val="100000"/>
+              <a:buChar char="✗"/>
+            </a:pPr>
+            <a:r>
+              <a:rPr lang="en-US" sz="1550" dirty="0">
+                <a:solidFill>
+                  <a:srgbClr val="E7EDF5"/>
+                </a:solidFill>
+                <a:latin typeface="Malgun Gothic" pitchFamily="34" charset="0"/>
+                <a:ea typeface="Malgun Gothic" pitchFamily="34" charset="-122"/>
+                <a:cs typeface="Malgun Gothic" pitchFamily="34" charset="-120"/>
+              </a:rPr>
+              <a:t>커널에서 값을 return 하려 함 → void, 결과는 메모리로</a:t>
+            </a:r>
+            <a:endParaRPr lang="en-US" sz="1550" dirty="0"/>
+          </a:p>
+          <a:p>
+            <a:pPr marL="342900" indent="-342900">
+              <a:lnSpc>
+                <a:spcPct val="105000"/>
+              </a:lnSpc>
+              <a:spcAft>
+                <a:spcPts val="1200"/>
+              </a:spcAft>
+              <a:buSzPct val="100000"/>
+              <a:buChar char="✗"/>
+            </a:pPr>
+            <a:r>
+              <a:rPr lang="en-US" sz="1550" dirty="0">
+                <a:solidFill>
+                  <a:srgbClr val="E7EDF5"/>
+                </a:solidFill>
+                <a:latin typeface="Malgun Gothic" pitchFamily="34" charset="0"/>
+                <a:ea typeface="Malgun Gothic" pitchFamily="34" charset="-122"/>
+                <a:cs typeface="Malgun Gothic" pitchFamily="34" charset="-120"/>
+              </a:rPr>
+              <a:t>호스트 포인터를 커널에 그대로 전달 → 디바이스 포인터여야</a:t>
+            </a:r>
+            <a:endParaRPr lang="en-US" sz="1550" dirty="0"/>
+          </a:p>
+          <a:p>
+            <a:pPr marL="342900" indent="-342900">
+              <a:lnSpc>
+                <a:spcPct val="105000"/>
+              </a:lnSpc>
+              <a:spcAft>
+                <a:spcPts val="1200"/>
+              </a:spcAft>
+              <a:buSzPct val="100000"/>
+              <a:buChar char="✗"/>
+            </a:pPr>
+            <a:r>
+              <a:rPr lang="en-US" sz="1550" dirty="0">
+                <a:solidFill>
+                  <a:srgbClr val="E7EDF5"/>
+                </a:solidFill>
+                <a:latin typeface="Malgun Gothic" pitchFamily="34" charset="0"/>
+                <a:ea typeface="Malgun Gothic" pitchFamily="34" charset="-122"/>
+                <a:cs typeface="Malgun Gothic" pitchFamily="34" charset="-120"/>
+              </a:rPr>
+              <a:t>blockDim을 스레드마다 다르다고 착각 → 모두 같은 값</a:t>
+            </a:r>
+            <a:endParaRPr lang="en-US" sz="1550" dirty="0"/>
+          </a:p>
+        </p:txBody>
+      </p:sp>
+    </p:spTree>
+  </p:cSld>
+  <p:clrMapOvr>
+    <a:masterClrMapping/>
+  </p:clrMapOvr>
+</p:sld>
+</file>
+
+<file path=ppt/slides/slide12.xml><?xml version="1.0" encoding="utf-8"?>
+<p:sld xmlns:a="http://schemas.openxmlformats.org/drawingml/2006/main" xmlns:r="http://schemas.openxmlformats.org/officeDocument/2006/relationships" xmlns:p="http://schemas.openxmlformats.org/presentationml/2006/main">
+  <p:cSld name="Slide 12">
     <p:bg>
       <p:bgPr>
         <a:solidFill>

--- a/docs/seminar/slides/세션1_스레드모델과_주소매핑.pptx
+++ b/docs/seminar/slides/세션1_스레드모델과_주소매핑.pptx
@@ -17,9 +17,10 @@
     <p:sldId id="265" r:id="rId11"/>
     <p:sldId id="266" r:id="rId12"/>
     <p:sldId id="267" r:id="rId13"/>
+    <p:sldId id="268" r:id="rId14"/>
   </p:sldIdLst>
   <p:notesMasterIdLst>
-    <p:notesMasterId r:id="rId14"/>
+    <p:notesMasterId r:id="rId15"/>
   </p:notesMasterIdLst>
   <p:sldSz cx="12192000" cy="6858000"/>
   <p:notesSz cx="6858000" cy="12192000"/>
@@ -601,7 +602,7 @@
           <a:p>
             <a:r>
               <a:rPr lang="en-US" dirty="0"/>
-              <a:t>launch = CPU 한 줄 → GPU가 블록을 SM에 분배 → 워프 실행 → 완료. 호스트는 비동기로 리턴한다는 점이 다음 세션들의 복선.</a:t>
+              <a:t>커널 launch는 비동기입니다(호스트는 곧바로 리턴). 이 성질은 세션 3·4에서 타이밍·오류와 함께 다룹니다.</a:t>
             </a:r>
             <a:endParaRPr lang="en-US" dirty="0"/>
           </a:p>
@@ -689,7 +690,7 @@
           <a:p>
             <a:r>
               <a:rPr lang="en-US" dirty="0"/>
-              <a:t>네 가지 목표(슬라이드 2)로 돌아가 자가 점검을 유도하세요.</a:t>
+              <a:t>launch = CPU 한 줄 → GPU가 블록을 SM에 분배 → 워프 실행 → 완료. 호스트는 비동기로 리턴한다는 점이 다음 세션들의 복선.</a:t>
             </a:r>
             <a:endParaRPr lang="en-US" dirty="0"/>
           </a:p>
@@ -777,7 +778,7 @@
           <a:p>
             <a:r>
               <a:rPr lang="en-US" dirty="0"/>
-              <a:t/>
+              <a:t>네 가지 목표(슬라이드 2)로 돌아가 자가 점검을 유도하세요.</a:t>
             </a:r>
             <a:endParaRPr lang="en-US" dirty="0"/>
           </a:p>
@@ -801,6 +802,94 @@
             <a:fld id="{F7021451-1387-4CA6-816F-3879F97B5CBC}" type="slidenum">
               <a:rPr lang="en-US"/>
               <a:t>12</a:t>
+            </a:fld>
+            <a:endParaRPr lang="en-US"/>
+          </a:p>
+        </p:txBody>
+      </p:sp>
+    </p:spTree>
+    <p:extLst>
+      <p:ext uri="{BB962C8B-B14F-4D97-AF65-F5344CB8AC3E}">
+        <p14:creationId xmlns:p14="http://schemas.microsoft.com/office/powerpoint/2010/main" val="1024086991"/>
+      </p:ext>
+    </p:extLst>
+  </p:cSld>
+  <p:clrMapOvr>
+    <a:masterClrMapping/>
+  </p:clrMapOvr>
+</p:notes>
+</file>
+
+<file path=ppt/notesSlides/notesSlide13.xml><?xml version="1.0" encoding="utf-8"?>
+<p:notes xmlns:a="http://schemas.openxmlformats.org/drawingml/2006/main" xmlns:r="http://schemas.openxmlformats.org/officeDocument/2006/relationships" xmlns:p="http://schemas.openxmlformats.org/presentationml/2006/main">
+  <p:cSld>
+    <p:spTree>
+      <p:nvGrpSpPr>
+        <p:cNvPr id="1" name=""/>
+        <p:cNvGrpSpPr/>
+        <p:nvPr/>
+      </p:nvGrpSpPr>
+      <p:grpSpPr>
+        <a:xfrm>
+          <a:off x="0" y="0"/>
+          <a:ext cx="0" cy="0"/>
+          <a:chOff x="0" y="0"/>
+          <a:chExt cx="0" cy="0"/>
+        </a:xfrm>
+      </p:grpSpPr>
+      <p:sp>
+        <p:nvSpPr>
+          <p:cNvPr id="2" name="Slide Image Placeholder 1"/>
+          <p:cNvSpPr>
+            <a:spLocks noGrp="1" noRot="1" noChangeAspect="1"/>
+          </p:cNvSpPr>
+          <p:nvPr>
+            <p:ph type="sldImg"/>
+          </p:nvPr>
+        </p:nvSpPr>
+        <p:spPr/>
+      </p:sp>
+      <p:sp>
+        <p:nvSpPr>
+          <p:cNvPr id="3" name="Notes Placeholder 2"/>
+          <p:cNvSpPr>
+            <a:spLocks noGrp="1"/>
+          </p:cNvSpPr>
+          <p:nvPr>
+            <p:ph type="body" idx="1"/>
+          </p:nvPr>
+        </p:nvSpPr>
+        <p:spPr/>
+        <p:txBody>
+          <a:bodyPr/>
+          <a:lstStyle/>
+          <a:p>
+            <a:r>
+              <a:rPr lang="en-US" dirty="0"/>
+              <a:t/>
+            </a:r>
+            <a:endParaRPr lang="en-US" dirty="0"/>
+          </a:p>
+        </p:txBody>
+      </p:sp>
+      <p:sp>
+        <p:nvSpPr>
+          <p:cNvPr id="4" name="Slide Number Placeholder 3"/>
+          <p:cNvSpPr>
+            <a:spLocks noGrp="1"/>
+          </p:cNvSpPr>
+          <p:nvPr>
+            <p:ph type="sldNum" sz="quarter" idx="10"/>
+          </p:nvPr>
+        </p:nvSpPr>
+        <p:spPr/>
+        <p:txBody>
+          <a:bodyPr/>
+          <a:lstStyle/>
+          <a:p>
+            <a:fld id="{F7021451-1387-4CA6-816F-3879F97B5CBC}" type="slidenum">
+              <a:rPr lang="en-US"/>
+              <a:t>13</a:t>
             </a:fld>
             <a:endParaRPr lang="en-US"/>
           </a:p>
@@ -1129,7 +1218,7 @@
           <a:p>
             <a:r>
               <a:rPr lang="en-US" dirty="0"/>
-              <a:t>blockIdx/threadIdx는 스레드마다 다름, blockDim/gridDim은 모두 같음 — 이 대비가 주소 계산의 핵심입니다.</a:t>
+              <a:t>실행 계층(앞 슬라이드)이 하드웨어에 매핑되는 관점. Grid→GPU, Block→SM, Warp(32)→스케줄러(SIMT), Thread→코어. 워프 개념이 다음 coalescing 슬라이드의 전제입니다.</a:t>
             </a:r>
             <a:endParaRPr lang="en-US" dirty="0"/>
           </a:p>
@@ -1217,7 +1306,7 @@
           <a:p>
             <a:r>
               <a:rPr lang="en-US" dirty="0"/>
-              <a:t>이 한 줄이 모든 write/verify 커널에 등장합니다. 각 항의 역할을 손가락으로 짚어가며 읽으세요.</a:t>
+              <a:t>blockIdx/threadIdx는 스레드마다 다름, blockDim/gridDim은 모두 같음 — 이 대비가 주소 계산의 핵심입니다.</a:t>
             </a:r>
             <a:endParaRPr lang="en-US" dirty="0"/>
           </a:p>
@@ -1305,7 +1394,7 @@
           <a:p>
             <a:r>
               <a:rPr lang="en-US" dirty="0"/>
-              <a:t>coalescing은 세션 3(성능)의 복선. 여기서는 '이웃 스레드=이웃 주소'라는 직관만 각인시키면 됩니다.</a:t>
+              <a:t>이 한 줄이 모든 write/verify 커널에 등장합니다. 각 항의 역할을 손가락으로 짚어가며 읽으세요.</a:t>
             </a:r>
             <a:endParaRPr lang="en-US" dirty="0"/>
           </a:p>
@@ -1393,7 +1482,7 @@
           <a:p>
             <a:r>
               <a:rPr lang="en-US" dirty="0"/>
-              <a:t>THREAD_ADDRESS 덕에 커널 본문이 3줄. 인덱싱 복잡도를 매크로로 캡슐화하는 설계를 칭찬하세요.</a:t>
+              <a:t>coalescing은 세션 3(성능)의 복선. 여기서는 '이웃 스레드=이웃 주소'라는 직관만 각인시키면 됩니다.</a:t>
             </a:r>
             <a:endParaRPr lang="en-US" dirty="0"/>
           </a:p>
@@ -1481,7 +1570,7 @@
           <a:p>
             <a:r>
               <a:rPr lang="en-US" dirty="0"/>
-              <a:t>커널 launch는 비동기입니다(호스트는 곧바로 리턴). 이 성질은 세션 3·4에서 타이밍·오류와 함께 다룹니다.</a:t>
+              <a:t>THREAD_ADDRESS 덕에 커널 본문이 3줄. 인덱싱 복잡도를 매크로로 캡슐화하는 설계를 칭찬하세요.</a:t>
             </a:r>
             <a:endParaRPr lang="en-US" dirty="0"/>
           </a:p>
@@ -2171,7 +2260,7 @@
             </a:avLst>
           </a:prstGeom>
           <a:solidFill>
-            <a:srgbClr val="3FB8C4"/>
+            <a:srgbClr val="E8A33D"/>
           </a:solidFill>
           <a:ln/>
         </p:spPr>
@@ -2230,7 +2319,7 @@
                 <a:ea typeface="Malgun Gothic" pitchFamily="34" charset="-122"/>
                 <a:cs typeface="Malgun Gothic" pitchFamily="34" charset="-120"/>
               </a:rPr>
-              <a:t>커널 launch 흐름 · 호출에서 완료까지</a:t>
+              <a:t>호스트가 커널을 부르는 법</a:t>
             </a:r>
             <a:endParaRPr lang="en-US" sz="2900" dirty="0"/>
           </a:p>
@@ -2238,190 +2327,218 @@
       </p:sp>
       <p:sp>
         <p:nvSpPr>
-          <p:cNvPr id="4" name="Text 2"/>
-          <p:cNvSpPr/>
-          <p:nvPr/>
-        </p:nvSpPr>
-        <p:spPr>
-          <a:xfrm>
-            <a:off x="548640" y="1371600"/>
-            <a:ext cx="11064240" cy="411480"/>
-          </a:xfrm>
-          <a:prstGeom prst="rect">
-            <a:avLst/>
-          </a:prstGeom>
-          <a:noFill/>
-          <a:ln/>
-        </p:spPr>
-        <p:txBody>
-          <a:bodyPr wrap="square" lIns="0" tIns="0" rIns="0" bIns="0" rtlCol="0" anchor="ctr"/>
+          <p:cNvPr id="4" name="Shape 2"/>
+          <p:cNvSpPr/>
+          <p:nvPr/>
+        </p:nvSpPr>
+        <p:spPr>
+          <a:xfrm>
+            <a:off x="548640" y="1554480"/>
+            <a:ext cx="11064240" cy="1234440"/>
+          </a:xfrm>
+          <a:prstGeom prst="roundRect">
+            <a:avLst>
+              <a:gd name="adj" fmla="val 3704"/>
+            </a:avLst>
+          </a:prstGeom>
+          <a:solidFill>
+            <a:srgbClr val="0B1119"/>
+          </a:solidFill>
+          <a:ln w="12700">
+            <a:solidFill>
+              <a:srgbClr val="2C3A4E"/>
+            </a:solidFill>
+            <a:prstDash val="solid"/>
+          </a:ln>
+        </p:spPr>
+      </p:sp>
+      <p:sp>
+        <p:nvSpPr>
+          <p:cNvPr id="5" name="Text 3"/>
+          <p:cNvSpPr/>
+          <p:nvPr/>
+        </p:nvSpPr>
+        <p:spPr>
+          <a:xfrm>
+            <a:off x="768096" y="1700784"/>
+            <a:ext cx="10625328" cy="941832"/>
+          </a:xfrm>
+          <a:prstGeom prst="rect">
+            <a:avLst/>
+          </a:prstGeom>
+          <a:noFill/>
+          <a:ln/>
+        </p:spPr>
+        <p:txBody>
+          <a:bodyPr wrap="square" lIns="0" tIns="0" rIns="0" bIns="0" rtlCol="0" anchor="t"/>
+          <a:lstStyle/>
+          <a:p>
+            <a:pPr algn="l" indent="0" marL="0">
+              <a:lnSpc>
+                <a:spcPct val="110000"/>
+              </a:lnSpc>
+              <a:buNone/>
+            </a:pPr>
+            <a:r>
+              <a:rPr lang="en-US" sz="1350" dirty="0">
+                <a:solidFill>
+                  <a:srgbClr val="6B7D94"/>
+                </a:solidFill>
+                <a:latin typeface="Courier New" pitchFamily="34" charset="0"/>
+                <a:ea typeface="Courier New" pitchFamily="34" charset="-122"/>
+                <a:cs typeface="Courier New" pitchFamily="34" charset="-120"/>
+              </a:rPr>
+              <a:t>// core.cu:185 — gpuWriteConstant (호스트 함수)</a:t>
+            </a:r>
+            <a:endParaRPr lang="en-US" sz="1350" dirty="0"/>
+          </a:p>
+          <a:p>
+            <a:pPr algn="l" indent="0" marL="0">
+              <a:lnSpc>
+                <a:spcPct val="110000"/>
+              </a:lnSpc>
+              <a:buNone/>
+            </a:pPr>
+            <a:r>
+              <a:rPr lang="en-US" sz="1350" dirty="0">
+                <a:solidFill>
+                  <a:srgbClr val="E8A33D"/>
+                </a:solidFill>
+                <a:latin typeface="Courier New" pitchFamily="34" charset="0"/>
+                <a:ea typeface="Courier New" pitchFamily="34" charset="-122"/>
+                <a:cs typeface="Courier New" pitchFamily="34" charset="-120"/>
+              </a:rPr>
+              <a:t>deviceWriteConstant</a:t>
+            </a:r>
+            <a:pPr algn="l" indent="0" marL="0">
+              <a:lnSpc>
+                <a:spcPct val="110000"/>
+              </a:lnSpc>
+              <a:buNone/>
+            </a:pPr>
+            <a:r>
+              <a:rPr lang="en-US" sz="1350" b="1" dirty="0">
+                <a:solidFill>
+                  <a:srgbClr val="3FB8C4"/>
+                </a:solidFill>
+                <a:latin typeface="Courier New" pitchFamily="34" charset="0"/>
+                <a:ea typeface="Courier New" pitchFamily="34" charset="-122"/>
+                <a:cs typeface="Courier New" pitchFamily="34" charset="-120"/>
+              </a:rPr>
+              <a:t>&lt;&lt;&lt;nBlocks, nThreads&gt;&gt;&gt;</a:t>
+            </a:r>
+            <a:pPr algn="l" indent="0" marL="0">
+              <a:lnSpc>
+                <a:spcPct val="110000"/>
+              </a:lnSpc>
+              <a:buNone/>
+            </a:pPr>
+            <a:r>
+              <a:rPr lang="en-US" sz="1350" dirty="0">
+                <a:solidFill>
+                  <a:srgbClr val="E7EDF5"/>
+                </a:solidFill>
+                <a:latin typeface="Courier New" pitchFamily="34" charset="0"/>
+                <a:ea typeface="Courier New" pitchFamily="34" charset="-122"/>
+                <a:cs typeface="Courier New" pitchFamily="34" charset="-120"/>
+              </a:rPr>
+              <a:t>(base, N, constant);</a:t>
+            </a:r>
+            <a:endParaRPr lang="en-US" sz="1350" dirty="0"/>
+          </a:p>
+          <a:p>
+            <a:pPr algn="l" indent="0" marL="0">
+              <a:lnSpc>
+                <a:spcPct val="110000"/>
+              </a:lnSpc>
+              <a:buNone/>
+            </a:pPr>
+            <a:r>
+              <a:rPr lang="en-US" sz="1350" dirty="0">
+                <a:solidFill>
+                  <a:srgbClr val="6B7D94"/>
+                </a:solidFill>
+                <a:latin typeface="Courier New" pitchFamily="34" charset="0"/>
+                <a:ea typeface="Courier New" pitchFamily="34" charset="-122"/>
+                <a:cs typeface="Courier New" pitchFamily="34" charset="-120"/>
+              </a:rPr>
+              <a:t>//         ▲ 1024      ▲ 512</a:t>
+            </a:r>
+            <a:endParaRPr lang="en-US" sz="1350" dirty="0"/>
+          </a:p>
+        </p:txBody>
+      </p:sp>
+      <p:sp>
+        <p:nvSpPr>
+          <p:cNvPr id="6" name="Text 4"/>
+          <p:cNvSpPr/>
+          <p:nvPr/>
+        </p:nvSpPr>
+        <p:spPr>
+          <a:xfrm>
+            <a:off x="548640" y="3017520"/>
+            <a:ext cx="11064240" cy="822960"/>
+          </a:xfrm>
+          <a:prstGeom prst="rect">
+            <a:avLst/>
+          </a:prstGeom>
+          <a:noFill/>
+          <a:ln/>
+        </p:spPr>
+        <p:txBody>
+          <a:bodyPr wrap="square" lIns="0" tIns="0" rIns="0" bIns="0" rtlCol="0" anchor="t"/>
           <a:lstStyle/>
           <a:p>
             <a:pPr indent="0" marL="0">
               <a:buNone/>
             </a:pPr>
             <a:r>
-              <a:rPr lang="en-US" sz="1450" dirty="0">
-                <a:solidFill>
-                  <a:srgbClr val="9FB0C4"/>
+              <a:rPr lang="en-US" sz="1700" b="1" dirty="0">
+                <a:solidFill>
+                  <a:srgbClr val="3FB8C4"/>
                 </a:solidFill>
                 <a:latin typeface="Malgun Gothic" pitchFamily="34" charset="0"/>
                 <a:ea typeface="Malgun Gothic" pitchFamily="34" charset="-122"/>
                 <a:cs typeface="Malgun Gothic" pitchFamily="34" charset="-120"/>
               </a:rPr>
-              <a:t>&lt;&lt;&lt;&gt;&gt;&gt; 한 줄을 실행하면, 요청이 GPU로 넘어가 블록이 SM에 분배되고 워프 단위로 실행됩니다.</a:t>
-            </a:r>
-            <a:endParaRPr lang="en-US" sz="1450" dirty="0"/>
-          </a:p>
-        </p:txBody>
-      </p:sp>
-      <p:sp>
-        <p:nvSpPr>
-          <p:cNvPr id="5" name="Shape 3"/>
-          <p:cNvSpPr/>
-          <p:nvPr/>
-        </p:nvSpPr>
-        <p:spPr>
-          <a:xfrm>
-            <a:off x="548640" y="1874520"/>
-            <a:ext cx="7040880" cy="841248"/>
-          </a:xfrm>
-          <a:prstGeom prst="roundRect">
-            <a:avLst>
-              <a:gd name="adj" fmla="val 8696"/>
-            </a:avLst>
-          </a:prstGeom>
-          <a:solidFill>
-            <a:srgbClr val="16242C"/>
-          </a:solidFill>
-          <a:ln w="19050">
-            <a:solidFill>
-              <a:srgbClr val="3FB8C4"/>
-            </a:solidFill>
-            <a:prstDash val="solid"/>
-          </a:ln>
-        </p:spPr>
-      </p:sp>
-      <p:sp>
-        <p:nvSpPr>
-          <p:cNvPr id="6" name="Text 4"/>
-          <p:cNvSpPr/>
-          <p:nvPr/>
-        </p:nvSpPr>
-        <p:spPr>
-          <a:xfrm>
-            <a:off x="804672" y="1984248"/>
-            <a:ext cx="6583680" cy="365760"/>
-          </a:xfrm>
-          <a:prstGeom prst="rect">
-            <a:avLst/>
-          </a:prstGeom>
-          <a:noFill/>
-          <a:ln/>
-        </p:spPr>
-        <p:txBody>
-          <a:bodyPr wrap="square" lIns="0" tIns="0" rIns="0" bIns="0" rtlCol="0" anchor="ctr"/>
-          <a:lstStyle/>
-          <a:p>
+              <a:t>&lt;&lt;&lt;nBlocks, nThreads&gt;&gt;&gt;</a:t>
+            </a:r>
             <a:pPr indent="0" marL="0">
               <a:buNone/>
             </a:pPr>
             <a:r>
-              <a:rPr lang="en-US" sz="1500" b="1" dirty="0">
-                <a:solidFill>
-                  <a:srgbClr val="3FB8C4"/>
+              <a:rPr lang="en-US" sz="1700" dirty="0">
+                <a:solidFill>
+                  <a:srgbClr val="E7EDF5"/>
                 </a:solidFill>
                 <a:latin typeface="Malgun Gothic" pitchFamily="34" charset="0"/>
                 <a:ea typeface="Malgun Gothic" pitchFamily="34" charset="-122"/>
                 <a:cs typeface="Malgun Gothic" pitchFamily="34" charset="-120"/>
               </a:rPr>
-              <a:t>① 호스트(CPU) — 커널 실행 요청</a:t>
-            </a:r>
-            <a:endParaRPr lang="en-US" sz="1500" dirty="0"/>
-          </a:p>
-        </p:txBody>
-      </p:sp>
-      <p:sp>
-        <p:nvSpPr>
-          <p:cNvPr id="7" name="Text 5"/>
-          <p:cNvSpPr/>
-          <p:nvPr/>
-        </p:nvSpPr>
-        <p:spPr>
-          <a:xfrm>
-            <a:off x="804672" y="2331720"/>
-            <a:ext cx="6583680" cy="292608"/>
-          </a:xfrm>
-          <a:prstGeom prst="rect">
-            <a:avLst/>
-          </a:prstGeom>
-          <a:noFill/>
-          <a:ln/>
-        </p:spPr>
-        <p:txBody>
-          <a:bodyPr wrap="square" lIns="0" tIns="0" rIns="0" bIns="0" rtlCol="0" anchor="ctr"/>
-          <a:lstStyle/>
-          <a:p>
-            <a:pPr indent="0" marL="0">
-              <a:buNone/>
-            </a:pPr>
-            <a:r>
-              <a:rPr lang="en-US" sz="1100" dirty="0">
-                <a:solidFill>
-                  <a:srgbClr val="9FB0C4"/>
-                </a:solidFill>
-                <a:latin typeface="Courier New" pitchFamily="34" charset="0"/>
-                <a:ea typeface="Courier New" pitchFamily="34" charset="-122"/>
-                <a:cs typeface="Courier New" pitchFamily="34" charset="-120"/>
-              </a:rPr>
-              <a:t>deviceWriteConstant&lt;&lt;&lt;1024, 512&gt;&gt;&gt;(...)</a:t>
-            </a:r>
-            <a:endParaRPr lang="en-US" sz="1100" dirty="0"/>
-          </a:p>
-        </p:txBody>
-      </p:sp>
-      <p:sp>
-        <p:nvSpPr>
-          <p:cNvPr id="8" name="Shape 6"/>
-          <p:cNvSpPr/>
-          <p:nvPr/>
-        </p:nvSpPr>
-        <p:spPr>
-          <a:xfrm>
-            <a:off x="4069080" y="2734056"/>
-            <a:ext cx="0" cy="146304"/>
-          </a:xfrm>
-          <a:prstGeom prst="line">
-            <a:avLst/>
-          </a:prstGeom>
-          <a:noFill/>
-          <a:ln w="25400">
-            <a:solidFill>
-              <a:srgbClr val="6B7D94"/>
-            </a:solidFill>
-            <a:prstDash val="solid"/>
-            <a:tailEnd type="triangle"/>
-          </a:ln>
-        </p:spPr>
-      </p:sp>
-      <p:sp>
-        <p:nvSpPr>
-          <p:cNvPr id="9" name="Shape 7"/>
-          <p:cNvSpPr/>
-          <p:nvPr/>
-        </p:nvSpPr>
-        <p:spPr>
-          <a:xfrm>
-            <a:off x="548640" y="2898648"/>
-            <a:ext cx="7040880" cy="841248"/>
+              <a:t> 삼중 꺾쇠가 실행 구성입니다. CPU 코드 한 줄이지만, 이 호출로 GPU에서 52만 개 스레드가 깨어납니다.</a:t>
+            </a:r>
+            <a:endParaRPr lang="en-US" sz="1700" dirty="0"/>
+          </a:p>
+        </p:txBody>
+      </p:sp>
+      <p:sp>
+        <p:nvSpPr>
+          <p:cNvPr id="7" name="Shape 5"/>
+          <p:cNvSpPr/>
+          <p:nvPr/>
+        </p:nvSpPr>
+        <p:spPr>
+          <a:xfrm>
+            <a:off x="548640" y="3977640"/>
+            <a:ext cx="11064240" cy="1737360"/>
           </a:xfrm>
           <a:prstGeom prst="roundRect">
             <a:avLst>
-              <a:gd name="adj" fmla="val 8696"/>
+              <a:gd name="adj" fmla="val 4211"/>
             </a:avLst>
           </a:prstGeom>
           <a:solidFill>
-            <a:srgbClr val="241A16"/>
+            <a:srgbClr val="18212E"/>
           </a:solidFill>
           <a:ln w="19050">
             <a:solidFill>
@@ -2433,14 +2550,14 @@
       </p:sp>
       <p:sp>
         <p:nvSpPr>
-          <p:cNvPr id="10" name="Text 8"/>
-          <p:cNvSpPr/>
-          <p:nvPr/>
-        </p:nvSpPr>
-        <p:spPr>
-          <a:xfrm>
-            <a:off x="804672" y="3008376"/>
-            <a:ext cx="6583680" cy="365760"/>
+          <p:cNvPr id="8" name="Text 6"/>
+          <p:cNvSpPr/>
+          <p:nvPr/>
+        </p:nvSpPr>
+        <p:spPr>
+          <a:xfrm>
+            <a:off x="822960" y="4160520"/>
+            <a:ext cx="10515600" cy="365760"/>
           </a:xfrm>
           <a:prstGeom prst="rect">
             <a:avLst/>
@@ -2456,7 +2573,7 @@
               <a:buNone/>
             </a:pPr>
             <a:r>
-              <a:rPr lang="en-US" sz="1500" b="1" dirty="0">
+              <a:rPr lang="en-US" sz="1600" b="1" dirty="0">
                 <a:solidFill>
                   <a:srgbClr val="E8A33D"/>
                 </a:solidFill>
@@ -2464,538 +2581,98 @@
                 <a:ea typeface="Malgun Gothic" pitchFamily="34" charset="-122"/>
                 <a:cs typeface="Malgun Gothic" pitchFamily="34" charset="-120"/>
               </a:rPr>
-              <a:t>② GPU 스케줄러 — 블록을 SM에 분배</a:t>
-            </a:r>
-            <a:endParaRPr lang="en-US" sz="1500" dirty="0"/>
-          </a:p>
-        </p:txBody>
-      </p:sp>
-      <p:sp>
-        <p:nvSpPr>
-          <p:cNvPr id="11" name="Text 9"/>
-          <p:cNvSpPr/>
-          <p:nvPr/>
-        </p:nvSpPr>
-        <p:spPr>
-          <a:xfrm>
-            <a:off x="804672" y="3355848"/>
-            <a:ext cx="6583680" cy="292608"/>
-          </a:xfrm>
-          <a:prstGeom prst="rect">
-            <a:avLst/>
-          </a:prstGeom>
-          <a:noFill/>
-          <a:ln/>
-        </p:spPr>
-        <p:txBody>
-          <a:bodyPr wrap="square" lIns="0" tIns="0" rIns="0" bIns="0" rtlCol="0" anchor="ctr"/>
-          <a:lstStyle/>
-          <a:p>
-            <a:pPr indent="0" marL="0">
-              <a:buNone/>
-            </a:pPr>
-            <a:r>
-              <a:rPr lang="en-US" sz="1100" dirty="0">
-                <a:solidFill>
-                  <a:srgbClr val="9FB0C4"/>
+              <a:t>nBlocks·nThreads는 어디서 오나?</a:t>
+            </a:r>
+            <a:endParaRPr lang="en-US" sz="1600" dirty="0"/>
+          </a:p>
+        </p:txBody>
+      </p:sp>
+      <p:sp>
+        <p:nvSpPr>
+          <p:cNvPr id="9" name="Shape 7"/>
+          <p:cNvSpPr/>
+          <p:nvPr/>
+        </p:nvSpPr>
+        <p:spPr>
+          <a:xfrm>
+            <a:off x="822960" y="4572000"/>
+            <a:ext cx="10515600" cy="1005840"/>
+          </a:xfrm>
+          <a:prstGeom prst="roundRect">
+            <a:avLst>
+              <a:gd name="adj" fmla="val 4545"/>
+            </a:avLst>
+          </a:prstGeom>
+          <a:solidFill>
+            <a:srgbClr val="0B1119"/>
+          </a:solidFill>
+          <a:ln w="12700">
+            <a:solidFill>
+              <a:srgbClr val="2C3A4E"/>
+            </a:solidFill>
+            <a:prstDash val="solid"/>
+          </a:ln>
+        </p:spPr>
+      </p:sp>
+      <p:sp>
+        <p:nvSpPr>
+          <p:cNvPr id="10" name="Text 8"/>
+          <p:cNvSpPr/>
+          <p:nvPr/>
+        </p:nvSpPr>
+        <p:spPr>
+          <a:xfrm>
+            <a:off x="1042416" y="4718304"/>
+            <a:ext cx="10076688" cy="713232"/>
+          </a:xfrm>
+          <a:prstGeom prst="rect">
+            <a:avLst/>
+          </a:prstGeom>
+          <a:noFill/>
+          <a:ln/>
+        </p:spPr>
+        <p:txBody>
+          <a:bodyPr wrap="square" lIns="0" tIns="0" rIns="0" bIns="0" rtlCol="0" anchor="t"/>
+          <a:lstStyle/>
+          <a:p>
+            <a:pPr algn="l" indent="0" marL="0">
+              <a:lnSpc>
+                <a:spcPct val="110000"/>
+              </a:lnSpc>
+              <a:buNone/>
+            </a:pPr>
+            <a:r>
+              <a:rPr lang="en-US" sz="1250" dirty="0">
+                <a:solidFill>
+                  <a:srgbClr val="6B7D94"/>
                 </a:solidFill>
                 <a:latin typeface="Courier New" pitchFamily="34" charset="0"/>
                 <a:ea typeface="Courier New" pitchFamily="34" charset="-122"/>
                 <a:cs typeface="Courier New" pitchFamily="34" charset="-120"/>
               </a:rPr>
-              <a:t>블록 1024개 → 여러 SM에 나눠 배정</a:t>
-            </a:r>
-            <a:endParaRPr lang="en-US" sz="1100" dirty="0"/>
-          </a:p>
-        </p:txBody>
-      </p:sp>
-      <p:sp>
-        <p:nvSpPr>
-          <p:cNvPr id="12" name="Shape 10"/>
-          <p:cNvSpPr/>
-          <p:nvPr/>
-        </p:nvSpPr>
-        <p:spPr>
-          <a:xfrm>
-            <a:off x="4069080" y="3758184"/>
-            <a:ext cx="0" cy="146304"/>
-          </a:xfrm>
-          <a:prstGeom prst="line">
-            <a:avLst/>
-          </a:prstGeom>
-          <a:noFill/>
-          <a:ln w="25400">
-            <a:solidFill>
-              <a:srgbClr val="6B7D94"/>
-            </a:solidFill>
-            <a:prstDash val="solid"/>
-            <a:tailEnd type="triangle"/>
-          </a:ln>
-        </p:spPr>
-      </p:sp>
-      <p:sp>
-        <p:nvSpPr>
-          <p:cNvPr id="13" name="Shape 11"/>
-          <p:cNvSpPr/>
-          <p:nvPr/>
-        </p:nvSpPr>
-        <p:spPr>
-          <a:xfrm>
-            <a:off x="548640" y="3922776"/>
-            <a:ext cx="7040880" cy="841248"/>
-          </a:xfrm>
-          <a:prstGeom prst="roundRect">
-            <a:avLst>
-              <a:gd name="adj" fmla="val 8696"/>
-            </a:avLst>
-          </a:prstGeom>
-          <a:solidFill>
-            <a:srgbClr val="241A16"/>
-          </a:solidFill>
-          <a:ln w="19050">
-            <a:solidFill>
-              <a:srgbClr val="E8A33D"/>
-            </a:solidFill>
-            <a:prstDash val="solid"/>
-          </a:ln>
-        </p:spPr>
-      </p:sp>
-      <p:sp>
-        <p:nvSpPr>
-          <p:cNvPr id="14" name="Text 12"/>
-          <p:cNvSpPr/>
-          <p:nvPr/>
-        </p:nvSpPr>
-        <p:spPr>
-          <a:xfrm>
-            <a:off x="804672" y="4032504"/>
-            <a:ext cx="6583680" cy="365760"/>
-          </a:xfrm>
-          <a:prstGeom prst="rect">
-            <a:avLst/>
-          </a:prstGeom>
-          <a:noFill/>
-          <a:ln/>
-        </p:spPr>
-        <p:txBody>
-          <a:bodyPr wrap="square" lIns="0" tIns="0" rIns="0" bIns="0" rtlCol="0" anchor="ctr"/>
-          <a:lstStyle/>
-          <a:p>
-            <a:pPr indent="0" marL="0">
-              <a:buNone/>
-            </a:pPr>
-            <a:r>
-              <a:rPr lang="en-US" sz="1500" b="1" dirty="0">
-                <a:solidFill>
-                  <a:srgbClr val="E8A33D"/>
-                </a:solidFill>
-                <a:latin typeface="Malgun Gothic" pitchFamily="34" charset="0"/>
-                <a:ea typeface="Malgun Gothic" pitchFamily="34" charset="-122"/>
-                <a:cs typeface="Malgun Gothic" pitchFamily="34" charset="-120"/>
-              </a:rPr>
-              <a:t>③ 각 SM — 워프(32 스레드) 단위로 실행</a:t>
-            </a:r>
-            <a:endParaRPr lang="en-US" sz="1500" dirty="0"/>
-          </a:p>
-        </p:txBody>
-      </p:sp>
-      <p:sp>
-        <p:nvSpPr>
-          <p:cNvPr id="15" name="Text 13"/>
-          <p:cNvSpPr/>
-          <p:nvPr/>
-        </p:nvSpPr>
-        <p:spPr>
-          <a:xfrm>
-            <a:off x="804672" y="4379976"/>
-            <a:ext cx="6583680" cy="292608"/>
-          </a:xfrm>
-          <a:prstGeom prst="rect">
-            <a:avLst/>
-          </a:prstGeom>
-          <a:noFill/>
-          <a:ln/>
-        </p:spPr>
-        <p:txBody>
-          <a:bodyPr wrap="square" lIns="0" tIns="0" rIns="0" bIns="0" rtlCol="0" anchor="ctr"/>
-          <a:lstStyle/>
-          <a:p>
-            <a:pPr indent="0" marL="0">
-              <a:buNone/>
-            </a:pPr>
-            <a:r>
-              <a:rPr lang="en-US" sz="1100" dirty="0">
-                <a:solidFill>
-                  <a:srgbClr val="9FB0C4"/>
+              <a:t>// core.h:78 — memtestState 클래스의 상수 멤버</a:t>
+            </a:r>
+            <a:endParaRPr lang="en-US" sz="1250" dirty="0"/>
+          </a:p>
+          <a:p>
+            <a:pPr algn="l" indent="0" marL="0">
+              <a:lnSpc>
+                <a:spcPct val="110000"/>
+              </a:lnSpc>
+              <a:buNone/>
+            </a:pPr>
+            <a:r>
+              <a:rPr lang="en-US" sz="1250" dirty="0">
+                <a:solidFill>
+                  <a:srgbClr val="E7EDF5"/>
                 </a:solidFill>
                 <a:latin typeface="Courier New" pitchFamily="34" charset="0"/>
                 <a:ea typeface="Courier New" pitchFamily="34" charset="-122"/>
                 <a:cs typeface="Courier New" pitchFamily="34" charset="-120"/>
               </a:rPr>
-              <a:t>블록 안 512 스레드가 실제 연산 수행</a:t>
-            </a:r>
-            <a:endParaRPr lang="en-US" sz="1100" dirty="0"/>
-          </a:p>
-        </p:txBody>
-      </p:sp>
-      <p:sp>
-        <p:nvSpPr>
-          <p:cNvPr id="16" name="Shape 14"/>
-          <p:cNvSpPr/>
-          <p:nvPr/>
-        </p:nvSpPr>
-        <p:spPr>
-          <a:xfrm>
-            <a:off x="4069080" y="4782312"/>
-            <a:ext cx="0" cy="146304"/>
-          </a:xfrm>
-          <a:prstGeom prst="line">
-            <a:avLst/>
-          </a:prstGeom>
-          <a:noFill/>
-          <a:ln w="25400">
-            <a:solidFill>
-              <a:srgbClr val="6B7D94"/>
-            </a:solidFill>
-            <a:prstDash val="solid"/>
-            <a:tailEnd type="triangle"/>
-          </a:ln>
-        </p:spPr>
-      </p:sp>
-      <p:sp>
-        <p:nvSpPr>
-          <p:cNvPr id="17" name="Shape 15"/>
-          <p:cNvSpPr/>
-          <p:nvPr/>
-        </p:nvSpPr>
-        <p:spPr>
-          <a:xfrm>
-            <a:off x="548640" y="4946904"/>
-            <a:ext cx="7040880" cy="841248"/>
-          </a:xfrm>
-          <a:prstGeom prst="roundRect">
-            <a:avLst>
-              <a:gd name="adj" fmla="val 8696"/>
-            </a:avLst>
-          </a:prstGeom>
-          <a:solidFill>
-            <a:srgbClr val="241A16"/>
-          </a:solidFill>
-          <a:ln w="19050">
-            <a:solidFill>
-              <a:srgbClr val="E8A33D"/>
-            </a:solidFill>
-            <a:prstDash val="solid"/>
-          </a:ln>
-        </p:spPr>
-      </p:sp>
-      <p:sp>
-        <p:nvSpPr>
-          <p:cNvPr id="18" name="Text 16"/>
-          <p:cNvSpPr/>
-          <p:nvPr/>
-        </p:nvSpPr>
-        <p:spPr>
-          <a:xfrm>
-            <a:off x="804672" y="5056632"/>
-            <a:ext cx="6583680" cy="365760"/>
-          </a:xfrm>
-          <a:prstGeom prst="rect">
-            <a:avLst/>
-          </a:prstGeom>
-          <a:noFill/>
-          <a:ln/>
-        </p:spPr>
-        <p:txBody>
-          <a:bodyPr wrap="square" lIns="0" tIns="0" rIns="0" bIns="0" rtlCol="0" anchor="ctr"/>
-          <a:lstStyle/>
-          <a:p>
-            <a:pPr indent="0" marL="0">
-              <a:buNone/>
-            </a:pPr>
-            <a:r>
-              <a:rPr lang="en-US" sz="1500" b="1" dirty="0">
-                <a:solidFill>
-                  <a:srgbClr val="E8A33D"/>
-                </a:solidFill>
-                <a:latin typeface="Malgun Gothic" pitchFamily="34" charset="0"/>
-                <a:ea typeface="Malgun Gothic" pitchFamily="34" charset="-122"/>
-                <a:cs typeface="Malgun Gothic" pitchFamily="34" charset="-120"/>
-              </a:rPr>
-              <a:t>④ 커널 완료 — 결과는 전역 메모리에</a:t>
-            </a:r>
-            <a:endParaRPr lang="en-US" sz="1500" dirty="0"/>
-          </a:p>
-        </p:txBody>
-      </p:sp>
-      <p:sp>
-        <p:nvSpPr>
-          <p:cNvPr id="19" name="Text 17"/>
-          <p:cNvSpPr/>
-          <p:nvPr/>
-        </p:nvSpPr>
-        <p:spPr>
-          <a:xfrm>
-            <a:off x="804672" y="5404104"/>
-            <a:ext cx="6583680" cy="292608"/>
-          </a:xfrm>
-          <a:prstGeom prst="rect">
-            <a:avLst/>
-          </a:prstGeom>
-          <a:noFill/>
-          <a:ln/>
-        </p:spPr>
-        <p:txBody>
-          <a:bodyPr wrap="square" lIns="0" tIns="0" rIns="0" bIns="0" rtlCol="0" anchor="ctr"/>
-          <a:lstStyle/>
-          <a:p>
-            <a:pPr indent="0" marL="0">
-              <a:buNone/>
-            </a:pPr>
-            <a:r>
-              <a:rPr lang="en-US" sz="1100" dirty="0">
-                <a:solidFill>
-                  <a:srgbClr val="9FB0C4"/>
-                </a:solidFill>
-                <a:latin typeface="Courier New" pitchFamily="34" charset="0"/>
-                <a:ea typeface="Courier New" pitchFamily="34" charset="-122"/>
-                <a:cs typeface="Courier New" pitchFamily="34" charset="-120"/>
-              </a:rPr>
-              <a:t>호스트는 SOFTWAIT로 완료를 기다림</a:t>
-            </a:r>
-            <a:endParaRPr lang="en-US" sz="1100" dirty="0"/>
-          </a:p>
-        </p:txBody>
-      </p:sp>
-      <p:sp>
-        <p:nvSpPr>
-          <p:cNvPr id="20" name="Text 18"/>
-          <p:cNvSpPr/>
-          <p:nvPr/>
-        </p:nvSpPr>
-        <p:spPr>
-          <a:xfrm>
-            <a:off x="7726680" y="2057400"/>
-            <a:ext cx="1371600" cy="365760"/>
-          </a:xfrm>
-          <a:prstGeom prst="rect">
-            <a:avLst/>
-          </a:prstGeom>
-          <a:noFill/>
-          <a:ln/>
-        </p:spPr>
-        <p:txBody>
-          <a:bodyPr wrap="square" lIns="0" tIns="0" rIns="0" bIns="0" rtlCol="0" anchor="ctr"/>
-          <a:lstStyle/>
-          <a:p>
-            <a:pPr indent="0" marL="0">
-              <a:buNone/>
-            </a:pPr>
-            <a:r>
-              <a:rPr lang="en-US" sz="1200" b="1" dirty="0">
-                <a:solidFill>
-                  <a:srgbClr val="3FB8C4"/>
-                </a:solidFill>
-                <a:latin typeface="Malgun Gothic" pitchFamily="34" charset="0"/>
-                <a:ea typeface="Malgun Gothic" pitchFamily="34" charset="-122"/>
-                <a:cs typeface="Malgun Gothic" pitchFamily="34" charset="-120"/>
-              </a:rPr>
-              <a:t>호스트</a:t>
-            </a:r>
-            <a:endParaRPr lang="en-US" sz="1200" dirty="0"/>
-          </a:p>
-        </p:txBody>
-      </p:sp>
-      <p:sp>
-        <p:nvSpPr>
-          <p:cNvPr id="21" name="Text 19"/>
-          <p:cNvSpPr/>
-          <p:nvPr/>
-        </p:nvSpPr>
-        <p:spPr>
-          <a:xfrm>
-            <a:off x="7726680" y="3108960"/>
-            <a:ext cx="1737360" cy="365760"/>
-          </a:xfrm>
-          <a:prstGeom prst="rect">
-            <a:avLst/>
-          </a:prstGeom>
-          <a:noFill/>
-          <a:ln/>
-        </p:spPr>
-        <p:txBody>
-          <a:bodyPr wrap="square" lIns="0" tIns="0" rIns="0" bIns="0" rtlCol="0" anchor="ctr"/>
-          <a:lstStyle/>
-          <a:p>
-            <a:pPr indent="0" marL="0">
-              <a:buNone/>
-            </a:pPr>
-            <a:r>
-              <a:rPr lang="en-US" sz="1200" b="1" dirty="0">
-                <a:solidFill>
-                  <a:srgbClr val="E8A33D"/>
-                </a:solidFill>
-                <a:latin typeface="Malgun Gothic" pitchFamily="34" charset="0"/>
-                <a:ea typeface="Malgun Gothic" pitchFamily="34" charset="-122"/>
-                <a:cs typeface="Malgun Gothic" pitchFamily="34" charset="-120"/>
-              </a:rPr>
-              <a:t>디바이스(GPU)</a:t>
-            </a:r>
-            <a:endParaRPr lang="en-US" sz="1200" dirty="0"/>
-          </a:p>
-        </p:txBody>
-      </p:sp>
-      <p:sp>
-        <p:nvSpPr>
-          <p:cNvPr id="22" name="Shape 20"/>
-          <p:cNvSpPr/>
-          <p:nvPr/>
-        </p:nvSpPr>
-        <p:spPr>
-          <a:xfrm>
-            <a:off x="9692640" y="1874520"/>
-            <a:ext cx="1920240" cy="3977640"/>
-          </a:xfrm>
-          <a:prstGeom prst="roundRect">
-            <a:avLst>
-              <a:gd name="adj" fmla="val 3810"/>
-            </a:avLst>
-          </a:prstGeom>
-          <a:solidFill>
-            <a:srgbClr val="18212E"/>
-          </a:solidFill>
-          <a:ln w="19050">
-            <a:solidFill>
-              <a:srgbClr val="E6604F"/>
-            </a:solidFill>
-            <a:prstDash val="solid"/>
-          </a:ln>
-        </p:spPr>
-      </p:sp>
-      <p:sp>
-        <p:nvSpPr>
-          <p:cNvPr id="23" name="Text 21"/>
-          <p:cNvSpPr/>
-          <p:nvPr/>
-        </p:nvSpPr>
-        <p:spPr>
-          <a:xfrm>
-            <a:off x="9921240" y="2057400"/>
-            <a:ext cx="1463040" cy="411480"/>
-          </a:xfrm>
-          <a:prstGeom prst="rect">
-            <a:avLst/>
-          </a:prstGeom>
-          <a:noFill/>
-          <a:ln/>
-        </p:spPr>
-        <p:txBody>
-          <a:bodyPr wrap="square" lIns="0" tIns="0" rIns="0" bIns="0" rtlCol="0" anchor="ctr"/>
-          <a:lstStyle/>
-          <a:p>
-            <a:pPr indent="0" marL="0">
-              <a:buNone/>
-            </a:pPr>
-            <a:r>
-              <a:rPr lang="en-US" sz="1600" b="1" dirty="0">
-                <a:solidFill>
-                  <a:srgbClr val="E6604F"/>
-                </a:solidFill>
-                <a:latin typeface="Malgun Gothic" pitchFamily="34" charset="0"/>
-                <a:ea typeface="Malgun Gothic" pitchFamily="34" charset="-122"/>
-                <a:cs typeface="Malgun Gothic" pitchFamily="34" charset="-120"/>
-              </a:rPr>
-              <a:t>비동기(async)</a:t>
-            </a:r>
-            <a:endParaRPr lang="en-US" sz="1600" dirty="0"/>
-          </a:p>
-        </p:txBody>
-      </p:sp>
-      <p:sp>
-        <p:nvSpPr>
-          <p:cNvPr id="24" name="Text 22"/>
-          <p:cNvSpPr/>
-          <p:nvPr/>
-        </p:nvSpPr>
-        <p:spPr>
-          <a:xfrm>
-            <a:off x="9921240" y="2606040"/>
-            <a:ext cx="1463040" cy="3063240"/>
-          </a:xfrm>
-          <a:prstGeom prst="rect">
-            <a:avLst/>
-          </a:prstGeom>
-          <a:noFill/>
-          <a:ln/>
-        </p:spPr>
-        <p:txBody>
-          <a:bodyPr wrap="square" lIns="0" tIns="0" rIns="0" bIns="0" rtlCol="0" anchor="t"/>
-          <a:lstStyle/>
-          <a:p>
-            <a:pPr indent="0" marL="0">
-              <a:lnSpc>
-                <a:spcPct val="115000"/>
-              </a:lnSpc>
-              <a:spcAft>
-                <a:spcPts val="1000"/>
-              </a:spcAft>
-              <a:buNone/>
-            </a:pPr>
-            <a:r>
-              <a:rPr lang="en-US" sz="1350" dirty="0">
-                <a:solidFill>
-                  <a:srgbClr val="E7EDF5"/>
-                </a:solidFill>
-                <a:latin typeface="Malgun Gothic" pitchFamily="34" charset="0"/>
-                <a:ea typeface="Malgun Gothic" pitchFamily="34" charset="-122"/>
-                <a:cs typeface="Malgun Gothic" pitchFamily="34" charset="-120"/>
-              </a:rPr>
-              <a:t>호스트는 ① 요청 후 곧바로 다음 코드로 갑니다.</a:t>
-            </a:r>
-            <a:endParaRPr lang="en-US" sz="1350" dirty="0"/>
-          </a:p>
-          <a:p>
-            <a:pPr indent="0" marL="0">
-              <a:lnSpc>
-                <a:spcPct val="115000"/>
-              </a:lnSpc>
-              <a:spcAft>
-                <a:spcPts val="1000"/>
-              </a:spcAft>
-              <a:buNone/>
-            </a:pPr>
-            <a:r>
-              <a:rPr lang="en-US" sz="1350" dirty="0">
-                <a:solidFill>
-                  <a:srgbClr val="E7EDF5"/>
-                </a:solidFill>
-                <a:latin typeface="Malgun Gothic" pitchFamily="34" charset="0"/>
-                <a:ea typeface="Malgun Gothic" pitchFamily="34" charset="-122"/>
-                <a:cs typeface="Malgun Gothic" pitchFamily="34" charset="-120"/>
-              </a:rPr>
-              <a:t>결과가 필요하면 SOFTWAIT로 GPU 완료를 기다립니다.</a:t>
-            </a:r>
-            <a:endParaRPr lang="en-US" sz="1350" dirty="0"/>
-          </a:p>
-          <a:p>
-            <a:pPr indent="0" marL="0">
-              <a:lnSpc>
-                <a:spcPct val="115000"/>
-              </a:lnSpc>
-              <a:buNone/>
-            </a:pPr>
-            <a:r>
-              <a:rPr lang="en-US" sz="1350" i="1" dirty="0">
-                <a:solidFill>
-                  <a:srgbClr val="9FB0C4"/>
-                </a:solidFill>
-                <a:latin typeface="Malgun Gothic" pitchFamily="34" charset="0"/>
-                <a:ea typeface="Malgun Gothic" pitchFamily="34" charset="-122"/>
-                <a:cs typeface="Malgun Gothic" pitchFamily="34" charset="-120"/>
-              </a:rPr>
-              <a:t>→ 이 비동기 특성은 세션 2(검증)·세션 4(타이밍)에서 자세히.</a:t>
-            </a:r>
-            <a:endParaRPr lang="en-US" sz="1350" dirty="0"/>
+              <a:t>memtestState() : nBlocks(1024), nThreads(512), ... {};</a:t>
+            </a:r>
+            <a:endParaRPr lang="en-US" sz="1250" dirty="0"/>
           </a:p>
         </p:txBody>
       </p:sp>
@@ -3048,7 +2725,7 @@
             </a:avLst>
           </a:prstGeom>
           <a:solidFill>
-            <a:srgbClr val="E8A33D"/>
+            <a:srgbClr val="3FB8C4"/>
           </a:solidFill>
           <a:ln/>
         </p:spPr>
@@ -3068,7 +2745,7 @@
                 <a:ea typeface="Courier New" pitchFamily="34" charset="-122"/>
                 <a:cs typeface="Courier New" pitchFamily="34" charset="-120"/>
               </a:rPr>
-              <a:t>9</a:t>
+              <a:t>8</a:t>
             </a:r>
             <a:endParaRPr lang="en-US" sz="2200" dirty="0"/>
           </a:p>
@@ -3107,7 +2784,7 @@
                 <a:ea typeface="Malgun Gothic" pitchFamily="34" charset="-122"/>
                 <a:cs typeface="Malgun Gothic" pitchFamily="34" charset="-120"/>
               </a:rPr>
-              <a:t>핵심 정리 &amp; 자주 하는 실수</a:t>
+              <a:t>커널 launch 흐름 · 호출에서 완료까지</a:t>
             </a:r>
             <a:endParaRPr lang="en-US" sz="2900" dirty="0"/>
           </a:p>
@@ -3115,36 +2792,650 @@
       </p:sp>
       <p:sp>
         <p:nvSpPr>
-          <p:cNvPr id="4" name="Shape 2"/>
-          <p:cNvSpPr/>
-          <p:nvPr/>
-        </p:nvSpPr>
-        <p:spPr>
-          <a:xfrm>
-            <a:off x="548640" y="1600200"/>
-            <a:ext cx="5349240" cy="4114800"/>
+          <p:cNvPr id="4" name="Text 2"/>
+          <p:cNvSpPr/>
+          <p:nvPr/>
+        </p:nvSpPr>
+        <p:spPr>
+          <a:xfrm>
+            <a:off x="548640" y="1371600"/>
+            <a:ext cx="11064240" cy="411480"/>
+          </a:xfrm>
+          <a:prstGeom prst="rect">
+            <a:avLst/>
+          </a:prstGeom>
+          <a:noFill/>
+          <a:ln/>
+        </p:spPr>
+        <p:txBody>
+          <a:bodyPr wrap="square" lIns="0" tIns="0" rIns="0" bIns="0" rtlCol="0" anchor="ctr"/>
+          <a:lstStyle/>
+          <a:p>
+            <a:pPr indent="0" marL="0">
+              <a:buNone/>
+            </a:pPr>
+            <a:r>
+              <a:rPr lang="en-US" sz="1450" dirty="0">
+                <a:solidFill>
+                  <a:srgbClr val="9FB0C4"/>
+                </a:solidFill>
+                <a:latin typeface="Malgun Gothic" pitchFamily="34" charset="0"/>
+                <a:ea typeface="Malgun Gothic" pitchFamily="34" charset="-122"/>
+                <a:cs typeface="Malgun Gothic" pitchFamily="34" charset="-120"/>
+              </a:rPr>
+              <a:t>&lt;&lt;&lt;&gt;&gt;&gt; 한 줄을 실행하면, 요청이 GPU로 넘어가 블록이 SM에 분배되고 워프 단위로 실행됩니다.</a:t>
+            </a:r>
+            <a:endParaRPr lang="en-US" sz="1450" dirty="0"/>
+          </a:p>
+        </p:txBody>
+      </p:sp>
+      <p:sp>
+        <p:nvSpPr>
+          <p:cNvPr id="5" name="Shape 3"/>
+          <p:cNvSpPr/>
+          <p:nvPr/>
+        </p:nvSpPr>
+        <p:spPr>
+          <a:xfrm>
+            <a:off x="548640" y="1874520"/>
+            <a:ext cx="7040880" cy="841248"/>
           </a:xfrm>
           <a:prstGeom prst="roundRect">
             <a:avLst>
-              <a:gd name="adj" fmla="val 1778"/>
+              <a:gd name="adj" fmla="val 8696"/>
+            </a:avLst>
+          </a:prstGeom>
+          <a:solidFill>
+            <a:srgbClr val="16242C"/>
+          </a:solidFill>
+          <a:ln w="19050">
+            <a:solidFill>
+              <a:srgbClr val="3FB8C4"/>
+            </a:solidFill>
+            <a:prstDash val="solid"/>
+          </a:ln>
+        </p:spPr>
+      </p:sp>
+      <p:sp>
+        <p:nvSpPr>
+          <p:cNvPr id="6" name="Text 4"/>
+          <p:cNvSpPr/>
+          <p:nvPr/>
+        </p:nvSpPr>
+        <p:spPr>
+          <a:xfrm>
+            <a:off x="804672" y="1984248"/>
+            <a:ext cx="6583680" cy="365760"/>
+          </a:xfrm>
+          <a:prstGeom prst="rect">
+            <a:avLst/>
+          </a:prstGeom>
+          <a:noFill/>
+          <a:ln/>
+        </p:spPr>
+        <p:txBody>
+          <a:bodyPr wrap="square" lIns="0" tIns="0" rIns="0" bIns="0" rtlCol="0" anchor="ctr"/>
+          <a:lstStyle/>
+          <a:p>
+            <a:pPr indent="0" marL="0">
+              <a:buNone/>
+            </a:pPr>
+            <a:r>
+              <a:rPr lang="en-US" sz="1500" b="1" dirty="0">
+                <a:solidFill>
+                  <a:srgbClr val="3FB8C4"/>
+                </a:solidFill>
+                <a:latin typeface="Malgun Gothic" pitchFamily="34" charset="0"/>
+                <a:ea typeface="Malgun Gothic" pitchFamily="34" charset="-122"/>
+                <a:cs typeface="Malgun Gothic" pitchFamily="34" charset="-120"/>
+              </a:rPr>
+              <a:t>① 호스트(CPU) — 커널 실행 요청</a:t>
+            </a:r>
+            <a:endParaRPr lang="en-US" sz="1500" dirty="0"/>
+          </a:p>
+        </p:txBody>
+      </p:sp>
+      <p:sp>
+        <p:nvSpPr>
+          <p:cNvPr id="7" name="Text 5"/>
+          <p:cNvSpPr/>
+          <p:nvPr/>
+        </p:nvSpPr>
+        <p:spPr>
+          <a:xfrm>
+            <a:off x="804672" y="2331720"/>
+            <a:ext cx="6583680" cy="292608"/>
+          </a:xfrm>
+          <a:prstGeom prst="rect">
+            <a:avLst/>
+          </a:prstGeom>
+          <a:noFill/>
+          <a:ln/>
+        </p:spPr>
+        <p:txBody>
+          <a:bodyPr wrap="square" lIns="0" tIns="0" rIns="0" bIns="0" rtlCol="0" anchor="ctr"/>
+          <a:lstStyle/>
+          <a:p>
+            <a:pPr indent="0" marL="0">
+              <a:buNone/>
+            </a:pPr>
+            <a:r>
+              <a:rPr lang="en-US" sz="1100" dirty="0">
+                <a:solidFill>
+                  <a:srgbClr val="9FB0C4"/>
+                </a:solidFill>
+                <a:latin typeface="Courier New" pitchFamily="34" charset="0"/>
+                <a:ea typeface="Courier New" pitchFamily="34" charset="-122"/>
+                <a:cs typeface="Courier New" pitchFamily="34" charset="-120"/>
+              </a:rPr>
+              <a:t>deviceWriteConstant&lt;&lt;&lt;1024, 512&gt;&gt;&gt;(...)</a:t>
+            </a:r>
+            <a:endParaRPr lang="en-US" sz="1100" dirty="0"/>
+          </a:p>
+        </p:txBody>
+      </p:sp>
+      <p:sp>
+        <p:nvSpPr>
+          <p:cNvPr id="8" name="Shape 6"/>
+          <p:cNvSpPr/>
+          <p:nvPr/>
+        </p:nvSpPr>
+        <p:spPr>
+          <a:xfrm>
+            <a:off x="4069080" y="2734056"/>
+            <a:ext cx="0" cy="146304"/>
+          </a:xfrm>
+          <a:prstGeom prst="line">
+            <a:avLst/>
+          </a:prstGeom>
+          <a:noFill/>
+          <a:ln w="25400">
+            <a:solidFill>
+              <a:srgbClr val="6B7D94"/>
+            </a:solidFill>
+            <a:prstDash val="solid"/>
+            <a:tailEnd type="triangle"/>
+          </a:ln>
+        </p:spPr>
+      </p:sp>
+      <p:sp>
+        <p:nvSpPr>
+          <p:cNvPr id="9" name="Shape 7"/>
+          <p:cNvSpPr/>
+          <p:nvPr/>
+        </p:nvSpPr>
+        <p:spPr>
+          <a:xfrm>
+            <a:off x="548640" y="2898648"/>
+            <a:ext cx="7040880" cy="841248"/>
+          </a:xfrm>
+          <a:prstGeom prst="roundRect">
+            <a:avLst>
+              <a:gd name="adj" fmla="val 8696"/>
+            </a:avLst>
+          </a:prstGeom>
+          <a:solidFill>
+            <a:srgbClr val="241A16"/>
+          </a:solidFill>
+          <a:ln w="19050">
+            <a:solidFill>
+              <a:srgbClr val="E8A33D"/>
+            </a:solidFill>
+            <a:prstDash val="solid"/>
+          </a:ln>
+        </p:spPr>
+      </p:sp>
+      <p:sp>
+        <p:nvSpPr>
+          <p:cNvPr id="10" name="Text 8"/>
+          <p:cNvSpPr/>
+          <p:nvPr/>
+        </p:nvSpPr>
+        <p:spPr>
+          <a:xfrm>
+            <a:off x="804672" y="3008376"/>
+            <a:ext cx="6583680" cy="365760"/>
+          </a:xfrm>
+          <a:prstGeom prst="rect">
+            <a:avLst/>
+          </a:prstGeom>
+          <a:noFill/>
+          <a:ln/>
+        </p:spPr>
+        <p:txBody>
+          <a:bodyPr wrap="square" lIns="0" tIns="0" rIns="0" bIns="0" rtlCol="0" anchor="ctr"/>
+          <a:lstStyle/>
+          <a:p>
+            <a:pPr indent="0" marL="0">
+              <a:buNone/>
+            </a:pPr>
+            <a:r>
+              <a:rPr lang="en-US" sz="1500" b="1" dirty="0">
+                <a:solidFill>
+                  <a:srgbClr val="E8A33D"/>
+                </a:solidFill>
+                <a:latin typeface="Malgun Gothic" pitchFamily="34" charset="0"/>
+                <a:ea typeface="Malgun Gothic" pitchFamily="34" charset="-122"/>
+                <a:cs typeface="Malgun Gothic" pitchFamily="34" charset="-120"/>
+              </a:rPr>
+              <a:t>② GPU 스케줄러 — 블록을 SM에 분배</a:t>
+            </a:r>
+            <a:endParaRPr lang="en-US" sz="1500" dirty="0"/>
+          </a:p>
+        </p:txBody>
+      </p:sp>
+      <p:sp>
+        <p:nvSpPr>
+          <p:cNvPr id="11" name="Text 9"/>
+          <p:cNvSpPr/>
+          <p:nvPr/>
+        </p:nvSpPr>
+        <p:spPr>
+          <a:xfrm>
+            <a:off x="804672" y="3355848"/>
+            <a:ext cx="6583680" cy="292608"/>
+          </a:xfrm>
+          <a:prstGeom prst="rect">
+            <a:avLst/>
+          </a:prstGeom>
+          <a:noFill/>
+          <a:ln/>
+        </p:spPr>
+        <p:txBody>
+          <a:bodyPr wrap="square" lIns="0" tIns="0" rIns="0" bIns="0" rtlCol="0" anchor="ctr"/>
+          <a:lstStyle/>
+          <a:p>
+            <a:pPr indent="0" marL="0">
+              <a:buNone/>
+            </a:pPr>
+            <a:r>
+              <a:rPr lang="en-US" sz="1100" dirty="0">
+                <a:solidFill>
+                  <a:srgbClr val="9FB0C4"/>
+                </a:solidFill>
+                <a:latin typeface="Courier New" pitchFamily="34" charset="0"/>
+                <a:ea typeface="Courier New" pitchFamily="34" charset="-122"/>
+                <a:cs typeface="Courier New" pitchFamily="34" charset="-120"/>
+              </a:rPr>
+              <a:t>블록 1024개 → 여러 SM에 나눠 배정</a:t>
+            </a:r>
+            <a:endParaRPr lang="en-US" sz="1100" dirty="0"/>
+          </a:p>
+        </p:txBody>
+      </p:sp>
+      <p:sp>
+        <p:nvSpPr>
+          <p:cNvPr id="12" name="Shape 10"/>
+          <p:cNvSpPr/>
+          <p:nvPr/>
+        </p:nvSpPr>
+        <p:spPr>
+          <a:xfrm>
+            <a:off x="4069080" y="3758184"/>
+            <a:ext cx="0" cy="146304"/>
+          </a:xfrm>
+          <a:prstGeom prst="line">
+            <a:avLst/>
+          </a:prstGeom>
+          <a:noFill/>
+          <a:ln w="25400">
+            <a:solidFill>
+              <a:srgbClr val="6B7D94"/>
+            </a:solidFill>
+            <a:prstDash val="solid"/>
+            <a:tailEnd type="triangle"/>
+          </a:ln>
+        </p:spPr>
+      </p:sp>
+      <p:sp>
+        <p:nvSpPr>
+          <p:cNvPr id="13" name="Shape 11"/>
+          <p:cNvSpPr/>
+          <p:nvPr/>
+        </p:nvSpPr>
+        <p:spPr>
+          <a:xfrm>
+            <a:off x="548640" y="3922776"/>
+            <a:ext cx="7040880" cy="841248"/>
+          </a:xfrm>
+          <a:prstGeom prst="roundRect">
+            <a:avLst>
+              <a:gd name="adj" fmla="val 8696"/>
+            </a:avLst>
+          </a:prstGeom>
+          <a:solidFill>
+            <a:srgbClr val="241A16"/>
+          </a:solidFill>
+          <a:ln w="19050">
+            <a:solidFill>
+              <a:srgbClr val="E8A33D"/>
+            </a:solidFill>
+            <a:prstDash val="solid"/>
+          </a:ln>
+        </p:spPr>
+      </p:sp>
+      <p:sp>
+        <p:nvSpPr>
+          <p:cNvPr id="14" name="Text 12"/>
+          <p:cNvSpPr/>
+          <p:nvPr/>
+        </p:nvSpPr>
+        <p:spPr>
+          <a:xfrm>
+            <a:off x="804672" y="4032504"/>
+            <a:ext cx="6583680" cy="365760"/>
+          </a:xfrm>
+          <a:prstGeom prst="rect">
+            <a:avLst/>
+          </a:prstGeom>
+          <a:noFill/>
+          <a:ln/>
+        </p:spPr>
+        <p:txBody>
+          <a:bodyPr wrap="square" lIns="0" tIns="0" rIns="0" bIns="0" rtlCol="0" anchor="ctr"/>
+          <a:lstStyle/>
+          <a:p>
+            <a:pPr indent="0" marL="0">
+              <a:buNone/>
+            </a:pPr>
+            <a:r>
+              <a:rPr lang="en-US" sz="1500" b="1" dirty="0">
+                <a:solidFill>
+                  <a:srgbClr val="E8A33D"/>
+                </a:solidFill>
+                <a:latin typeface="Malgun Gothic" pitchFamily="34" charset="0"/>
+                <a:ea typeface="Malgun Gothic" pitchFamily="34" charset="-122"/>
+                <a:cs typeface="Malgun Gothic" pitchFamily="34" charset="-120"/>
+              </a:rPr>
+              <a:t>③ 각 SM — 워프(32 스레드) 단위로 실행</a:t>
+            </a:r>
+            <a:endParaRPr lang="en-US" sz="1500" dirty="0"/>
+          </a:p>
+        </p:txBody>
+      </p:sp>
+      <p:sp>
+        <p:nvSpPr>
+          <p:cNvPr id="15" name="Text 13"/>
+          <p:cNvSpPr/>
+          <p:nvPr/>
+        </p:nvSpPr>
+        <p:spPr>
+          <a:xfrm>
+            <a:off x="804672" y="4379976"/>
+            <a:ext cx="6583680" cy="292608"/>
+          </a:xfrm>
+          <a:prstGeom prst="rect">
+            <a:avLst/>
+          </a:prstGeom>
+          <a:noFill/>
+          <a:ln/>
+        </p:spPr>
+        <p:txBody>
+          <a:bodyPr wrap="square" lIns="0" tIns="0" rIns="0" bIns="0" rtlCol="0" anchor="ctr"/>
+          <a:lstStyle/>
+          <a:p>
+            <a:pPr indent="0" marL="0">
+              <a:buNone/>
+            </a:pPr>
+            <a:r>
+              <a:rPr lang="en-US" sz="1100" dirty="0">
+                <a:solidFill>
+                  <a:srgbClr val="9FB0C4"/>
+                </a:solidFill>
+                <a:latin typeface="Courier New" pitchFamily="34" charset="0"/>
+                <a:ea typeface="Courier New" pitchFamily="34" charset="-122"/>
+                <a:cs typeface="Courier New" pitchFamily="34" charset="-120"/>
+              </a:rPr>
+              <a:t>블록 안 512 스레드가 실제 연산 수행</a:t>
+            </a:r>
+            <a:endParaRPr lang="en-US" sz="1100" dirty="0"/>
+          </a:p>
+        </p:txBody>
+      </p:sp>
+      <p:sp>
+        <p:nvSpPr>
+          <p:cNvPr id="16" name="Shape 14"/>
+          <p:cNvSpPr/>
+          <p:nvPr/>
+        </p:nvSpPr>
+        <p:spPr>
+          <a:xfrm>
+            <a:off x="4069080" y="4782312"/>
+            <a:ext cx="0" cy="146304"/>
+          </a:xfrm>
+          <a:prstGeom prst="line">
+            <a:avLst/>
+          </a:prstGeom>
+          <a:noFill/>
+          <a:ln w="25400">
+            <a:solidFill>
+              <a:srgbClr val="6B7D94"/>
+            </a:solidFill>
+            <a:prstDash val="solid"/>
+            <a:tailEnd type="triangle"/>
+          </a:ln>
+        </p:spPr>
+      </p:sp>
+      <p:sp>
+        <p:nvSpPr>
+          <p:cNvPr id="17" name="Shape 15"/>
+          <p:cNvSpPr/>
+          <p:nvPr/>
+        </p:nvSpPr>
+        <p:spPr>
+          <a:xfrm>
+            <a:off x="548640" y="4946904"/>
+            <a:ext cx="7040880" cy="841248"/>
+          </a:xfrm>
+          <a:prstGeom prst="roundRect">
+            <a:avLst>
+              <a:gd name="adj" fmla="val 8696"/>
+            </a:avLst>
+          </a:prstGeom>
+          <a:solidFill>
+            <a:srgbClr val="241A16"/>
+          </a:solidFill>
+          <a:ln w="19050">
+            <a:solidFill>
+              <a:srgbClr val="E8A33D"/>
+            </a:solidFill>
+            <a:prstDash val="solid"/>
+          </a:ln>
+        </p:spPr>
+      </p:sp>
+      <p:sp>
+        <p:nvSpPr>
+          <p:cNvPr id="18" name="Text 16"/>
+          <p:cNvSpPr/>
+          <p:nvPr/>
+        </p:nvSpPr>
+        <p:spPr>
+          <a:xfrm>
+            <a:off x="804672" y="5056632"/>
+            <a:ext cx="6583680" cy="365760"/>
+          </a:xfrm>
+          <a:prstGeom prst="rect">
+            <a:avLst/>
+          </a:prstGeom>
+          <a:noFill/>
+          <a:ln/>
+        </p:spPr>
+        <p:txBody>
+          <a:bodyPr wrap="square" lIns="0" tIns="0" rIns="0" bIns="0" rtlCol="0" anchor="ctr"/>
+          <a:lstStyle/>
+          <a:p>
+            <a:pPr indent="0" marL="0">
+              <a:buNone/>
+            </a:pPr>
+            <a:r>
+              <a:rPr lang="en-US" sz="1500" b="1" dirty="0">
+                <a:solidFill>
+                  <a:srgbClr val="E8A33D"/>
+                </a:solidFill>
+                <a:latin typeface="Malgun Gothic" pitchFamily="34" charset="0"/>
+                <a:ea typeface="Malgun Gothic" pitchFamily="34" charset="-122"/>
+                <a:cs typeface="Malgun Gothic" pitchFamily="34" charset="-120"/>
+              </a:rPr>
+              <a:t>④ 커널 완료 — 결과는 전역 메모리에</a:t>
+            </a:r>
+            <a:endParaRPr lang="en-US" sz="1500" dirty="0"/>
+          </a:p>
+        </p:txBody>
+      </p:sp>
+      <p:sp>
+        <p:nvSpPr>
+          <p:cNvPr id="19" name="Text 17"/>
+          <p:cNvSpPr/>
+          <p:nvPr/>
+        </p:nvSpPr>
+        <p:spPr>
+          <a:xfrm>
+            <a:off x="804672" y="5404104"/>
+            <a:ext cx="6583680" cy="292608"/>
+          </a:xfrm>
+          <a:prstGeom prst="rect">
+            <a:avLst/>
+          </a:prstGeom>
+          <a:noFill/>
+          <a:ln/>
+        </p:spPr>
+        <p:txBody>
+          <a:bodyPr wrap="square" lIns="0" tIns="0" rIns="0" bIns="0" rtlCol="0" anchor="ctr"/>
+          <a:lstStyle/>
+          <a:p>
+            <a:pPr indent="0" marL="0">
+              <a:buNone/>
+            </a:pPr>
+            <a:r>
+              <a:rPr lang="en-US" sz="1100" dirty="0">
+                <a:solidFill>
+                  <a:srgbClr val="9FB0C4"/>
+                </a:solidFill>
+                <a:latin typeface="Courier New" pitchFamily="34" charset="0"/>
+                <a:ea typeface="Courier New" pitchFamily="34" charset="-122"/>
+                <a:cs typeface="Courier New" pitchFamily="34" charset="-120"/>
+              </a:rPr>
+              <a:t>호스트는 SOFTWAIT로 완료를 기다림</a:t>
+            </a:r>
+            <a:endParaRPr lang="en-US" sz="1100" dirty="0"/>
+          </a:p>
+        </p:txBody>
+      </p:sp>
+      <p:sp>
+        <p:nvSpPr>
+          <p:cNvPr id="20" name="Text 18"/>
+          <p:cNvSpPr/>
+          <p:nvPr/>
+        </p:nvSpPr>
+        <p:spPr>
+          <a:xfrm>
+            <a:off x="7726680" y="2057400"/>
+            <a:ext cx="1371600" cy="365760"/>
+          </a:xfrm>
+          <a:prstGeom prst="rect">
+            <a:avLst/>
+          </a:prstGeom>
+          <a:noFill/>
+          <a:ln/>
+        </p:spPr>
+        <p:txBody>
+          <a:bodyPr wrap="square" lIns="0" tIns="0" rIns="0" bIns="0" rtlCol="0" anchor="ctr"/>
+          <a:lstStyle/>
+          <a:p>
+            <a:pPr indent="0" marL="0">
+              <a:buNone/>
+            </a:pPr>
+            <a:r>
+              <a:rPr lang="en-US" sz="1200" b="1" dirty="0">
+                <a:solidFill>
+                  <a:srgbClr val="3FB8C4"/>
+                </a:solidFill>
+                <a:latin typeface="Malgun Gothic" pitchFamily="34" charset="0"/>
+                <a:ea typeface="Malgun Gothic" pitchFamily="34" charset="-122"/>
+                <a:cs typeface="Malgun Gothic" pitchFamily="34" charset="-120"/>
+              </a:rPr>
+              <a:t>호스트</a:t>
+            </a:r>
+            <a:endParaRPr lang="en-US" sz="1200" dirty="0"/>
+          </a:p>
+        </p:txBody>
+      </p:sp>
+      <p:sp>
+        <p:nvSpPr>
+          <p:cNvPr id="21" name="Text 19"/>
+          <p:cNvSpPr/>
+          <p:nvPr/>
+        </p:nvSpPr>
+        <p:spPr>
+          <a:xfrm>
+            <a:off x="7726680" y="3108960"/>
+            <a:ext cx="1737360" cy="365760"/>
+          </a:xfrm>
+          <a:prstGeom prst="rect">
+            <a:avLst/>
+          </a:prstGeom>
+          <a:noFill/>
+          <a:ln/>
+        </p:spPr>
+        <p:txBody>
+          <a:bodyPr wrap="square" lIns="0" tIns="0" rIns="0" bIns="0" rtlCol="0" anchor="ctr"/>
+          <a:lstStyle/>
+          <a:p>
+            <a:pPr indent="0" marL="0">
+              <a:buNone/>
+            </a:pPr>
+            <a:r>
+              <a:rPr lang="en-US" sz="1200" b="1" dirty="0">
+                <a:solidFill>
+                  <a:srgbClr val="E8A33D"/>
+                </a:solidFill>
+                <a:latin typeface="Malgun Gothic" pitchFamily="34" charset="0"/>
+                <a:ea typeface="Malgun Gothic" pitchFamily="34" charset="-122"/>
+                <a:cs typeface="Malgun Gothic" pitchFamily="34" charset="-120"/>
+              </a:rPr>
+              <a:t>디바이스(GPU)</a:t>
+            </a:r>
+            <a:endParaRPr lang="en-US" sz="1200" dirty="0"/>
+          </a:p>
+        </p:txBody>
+      </p:sp>
+      <p:sp>
+        <p:nvSpPr>
+          <p:cNvPr id="22" name="Shape 20"/>
+          <p:cNvSpPr/>
+          <p:nvPr/>
+        </p:nvSpPr>
+        <p:spPr>
+          <a:xfrm>
+            <a:off x="9692640" y="1874520"/>
+            <a:ext cx="1920240" cy="3977640"/>
+          </a:xfrm>
+          <a:prstGeom prst="roundRect">
+            <a:avLst>
+              <a:gd name="adj" fmla="val 3810"/>
             </a:avLst>
           </a:prstGeom>
           <a:solidFill>
             <a:srgbClr val="18212E"/>
           </a:solidFill>
-          <a:ln/>
-        </p:spPr>
-      </p:sp>
-      <p:sp>
-        <p:nvSpPr>
-          <p:cNvPr id="5" name="Text 3"/>
-          <p:cNvSpPr/>
-          <p:nvPr/>
-        </p:nvSpPr>
-        <p:spPr>
-          <a:xfrm>
-            <a:off x="822960" y="1828800"/>
-            <a:ext cx="4800600" cy="457200"/>
+          <a:ln w="19050">
+            <a:solidFill>
+              <a:srgbClr val="E6604F"/>
+            </a:solidFill>
+            <a:prstDash val="solid"/>
+          </a:ln>
+        </p:spPr>
+      </p:sp>
+      <p:sp>
+        <p:nvSpPr>
+          <p:cNvPr id="23" name="Text 21"/>
+          <p:cNvSpPr/>
+          <p:nvPr/>
+        </p:nvSpPr>
+        <p:spPr>
+          <a:xfrm>
+            <a:off x="9921240" y="2057400"/>
+            <a:ext cx="1463040" cy="411480"/>
           </a:xfrm>
           <a:prstGeom prst="rect">
             <a:avLst/>
@@ -3160,30 +3451,30 @@
               <a:buNone/>
             </a:pPr>
             <a:r>
-              <a:rPr lang="en-US" sz="2000" b="1" dirty="0">
-                <a:solidFill>
-                  <a:srgbClr val="E8A33D"/>
+              <a:rPr lang="en-US" sz="1600" b="1" dirty="0">
+                <a:solidFill>
+                  <a:srgbClr val="E6604F"/>
                 </a:solidFill>
                 <a:latin typeface="Malgun Gothic" pitchFamily="34" charset="0"/>
                 <a:ea typeface="Malgun Gothic" pitchFamily="34" charset="-122"/>
                 <a:cs typeface="Malgun Gothic" pitchFamily="34" charset="-120"/>
               </a:rPr>
-              <a:t>기억할 것</a:t>
-            </a:r>
-            <a:endParaRPr lang="en-US" sz="2000" dirty="0"/>
-          </a:p>
-        </p:txBody>
-      </p:sp>
-      <p:sp>
-        <p:nvSpPr>
-          <p:cNvPr id="6" name="Text 4"/>
-          <p:cNvSpPr/>
-          <p:nvPr/>
-        </p:nvSpPr>
-        <p:spPr>
-          <a:xfrm>
-            <a:off x="822960" y="2423160"/>
-            <a:ext cx="4800600" cy="3108960"/>
+              <a:t>비동기(async)</a:t>
+            </a:r>
+            <a:endParaRPr lang="en-US" sz="1600" dirty="0"/>
+          </a:p>
+        </p:txBody>
+      </p:sp>
+      <p:sp>
+        <p:nvSpPr>
+          <p:cNvPr id="24" name="Text 22"/>
+          <p:cNvSpPr/>
+          <p:nvPr/>
+        </p:nvSpPr>
+        <p:spPr>
+          <a:xfrm>
+            <a:off x="9921240" y="2606040"/>
+            <a:ext cx="1463040" cy="3063240"/>
           </a:xfrm>
           <a:prstGeom prst="rect">
             <a:avLst/>
@@ -3195,18 +3486,17 @@
           <a:bodyPr wrap="square" lIns="0" tIns="0" rIns="0" bIns="0" rtlCol="0" anchor="t"/>
           <a:lstStyle/>
           <a:p>
-            <a:pPr marL="342900" indent="-342900">
+            <a:pPr indent="0" marL="0">
               <a:lnSpc>
-                <a:spcPct val="105000"/>
+                <a:spcPct val="115000"/>
               </a:lnSpc>
               <a:spcAft>
-                <a:spcPts val="1200"/>
+                <a:spcPts val="1000"/>
               </a:spcAft>
-              <a:buSzPct val="100000"/>
-              <a:buChar char="✓"/>
-            </a:pPr>
-            <a:r>
-              <a:rPr lang="en-US" sz="1600" dirty="0">
+              <a:buNone/>
+            </a:pPr>
+            <a:r>
+              <a:rPr lang="en-US" sz="1350" dirty="0">
                 <a:solidFill>
                   <a:srgbClr val="E7EDF5"/>
                 </a:solidFill>
@@ -3214,23 +3504,22 @@
                 <a:ea typeface="Malgun Gothic" pitchFamily="34" charset="-122"/>
                 <a:cs typeface="Malgun Gothic" pitchFamily="34" charset="-120"/>
               </a:rPr>
-              <a:t>커널 = __global__, 반환형 void</a:t>
-            </a:r>
-            <a:endParaRPr lang="en-US" sz="1600" dirty="0"/>
-          </a:p>
-          <a:p>
-            <a:pPr marL="342900" indent="-342900">
+              <a:t>호스트는 ① 요청 후 곧바로 다음 코드로 갑니다.</a:t>
+            </a:r>
+            <a:endParaRPr lang="en-US" sz="1350" dirty="0"/>
+          </a:p>
+          <a:p>
+            <a:pPr indent="0" marL="0">
               <a:lnSpc>
-                <a:spcPct val="105000"/>
+                <a:spcPct val="115000"/>
               </a:lnSpc>
               <a:spcAft>
-                <a:spcPts val="1200"/>
+                <a:spcPts val="1000"/>
               </a:spcAft>
-              <a:buSzPct val="100000"/>
-              <a:buChar char="✓"/>
-            </a:pPr>
-            <a:r>
-              <a:rPr lang="en-US" sz="1600" dirty="0">
+              <a:buNone/>
+            </a:pPr>
+            <a:r>
+              <a:rPr lang="en-US" sz="1350" dirty="0">
                 <a:solidFill>
                   <a:srgbClr val="E7EDF5"/>
                 </a:solidFill>
@@ -3238,236 +3527,29 @@
                 <a:ea typeface="Malgun Gothic" pitchFamily="34" charset="-122"/>
                 <a:cs typeface="Malgun Gothic" pitchFamily="34" charset="-120"/>
               </a:rPr>
-              <a:t>&lt;&lt;&lt;1024, 512&gt;&gt;&gt; = 블록수, 블록당 스레드수</a:t>
-            </a:r>
-            <a:endParaRPr lang="en-US" sz="1600" dirty="0"/>
-          </a:p>
-          <a:p>
-            <a:pPr marL="342900" indent="-342900">
+              <a:t>결과가 필요하면 SOFTWAIT로 GPU 완료를 기다립니다.</a:t>
+            </a:r>
+            <a:endParaRPr lang="en-US" sz="1350" dirty="0"/>
+          </a:p>
+          <a:p>
+            <a:pPr indent="0" marL="0">
               <a:lnSpc>
-                <a:spcPct val="105000"/>
+                <a:spcPct val="115000"/>
               </a:lnSpc>
-              <a:spcAft>
-                <a:spcPts val="1200"/>
-              </a:spcAft>
-              <a:buSzPct val="100000"/>
-              <a:buChar char="✓"/>
-            </a:pPr>
-            <a:r>
-              <a:rPr lang="en-US" sz="1600" dirty="0">
-                <a:solidFill>
-                  <a:srgbClr val="E7EDF5"/>
+              <a:buNone/>
+            </a:pPr>
+            <a:r>
+              <a:rPr lang="en-US" sz="1350" i="1" dirty="0">
+                <a:solidFill>
+                  <a:srgbClr val="9FB0C4"/>
                 </a:solidFill>
                 <a:latin typeface="Malgun Gothic" pitchFamily="34" charset="0"/>
                 <a:ea typeface="Malgun Gothic" pitchFamily="34" charset="-122"/>
                 <a:cs typeface="Malgun Gothic" pitchFamily="34" charset="-120"/>
               </a:rPr>
-              <a:t>THREAD_ADDRESS로 겹치지 않는 자기 word 계산</a:t>
-            </a:r>
-            <a:endParaRPr lang="en-US" sz="1600" dirty="0"/>
-          </a:p>
-          <a:p>
-            <a:pPr marL="342900" indent="-342900">
-              <a:lnSpc>
-                <a:spcPct val="105000"/>
-              </a:lnSpc>
-              <a:spcAft>
-                <a:spcPts val="1200"/>
-              </a:spcAft>
-              <a:buSzPct val="100000"/>
-              <a:buChar char="✓"/>
-            </a:pPr>
-            <a:r>
-              <a:rPr lang="en-US" sz="1600" dirty="0">
-                <a:solidFill>
-                  <a:srgbClr val="E7EDF5"/>
-                </a:solidFill>
-                <a:latin typeface="Malgun Gothic" pitchFamily="34" charset="0"/>
-                <a:ea typeface="Malgun Gothic" pitchFamily="34" charset="-122"/>
-                <a:cs typeface="Malgun Gothic" pitchFamily="34" charset="-120"/>
-              </a:rPr>
-              <a:t>이웃 스레드 = 이웃 주소 → coalescing</a:t>
-            </a:r>
-            <a:endParaRPr lang="en-US" sz="1600" dirty="0"/>
-          </a:p>
-        </p:txBody>
-      </p:sp>
-      <p:sp>
-        <p:nvSpPr>
-          <p:cNvPr id="7" name="Shape 5"/>
-          <p:cNvSpPr/>
-          <p:nvPr/>
-        </p:nvSpPr>
-        <p:spPr>
-          <a:xfrm>
-            <a:off x="6263640" y="1600200"/>
-            <a:ext cx="5349240" cy="4114800"/>
-          </a:xfrm>
-          <a:prstGeom prst="roundRect">
-            <a:avLst>
-              <a:gd name="adj" fmla="val 1778"/>
-            </a:avLst>
-          </a:prstGeom>
-          <a:solidFill>
-            <a:srgbClr val="18212E"/>
-          </a:solidFill>
-          <a:ln/>
-        </p:spPr>
-      </p:sp>
-      <p:sp>
-        <p:nvSpPr>
-          <p:cNvPr id="8" name="Text 6"/>
-          <p:cNvSpPr/>
-          <p:nvPr/>
-        </p:nvSpPr>
-        <p:spPr>
-          <a:xfrm>
-            <a:off x="6537960" y="1828800"/>
-            <a:ext cx="4800600" cy="457200"/>
-          </a:xfrm>
-          <a:prstGeom prst="rect">
-            <a:avLst/>
-          </a:prstGeom>
-          <a:noFill/>
-          <a:ln/>
-        </p:spPr>
-        <p:txBody>
-          <a:bodyPr wrap="square" lIns="0" tIns="0" rIns="0" bIns="0" rtlCol="0" anchor="ctr"/>
-          <a:lstStyle/>
-          <a:p>
-            <a:pPr indent="0" marL="0">
-              <a:buNone/>
-            </a:pPr>
-            <a:r>
-              <a:rPr lang="en-US" sz="2000" b="1" dirty="0">
-                <a:solidFill>
-                  <a:srgbClr val="E6604F"/>
-                </a:solidFill>
-                <a:latin typeface="Malgun Gothic" pitchFamily="34" charset="0"/>
-                <a:ea typeface="Malgun Gothic" pitchFamily="34" charset="-122"/>
-                <a:cs typeface="Malgun Gothic" pitchFamily="34" charset="-120"/>
-              </a:rPr>
-              <a:t>입문자 함정</a:t>
-            </a:r>
-            <a:endParaRPr lang="en-US" sz="2000" dirty="0"/>
-          </a:p>
-        </p:txBody>
-      </p:sp>
-      <p:sp>
-        <p:nvSpPr>
-          <p:cNvPr id="9" name="Text 7"/>
-          <p:cNvSpPr/>
-          <p:nvPr/>
-        </p:nvSpPr>
-        <p:spPr>
-          <a:xfrm>
-            <a:off x="6537960" y="2423160"/>
-            <a:ext cx="4800600" cy="3108960"/>
-          </a:xfrm>
-          <a:prstGeom prst="rect">
-            <a:avLst/>
-          </a:prstGeom>
-          <a:noFill/>
-          <a:ln/>
-        </p:spPr>
-        <p:txBody>
-          <a:bodyPr wrap="square" lIns="0" tIns="0" rIns="0" bIns="0" rtlCol="0" anchor="t"/>
-          <a:lstStyle/>
-          <a:p>
-            <a:pPr marL="342900" indent="-342900">
-              <a:lnSpc>
-                <a:spcPct val="105000"/>
-              </a:lnSpc>
-              <a:spcAft>
-                <a:spcPts val="1200"/>
-              </a:spcAft>
-              <a:buSzPct val="100000"/>
-              <a:buChar char="✗"/>
-            </a:pPr>
-            <a:r>
-              <a:rPr lang="en-US" sz="1550" dirty="0">
-                <a:solidFill>
-                  <a:srgbClr val="E7EDF5"/>
-                </a:solidFill>
-                <a:latin typeface="Malgun Gothic" pitchFamily="34" charset="0"/>
-                <a:ea typeface="Malgun Gothic" pitchFamily="34" charset="-122"/>
-                <a:cs typeface="Malgun Gothic" pitchFamily="34" charset="-120"/>
-              </a:rPr>
-              <a:t>커널을 일반 함수처럼 () 로 호출 → &lt;&lt;&lt;&gt;&gt;&gt; 필수</a:t>
-            </a:r>
-            <a:endParaRPr lang="en-US" sz="1550" dirty="0"/>
-          </a:p>
-          <a:p>
-            <a:pPr marL="342900" indent="-342900">
-              <a:lnSpc>
-                <a:spcPct val="105000"/>
-              </a:lnSpc>
-              <a:spcAft>
-                <a:spcPts val="1200"/>
-              </a:spcAft>
-              <a:buSzPct val="100000"/>
-              <a:buChar char="✗"/>
-            </a:pPr>
-            <a:r>
-              <a:rPr lang="en-US" sz="1550" dirty="0">
-                <a:solidFill>
-                  <a:srgbClr val="E7EDF5"/>
-                </a:solidFill>
-                <a:latin typeface="Malgun Gothic" pitchFamily="34" charset="0"/>
-                <a:ea typeface="Malgun Gothic" pitchFamily="34" charset="-122"/>
-                <a:cs typeface="Malgun Gothic" pitchFamily="34" charset="-120"/>
-              </a:rPr>
-              <a:t>커널에서 값을 return 하려 함 → void, 결과는 메모리로</a:t>
-            </a:r>
-            <a:endParaRPr lang="en-US" sz="1550" dirty="0"/>
-          </a:p>
-          <a:p>
-            <a:pPr marL="342900" indent="-342900">
-              <a:lnSpc>
-                <a:spcPct val="105000"/>
-              </a:lnSpc>
-              <a:spcAft>
-                <a:spcPts val="1200"/>
-              </a:spcAft>
-              <a:buSzPct val="100000"/>
-              <a:buChar char="✗"/>
-            </a:pPr>
-            <a:r>
-              <a:rPr lang="en-US" sz="1550" dirty="0">
-                <a:solidFill>
-                  <a:srgbClr val="E7EDF5"/>
-                </a:solidFill>
-                <a:latin typeface="Malgun Gothic" pitchFamily="34" charset="0"/>
-                <a:ea typeface="Malgun Gothic" pitchFamily="34" charset="-122"/>
-                <a:cs typeface="Malgun Gothic" pitchFamily="34" charset="-120"/>
-              </a:rPr>
-              <a:t>호스트 포인터를 커널에 그대로 전달 → 디바이스 포인터여야</a:t>
-            </a:r>
-            <a:endParaRPr lang="en-US" sz="1550" dirty="0"/>
-          </a:p>
-          <a:p>
-            <a:pPr marL="342900" indent="-342900">
-              <a:lnSpc>
-                <a:spcPct val="105000"/>
-              </a:lnSpc>
-              <a:spcAft>
-                <a:spcPts val="1200"/>
-              </a:spcAft>
-              <a:buSzPct val="100000"/>
-              <a:buChar char="✗"/>
-            </a:pPr>
-            <a:r>
-              <a:rPr lang="en-US" sz="1550" dirty="0">
-                <a:solidFill>
-                  <a:srgbClr val="E7EDF5"/>
-                </a:solidFill>
-                <a:latin typeface="Malgun Gothic" pitchFamily="34" charset="0"/>
-                <a:ea typeface="Malgun Gothic" pitchFamily="34" charset="-122"/>
-                <a:cs typeface="Malgun Gothic" pitchFamily="34" charset="-120"/>
-              </a:rPr>
-              <a:t>blockDim을 스레드마다 다르다고 착각 → 모두 같은 값</a:t>
-            </a:r>
-            <a:endParaRPr lang="en-US" sz="1550" dirty="0"/>
+              <a:t>→ 이 비동기 특성은 세션 2(검증)·세션 4(타이밍)에서 자세히.</a:t>
+            </a:r>
+            <a:endParaRPr lang="en-US" sz="1350" dirty="0"/>
           </a:p>
         </p:txBody>
       </p:sp>
@@ -3511,6 +3593,478 @@
         </p:nvSpPr>
         <p:spPr>
           <a:xfrm>
+            <a:off x="548640" y="411480"/>
+            <a:ext cx="658368" cy="658368"/>
+          </a:xfrm>
+          <a:prstGeom prst="roundRect">
+            <a:avLst>
+              <a:gd name="adj" fmla="val 13889"/>
+            </a:avLst>
+          </a:prstGeom>
+          <a:solidFill>
+            <a:srgbClr val="E8A33D"/>
+          </a:solidFill>
+          <a:ln/>
+        </p:spPr>
+        <p:txBody>
+          <a:bodyPr wrap="square" rtlCol="0" anchor="ctr"/>
+          <a:lstStyle/>
+          <a:p>
+            <a:pPr algn="ctr" indent="0" marL="0">
+              <a:buNone/>
+            </a:pPr>
+            <a:r>
+              <a:rPr lang="en-US" sz="2200" b="1" dirty="0">
+                <a:solidFill>
+                  <a:srgbClr val="101722"/>
+                </a:solidFill>
+                <a:latin typeface="Courier New" pitchFamily="34" charset="0"/>
+                <a:ea typeface="Courier New" pitchFamily="34" charset="-122"/>
+                <a:cs typeface="Courier New" pitchFamily="34" charset="-120"/>
+              </a:rPr>
+              <a:t>9</a:t>
+            </a:r>
+            <a:endParaRPr lang="en-US" sz="2200" dirty="0"/>
+          </a:p>
+        </p:txBody>
+      </p:sp>
+      <p:sp>
+        <p:nvSpPr>
+          <p:cNvPr id="3" name="Text 1"/>
+          <p:cNvSpPr/>
+          <p:nvPr/>
+        </p:nvSpPr>
+        <p:spPr>
+          <a:xfrm>
+            <a:off x="1371600" y="384048"/>
+            <a:ext cx="10241280" cy="713232"/>
+          </a:xfrm>
+          <a:prstGeom prst="rect">
+            <a:avLst/>
+          </a:prstGeom>
+          <a:noFill/>
+          <a:ln/>
+        </p:spPr>
+        <p:txBody>
+          <a:bodyPr wrap="square" lIns="0" tIns="0" rIns="0" bIns="0" rtlCol="0" anchor="ctr"/>
+          <a:lstStyle/>
+          <a:p>
+            <a:pPr algn="l" indent="0" marL="0">
+              <a:buNone/>
+            </a:pPr>
+            <a:r>
+              <a:rPr lang="en-US" sz="2900" b="1" dirty="0">
+                <a:solidFill>
+                  <a:srgbClr val="E7EDF5"/>
+                </a:solidFill>
+                <a:latin typeface="Malgun Gothic" pitchFamily="34" charset="0"/>
+                <a:ea typeface="Malgun Gothic" pitchFamily="34" charset="-122"/>
+                <a:cs typeface="Malgun Gothic" pitchFamily="34" charset="-120"/>
+              </a:rPr>
+              <a:t>핵심 정리 &amp; 자주 하는 실수</a:t>
+            </a:r>
+            <a:endParaRPr lang="en-US" sz="2900" dirty="0"/>
+          </a:p>
+        </p:txBody>
+      </p:sp>
+      <p:sp>
+        <p:nvSpPr>
+          <p:cNvPr id="4" name="Shape 2"/>
+          <p:cNvSpPr/>
+          <p:nvPr/>
+        </p:nvSpPr>
+        <p:spPr>
+          <a:xfrm>
+            <a:off x="548640" y="1600200"/>
+            <a:ext cx="5349240" cy="4114800"/>
+          </a:xfrm>
+          <a:prstGeom prst="roundRect">
+            <a:avLst>
+              <a:gd name="adj" fmla="val 1778"/>
+            </a:avLst>
+          </a:prstGeom>
+          <a:solidFill>
+            <a:srgbClr val="18212E"/>
+          </a:solidFill>
+          <a:ln/>
+        </p:spPr>
+      </p:sp>
+      <p:sp>
+        <p:nvSpPr>
+          <p:cNvPr id="5" name="Text 3"/>
+          <p:cNvSpPr/>
+          <p:nvPr/>
+        </p:nvSpPr>
+        <p:spPr>
+          <a:xfrm>
+            <a:off x="822960" y="1828800"/>
+            <a:ext cx="4800600" cy="457200"/>
+          </a:xfrm>
+          <a:prstGeom prst="rect">
+            <a:avLst/>
+          </a:prstGeom>
+          <a:noFill/>
+          <a:ln/>
+        </p:spPr>
+        <p:txBody>
+          <a:bodyPr wrap="square" lIns="0" tIns="0" rIns="0" bIns="0" rtlCol="0" anchor="ctr"/>
+          <a:lstStyle/>
+          <a:p>
+            <a:pPr indent="0" marL="0">
+              <a:buNone/>
+            </a:pPr>
+            <a:r>
+              <a:rPr lang="en-US" sz="2000" b="1" dirty="0">
+                <a:solidFill>
+                  <a:srgbClr val="E8A33D"/>
+                </a:solidFill>
+                <a:latin typeface="Malgun Gothic" pitchFamily="34" charset="0"/>
+                <a:ea typeface="Malgun Gothic" pitchFamily="34" charset="-122"/>
+                <a:cs typeface="Malgun Gothic" pitchFamily="34" charset="-120"/>
+              </a:rPr>
+              <a:t>기억할 것</a:t>
+            </a:r>
+            <a:endParaRPr lang="en-US" sz="2000" dirty="0"/>
+          </a:p>
+        </p:txBody>
+      </p:sp>
+      <p:sp>
+        <p:nvSpPr>
+          <p:cNvPr id="6" name="Text 4"/>
+          <p:cNvSpPr/>
+          <p:nvPr/>
+        </p:nvSpPr>
+        <p:spPr>
+          <a:xfrm>
+            <a:off x="822960" y="2423160"/>
+            <a:ext cx="4800600" cy="3108960"/>
+          </a:xfrm>
+          <a:prstGeom prst="rect">
+            <a:avLst/>
+          </a:prstGeom>
+          <a:noFill/>
+          <a:ln/>
+        </p:spPr>
+        <p:txBody>
+          <a:bodyPr wrap="square" lIns="0" tIns="0" rIns="0" bIns="0" rtlCol="0" anchor="t"/>
+          <a:lstStyle/>
+          <a:p>
+            <a:pPr marL="342900" indent="-342900">
+              <a:lnSpc>
+                <a:spcPct val="105000"/>
+              </a:lnSpc>
+              <a:spcAft>
+                <a:spcPts val="1200"/>
+              </a:spcAft>
+              <a:buSzPct val="100000"/>
+              <a:buChar char="✓"/>
+            </a:pPr>
+            <a:r>
+              <a:rPr lang="en-US" sz="1600" dirty="0">
+                <a:solidFill>
+                  <a:srgbClr val="E7EDF5"/>
+                </a:solidFill>
+                <a:latin typeface="Malgun Gothic" pitchFamily="34" charset="0"/>
+                <a:ea typeface="Malgun Gothic" pitchFamily="34" charset="-122"/>
+                <a:cs typeface="Malgun Gothic" pitchFamily="34" charset="-120"/>
+              </a:rPr>
+              <a:t>커널 = __global__, 반환형 void</a:t>
+            </a:r>
+            <a:endParaRPr lang="en-US" sz="1600" dirty="0"/>
+          </a:p>
+          <a:p>
+            <a:pPr marL="342900" indent="-342900">
+              <a:lnSpc>
+                <a:spcPct val="105000"/>
+              </a:lnSpc>
+              <a:spcAft>
+                <a:spcPts val="1200"/>
+              </a:spcAft>
+              <a:buSzPct val="100000"/>
+              <a:buChar char="✓"/>
+            </a:pPr>
+            <a:r>
+              <a:rPr lang="en-US" sz="1600" dirty="0">
+                <a:solidFill>
+                  <a:srgbClr val="E7EDF5"/>
+                </a:solidFill>
+                <a:latin typeface="Malgun Gothic" pitchFamily="34" charset="0"/>
+                <a:ea typeface="Malgun Gothic" pitchFamily="34" charset="-122"/>
+                <a:cs typeface="Malgun Gothic" pitchFamily="34" charset="-120"/>
+              </a:rPr>
+              <a:t>&lt;&lt;&lt;1024, 512&gt;&gt;&gt; = 블록수, 블록당 스레드수</a:t>
+            </a:r>
+            <a:endParaRPr lang="en-US" sz="1600" dirty="0"/>
+          </a:p>
+          <a:p>
+            <a:pPr marL="342900" indent="-342900">
+              <a:lnSpc>
+                <a:spcPct val="105000"/>
+              </a:lnSpc>
+              <a:spcAft>
+                <a:spcPts val="1200"/>
+              </a:spcAft>
+              <a:buSzPct val="100000"/>
+              <a:buChar char="✓"/>
+            </a:pPr>
+            <a:r>
+              <a:rPr lang="en-US" sz="1600" dirty="0">
+                <a:solidFill>
+                  <a:srgbClr val="E7EDF5"/>
+                </a:solidFill>
+                <a:latin typeface="Malgun Gothic" pitchFamily="34" charset="0"/>
+                <a:ea typeface="Malgun Gothic" pitchFamily="34" charset="-122"/>
+                <a:cs typeface="Malgun Gothic" pitchFamily="34" charset="-120"/>
+              </a:rPr>
+              <a:t>THREAD_ADDRESS로 겹치지 않는 자기 word 계산</a:t>
+            </a:r>
+            <a:endParaRPr lang="en-US" sz="1600" dirty="0"/>
+          </a:p>
+          <a:p>
+            <a:pPr marL="342900" indent="-342900">
+              <a:lnSpc>
+                <a:spcPct val="105000"/>
+              </a:lnSpc>
+              <a:spcAft>
+                <a:spcPts val="1200"/>
+              </a:spcAft>
+              <a:buSzPct val="100000"/>
+              <a:buChar char="✓"/>
+            </a:pPr>
+            <a:r>
+              <a:rPr lang="en-US" sz="1600" dirty="0">
+                <a:solidFill>
+                  <a:srgbClr val="E7EDF5"/>
+                </a:solidFill>
+                <a:latin typeface="Malgun Gothic" pitchFamily="34" charset="0"/>
+                <a:ea typeface="Malgun Gothic" pitchFamily="34" charset="-122"/>
+                <a:cs typeface="Malgun Gothic" pitchFamily="34" charset="-120"/>
+              </a:rPr>
+              <a:t>이웃 스레드 = 이웃 주소 → coalescing</a:t>
+            </a:r>
+            <a:endParaRPr lang="en-US" sz="1600" dirty="0"/>
+          </a:p>
+        </p:txBody>
+      </p:sp>
+      <p:sp>
+        <p:nvSpPr>
+          <p:cNvPr id="7" name="Shape 5"/>
+          <p:cNvSpPr/>
+          <p:nvPr/>
+        </p:nvSpPr>
+        <p:spPr>
+          <a:xfrm>
+            <a:off x="6263640" y="1600200"/>
+            <a:ext cx="5349240" cy="4114800"/>
+          </a:xfrm>
+          <a:prstGeom prst="roundRect">
+            <a:avLst>
+              <a:gd name="adj" fmla="val 1778"/>
+            </a:avLst>
+          </a:prstGeom>
+          <a:solidFill>
+            <a:srgbClr val="18212E"/>
+          </a:solidFill>
+          <a:ln/>
+        </p:spPr>
+      </p:sp>
+      <p:sp>
+        <p:nvSpPr>
+          <p:cNvPr id="8" name="Text 6"/>
+          <p:cNvSpPr/>
+          <p:nvPr/>
+        </p:nvSpPr>
+        <p:spPr>
+          <a:xfrm>
+            <a:off x="6537960" y="1828800"/>
+            <a:ext cx="4800600" cy="457200"/>
+          </a:xfrm>
+          <a:prstGeom prst="rect">
+            <a:avLst/>
+          </a:prstGeom>
+          <a:noFill/>
+          <a:ln/>
+        </p:spPr>
+        <p:txBody>
+          <a:bodyPr wrap="square" lIns="0" tIns="0" rIns="0" bIns="0" rtlCol="0" anchor="ctr"/>
+          <a:lstStyle/>
+          <a:p>
+            <a:pPr indent="0" marL="0">
+              <a:buNone/>
+            </a:pPr>
+            <a:r>
+              <a:rPr lang="en-US" sz="2000" b="1" dirty="0">
+                <a:solidFill>
+                  <a:srgbClr val="E6604F"/>
+                </a:solidFill>
+                <a:latin typeface="Malgun Gothic" pitchFamily="34" charset="0"/>
+                <a:ea typeface="Malgun Gothic" pitchFamily="34" charset="-122"/>
+                <a:cs typeface="Malgun Gothic" pitchFamily="34" charset="-120"/>
+              </a:rPr>
+              <a:t>입문자 함정</a:t>
+            </a:r>
+            <a:endParaRPr lang="en-US" sz="2000" dirty="0"/>
+          </a:p>
+        </p:txBody>
+      </p:sp>
+      <p:sp>
+        <p:nvSpPr>
+          <p:cNvPr id="9" name="Text 7"/>
+          <p:cNvSpPr/>
+          <p:nvPr/>
+        </p:nvSpPr>
+        <p:spPr>
+          <a:xfrm>
+            <a:off x="6537960" y="2423160"/>
+            <a:ext cx="4800600" cy="3108960"/>
+          </a:xfrm>
+          <a:prstGeom prst="rect">
+            <a:avLst/>
+          </a:prstGeom>
+          <a:noFill/>
+          <a:ln/>
+        </p:spPr>
+        <p:txBody>
+          <a:bodyPr wrap="square" lIns="0" tIns="0" rIns="0" bIns="0" rtlCol="0" anchor="t"/>
+          <a:lstStyle/>
+          <a:p>
+            <a:pPr marL="342900" indent="-342900">
+              <a:lnSpc>
+                <a:spcPct val="105000"/>
+              </a:lnSpc>
+              <a:spcAft>
+                <a:spcPts val="1200"/>
+              </a:spcAft>
+              <a:buSzPct val="100000"/>
+              <a:buChar char="✗"/>
+            </a:pPr>
+            <a:r>
+              <a:rPr lang="en-US" sz="1550" dirty="0">
+                <a:solidFill>
+                  <a:srgbClr val="E7EDF5"/>
+                </a:solidFill>
+                <a:latin typeface="Malgun Gothic" pitchFamily="34" charset="0"/>
+                <a:ea typeface="Malgun Gothic" pitchFamily="34" charset="-122"/>
+                <a:cs typeface="Malgun Gothic" pitchFamily="34" charset="-120"/>
+              </a:rPr>
+              <a:t>커널을 일반 함수처럼 () 로 호출 → &lt;&lt;&lt;&gt;&gt;&gt; 필수</a:t>
+            </a:r>
+            <a:endParaRPr lang="en-US" sz="1550" dirty="0"/>
+          </a:p>
+          <a:p>
+            <a:pPr marL="342900" indent="-342900">
+              <a:lnSpc>
+                <a:spcPct val="105000"/>
+              </a:lnSpc>
+              <a:spcAft>
+                <a:spcPts val="1200"/>
+              </a:spcAft>
+              <a:buSzPct val="100000"/>
+              <a:buChar char="✗"/>
+            </a:pPr>
+            <a:r>
+              <a:rPr lang="en-US" sz="1550" dirty="0">
+                <a:solidFill>
+                  <a:srgbClr val="E7EDF5"/>
+                </a:solidFill>
+                <a:latin typeface="Malgun Gothic" pitchFamily="34" charset="0"/>
+                <a:ea typeface="Malgun Gothic" pitchFamily="34" charset="-122"/>
+                <a:cs typeface="Malgun Gothic" pitchFamily="34" charset="-120"/>
+              </a:rPr>
+              <a:t>커널에서 값을 return 하려 함 → void, 결과는 메모리로</a:t>
+            </a:r>
+            <a:endParaRPr lang="en-US" sz="1550" dirty="0"/>
+          </a:p>
+          <a:p>
+            <a:pPr marL="342900" indent="-342900">
+              <a:lnSpc>
+                <a:spcPct val="105000"/>
+              </a:lnSpc>
+              <a:spcAft>
+                <a:spcPts val="1200"/>
+              </a:spcAft>
+              <a:buSzPct val="100000"/>
+              <a:buChar char="✗"/>
+            </a:pPr>
+            <a:r>
+              <a:rPr lang="en-US" sz="1550" dirty="0">
+                <a:solidFill>
+                  <a:srgbClr val="E7EDF5"/>
+                </a:solidFill>
+                <a:latin typeface="Malgun Gothic" pitchFamily="34" charset="0"/>
+                <a:ea typeface="Malgun Gothic" pitchFamily="34" charset="-122"/>
+                <a:cs typeface="Malgun Gothic" pitchFamily="34" charset="-120"/>
+              </a:rPr>
+              <a:t>호스트 포인터를 커널에 그대로 전달 → 디바이스 포인터여야</a:t>
+            </a:r>
+            <a:endParaRPr lang="en-US" sz="1550" dirty="0"/>
+          </a:p>
+          <a:p>
+            <a:pPr marL="342900" indent="-342900">
+              <a:lnSpc>
+                <a:spcPct val="105000"/>
+              </a:lnSpc>
+              <a:spcAft>
+                <a:spcPts val="1200"/>
+              </a:spcAft>
+              <a:buSzPct val="100000"/>
+              <a:buChar char="✗"/>
+            </a:pPr>
+            <a:r>
+              <a:rPr lang="en-US" sz="1550" dirty="0">
+                <a:solidFill>
+                  <a:srgbClr val="E7EDF5"/>
+                </a:solidFill>
+                <a:latin typeface="Malgun Gothic" pitchFamily="34" charset="0"/>
+                <a:ea typeface="Malgun Gothic" pitchFamily="34" charset="-122"/>
+                <a:cs typeface="Malgun Gothic" pitchFamily="34" charset="-120"/>
+              </a:rPr>
+              <a:t>blockDim을 스레드마다 다르다고 착각 → 모두 같은 값</a:t>
+            </a:r>
+            <a:endParaRPr lang="en-US" sz="1550" dirty="0"/>
+          </a:p>
+        </p:txBody>
+      </p:sp>
+    </p:spTree>
+  </p:cSld>
+  <p:clrMapOvr>
+    <a:masterClrMapping/>
+  </p:clrMapOvr>
+</p:sld>
+</file>
+
+<file path=ppt/slides/slide13.xml><?xml version="1.0" encoding="utf-8"?>
+<p:sld xmlns:a="http://schemas.openxmlformats.org/drawingml/2006/main" xmlns:r="http://schemas.openxmlformats.org/officeDocument/2006/relationships" xmlns:p="http://schemas.openxmlformats.org/presentationml/2006/main">
+  <p:cSld name="Slide 13">
+    <p:bg>
+      <p:bgPr>
+        <a:solidFill>
+          <a:srgbClr val="101722"/>
+        </a:solidFill>
+      </p:bgPr>
+    </p:bg>
+    <p:spTree>
+      <p:nvGrpSpPr>
+        <p:cNvPr id="1" name=""/>
+        <p:cNvGrpSpPr/>
+        <p:nvPr/>
+      </p:nvGrpSpPr>
+      <p:grpSpPr>
+        <a:xfrm>
+          <a:off x="0" y="0"/>
+          <a:ext cx="0" cy="0"/>
+          <a:chOff x="0" y="0"/>
+          <a:chExt cx="0" cy="0"/>
+        </a:xfrm>
+      </p:grpSpPr>
+      <p:sp>
+        <p:nvSpPr>
+          <p:cNvPr id="2" name="Text 0"/>
+          <p:cNvSpPr/>
+          <p:nvPr/>
+        </p:nvSpPr>
+        <p:spPr>
+          <a:xfrm>
             <a:off x="548640" y="1463040"/>
             <a:ext cx="10058400" cy="457200"/>
           </a:xfrm>
@@ -7206,7 +7760,7 @@
             </a:avLst>
           </a:prstGeom>
           <a:solidFill>
-            <a:srgbClr val="E8A33D"/>
+            <a:srgbClr val="3FB8C4"/>
           </a:solidFill>
           <a:ln/>
         </p:spPr>
@@ -7226,7 +7780,7 @@
                 <a:ea typeface="Courier New" pitchFamily="34" charset="-122"/>
                 <a:cs typeface="Courier New" pitchFamily="34" charset="-120"/>
               </a:rPr>
-              <a:t>4</a:t>
+              <a:t>3</a:t>
             </a:r>
             <a:endParaRPr lang="en-US" sz="2200" dirty="0"/>
           </a:p>
@@ -7265,7 +7819,7 @@
                 <a:ea typeface="Malgun Gothic" pitchFamily="34" charset="-122"/>
                 <a:cs typeface="Malgun Gothic" pitchFamily="34" charset="-120"/>
               </a:rPr>
-              <a:t>내장 변수 · 스레드의 신분증</a:t>
+              <a:t>실행 모델 · 소프트웨어 → 하드웨어 매핑</a:t>
             </a:r>
             <a:endParaRPr lang="en-US" sz="2900" dirty="0"/>
           </a:p>
@@ -7279,8 +7833,8 @@
         </p:nvSpPr>
         <p:spPr>
           <a:xfrm>
-            <a:off x="548640" y="1463040"/>
-            <a:ext cx="11064240" cy="457200"/>
+            <a:off x="548640" y="1371600"/>
+            <a:ext cx="11064240" cy="411480"/>
           </a:xfrm>
           <a:prstGeom prst="rect">
             <a:avLst/>
@@ -7296,7 +7850,7 @@
               <a:buNone/>
             </a:pPr>
             <a:r>
-              <a:rPr lang="en-US" sz="1600" dirty="0">
+              <a:rPr lang="en-US" sz="1450" dirty="0">
                 <a:solidFill>
                   <a:srgbClr val="9FB0C4"/>
                 </a:solidFill>
@@ -7304,44 +7858,166 @@
                 <a:ea typeface="Malgun Gothic" pitchFamily="34" charset="-122"/>
                 <a:cs typeface="Malgun Gothic" pitchFamily="34" charset="-120"/>
               </a:rPr>
-              <a:t>커널 안에서 자동으로 주어지는 값들. 이것으로 '내가 전체에서 몇 번째인지'를 계산합니다.</a:t>
-            </a:r>
-            <a:endParaRPr lang="en-US" sz="1600" dirty="0"/>
-          </a:p>
-        </p:txBody>
-      </p:sp>
-      <p:sp>
-        <p:nvSpPr>
-          <p:cNvPr id="5" name="Shape 3"/>
-          <p:cNvSpPr/>
-          <p:nvPr/>
-        </p:nvSpPr>
-        <p:spPr>
-          <a:xfrm>
-            <a:off x="548640" y="2057400"/>
-            <a:ext cx="11064240" cy="841248"/>
+              <a:t>논리적 계층(왼쪽)이 실제 GPU 하드웨어(오른쪽)에 어떻게 배정되어 실행되는지를 보여줍니다.</a:t>
+            </a:r>
+            <a:endParaRPr lang="en-US" sz="1450" dirty="0"/>
+          </a:p>
+        </p:txBody>
+      </p:sp>
+      <p:sp>
+        <p:nvSpPr>
+          <p:cNvPr id="5" name="Text 3"/>
+          <p:cNvSpPr/>
+          <p:nvPr/>
+        </p:nvSpPr>
+        <p:spPr>
+          <a:xfrm>
+            <a:off x="548640" y="1828800"/>
+            <a:ext cx="4297680" cy="320040"/>
+          </a:xfrm>
+          <a:prstGeom prst="rect">
+            <a:avLst/>
+          </a:prstGeom>
+          <a:noFill/>
+          <a:ln/>
+        </p:spPr>
+        <p:txBody>
+          <a:bodyPr wrap="square" lIns="0" tIns="0" rIns="0" bIns="0" rtlCol="0" anchor="ctr"/>
+          <a:lstStyle/>
+          <a:p>
+            <a:pPr algn="ctr" indent="0" marL="0">
+              <a:buNone/>
+            </a:pPr>
+            <a:r>
+              <a:rPr lang="en-US" sz="1300" b="1" dirty="0">
+                <a:solidFill>
+                  <a:srgbClr val="3FB8C4"/>
+                </a:solidFill>
+                <a:latin typeface="Malgun Gothic" pitchFamily="34" charset="0"/>
+                <a:ea typeface="Malgun Gothic" pitchFamily="34" charset="-122"/>
+                <a:cs typeface="Malgun Gothic" pitchFamily="34" charset="-120"/>
+              </a:rPr>
+              <a:t>소프트웨어 (논리)</a:t>
+            </a:r>
+            <a:endParaRPr lang="en-US" sz="1300" dirty="0"/>
+          </a:p>
+        </p:txBody>
+      </p:sp>
+      <p:sp>
+        <p:nvSpPr>
+          <p:cNvPr id="6" name="Text 4"/>
+          <p:cNvSpPr/>
+          <p:nvPr/>
+        </p:nvSpPr>
+        <p:spPr>
+          <a:xfrm>
+            <a:off x="6858000" y="1828800"/>
+            <a:ext cx="4754880" cy="320040"/>
+          </a:xfrm>
+          <a:prstGeom prst="rect">
+            <a:avLst/>
+          </a:prstGeom>
+          <a:noFill/>
+          <a:ln/>
+        </p:spPr>
+        <p:txBody>
+          <a:bodyPr wrap="square" lIns="0" tIns="0" rIns="0" bIns="0" rtlCol="0" anchor="ctr"/>
+          <a:lstStyle/>
+          <a:p>
+            <a:pPr algn="ctr" indent="0" marL="0">
+              <a:buNone/>
+            </a:pPr>
+            <a:r>
+              <a:rPr lang="en-US" sz="1300" b="1" dirty="0">
+                <a:solidFill>
+                  <a:srgbClr val="E8A33D"/>
+                </a:solidFill>
+                <a:latin typeface="Malgun Gothic" pitchFamily="34" charset="0"/>
+                <a:ea typeface="Malgun Gothic" pitchFamily="34" charset="-122"/>
+                <a:cs typeface="Malgun Gothic" pitchFamily="34" charset="-120"/>
+              </a:rPr>
+              <a:t>하드웨어 (물리)</a:t>
+            </a:r>
+            <a:endParaRPr lang="en-US" sz="1300" dirty="0"/>
+          </a:p>
+        </p:txBody>
+      </p:sp>
+      <p:sp>
+        <p:nvSpPr>
+          <p:cNvPr id="7" name="Shape 5"/>
+          <p:cNvSpPr/>
+          <p:nvPr/>
+        </p:nvSpPr>
+        <p:spPr>
+          <a:xfrm>
+            <a:off x="548640" y="2240280"/>
+            <a:ext cx="4297680" cy="822960"/>
           </a:xfrm>
           <a:prstGeom prst="roundRect">
             <a:avLst>
-              <a:gd name="adj" fmla="val 8696"/>
+              <a:gd name="adj" fmla="val 5556"/>
             </a:avLst>
           </a:prstGeom>
           <a:solidFill>
-            <a:srgbClr val="18212E"/>
+            <a:srgbClr val="12212A"/>
           </a:solidFill>
-          <a:ln/>
-        </p:spPr>
-      </p:sp>
-      <p:sp>
-        <p:nvSpPr>
-          <p:cNvPr id="6" name="Text 4"/>
-          <p:cNvSpPr/>
-          <p:nvPr/>
-        </p:nvSpPr>
-        <p:spPr>
-          <a:xfrm>
-            <a:off x="822960" y="2167128"/>
-            <a:ext cx="2926080" cy="621792"/>
+          <a:ln w="19050">
+            <a:solidFill>
+              <a:srgbClr val="3FB8C4"/>
+            </a:solidFill>
+            <a:prstDash val="solid"/>
+          </a:ln>
+        </p:spPr>
+      </p:sp>
+      <p:sp>
+        <p:nvSpPr>
+          <p:cNvPr id="8" name="Text 6"/>
+          <p:cNvSpPr/>
+          <p:nvPr/>
+        </p:nvSpPr>
+        <p:spPr>
+          <a:xfrm>
+            <a:off x="658368" y="2331720"/>
+            <a:ext cx="4078224" cy="365760"/>
+          </a:xfrm>
+          <a:prstGeom prst="rect">
+            <a:avLst/>
+          </a:prstGeom>
+          <a:noFill/>
+          <a:ln/>
+        </p:spPr>
+        <p:txBody>
+          <a:bodyPr wrap="square" lIns="0" tIns="0" rIns="0" bIns="0" rtlCol="0" anchor="t"/>
+          <a:lstStyle/>
+          <a:p>
+            <a:pPr algn="ctr" indent="0" marL="0">
+              <a:buNone/>
+            </a:pPr>
+            <a:r>
+              <a:rPr lang="en-US" sz="1400" b="1" dirty="0">
+                <a:solidFill>
+                  <a:srgbClr val="3FB8C4"/>
+                </a:solidFill>
+                <a:latin typeface="Malgun Gothic" pitchFamily="34" charset="0"/>
+                <a:ea typeface="Malgun Gothic" pitchFamily="34" charset="-122"/>
+                <a:cs typeface="Malgun Gothic" pitchFamily="34" charset="-120"/>
+              </a:rPr>
+              <a:t>그리드 (Grid)</a:t>
+            </a:r>
+            <a:endParaRPr lang="en-US" sz="1400" dirty="0"/>
+          </a:p>
+        </p:txBody>
+      </p:sp>
+      <p:sp>
+        <p:nvSpPr>
+          <p:cNvPr id="9" name="Text 7"/>
+          <p:cNvSpPr/>
+          <p:nvPr/>
+        </p:nvSpPr>
+        <p:spPr>
+          <a:xfrm>
+            <a:off x="658368" y="2606040"/>
+            <a:ext cx="4078224" cy="384048"/>
           </a:xfrm>
           <a:prstGeom prst="rect">
             <a:avLst/>
@@ -7353,73 +8029,100 @@
           <a:bodyPr wrap="square" lIns="0" tIns="0" rIns="0" bIns="0" rtlCol="0" anchor="ctr"/>
           <a:lstStyle/>
           <a:p>
-            <a:pPr indent="0" marL="0">
-              <a:buNone/>
-            </a:pPr>
-            <a:r>
-              <a:rPr lang="en-US" sz="1900" b="1" dirty="0">
-                <a:solidFill>
-                  <a:srgbClr val="E8A33D"/>
+            <a:pPr algn="ctr" indent="0" marL="0">
+              <a:buNone/>
+            </a:pPr>
+            <a:r>
+              <a:rPr lang="en-US" sz="1050" dirty="0">
+                <a:solidFill>
+                  <a:srgbClr val="9FB0C4"/>
                 </a:solidFill>
                 <a:latin typeface="Courier New" pitchFamily="34" charset="0"/>
                 <a:ea typeface="Courier New" pitchFamily="34" charset="-122"/>
                 <a:cs typeface="Courier New" pitchFamily="34" charset="-120"/>
               </a:rPr>
-              <a:t>blockIdx.x</a:t>
-            </a:r>
-            <a:endParaRPr lang="en-US" sz="1900" dirty="0"/>
-          </a:p>
-        </p:txBody>
-      </p:sp>
-      <p:sp>
-        <p:nvSpPr>
-          <p:cNvPr id="7" name="Text 5"/>
-          <p:cNvSpPr/>
-          <p:nvPr/>
-        </p:nvSpPr>
-        <p:spPr>
-          <a:xfrm>
-            <a:off x="3931920" y="2167128"/>
-            <a:ext cx="5212080" cy="621792"/>
-          </a:xfrm>
-          <a:prstGeom prst="rect">
-            <a:avLst/>
-          </a:prstGeom>
-          <a:noFill/>
-          <a:ln/>
-        </p:spPr>
-        <p:txBody>
-          <a:bodyPr wrap="square" lIns="0" tIns="0" rIns="0" bIns="0" rtlCol="0" anchor="ctr"/>
-          <a:lstStyle/>
-          <a:p>
-            <a:pPr indent="0" marL="0">
-              <a:buNone/>
-            </a:pPr>
-            <a:r>
-              <a:rPr lang="en-US" sz="1550" dirty="0">
-                <a:solidFill>
-                  <a:srgbClr val="E7EDF5"/>
+              <a:t>커널 실행 전체</a:t>
+            </a:r>
+            <a:endParaRPr lang="en-US" sz="1050" dirty="0"/>
+          </a:p>
+        </p:txBody>
+      </p:sp>
+      <p:sp>
+        <p:nvSpPr>
+          <p:cNvPr id="10" name="Shape 8"/>
+          <p:cNvSpPr/>
+          <p:nvPr/>
+        </p:nvSpPr>
+        <p:spPr>
+          <a:xfrm>
+            <a:off x="6858000" y="2240280"/>
+            <a:ext cx="4754880" cy="822960"/>
+          </a:xfrm>
+          <a:prstGeom prst="roundRect">
+            <a:avLst>
+              <a:gd name="adj" fmla="val 5556"/>
+            </a:avLst>
+          </a:prstGeom>
+          <a:solidFill>
+            <a:srgbClr val="241A16"/>
+          </a:solidFill>
+          <a:ln w="19050">
+            <a:solidFill>
+              <a:srgbClr val="E8A33D"/>
+            </a:solidFill>
+            <a:prstDash val="solid"/>
+          </a:ln>
+        </p:spPr>
+      </p:sp>
+      <p:sp>
+        <p:nvSpPr>
+          <p:cNvPr id="11" name="Text 9"/>
+          <p:cNvSpPr/>
+          <p:nvPr/>
+        </p:nvSpPr>
+        <p:spPr>
+          <a:xfrm>
+            <a:off x="6967728" y="2331720"/>
+            <a:ext cx="4535424" cy="365760"/>
+          </a:xfrm>
+          <a:prstGeom prst="rect">
+            <a:avLst/>
+          </a:prstGeom>
+          <a:noFill/>
+          <a:ln/>
+        </p:spPr>
+        <p:txBody>
+          <a:bodyPr wrap="square" lIns="0" tIns="0" rIns="0" bIns="0" rtlCol="0" anchor="t"/>
+          <a:lstStyle/>
+          <a:p>
+            <a:pPr algn="ctr" indent="0" marL="0">
+              <a:buNone/>
+            </a:pPr>
+            <a:r>
+              <a:rPr lang="en-US" sz="1400" b="1" dirty="0">
+                <a:solidFill>
+                  <a:srgbClr val="E8A33D"/>
                 </a:solidFill>
                 <a:latin typeface="Malgun Gothic" pitchFamily="34" charset="0"/>
                 <a:ea typeface="Malgun Gothic" pitchFamily="34" charset="-122"/>
                 <a:cs typeface="Malgun Gothic" pitchFamily="34" charset="-120"/>
               </a:rPr>
-              <a:t>지금 이 블록의 번호 (0 ~ 1023)</a:t>
-            </a:r>
-            <a:endParaRPr lang="en-US" sz="1550" dirty="0"/>
-          </a:p>
-        </p:txBody>
-      </p:sp>
-      <p:sp>
-        <p:nvSpPr>
-          <p:cNvPr id="8" name="Text 6"/>
-          <p:cNvSpPr/>
-          <p:nvPr/>
-        </p:nvSpPr>
-        <p:spPr>
-          <a:xfrm>
-            <a:off x="9326880" y="2167128"/>
-            <a:ext cx="2103120" cy="621792"/>
+              <a:t>GPU (디바이스)</a:t>
+            </a:r>
+            <a:endParaRPr lang="en-US" sz="1400" dirty="0"/>
+          </a:p>
+        </p:txBody>
+      </p:sp>
+      <p:sp>
+        <p:nvSpPr>
+          <p:cNvPr id="12" name="Text 10"/>
+          <p:cNvSpPr/>
+          <p:nvPr/>
+        </p:nvSpPr>
+        <p:spPr>
+          <a:xfrm>
+            <a:off x="6967728" y="2606040"/>
+            <a:ext cx="4535424" cy="384048"/>
           </a:xfrm>
           <a:prstGeom prst="rect">
             <a:avLst/>
@@ -7431,56 +8134,124 @@
           <a:bodyPr wrap="square" lIns="0" tIns="0" rIns="0" bIns="0" rtlCol="0" anchor="ctr"/>
           <a:lstStyle/>
           <a:p>
-            <a:pPr algn="r" indent="0" marL="0">
-              <a:buNone/>
-            </a:pPr>
-            <a:r>
-              <a:rPr lang="en-US" sz="1250" i="1" dirty="0">
+            <a:pPr algn="ctr" indent="0" marL="0">
+              <a:buNone/>
+            </a:pPr>
+            <a:r>
+              <a:rPr lang="en-US" sz="1050" dirty="0">
                 <a:solidFill>
                   <a:srgbClr val="9FB0C4"/>
+                </a:solidFill>
+                <a:latin typeface="Courier New" pitchFamily="34" charset="0"/>
+                <a:ea typeface="Courier New" pitchFamily="34" charset="-122"/>
+                <a:cs typeface="Courier New" pitchFamily="34" charset="-120"/>
+              </a:rPr>
+              <a:t>여러 SM으로 구성</a:t>
+            </a:r>
+            <a:endParaRPr lang="en-US" sz="1050" dirty="0"/>
+          </a:p>
+        </p:txBody>
+      </p:sp>
+      <p:sp>
+        <p:nvSpPr>
+          <p:cNvPr id="13" name="Shape 11"/>
+          <p:cNvSpPr/>
+          <p:nvPr/>
+        </p:nvSpPr>
+        <p:spPr>
+          <a:xfrm>
+            <a:off x="4919472" y="2651760"/>
+            <a:ext cx="1865376" cy="0"/>
+          </a:xfrm>
+          <a:prstGeom prst="line">
+            <a:avLst/>
+          </a:prstGeom>
+          <a:noFill/>
+          <a:ln w="22860">
+            <a:solidFill>
+              <a:srgbClr val="6B7D94"/>
+            </a:solidFill>
+            <a:prstDash val="solid"/>
+            <a:tailEnd type="triangle"/>
+          </a:ln>
+        </p:spPr>
+      </p:sp>
+      <p:sp>
+        <p:nvSpPr>
+          <p:cNvPr id="14" name="Shape 12"/>
+          <p:cNvSpPr/>
+          <p:nvPr/>
+        </p:nvSpPr>
+        <p:spPr>
+          <a:xfrm>
+            <a:off x="548640" y="3209544"/>
+            <a:ext cx="4297680" cy="822960"/>
+          </a:xfrm>
+          <a:prstGeom prst="roundRect">
+            <a:avLst>
+              <a:gd name="adj" fmla="val 5556"/>
+            </a:avLst>
+          </a:prstGeom>
+          <a:solidFill>
+            <a:srgbClr val="12212A"/>
+          </a:solidFill>
+          <a:ln w="19050">
+            <a:solidFill>
+              <a:srgbClr val="3FB8C4"/>
+            </a:solidFill>
+            <a:prstDash val="solid"/>
+          </a:ln>
+        </p:spPr>
+      </p:sp>
+      <p:sp>
+        <p:nvSpPr>
+          <p:cNvPr id="15" name="Text 13"/>
+          <p:cNvSpPr/>
+          <p:nvPr/>
+        </p:nvSpPr>
+        <p:spPr>
+          <a:xfrm>
+            <a:off x="658368" y="3300984"/>
+            <a:ext cx="4078224" cy="365760"/>
+          </a:xfrm>
+          <a:prstGeom prst="rect">
+            <a:avLst/>
+          </a:prstGeom>
+          <a:noFill/>
+          <a:ln/>
+        </p:spPr>
+        <p:txBody>
+          <a:bodyPr wrap="square" lIns="0" tIns="0" rIns="0" bIns="0" rtlCol="0" anchor="t"/>
+          <a:lstStyle/>
+          <a:p>
+            <a:pPr algn="ctr" indent="0" marL="0">
+              <a:buNone/>
+            </a:pPr>
+            <a:r>
+              <a:rPr lang="en-US" sz="1400" b="1" dirty="0">
+                <a:solidFill>
+                  <a:srgbClr val="3FB8C4"/>
                 </a:solidFill>
                 <a:latin typeface="Malgun Gothic" pitchFamily="34" charset="0"/>
                 <a:ea typeface="Malgun Gothic" pitchFamily="34" charset="-122"/>
                 <a:cs typeface="Malgun Gothic" pitchFamily="34" charset="-120"/>
               </a:rPr>
-              <a:t>스레드마다 다름</a:t>
-            </a:r>
-            <a:endParaRPr lang="en-US" sz="1250" dirty="0"/>
-          </a:p>
-        </p:txBody>
-      </p:sp>
-      <p:sp>
-        <p:nvSpPr>
-          <p:cNvPr id="9" name="Shape 7"/>
-          <p:cNvSpPr/>
-          <p:nvPr/>
-        </p:nvSpPr>
-        <p:spPr>
-          <a:xfrm>
-            <a:off x="548640" y="3026664"/>
-            <a:ext cx="11064240" cy="841248"/>
-          </a:xfrm>
-          <a:prstGeom prst="roundRect">
-            <a:avLst>
-              <a:gd name="adj" fmla="val 8696"/>
-            </a:avLst>
-          </a:prstGeom>
-          <a:solidFill>
-            <a:srgbClr val="18212E"/>
-          </a:solidFill>
-          <a:ln/>
-        </p:spPr>
-      </p:sp>
-      <p:sp>
-        <p:nvSpPr>
-          <p:cNvPr id="10" name="Text 8"/>
-          <p:cNvSpPr/>
-          <p:nvPr/>
-        </p:nvSpPr>
-        <p:spPr>
-          <a:xfrm>
-            <a:off x="822960" y="3136392"/>
-            <a:ext cx="2926080" cy="621792"/>
+              <a:t>블록 (Block)</a:t>
+            </a:r>
+            <a:endParaRPr lang="en-US" sz="1400" dirty="0"/>
+          </a:p>
+        </p:txBody>
+      </p:sp>
+      <p:sp>
+        <p:nvSpPr>
+          <p:cNvPr id="16" name="Text 14"/>
+          <p:cNvSpPr/>
+          <p:nvPr/>
+        </p:nvSpPr>
+        <p:spPr>
+          <a:xfrm>
+            <a:off x="658368" y="3575304"/>
+            <a:ext cx="4078224" cy="384048"/>
           </a:xfrm>
           <a:prstGeom prst="rect">
             <a:avLst/>
@@ -7492,73 +8263,100 @@
           <a:bodyPr wrap="square" lIns="0" tIns="0" rIns="0" bIns="0" rtlCol="0" anchor="ctr"/>
           <a:lstStyle/>
           <a:p>
-            <a:pPr indent="0" marL="0">
-              <a:buNone/>
-            </a:pPr>
-            <a:r>
-              <a:rPr lang="en-US" sz="1900" b="1" dirty="0">
-                <a:solidFill>
-                  <a:srgbClr val="3FB8C4"/>
+            <a:pPr algn="ctr" indent="0" marL="0">
+              <a:buNone/>
+            </a:pPr>
+            <a:r>
+              <a:rPr lang="en-US" sz="1050" dirty="0">
+                <a:solidFill>
+                  <a:srgbClr val="9FB0C4"/>
                 </a:solidFill>
                 <a:latin typeface="Courier New" pitchFamily="34" charset="0"/>
                 <a:ea typeface="Courier New" pitchFamily="34" charset="-122"/>
                 <a:cs typeface="Courier New" pitchFamily="34" charset="-120"/>
               </a:rPr>
-              <a:t>threadIdx.x</a:t>
-            </a:r>
-            <a:endParaRPr lang="en-US" sz="1900" dirty="0"/>
-          </a:p>
-        </p:txBody>
-      </p:sp>
-      <p:sp>
-        <p:nvSpPr>
-          <p:cNvPr id="11" name="Text 9"/>
-          <p:cNvSpPr/>
-          <p:nvPr/>
-        </p:nvSpPr>
-        <p:spPr>
-          <a:xfrm>
-            <a:off x="3931920" y="3136392"/>
-            <a:ext cx="5212080" cy="621792"/>
-          </a:xfrm>
-          <a:prstGeom prst="rect">
-            <a:avLst/>
-          </a:prstGeom>
-          <a:noFill/>
-          <a:ln/>
-        </p:spPr>
-        <p:txBody>
-          <a:bodyPr wrap="square" lIns="0" tIns="0" rIns="0" bIns="0" rtlCol="0" anchor="ctr"/>
-          <a:lstStyle/>
-          <a:p>
-            <a:pPr indent="0" marL="0">
-              <a:buNone/>
-            </a:pPr>
-            <a:r>
-              <a:rPr lang="en-US" sz="1550" dirty="0">
-                <a:solidFill>
-                  <a:srgbClr val="E7EDF5"/>
+              <a:t>blockIdx.x · 최대 1024 스레드</a:t>
+            </a:r>
+            <a:endParaRPr lang="en-US" sz="1050" dirty="0"/>
+          </a:p>
+        </p:txBody>
+      </p:sp>
+      <p:sp>
+        <p:nvSpPr>
+          <p:cNvPr id="17" name="Shape 15"/>
+          <p:cNvSpPr/>
+          <p:nvPr/>
+        </p:nvSpPr>
+        <p:spPr>
+          <a:xfrm>
+            <a:off x="6858000" y="3209544"/>
+            <a:ext cx="4754880" cy="822960"/>
+          </a:xfrm>
+          <a:prstGeom prst="roundRect">
+            <a:avLst>
+              <a:gd name="adj" fmla="val 5556"/>
+            </a:avLst>
+          </a:prstGeom>
+          <a:solidFill>
+            <a:srgbClr val="241A16"/>
+          </a:solidFill>
+          <a:ln w="19050">
+            <a:solidFill>
+              <a:srgbClr val="E8A33D"/>
+            </a:solidFill>
+            <a:prstDash val="solid"/>
+          </a:ln>
+        </p:spPr>
+      </p:sp>
+      <p:sp>
+        <p:nvSpPr>
+          <p:cNvPr id="18" name="Text 16"/>
+          <p:cNvSpPr/>
+          <p:nvPr/>
+        </p:nvSpPr>
+        <p:spPr>
+          <a:xfrm>
+            <a:off x="6967728" y="3300984"/>
+            <a:ext cx="4535424" cy="365760"/>
+          </a:xfrm>
+          <a:prstGeom prst="rect">
+            <a:avLst/>
+          </a:prstGeom>
+          <a:noFill/>
+          <a:ln/>
+        </p:spPr>
+        <p:txBody>
+          <a:bodyPr wrap="square" lIns="0" tIns="0" rIns="0" bIns="0" rtlCol="0" anchor="t"/>
+          <a:lstStyle/>
+          <a:p>
+            <a:pPr algn="ctr" indent="0" marL="0">
+              <a:buNone/>
+            </a:pPr>
+            <a:r>
+              <a:rPr lang="en-US" sz="1400" b="1" dirty="0">
+                <a:solidFill>
+                  <a:srgbClr val="E8A33D"/>
                 </a:solidFill>
                 <a:latin typeface="Malgun Gothic" pitchFamily="34" charset="0"/>
                 <a:ea typeface="Malgun Gothic" pitchFamily="34" charset="-122"/>
                 <a:cs typeface="Malgun Gothic" pitchFamily="34" charset="-120"/>
               </a:rPr>
-              <a:t>블록 안에서 이 스레드의 번호 (0 ~ 511)</a:t>
-            </a:r>
-            <a:endParaRPr lang="en-US" sz="1550" dirty="0"/>
-          </a:p>
-        </p:txBody>
-      </p:sp>
-      <p:sp>
-        <p:nvSpPr>
-          <p:cNvPr id="12" name="Text 10"/>
-          <p:cNvSpPr/>
-          <p:nvPr/>
-        </p:nvSpPr>
-        <p:spPr>
-          <a:xfrm>
-            <a:off x="9326880" y="3136392"/>
-            <a:ext cx="2103120" cy="621792"/>
+              <a:t>SM (Streaming Multiprocessor)</a:t>
+            </a:r>
+            <a:endParaRPr lang="en-US" sz="1400" dirty="0"/>
+          </a:p>
+        </p:txBody>
+      </p:sp>
+      <p:sp>
+        <p:nvSpPr>
+          <p:cNvPr id="19" name="Text 17"/>
+          <p:cNvSpPr/>
+          <p:nvPr/>
+        </p:nvSpPr>
+        <p:spPr>
+          <a:xfrm>
+            <a:off x="6967728" y="3575304"/>
+            <a:ext cx="4535424" cy="384048"/>
           </a:xfrm>
           <a:prstGeom prst="rect">
             <a:avLst/>
@@ -7570,56 +8368,124 @@
           <a:bodyPr wrap="square" lIns="0" tIns="0" rIns="0" bIns="0" rtlCol="0" anchor="ctr"/>
           <a:lstStyle/>
           <a:p>
-            <a:pPr algn="r" indent="0" marL="0">
-              <a:buNone/>
-            </a:pPr>
-            <a:r>
-              <a:rPr lang="en-US" sz="1250" i="1" dirty="0">
+            <a:pPr algn="ctr" indent="0" marL="0">
+              <a:buNone/>
+            </a:pPr>
+            <a:r>
+              <a:rPr lang="en-US" sz="1050" dirty="0">
                 <a:solidFill>
                   <a:srgbClr val="9FB0C4"/>
+                </a:solidFill>
+                <a:latin typeface="Courier New" pitchFamily="34" charset="0"/>
+                <a:ea typeface="Courier New" pitchFamily="34" charset="-122"/>
+                <a:cs typeface="Courier New" pitchFamily="34" charset="-120"/>
+              </a:rPr>
+              <a:t>블록을 배정받아 실행</a:t>
+            </a:r>
+            <a:endParaRPr lang="en-US" sz="1050" dirty="0"/>
+          </a:p>
+        </p:txBody>
+      </p:sp>
+      <p:sp>
+        <p:nvSpPr>
+          <p:cNvPr id="20" name="Shape 18"/>
+          <p:cNvSpPr/>
+          <p:nvPr/>
+        </p:nvSpPr>
+        <p:spPr>
+          <a:xfrm>
+            <a:off x="4919472" y="3621024"/>
+            <a:ext cx="1865376" cy="0"/>
+          </a:xfrm>
+          <a:prstGeom prst="line">
+            <a:avLst/>
+          </a:prstGeom>
+          <a:noFill/>
+          <a:ln w="22860">
+            <a:solidFill>
+              <a:srgbClr val="6B7D94"/>
+            </a:solidFill>
+            <a:prstDash val="solid"/>
+            <a:tailEnd type="triangle"/>
+          </a:ln>
+        </p:spPr>
+      </p:sp>
+      <p:sp>
+        <p:nvSpPr>
+          <p:cNvPr id="21" name="Shape 19"/>
+          <p:cNvSpPr/>
+          <p:nvPr/>
+        </p:nvSpPr>
+        <p:spPr>
+          <a:xfrm>
+            <a:off x="548640" y="4178808"/>
+            <a:ext cx="4297680" cy="822960"/>
+          </a:xfrm>
+          <a:prstGeom prst="roundRect">
+            <a:avLst>
+              <a:gd name="adj" fmla="val 5556"/>
+            </a:avLst>
+          </a:prstGeom>
+          <a:solidFill>
+            <a:srgbClr val="12212A"/>
+          </a:solidFill>
+          <a:ln w="19050">
+            <a:solidFill>
+              <a:srgbClr val="3FB8C4"/>
+            </a:solidFill>
+            <a:prstDash val="solid"/>
+          </a:ln>
+        </p:spPr>
+      </p:sp>
+      <p:sp>
+        <p:nvSpPr>
+          <p:cNvPr id="22" name="Text 20"/>
+          <p:cNvSpPr/>
+          <p:nvPr/>
+        </p:nvSpPr>
+        <p:spPr>
+          <a:xfrm>
+            <a:off x="658368" y="4270248"/>
+            <a:ext cx="4078224" cy="365760"/>
+          </a:xfrm>
+          <a:prstGeom prst="rect">
+            <a:avLst/>
+          </a:prstGeom>
+          <a:noFill/>
+          <a:ln/>
+        </p:spPr>
+        <p:txBody>
+          <a:bodyPr wrap="square" lIns="0" tIns="0" rIns="0" bIns="0" rtlCol="0" anchor="t"/>
+          <a:lstStyle/>
+          <a:p>
+            <a:pPr algn="ctr" indent="0" marL="0">
+              <a:buNone/>
+            </a:pPr>
+            <a:r>
+              <a:rPr lang="en-US" sz="1400" b="1" dirty="0">
+                <a:solidFill>
+                  <a:srgbClr val="3FB8C4"/>
                 </a:solidFill>
                 <a:latin typeface="Malgun Gothic" pitchFamily="34" charset="0"/>
                 <a:ea typeface="Malgun Gothic" pitchFamily="34" charset="-122"/>
                 <a:cs typeface="Malgun Gothic" pitchFamily="34" charset="-120"/>
               </a:rPr>
-              <a:t>스레드마다 다름</a:t>
-            </a:r>
-            <a:endParaRPr lang="en-US" sz="1250" dirty="0"/>
-          </a:p>
-        </p:txBody>
-      </p:sp>
-      <p:sp>
-        <p:nvSpPr>
-          <p:cNvPr id="13" name="Shape 11"/>
-          <p:cNvSpPr/>
-          <p:nvPr/>
-        </p:nvSpPr>
-        <p:spPr>
-          <a:xfrm>
-            <a:off x="548640" y="3995928"/>
-            <a:ext cx="11064240" cy="841248"/>
-          </a:xfrm>
-          <a:prstGeom prst="roundRect">
-            <a:avLst>
-              <a:gd name="adj" fmla="val 8696"/>
-            </a:avLst>
-          </a:prstGeom>
-          <a:solidFill>
-            <a:srgbClr val="18212E"/>
-          </a:solidFill>
-          <a:ln/>
-        </p:spPr>
-      </p:sp>
-      <p:sp>
-        <p:nvSpPr>
-          <p:cNvPr id="14" name="Text 12"/>
-          <p:cNvSpPr/>
-          <p:nvPr/>
-        </p:nvSpPr>
-        <p:spPr>
-          <a:xfrm>
-            <a:off x="822960" y="4105656"/>
-            <a:ext cx="2926080" cy="621792"/>
+              <a:t>워프 (Warp) = 32 스레드</a:t>
+            </a:r>
+            <a:endParaRPr lang="en-US" sz="1400" dirty="0"/>
+          </a:p>
+        </p:txBody>
+      </p:sp>
+      <p:sp>
+        <p:nvSpPr>
+          <p:cNvPr id="23" name="Text 21"/>
+          <p:cNvSpPr/>
+          <p:nvPr/>
+        </p:nvSpPr>
+        <p:spPr>
+          <a:xfrm>
+            <a:off x="658368" y="4544568"/>
+            <a:ext cx="4078224" cy="384048"/>
           </a:xfrm>
           <a:prstGeom prst="rect">
             <a:avLst/>
@@ -7631,73 +8497,100 @@
           <a:bodyPr wrap="square" lIns="0" tIns="0" rIns="0" bIns="0" rtlCol="0" anchor="ctr"/>
           <a:lstStyle/>
           <a:p>
-            <a:pPr indent="0" marL="0">
-              <a:buNone/>
-            </a:pPr>
-            <a:r>
-              <a:rPr lang="en-US" sz="1900" b="1" dirty="0">
-                <a:solidFill>
-                  <a:srgbClr val="3FB8C4"/>
+            <a:pPr algn="ctr" indent="0" marL="0">
+              <a:buNone/>
+            </a:pPr>
+            <a:r>
+              <a:rPr lang="en-US" sz="1050" dirty="0">
+                <a:solidFill>
+                  <a:srgbClr val="9FB0C4"/>
                 </a:solidFill>
                 <a:latin typeface="Courier New" pitchFamily="34" charset="0"/>
                 <a:ea typeface="Courier New" pitchFamily="34" charset="-122"/>
                 <a:cs typeface="Courier New" pitchFamily="34" charset="-120"/>
               </a:rPr>
-              <a:t>blockDim.x</a:t>
-            </a:r>
-            <a:endParaRPr lang="en-US" sz="1900" dirty="0"/>
-          </a:p>
-        </p:txBody>
-      </p:sp>
-      <p:sp>
-        <p:nvSpPr>
-          <p:cNvPr id="15" name="Text 13"/>
-          <p:cNvSpPr/>
-          <p:nvPr/>
-        </p:nvSpPr>
-        <p:spPr>
-          <a:xfrm>
-            <a:off x="3931920" y="4105656"/>
-            <a:ext cx="5212080" cy="621792"/>
-          </a:xfrm>
-          <a:prstGeom prst="rect">
-            <a:avLst/>
-          </a:prstGeom>
-          <a:noFill/>
-          <a:ln/>
-        </p:spPr>
-        <p:txBody>
-          <a:bodyPr wrap="square" lIns="0" tIns="0" rIns="0" bIns="0" rtlCol="0" anchor="ctr"/>
-          <a:lstStyle/>
-          <a:p>
-            <a:pPr indent="0" marL="0">
-              <a:buNone/>
-            </a:pPr>
-            <a:r>
-              <a:rPr lang="en-US" sz="1550" dirty="0">
-                <a:solidFill>
-                  <a:srgbClr val="E7EDF5"/>
+              <a:t>블록을 32개씩 묶음</a:t>
+            </a:r>
+            <a:endParaRPr lang="en-US" sz="1050" dirty="0"/>
+          </a:p>
+        </p:txBody>
+      </p:sp>
+      <p:sp>
+        <p:nvSpPr>
+          <p:cNvPr id="24" name="Shape 22"/>
+          <p:cNvSpPr/>
+          <p:nvPr/>
+        </p:nvSpPr>
+        <p:spPr>
+          <a:xfrm>
+            <a:off x="6858000" y="4178808"/>
+            <a:ext cx="4754880" cy="822960"/>
+          </a:xfrm>
+          <a:prstGeom prst="roundRect">
+            <a:avLst>
+              <a:gd name="adj" fmla="val 5556"/>
+            </a:avLst>
+          </a:prstGeom>
+          <a:solidFill>
+            <a:srgbClr val="241A16"/>
+          </a:solidFill>
+          <a:ln w="19050">
+            <a:solidFill>
+              <a:srgbClr val="E8A33D"/>
+            </a:solidFill>
+            <a:prstDash val="solid"/>
+          </a:ln>
+        </p:spPr>
+      </p:sp>
+      <p:sp>
+        <p:nvSpPr>
+          <p:cNvPr id="25" name="Text 23"/>
+          <p:cNvSpPr/>
+          <p:nvPr/>
+        </p:nvSpPr>
+        <p:spPr>
+          <a:xfrm>
+            <a:off x="6967728" y="4270248"/>
+            <a:ext cx="4535424" cy="365760"/>
+          </a:xfrm>
+          <a:prstGeom prst="rect">
+            <a:avLst/>
+          </a:prstGeom>
+          <a:noFill/>
+          <a:ln/>
+        </p:spPr>
+        <p:txBody>
+          <a:bodyPr wrap="square" lIns="0" tIns="0" rIns="0" bIns="0" rtlCol="0" anchor="t"/>
+          <a:lstStyle/>
+          <a:p>
+            <a:pPr algn="ctr" indent="0" marL="0">
+              <a:buNone/>
+            </a:pPr>
+            <a:r>
+              <a:rPr lang="en-US" sz="1400" b="1" dirty="0">
+                <a:solidFill>
+                  <a:srgbClr val="E8A33D"/>
                 </a:solidFill>
                 <a:latin typeface="Malgun Gothic" pitchFamily="34" charset="0"/>
                 <a:ea typeface="Malgun Gothic" pitchFamily="34" charset="-122"/>
                 <a:cs typeface="Malgun Gothic" pitchFamily="34" charset="-120"/>
               </a:rPr>
-              <a:t>블록당 스레드 수 (= 512)</a:t>
-            </a:r>
-            <a:endParaRPr lang="en-US" sz="1550" dirty="0"/>
-          </a:p>
-        </p:txBody>
-      </p:sp>
-      <p:sp>
-        <p:nvSpPr>
-          <p:cNvPr id="16" name="Text 14"/>
-          <p:cNvSpPr/>
-          <p:nvPr/>
-        </p:nvSpPr>
-        <p:spPr>
-          <a:xfrm>
-            <a:off x="9326880" y="4105656"/>
-            <a:ext cx="2103120" cy="621792"/>
+              <a:t>워프 스케줄러 (SIMT)</a:t>
+            </a:r>
+            <a:endParaRPr lang="en-US" sz="1400" dirty="0"/>
+          </a:p>
+        </p:txBody>
+      </p:sp>
+      <p:sp>
+        <p:nvSpPr>
+          <p:cNvPr id="26" name="Text 24"/>
+          <p:cNvSpPr/>
+          <p:nvPr/>
+        </p:nvSpPr>
+        <p:spPr>
+          <a:xfrm>
+            <a:off x="6967728" y="4544568"/>
+            <a:ext cx="4535424" cy="384048"/>
           </a:xfrm>
           <a:prstGeom prst="rect">
             <a:avLst/>
@@ -7709,56 +8602,124 @@
           <a:bodyPr wrap="square" lIns="0" tIns="0" rIns="0" bIns="0" rtlCol="0" anchor="ctr"/>
           <a:lstStyle/>
           <a:p>
-            <a:pPr algn="r" indent="0" marL="0">
-              <a:buNone/>
-            </a:pPr>
-            <a:r>
-              <a:rPr lang="en-US" sz="1250" i="1" dirty="0">
+            <a:pPr algn="ctr" indent="0" marL="0">
+              <a:buNone/>
+            </a:pPr>
+            <a:r>
+              <a:rPr lang="en-US" sz="1050" dirty="0">
                 <a:solidFill>
                   <a:srgbClr val="9FB0C4"/>
+                </a:solidFill>
+                <a:latin typeface="Courier New" pitchFamily="34" charset="0"/>
+                <a:ea typeface="Courier New" pitchFamily="34" charset="-122"/>
+                <a:cs typeface="Courier New" pitchFamily="34" charset="-120"/>
+              </a:rPr>
+              <a:t>32 스레드가 같은 명령 동시 실행</a:t>
+            </a:r>
+            <a:endParaRPr lang="en-US" sz="1050" dirty="0"/>
+          </a:p>
+        </p:txBody>
+      </p:sp>
+      <p:sp>
+        <p:nvSpPr>
+          <p:cNvPr id="27" name="Shape 25"/>
+          <p:cNvSpPr/>
+          <p:nvPr/>
+        </p:nvSpPr>
+        <p:spPr>
+          <a:xfrm>
+            <a:off x="4919472" y="4590288"/>
+            <a:ext cx="1865376" cy="0"/>
+          </a:xfrm>
+          <a:prstGeom prst="line">
+            <a:avLst/>
+          </a:prstGeom>
+          <a:noFill/>
+          <a:ln w="22860">
+            <a:solidFill>
+              <a:srgbClr val="6B7D94"/>
+            </a:solidFill>
+            <a:prstDash val="solid"/>
+            <a:tailEnd type="triangle"/>
+          </a:ln>
+        </p:spPr>
+      </p:sp>
+      <p:sp>
+        <p:nvSpPr>
+          <p:cNvPr id="28" name="Shape 26"/>
+          <p:cNvSpPr/>
+          <p:nvPr/>
+        </p:nvSpPr>
+        <p:spPr>
+          <a:xfrm>
+            <a:off x="548640" y="5148072"/>
+            <a:ext cx="4297680" cy="822960"/>
+          </a:xfrm>
+          <a:prstGeom prst="roundRect">
+            <a:avLst>
+              <a:gd name="adj" fmla="val 5556"/>
+            </a:avLst>
+          </a:prstGeom>
+          <a:solidFill>
+            <a:srgbClr val="12212A"/>
+          </a:solidFill>
+          <a:ln w="19050">
+            <a:solidFill>
+              <a:srgbClr val="3FB8C4"/>
+            </a:solidFill>
+            <a:prstDash val="solid"/>
+          </a:ln>
+        </p:spPr>
+      </p:sp>
+      <p:sp>
+        <p:nvSpPr>
+          <p:cNvPr id="29" name="Text 27"/>
+          <p:cNvSpPr/>
+          <p:nvPr/>
+        </p:nvSpPr>
+        <p:spPr>
+          <a:xfrm>
+            <a:off x="658368" y="5239512"/>
+            <a:ext cx="4078224" cy="365760"/>
+          </a:xfrm>
+          <a:prstGeom prst="rect">
+            <a:avLst/>
+          </a:prstGeom>
+          <a:noFill/>
+          <a:ln/>
+        </p:spPr>
+        <p:txBody>
+          <a:bodyPr wrap="square" lIns="0" tIns="0" rIns="0" bIns="0" rtlCol="0" anchor="t"/>
+          <a:lstStyle/>
+          <a:p>
+            <a:pPr algn="ctr" indent="0" marL="0">
+              <a:buNone/>
+            </a:pPr>
+            <a:r>
+              <a:rPr lang="en-US" sz="1400" b="1" dirty="0">
+                <a:solidFill>
+                  <a:srgbClr val="3FB8C4"/>
                 </a:solidFill>
                 <a:latin typeface="Malgun Gothic" pitchFamily="34" charset="0"/>
                 <a:ea typeface="Malgun Gothic" pitchFamily="34" charset="-122"/>
                 <a:cs typeface="Malgun Gothic" pitchFamily="34" charset="-120"/>
               </a:rPr>
-              <a:t>모두 같음</a:t>
-            </a:r>
-            <a:endParaRPr lang="en-US" sz="1250" dirty="0"/>
-          </a:p>
-        </p:txBody>
-      </p:sp>
-      <p:sp>
-        <p:nvSpPr>
-          <p:cNvPr id="17" name="Shape 15"/>
-          <p:cNvSpPr/>
-          <p:nvPr/>
-        </p:nvSpPr>
-        <p:spPr>
-          <a:xfrm>
-            <a:off x="548640" y="4965192"/>
-            <a:ext cx="11064240" cy="841248"/>
-          </a:xfrm>
-          <a:prstGeom prst="roundRect">
-            <a:avLst>
-              <a:gd name="adj" fmla="val 8696"/>
-            </a:avLst>
-          </a:prstGeom>
-          <a:solidFill>
-            <a:srgbClr val="18212E"/>
-          </a:solidFill>
-          <a:ln/>
-        </p:spPr>
-      </p:sp>
-      <p:sp>
-        <p:nvSpPr>
-          <p:cNvPr id="18" name="Text 16"/>
-          <p:cNvSpPr/>
-          <p:nvPr/>
-        </p:nvSpPr>
-        <p:spPr>
-          <a:xfrm>
-            <a:off x="822960" y="5074920"/>
-            <a:ext cx="2926080" cy="621792"/>
+              <a:t>스레드 (Thread)</a:t>
+            </a:r>
+            <a:endParaRPr lang="en-US" sz="1400" dirty="0"/>
+          </a:p>
+        </p:txBody>
+      </p:sp>
+      <p:sp>
+        <p:nvSpPr>
+          <p:cNvPr id="30" name="Text 28"/>
+          <p:cNvSpPr/>
+          <p:nvPr/>
+        </p:nvSpPr>
+        <p:spPr>
+          <a:xfrm>
+            <a:off x="658368" y="5513832"/>
+            <a:ext cx="4078224" cy="384048"/>
           </a:xfrm>
           <a:prstGeom prst="rect">
             <a:avLst/>
@@ -7770,73 +8731,100 @@
           <a:bodyPr wrap="square" lIns="0" tIns="0" rIns="0" bIns="0" rtlCol="0" anchor="ctr"/>
           <a:lstStyle/>
           <a:p>
-            <a:pPr indent="0" marL="0">
-              <a:buNone/>
-            </a:pPr>
-            <a:r>
-              <a:rPr lang="en-US" sz="1900" b="1" dirty="0">
-                <a:solidFill>
-                  <a:srgbClr val="E8A33D"/>
+            <a:pPr algn="ctr" indent="0" marL="0">
+              <a:buNone/>
+            </a:pPr>
+            <a:r>
+              <a:rPr lang="en-US" sz="1050" dirty="0">
+                <a:solidFill>
+                  <a:srgbClr val="9FB0C4"/>
                 </a:solidFill>
                 <a:latin typeface="Courier New" pitchFamily="34" charset="0"/>
                 <a:ea typeface="Courier New" pitchFamily="34" charset="-122"/>
                 <a:cs typeface="Courier New" pitchFamily="34" charset="-120"/>
               </a:rPr>
-              <a:t>gridDim.x</a:t>
-            </a:r>
-            <a:endParaRPr lang="en-US" sz="1900" dirty="0"/>
-          </a:p>
-        </p:txBody>
-      </p:sp>
-      <p:sp>
-        <p:nvSpPr>
-          <p:cNvPr id="19" name="Text 17"/>
-          <p:cNvSpPr/>
-          <p:nvPr/>
-        </p:nvSpPr>
-        <p:spPr>
-          <a:xfrm>
-            <a:off x="3931920" y="5074920"/>
-            <a:ext cx="5212080" cy="621792"/>
-          </a:xfrm>
-          <a:prstGeom prst="rect">
-            <a:avLst/>
-          </a:prstGeom>
-          <a:noFill/>
-          <a:ln/>
-        </p:spPr>
-        <p:txBody>
-          <a:bodyPr wrap="square" lIns="0" tIns="0" rIns="0" bIns="0" rtlCol="0" anchor="ctr"/>
-          <a:lstStyle/>
-          <a:p>
-            <a:pPr indent="0" marL="0">
-              <a:buNone/>
-            </a:pPr>
-            <a:r>
-              <a:rPr lang="en-US" sz="1550" dirty="0">
-                <a:solidFill>
-                  <a:srgbClr val="E7EDF5"/>
+              <a:t>threadIdx.x</a:t>
+            </a:r>
+            <a:endParaRPr lang="en-US" sz="1050" dirty="0"/>
+          </a:p>
+        </p:txBody>
+      </p:sp>
+      <p:sp>
+        <p:nvSpPr>
+          <p:cNvPr id="31" name="Shape 29"/>
+          <p:cNvSpPr/>
+          <p:nvPr/>
+        </p:nvSpPr>
+        <p:spPr>
+          <a:xfrm>
+            <a:off x="6858000" y="5148072"/>
+            <a:ext cx="4754880" cy="822960"/>
+          </a:xfrm>
+          <a:prstGeom prst="roundRect">
+            <a:avLst>
+              <a:gd name="adj" fmla="val 5556"/>
+            </a:avLst>
+          </a:prstGeom>
+          <a:solidFill>
+            <a:srgbClr val="241A16"/>
+          </a:solidFill>
+          <a:ln w="19050">
+            <a:solidFill>
+              <a:srgbClr val="E8A33D"/>
+            </a:solidFill>
+            <a:prstDash val="solid"/>
+          </a:ln>
+        </p:spPr>
+      </p:sp>
+      <p:sp>
+        <p:nvSpPr>
+          <p:cNvPr id="32" name="Text 30"/>
+          <p:cNvSpPr/>
+          <p:nvPr/>
+        </p:nvSpPr>
+        <p:spPr>
+          <a:xfrm>
+            <a:off x="6967728" y="5239512"/>
+            <a:ext cx="4535424" cy="365760"/>
+          </a:xfrm>
+          <a:prstGeom prst="rect">
+            <a:avLst/>
+          </a:prstGeom>
+          <a:noFill/>
+          <a:ln/>
+        </p:spPr>
+        <p:txBody>
+          <a:bodyPr wrap="square" lIns="0" tIns="0" rIns="0" bIns="0" rtlCol="0" anchor="t"/>
+          <a:lstStyle/>
+          <a:p>
+            <a:pPr algn="ctr" indent="0" marL="0">
+              <a:buNone/>
+            </a:pPr>
+            <a:r>
+              <a:rPr lang="en-US" sz="1400" b="1" dirty="0">
+                <a:solidFill>
+                  <a:srgbClr val="E8A33D"/>
                 </a:solidFill>
                 <a:latin typeface="Malgun Gothic" pitchFamily="34" charset="0"/>
                 <a:ea typeface="Malgun Gothic" pitchFamily="34" charset="-122"/>
                 <a:cs typeface="Malgun Gothic" pitchFamily="34" charset="-120"/>
               </a:rPr>
-              <a:t>그리드의 블록 수 (= 1024)</a:t>
-            </a:r>
-            <a:endParaRPr lang="en-US" sz="1550" dirty="0"/>
-          </a:p>
-        </p:txBody>
-      </p:sp>
-      <p:sp>
-        <p:nvSpPr>
-          <p:cNvPr id="20" name="Text 18"/>
-          <p:cNvSpPr/>
-          <p:nvPr/>
-        </p:nvSpPr>
-        <p:spPr>
-          <a:xfrm>
-            <a:off x="9326880" y="5074920"/>
-            <a:ext cx="2103120" cy="621792"/>
+              <a:t>CUDA 코어 (lane)</a:t>
+            </a:r>
+            <a:endParaRPr lang="en-US" sz="1400" dirty="0"/>
+          </a:p>
+        </p:txBody>
+      </p:sp>
+      <p:sp>
+        <p:nvSpPr>
+          <p:cNvPr id="33" name="Text 31"/>
+          <p:cNvSpPr/>
+          <p:nvPr/>
+        </p:nvSpPr>
+        <p:spPr>
+          <a:xfrm>
+            <a:off x="6967728" y="5513832"/>
+            <a:ext cx="4535424" cy="384048"/>
           </a:xfrm>
           <a:prstGeom prst="rect">
             <a:avLst/>
@@ -7848,60 +8836,131 @@
           <a:bodyPr wrap="square" lIns="0" tIns="0" rIns="0" bIns="0" rtlCol="0" anchor="ctr"/>
           <a:lstStyle/>
           <a:p>
-            <a:pPr algn="r" indent="0" marL="0">
-              <a:buNone/>
-            </a:pPr>
-            <a:r>
-              <a:rPr lang="en-US" sz="1250" i="1" dirty="0">
+            <a:pPr algn="ctr" indent="0" marL="0">
+              <a:buNone/>
+            </a:pPr>
+            <a:r>
+              <a:rPr lang="en-US" sz="1050" dirty="0">
                 <a:solidFill>
                   <a:srgbClr val="9FB0C4"/>
+                </a:solidFill>
+                <a:latin typeface="Courier New" pitchFamily="34" charset="0"/>
+                <a:ea typeface="Courier New" pitchFamily="34" charset="-122"/>
+                <a:cs typeface="Courier New" pitchFamily="34" charset="-120"/>
+              </a:rPr>
+              <a:t>한 스레드의 연산 담당</a:t>
+            </a:r>
+            <a:endParaRPr lang="en-US" sz="1050" dirty="0"/>
+          </a:p>
+        </p:txBody>
+      </p:sp>
+      <p:sp>
+        <p:nvSpPr>
+          <p:cNvPr id="34" name="Shape 32"/>
+          <p:cNvSpPr/>
+          <p:nvPr/>
+        </p:nvSpPr>
+        <p:spPr>
+          <a:xfrm>
+            <a:off x="4919472" y="5559552"/>
+            <a:ext cx="1865376" cy="0"/>
+          </a:xfrm>
+          <a:prstGeom prst="line">
+            <a:avLst/>
+          </a:prstGeom>
+          <a:noFill/>
+          <a:ln w="22860">
+            <a:solidFill>
+              <a:srgbClr val="6B7D94"/>
+            </a:solidFill>
+            <a:prstDash val="solid"/>
+            <a:tailEnd type="triangle"/>
+          </a:ln>
+        </p:spPr>
+      </p:sp>
+      <p:sp>
+        <p:nvSpPr>
+          <p:cNvPr id="35" name="Shape 33"/>
+          <p:cNvSpPr/>
+          <p:nvPr/>
+        </p:nvSpPr>
+        <p:spPr>
+          <a:xfrm>
+            <a:off x="548640" y="6099048"/>
+            <a:ext cx="11064240" cy="868680"/>
+          </a:xfrm>
+          <a:prstGeom prst="roundRect">
+            <a:avLst>
+              <a:gd name="adj" fmla="val 8421"/>
+            </a:avLst>
+          </a:prstGeom>
+          <a:solidFill>
+            <a:srgbClr val="12212A"/>
+          </a:solidFill>
+          <a:ln w="19050">
+            <a:solidFill>
+              <a:srgbClr val="3FB8C4"/>
+            </a:solidFill>
+            <a:prstDash val="solid"/>
+          </a:ln>
+        </p:spPr>
+      </p:sp>
+      <p:sp>
+        <p:nvSpPr>
+          <p:cNvPr id="36" name="Text 34"/>
+          <p:cNvSpPr/>
+          <p:nvPr/>
+        </p:nvSpPr>
+        <p:spPr>
+          <a:xfrm>
+            <a:off x="822960" y="6245352"/>
+            <a:ext cx="10515600" cy="640080"/>
+          </a:xfrm>
+          <a:prstGeom prst="rect">
+            <a:avLst/>
+          </a:prstGeom>
+          <a:noFill/>
+          <a:ln/>
+        </p:spPr>
+        <p:txBody>
+          <a:bodyPr wrap="square" lIns="0" tIns="0" rIns="0" bIns="0" rtlCol="0" anchor="t"/>
+          <a:lstStyle/>
+          <a:p>
+            <a:pPr indent="0" marL="0">
+              <a:lnSpc>
+                <a:spcPct val="112000"/>
+              </a:lnSpc>
+              <a:buNone/>
+            </a:pPr>
+            <a:r>
+              <a:rPr lang="en-US" sz="1350" b="1" dirty="0">
+                <a:solidFill>
+                  <a:srgbClr val="3FB8C4"/>
                 </a:solidFill>
                 <a:latin typeface="Malgun Gothic" pitchFamily="34" charset="0"/>
                 <a:ea typeface="Malgun Gothic" pitchFamily="34" charset="-122"/>
                 <a:cs typeface="Malgun Gothic" pitchFamily="34" charset="-120"/>
               </a:rPr>
-              <a:t>모두 같음</a:t>
-            </a:r>
-            <a:endParaRPr lang="en-US" sz="1250" dirty="0"/>
-          </a:p>
-        </p:txBody>
-      </p:sp>
-      <p:sp>
-        <p:nvSpPr>
-          <p:cNvPr id="21" name="Text 19"/>
-          <p:cNvSpPr/>
-          <p:nvPr/>
-        </p:nvSpPr>
-        <p:spPr>
-          <a:xfrm>
-            <a:off x="548640" y="6172200"/>
-            <a:ext cx="11064240" cy="365760"/>
-          </a:xfrm>
-          <a:prstGeom prst="rect">
-            <a:avLst/>
-          </a:prstGeom>
-          <a:noFill/>
-          <a:ln/>
-        </p:spPr>
-        <p:txBody>
-          <a:bodyPr wrap="square" lIns="0" tIns="0" rIns="0" bIns="0" rtlCol="0" anchor="ctr"/>
-          <a:lstStyle/>
-          <a:p>
+              <a:t>MemtestG80: 블록당 512 스레드 = 16 워프. </a:t>
+            </a:r>
             <a:pPr indent="0" marL="0">
-              <a:buNone/>
-            </a:pPr>
-            <a:r>
-              <a:rPr lang="en-US" sz="1300" i="1" dirty="0">
-                <a:solidFill>
-                  <a:srgbClr val="9FB0C4"/>
+              <a:lnSpc>
+                <a:spcPct val="112000"/>
+              </a:lnSpc>
+              <a:buNone/>
+            </a:pPr>
+            <a:r>
+              <a:rPr lang="en-US" sz="1350" dirty="0">
+                <a:solidFill>
+                  <a:srgbClr val="E7EDF5"/>
                 </a:solidFill>
                 <a:latin typeface="Malgun Gothic" pitchFamily="34" charset="0"/>
                 <a:ea typeface="Malgun Gothic" pitchFamily="34" charset="-122"/>
                 <a:cs typeface="Malgun Gothic" pitchFamily="34" charset="-120"/>
               </a:rPr>
-              <a:t>이 저장소는 .x 만 씁니다 (1차원). 메모리는 결국 1차원 주소 공간이기 때문입니다.</a:t>
-            </a:r>
-            <a:endParaRPr lang="en-US" sz="1300" dirty="0"/>
+              <a:t>같은 워프의 32 스레드가 인접 주소를 읽어 메모리 병합(coalescing)이 일어납니다 (다음 슬라이드). SIMT = 한 명령을 32 스레드가 함께 실행.</a:t>
+            </a:r>
+            <a:endParaRPr lang="en-US" sz="1350" dirty="0"/>
           </a:p>
         </p:txBody>
       </p:sp>
@@ -7974,7 +9033,7 @@
                 <a:ea typeface="Courier New" pitchFamily="34" charset="-122"/>
                 <a:cs typeface="Courier New" pitchFamily="34" charset="-120"/>
               </a:rPr>
-              <a:t>5</a:t>
+              <a:t>4</a:t>
             </a:r>
             <a:endParaRPr lang="en-US" sz="2200" dirty="0"/>
           </a:p>
@@ -8013,7 +9072,7 @@
                 <a:ea typeface="Malgun Gothic" pitchFamily="34" charset="-122"/>
                 <a:cs typeface="Malgun Gothic" pitchFamily="34" charset="-120"/>
               </a:rPr>
-              <a:t>★ THREAD_ADDRESS · 모든 테스트의 심장</a:t>
+              <a:t>내장 변수 · 스레드의 신분증</a:t>
             </a:r>
             <a:endParaRPr lang="en-US" sz="2900" dirty="0"/>
           </a:p>
@@ -8021,232 +9080,547 @@
       </p:sp>
       <p:sp>
         <p:nvSpPr>
-          <p:cNvPr id="4" name="Shape 2"/>
+          <p:cNvPr id="4" name="Text 2"/>
           <p:cNvSpPr/>
           <p:nvPr/>
         </p:nvSpPr>
         <p:spPr>
           <a:xfrm>
             <a:off x="548640" y="1463040"/>
-            <a:ext cx="11064240" cy="1371600"/>
+            <a:ext cx="11064240" cy="457200"/>
+          </a:xfrm>
+          <a:prstGeom prst="rect">
+            <a:avLst/>
+          </a:prstGeom>
+          <a:noFill/>
+          <a:ln/>
+        </p:spPr>
+        <p:txBody>
+          <a:bodyPr wrap="square" lIns="0" tIns="0" rIns="0" bIns="0" rtlCol="0" anchor="ctr"/>
+          <a:lstStyle/>
+          <a:p>
+            <a:pPr indent="0" marL="0">
+              <a:buNone/>
+            </a:pPr>
+            <a:r>
+              <a:rPr lang="en-US" sz="1600" dirty="0">
+                <a:solidFill>
+                  <a:srgbClr val="9FB0C4"/>
+                </a:solidFill>
+                <a:latin typeface="Malgun Gothic" pitchFamily="34" charset="0"/>
+                <a:ea typeface="Malgun Gothic" pitchFamily="34" charset="-122"/>
+                <a:cs typeface="Malgun Gothic" pitchFamily="34" charset="-120"/>
+              </a:rPr>
+              <a:t>커널 안에서 자동으로 주어지는 값들. 이것으로 '내가 전체에서 몇 번째인지'를 계산합니다.</a:t>
+            </a:r>
+            <a:endParaRPr lang="en-US" sz="1600" dirty="0"/>
+          </a:p>
+        </p:txBody>
+      </p:sp>
+      <p:sp>
+        <p:nvSpPr>
+          <p:cNvPr id="5" name="Shape 3"/>
+          <p:cNvSpPr/>
+          <p:nvPr/>
+        </p:nvSpPr>
+        <p:spPr>
+          <a:xfrm>
+            <a:off x="548640" y="2057400"/>
+            <a:ext cx="11064240" cy="841248"/>
           </a:xfrm>
           <a:prstGeom prst="roundRect">
             <a:avLst>
-              <a:gd name="adj" fmla="val 3333"/>
+              <a:gd name="adj" fmla="val 8696"/>
             </a:avLst>
           </a:prstGeom>
           <a:solidFill>
-            <a:srgbClr val="0B1119"/>
+            <a:srgbClr val="18212E"/>
           </a:solidFill>
-          <a:ln w="12700">
-            <a:solidFill>
-              <a:srgbClr val="2C3A4E"/>
-            </a:solidFill>
-            <a:prstDash val="solid"/>
-          </a:ln>
-        </p:spPr>
-      </p:sp>
-      <p:sp>
-        <p:nvSpPr>
-          <p:cNvPr id="5" name="Text 3"/>
-          <p:cNvSpPr/>
-          <p:nvPr/>
-        </p:nvSpPr>
-        <p:spPr>
-          <a:xfrm>
-            <a:off x="768096" y="1609344"/>
-            <a:ext cx="10625328" cy="1078992"/>
-          </a:xfrm>
-          <a:prstGeom prst="rect">
-            <a:avLst/>
-          </a:prstGeom>
-          <a:noFill/>
-          <a:ln/>
-        </p:spPr>
-        <p:txBody>
-          <a:bodyPr wrap="square" lIns="0" tIns="0" rIns="0" bIns="0" rtlCol="0" anchor="t"/>
-          <a:lstStyle/>
-          <a:p>
-            <a:pPr algn="l" indent="0" marL="0">
-              <a:lnSpc>
-                <a:spcPct val="110000"/>
-              </a:lnSpc>
-              <a:buNone/>
-            </a:pPr>
-            <a:r>
-              <a:rPr lang="en-US" sz="1400" dirty="0">
-                <a:solidFill>
-                  <a:srgbClr val="F2C079"/>
+          <a:ln/>
+        </p:spPr>
+      </p:sp>
+      <p:sp>
+        <p:nvSpPr>
+          <p:cNvPr id="6" name="Text 4"/>
+          <p:cNvSpPr/>
+          <p:nvPr/>
+        </p:nvSpPr>
+        <p:spPr>
+          <a:xfrm>
+            <a:off x="822960" y="2167128"/>
+            <a:ext cx="2926080" cy="621792"/>
+          </a:xfrm>
+          <a:prstGeom prst="rect">
+            <a:avLst/>
+          </a:prstGeom>
+          <a:noFill/>
+          <a:ln/>
+        </p:spPr>
+        <p:txBody>
+          <a:bodyPr wrap="square" lIns="0" tIns="0" rIns="0" bIns="0" rtlCol="0" anchor="ctr"/>
+          <a:lstStyle/>
+          <a:p>
+            <a:pPr indent="0" marL="0">
+              <a:buNone/>
+            </a:pPr>
+            <a:r>
+              <a:rPr lang="en-US" sz="1900" b="1" dirty="0">
+                <a:solidFill>
+                  <a:srgbClr val="E8A33D"/>
                 </a:solidFill>
                 <a:latin typeface="Courier New" pitchFamily="34" charset="0"/>
                 <a:ea typeface="Courier New" pitchFamily="34" charset="-122"/>
                 <a:cs typeface="Courier New" pitchFamily="34" charset="-120"/>
               </a:rPr>
-              <a:t>#define THREAD_ADDRESS(base, N, i)   \</a:t>
-            </a:r>
-            <a:endParaRPr lang="en-US" sz="1400" dirty="0"/>
-          </a:p>
-          <a:p>
-            <a:pPr algn="l" indent="0" marL="0">
-              <a:lnSpc>
-                <a:spcPct val="110000"/>
-              </a:lnSpc>
-              <a:buNone/>
-            </a:pPr>
-            <a:r>
-              <a:rPr lang="en-US" sz="1400" dirty="0">
+              <a:t>blockIdx.x</a:t>
+            </a:r>
+            <a:endParaRPr lang="en-US" sz="1900" dirty="0"/>
+          </a:p>
+        </p:txBody>
+      </p:sp>
+      <p:sp>
+        <p:nvSpPr>
+          <p:cNvPr id="7" name="Text 5"/>
+          <p:cNvSpPr/>
+          <p:nvPr/>
+        </p:nvSpPr>
+        <p:spPr>
+          <a:xfrm>
+            <a:off x="3931920" y="2167128"/>
+            <a:ext cx="5212080" cy="621792"/>
+          </a:xfrm>
+          <a:prstGeom prst="rect">
+            <a:avLst/>
+          </a:prstGeom>
+          <a:noFill/>
+          <a:ln/>
+        </p:spPr>
+        <p:txBody>
+          <a:bodyPr wrap="square" lIns="0" tIns="0" rIns="0" bIns="0" rtlCol="0" anchor="ctr"/>
+          <a:lstStyle/>
+          <a:p>
+            <a:pPr indent="0" marL="0">
+              <a:buNone/>
+            </a:pPr>
+            <a:r>
+              <a:rPr lang="en-US" sz="1550" dirty="0">
                 <a:solidFill>
                   <a:srgbClr val="E7EDF5"/>
+                </a:solidFill>
+                <a:latin typeface="Malgun Gothic" pitchFamily="34" charset="0"/>
+                <a:ea typeface="Malgun Gothic" pitchFamily="34" charset="-122"/>
+                <a:cs typeface="Malgun Gothic" pitchFamily="34" charset="-120"/>
+              </a:rPr>
+              <a:t>지금 이 블록의 번호 (0 ~ 1023)</a:t>
+            </a:r>
+            <a:endParaRPr lang="en-US" sz="1550" dirty="0"/>
+          </a:p>
+        </p:txBody>
+      </p:sp>
+      <p:sp>
+        <p:nvSpPr>
+          <p:cNvPr id="8" name="Text 6"/>
+          <p:cNvSpPr/>
+          <p:nvPr/>
+        </p:nvSpPr>
+        <p:spPr>
+          <a:xfrm>
+            <a:off x="9326880" y="2167128"/>
+            <a:ext cx="2103120" cy="621792"/>
+          </a:xfrm>
+          <a:prstGeom prst="rect">
+            <a:avLst/>
+          </a:prstGeom>
+          <a:noFill/>
+          <a:ln/>
+        </p:spPr>
+        <p:txBody>
+          <a:bodyPr wrap="square" lIns="0" tIns="0" rIns="0" bIns="0" rtlCol="0" anchor="ctr"/>
+          <a:lstStyle/>
+          <a:p>
+            <a:pPr algn="r" indent="0" marL="0">
+              <a:buNone/>
+            </a:pPr>
+            <a:r>
+              <a:rPr lang="en-US" sz="1250" i="1" dirty="0">
+                <a:solidFill>
+                  <a:srgbClr val="9FB0C4"/>
+                </a:solidFill>
+                <a:latin typeface="Malgun Gothic" pitchFamily="34" charset="0"/>
+                <a:ea typeface="Malgun Gothic" pitchFamily="34" charset="-122"/>
+                <a:cs typeface="Malgun Gothic" pitchFamily="34" charset="-120"/>
+              </a:rPr>
+              <a:t>스레드마다 다름</a:t>
+            </a:r>
+            <a:endParaRPr lang="en-US" sz="1250" dirty="0"/>
+          </a:p>
+        </p:txBody>
+      </p:sp>
+      <p:sp>
+        <p:nvSpPr>
+          <p:cNvPr id="9" name="Shape 7"/>
+          <p:cNvSpPr/>
+          <p:nvPr/>
+        </p:nvSpPr>
+        <p:spPr>
+          <a:xfrm>
+            <a:off x="548640" y="3026664"/>
+            <a:ext cx="11064240" cy="841248"/>
+          </a:xfrm>
+          <a:prstGeom prst="roundRect">
+            <a:avLst>
+              <a:gd name="adj" fmla="val 8696"/>
+            </a:avLst>
+          </a:prstGeom>
+          <a:solidFill>
+            <a:srgbClr val="18212E"/>
+          </a:solidFill>
+          <a:ln/>
+        </p:spPr>
+      </p:sp>
+      <p:sp>
+        <p:nvSpPr>
+          <p:cNvPr id="10" name="Text 8"/>
+          <p:cNvSpPr/>
+          <p:nvPr/>
+        </p:nvSpPr>
+        <p:spPr>
+          <a:xfrm>
+            <a:off x="822960" y="3136392"/>
+            <a:ext cx="2926080" cy="621792"/>
+          </a:xfrm>
+          <a:prstGeom prst="rect">
+            <a:avLst/>
+          </a:prstGeom>
+          <a:noFill/>
+          <a:ln/>
+        </p:spPr>
+        <p:txBody>
+          <a:bodyPr wrap="square" lIns="0" tIns="0" rIns="0" bIns="0" rtlCol="0" anchor="ctr"/>
+          <a:lstStyle/>
+          <a:p>
+            <a:pPr indent="0" marL="0">
+              <a:buNone/>
+            </a:pPr>
+            <a:r>
+              <a:rPr lang="en-US" sz="1900" b="1" dirty="0">
+                <a:solidFill>
+                  <a:srgbClr val="3FB8C4"/>
                 </a:solidFill>
                 <a:latin typeface="Courier New" pitchFamily="34" charset="0"/>
                 <a:ea typeface="Courier New" pitchFamily="34" charset="-122"/>
                 <a:cs typeface="Courier New" pitchFamily="34" charset="-120"/>
               </a:rPr>
-              <a:t>   ( base</a:t>
-            </a:r>
-            <a:pPr algn="l" indent="0" marL="0">
-              <a:lnSpc>
-                <a:spcPct val="110000"/>
-              </a:lnSpc>
-              <a:buNone/>
-            </a:pPr>
-            <a:r>
-              <a:rPr lang="en-US" sz="1400" dirty="0">
-                <a:solidFill>
-                  <a:srgbClr val="E8A33D"/>
+              <a:t>threadIdx.x</a:t>
+            </a:r>
+            <a:endParaRPr lang="en-US" sz="1900" dirty="0"/>
+          </a:p>
+        </p:txBody>
+      </p:sp>
+      <p:sp>
+        <p:nvSpPr>
+          <p:cNvPr id="11" name="Text 9"/>
+          <p:cNvSpPr/>
+          <p:nvPr/>
+        </p:nvSpPr>
+        <p:spPr>
+          <a:xfrm>
+            <a:off x="3931920" y="3136392"/>
+            <a:ext cx="5212080" cy="621792"/>
+          </a:xfrm>
+          <a:prstGeom prst="rect">
+            <a:avLst/>
+          </a:prstGeom>
+          <a:noFill/>
+          <a:ln/>
+        </p:spPr>
+        <p:txBody>
+          <a:bodyPr wrap="square" lIns="0" tIns="0" rIns="0" bIns="0" rtlCol="0" anchor="ctr"/>
+          <a:lstStyle/>
+          <a:p>
+            <a:pPr indent="0" marL="0">
+              <a:buNone/>
+            </a:pPr>
+            <a:r>
+              <a:rPr lang="en-US" sz="1550" dirty="0">
+                <a:solidFill>
+                  <a:srgbClr val="E7EDF5"/>
+                </a:solidFill>
+                <a:latin typeface="Malgun Gothic" pitchFamily="34" charset="0"/>
+                <a:ea typeface="Malgun Gothic" pitchFamily="34" charset="-122"/>
+                <a:cs typeface="Malgun Gothic" pitchFamily="34" charset="-120"/>
+              </a:rPr>
+              <a:t>블록 안에서 이 스레드의 번호 (0 ~ 511)</a:t>
+            </a:r>
+            <a:endParaRPr lang="en-US" sz="1550" dirty="0"/>
+          </a:p>
+        </p:txBody>
+      </p:sp>
+      <p:sp>
+        <p:nvSpPr>
+          <p:cNvPr id="12" name="Text 10"/>
+          <p:cNvSpPr/>
+          <p:nvPr/>
+        </p:nvSpPr>
+        <p:spPr>
+          <a:xfrm>
+            <a:off x="9326880" y="3136392"/>
+            <a:ext cx="2103120" cy="621792"/>
+          </a:xfrm>
+          <a:prstGeom prst="rect">
+            <a:avLst/>
+          </a:prstGeom>
+          <a:noFill/>
+          <a:ln/>
+        </p:spPr>
+        <p:txBody>
+          <a:bodyPr wrap="square" lIns="0" tIns="0" rIns="0" bIns="0" rtlCol="0" anchor="ctr"/>
+          <a:lstStyle/>
+          <a:p>
+            <a:pPr algn="r" indent="0" marL="0">
+              <a:buNone/>
+            </a:pPr>
+            <a:r>
+              <a:rPr lang="en-US" sz="1250" i="1" dirty="0">
+                <a:solidFill>
+                  <a:srgbClr val="9FB0C4"/>
+                </a:solidFill>
+                <a:latin typeface="Malgun Gothic" pitchFamily="34" charset="0"/>
+                <a:ea typeface="Malgun Gothic" pitchFamily="34" charset="-122"/>
+                <a:cs typeface="Malgun Gothic" pitchFamily="34" charset="-120"/>
+              </a:rPr>
+              <a:t>스레드마다 다름</a:t>
+            </a:r>
+            <a:endParaRPr lang="en-US" sz="1250" dirty="0"/>
+          </a:p>
+        </p:txBody>
+      </p:sp>
+      <p:sp>
+        <p:nvSpPr>
+          <p:cNvPr id="13" name="Shape 11"/>
+          <p:cNvSpPr/>
+          <p:nvPr/>
+        </p:nvSpPr>
+        <p:spPr>
+          <a:xfrm>
+            <a:off x="548640" y="3995928"/>
+            <a:ext cx="11064240" cy="841248"/>
+          </a:xfrm>
+          <a:prstGeom prst="roundRect">
+            <a:avLst>
+              <a:gd name="adj" fmla="val 8696"/>
+            </a:avLst>
+          </a:prstGeom>
+          <a:solidFill>
+            <a:srgbClr val="18212E"/>
+          </a:solidFill>
+          <a:ln/>
+        </p:spPr>
+      </p:sp>
+      <p:sp>
+        <p:nvSpPr>
+          <p:cNvPr id="14" name="Text 12"/>
+          <p:cNvSpPr/>
+          <p:nvPr/>
+        </p:nvSpPr>
+        <p:spPr>
+          <a:xfrm>
+            <a:off x="822960" y="4105656"/>
+            <a:ext cx="2926080" cy="621792"/>
+          </a:xfrm>
+          <a:prstGeom prst="rect">
+            <a:avLst/>
+          </a:prstGeom>
+          <a:noFill/>
+          <a:ln/>
+        </p:spPr>
+        <p:txBody>
+          <a:bodyPr wrap="square" lIns="0" tIns="0" rIns="0" bIns="0" rtlCol="0" anchor="ctr"/>
+          <a:lstStyle/>
+          <a:p>
+            <a:pPr indent="0" marL="0">
+              <a:buNone/>
+            </a:pPr>
+            <a:r>
+              <a:rPr lang="en-US" sz="1900" b="1" dirty="0">
+                <a:solidFill>
+                  <a:srgbClr val="3FB8C4"/>
                 </a:solidFill>
                 <a:latin typeface="Courier New" pitchFamily="34" charset="0"/>
                 <a:ea typeface="Courier New" pitchFamily="34" charset="-122"/>
                 <a:cs typeface="Courier New" pitchFamily="34" charset="-120"/>
               </a:rPr>
-              <a:t> + blockIdx.x * N * blockDim.x</a:t>
-            </a:r>
-            <a:pPr algn="l" indent="0" marL="0">
-              <a:lnSpc>
-                <a:spcPct val="110000"/>
-              </a:lnSpc>
-              <a:buNone/>
-            </a:pPr>
-            <a:r>
-              <a:rPr lang="en-US" sz="1400" dirty="0">
-                <a:solidFill>
-                  <a:srgbClr val="3FB8C4"/>
+              <a:t>blockDim.x</a:t>
+            </a:r>
+            <a:endParaRPr lang="en-US" sz="1900" dirty="0"/>
+          </a:p>
+        </p:txBody>
+      </p:sp>
+      <p:sp>
+        <p:nvSpPr>
+          <p:cNvPr id="15" name="Text 13"/>
+          <p:cNvSpPr/>
+          <p:nvPr/>
+        </p:nvSpPr>
+        <p:spPr>
+          <a:xfrm>
+            <a:off x="3931920" y="4105656"/>
+            <a:ext cx="5212080" cy="621792"/>
+          </a:xfrm>
+          <a:prstGeom prst="rect">
+            <a:avLst/>
+          </a:prstGeom>
+          <a:noFill/>
+          <a:ln/>
+        </p:spPr>
+        <p:txBody>
+          <a:bodyPr wrap="square" lIns="0" tIns="0" rIns="0" bIns="0" rtlCol="0" anchor="ctr"/>
+          <a:lstStyle/>
+          <a:p>
+            <a:pPr indent="0" marL="0">
+              <a:buNone/>
+            </a:pPr>
+            <a:r>
+              <a:rPr lang="en-US" sz="1550" dirty="0">
+                <a:solidFill>
+                  <a:srgbClr val="E7EDF5"/>
+                </a:solidFill>
+                <a:latin typeface="Malgun Gothic" pitchFamily="34" charset="0"/>
+                <a:ea typeface="Malgun Gothic" pitchFamily="34" charset="-122"/>
+                <a:cs typeface="Malgun Gothic" pitchFamily="34" charset="-120"/>
+              </a:rPr>
+              <a:t>블록당 스레드 수 (= 512)</a:t>
+            </a:r>
+            <a:endParaRPr lang="en-US" sz="1550" dirty="0"/>
+          </a:p>
+        </p:txBody>
+      </p:sp>
+      <p:sp>
+        <p:nvSpPr>
+          <p:cNvPr id="16" name="Text 14"/>
+          <p:cNvSpPr/>
+          <p:nvPr/>
+        </p:nvSpPr>
+        <p:spPr>
+          <a:xfrm>
+            <a:off x="9326880" y="4105656"/>
+            <a:ext cx="2103120" cy="621792"/>
+          </a:xfrm>
+          <a:prstGeom prst="rect">
+            <a:avLst/>
+          </a:prstGeom>
+          <a:noFill/>
+          <a:ln/>
+        </p:spPr>
+        <p:txBody>
+          <a:bodyPr wrap="square" lIns="0" tIns="0" rIns="0" bIns="0" rtlCol="0" anchor="ctr"/>
+          <a:lstStyle/>
+          <a:p>
+            <a:pPr algn="r" indent="0" marL="0">
+              <a:buNone/>
+            </a:pPr>
+            <a:r>
+              <a:rPr lang="en-US" sz="1250" i="1" dirty="0">
+                <a:solidFill>
+                  <a:srgbClr val="9FB0C4"/>
+                </a:solidFill>
+                <a:latin typeface="Malgun Gothic" pitchFamily="34" charset="0"/>
+                <a:ea typeface="Malgun Gothic" pitchFamily="34" charset="-122"/>
+                <a:cs typeface="Malgun Gothic" pitchFamily="34" charset="-120"/>
+              </a:rPr>
+              <a:t>모두 같음</a:t>
+            </a:r>
+            <a:endParaRPr lang="en-US" sz="1250" dirty="0"/>
+          </a:p>
+        </p:txBody>
+      </p:sp>
+      <p:sp>
+        <p:nvSpPr>
+          <p:cNvPr id="17" name="Shape 15"/>
+          <p:cNvSpPr/>
+          <p:nvPr/>
+        </p:nvSpPr>
+        <p:spPr>
+          <a:xfrm>
+            <a:off x="548640" y="4965192"/>
+            <a:ext cx="11064240" cy="841248"/>
+          </a:xfrm>
+          <a:prstGeom prst="roundRect">
+            <a:avLst>
+              <a:gd name="adj" fmla="val 8696"/>
+            </a:avLst>
+          </a:prstGeom>
+          <a:solidFill>
+            <a:srgbClr val="18212E"/>
+          </a:solidFill>
+          <a:ln/>
+        </p:spPr>
+      </p:sp>
+      <p:sp>
+        <p:nvSpPr>
+          <p:cNvPr id="18" name="Text 16"/>
+          <p:cNvSpPr/>
+          <p:nvPr/>
+        </p:nvSpPr>
+        <p:spPr>
+          <a:xfrm>
+            <a:off x="822960" y="5074920"/>
+            <a:ext cx="2926080" cy="621792"/>
+          </a:xfrm>
+          <a:prstGeom prst="rect">
+            <a:avLst/>
+          </a:prstGeom>
+          <a:noFill/>
+          <a:ln/>
+        </p:spPr>
+        <p:txBody>
+          <a:bodyPr wrap="square" lIns="0" tIns="0" rIns="0" bIns="0" rtlCol="0" anchor="ctr"/>
+          <a:lstStyle/>
+          <a:p>
+            <a:pPr indent="0" marL="0">
+              <a:buNone/>
+            </a:pPr>
+            <a:r>
+              <a:rPr lang="en-US" sz="1900" b="1" dirty="0">
+                <a:solidFill>
+                  <a:srgbClr val="E8A33D"/>
                 </a:solidFill>
                 <a:latin typeface="Courier New" pitchFamily="34" charset="0"/>
                 <a:ea typeface="Courier New" pitchFamily="34" charset="-122"/>
                 <a:cs typeface="Courier New" pitchFamily="34" charset="-120"/>
               </a:rPr>
-              <a:t> + i * blockDim.x</a:t>
-            </a:r>
-            <a:pPr algn="l" indent="0" marL="0">
-              <a:lnSpc>
-                <a:spcPct val="110000"/>
-              </a:lnSpc>
-              <a:buNone/>
-            </a:pPr>
-            <a:r>
-              <a:rPr lang="en-US" sz="1400" dirty="0">
-                <a:solidFill>
-                  <a:srgbClr val="F2C079"/>
-                </a:solidFill>
-                <a:latin typeface="Courier New" pitchFamily="34" charset="0"/>
-                <a:ea typeface="Courier New" pitchFamily="34" charset="-122"/>
-                <a:cs typeface="Courier New" pitchFamily="34" charset="-120"/>
-              </a:rPr>
-              <a:t> + threadIdx.x )</a:t>
-            </a:r>
-            <a:endParaRPr lang="en-US" sz="1400" dirty="0"/>
-          </a:p>
-          <a:p>
-            <a:pPr algn="l" indent="0" marL="0">
-              <a:lnSpc>
-                <a:spcPct val="110000"/>
-              </a:lnSpc>
-              <a:buNone/>
-            </a:pPr>
-            <a:r>
-              <a:rPr lang="en-US" sz="1400" dirty="0">
-                <a:solidFill>
-                  <a:srgbClr val="6B7D94"/>
-                </a:solidFill>
-                <a:latin typeface="Courier New" pitchFamily="34" charset="0"/>
-                <a:ea typeface="Courier New" pitchFamily="34" charset="-122"/>
-                <a:cs typeface="Courier New" pitchFamily="34" charset="-120"/>
-              </a:rPr>
-              <a:t>// core.cu:26 — 스레드 t가 i번째 반복에 건드릴 word 주소</a:t>
-            </a:r>
-            <a:endParaRPr lang="en-US" sz="1400" dirty="0"/>
-          </a:p>
-        </p:txBody>
-      </p:sp>
-      <p:sp>
-        <p:nvSpPr>
-          <p:cNvPr id="6" name="Text 4"/>
-          <p:cNvSpPr/>
-          <p:nvPr/>
-        </p:nvSpPr>
-        <p:spPr>
-          <a:xfrm>
-            <a:off x="548640" y="3108960"/>
-            <a:ext cx="4206240" cy="640080"/>
-          </a:xfrm>
-          <a:prstGeom prst="rect">
-            <a:avLst/>
-          </a:prstGeom>
-          <a:noFill/>
-          <a:ln/>
-        </p:spPr>
-        <p:txBody>
-          <a:bodyPr wrap="square" lIns="0" tIns="0" rIns="0" bIns="0" rtlCol="0" anchor="t"/>
+              <a:t>gridDim.x</a:t>
+            </a:r>
+            <a:endParaRPr lang="en-US" sz="1900" dirty="0"/>
+          </a:p>
+        </p:txBody>
+      </p:sp>
+      <p:sp>
+        <p:nvSpPr>
+          <p:cNvPr id="19" name="Text 17"/>
+          <p:cNvSpPr/>
+          <p:nvPr/>
+        </p:nvSpPr>
+        <p:spPr>
+          <a:xfrm>
+            <a:off x="3931920" y="5074920"/>
+            <a:ext cx="5212080" cy="621792"/>
+          </a:xfrm>
+          <a:prstGeom prst="rect">
+            <a:avLst/>
+          </a:prstGeom>
+          <a:noFill/>
+          <a:ln/>
+        </p:spPr>
+        <p:txBody>
+          <a:bodyPr wrap="square" lIns="0" tIns="0" rIns="0" bIns="0" rtlCol="0" anchor="ctr"/>
           <a:lstStyle/>
           <a:p>
             <a:pPr indent="0" marL="0">
               <a:buNone/>
             </a:pPr>
             <a:r>
-              <a:rPr lang="en-US" sz="1400" b="1" dirty="0">
-                <a:solidFill>
-                  <a:srgbClr val="E7EDF5"/>
-                </a:solidFill>
-                <a:latin typeface="Courier New" pitchFamily="34" charset="0"/>
-                <a:ea typeface="Courier New" pitchFamily="34" charset="-122"/>
-                <a:cs typeface="Courier New" pitchFamily="34" charset="-120"/>
-              </a:rPr>
-              <a:t>base</a:t>
-            </a:r>
-            <a:endParaRPr lang="en-US" sz="1400" dirty="0"/>
-          </a:p>
-        </p:txBody>
-      </p:sp>
-      <p:sp>
-        <p:nvSpPr>
-          <p:cNvPr id="7" name="Text 5"/>
-          <p:cNvSpPr/>
-          <p:nvPr/>
-        </p:nvSpPr>
-        <p:spPr>
-          <a:xfrm>
-            <a:off x="4937760" y="3108960"/>
-            <a:ext cx="6675120" cy="640080"/>
-          </a:xfrm>
-          <a:prstGeom prst="rect">
-            <a:avLst/>
-          </a:prstGeom>
-          <a:noFill/>
-          <a:ln/>
-        </p:spPr>
-        <p:txBody>
-          <a:bodyPr wrap="square" lIns="0" tIns="0" rIns="0" bIns="0" rtlCol="0" anchor="t"/>
-          <a:lstStyle/>
-          <a:p>
-            <a:pPr indent="0" marL="0">
-              <a:lnSpc>
-                <a:spcPct val="105000"/>
-              </a:lnSpc>
-              <a:buNone/>
-            </a:pPr>
-            <a:r>
-              <a:rPr lang="en-US" sz="1500" dirty="0">
+              <a:rPr lang="en-US" sz="1550" dirty="0">
                 <a:solidFill>
                   <a:srgbClr val="E7EDF5"/>
                 </a:solidFill>
@@ -8254,252 +9628,87 @@
                 <a:ea typeface="Malgun Gothic" pitchFamily="34" charset="-122"/>
                 <a:cs typeface="Malgun Gothic" pitchFamily="34" charset="-120"/>
               </a:rPr>
-              <a:t>테스트 영역의 시작 주소</a:t>
-            </a:r>
-            <a:endParaRPr lang="en-US" sz="1500" dirty="0"/>
-          </a:p>
-        </p:txBody>
-      </p:sp>
-      <p:sp>
-        <p:nvSpPr>
-          <p:cNvPr id="8" name="Text 6"/>
-          <p:cNvSpPr/>
-          <p:nvPr/>
-        </p:nvSpPr>
-        <p:spPr>
-          <a:xfrm>
-            <a:off x="548640" y="3822192"/>
-            <a:ext cx="4206240" cy="640080"/>
-          </a:xfrm>
-          <a:prstGeom prst="rect">
-            <a:avLst/>
-          </a:prstGeom>
-          <a:noFill/>
-          <a:ln/>
-        </p:spPr>
-        <p:txBody>
-          <a:bodyPr wrap="square" lIns="0" tIns="0" rIns="0" bIns="0" rtlCol="0" anchor="t"/>
-          <a:lstStyle/>
-          <a:p>
-            <a:pPr indent="0" marL="0">
-              <a:buNone/>
-            </a:pPr>
-            <a:r>
-              <a:rPr lang="en-US" sz="1400" b="1" dirty="0">
-                <a:solidFill>
-                  <a:srgbClr val="E8A33D"/>
-                </a:solidFill>
-                <a:latin typeface="Courier New" pitchFamily="34" charset="0"/>
-                <a:ea typeface="Courier New" pitchFamily="34" charset="-122"/>
-                <a:cs typeface="Courier New" pitchFamily="34" charset="-120"/>
-              </a:rPr>
-              <a:t>blockIdx.x * N * blockDim.x</a:t>
-            </a:r>
-            <a:endParaRPr lang="en-US" sz="1400" dirty="0"/>
-          </a:p>
-        </p:txBody>
-      </p:sp>
-      <p:sp>
-        <p:nvSpPr>
-          <p:cNvPr id="9" name="Text 7"/>
-          <p:cNvSpPr/>
-          <p:nvPr/>
-        </p:nvSpPr>
-        <p:spPr>
-          <a:xfrm>
-            <a:off x="4937760" y="3822192"/>
-            <a:ext cx="6675120" cy="640080"/>
-          </a:xfrm>
-          <a:prstGeom prst="rect">
-            <a:avLst/>
-          </a:prstGeom>
-          <a:noFill/>
-          <a:ln/>
-        </p:spPr>
-        <p:txBody>
-          <a:bodyPr wrap="square" lIns="0" tIns="0" rIns="0" bIns="0" rtlCol="0" anchor="t"/>
-          <a:lstStyle/>
-          <a:p>
-            <a:pPr indent="0" marL="0">
-              <a:lnSpc>
-                <a:spcPct val="105000"/>
-              </a:lnSpc>
-              <a:buNone/>
-            </a:pPr>
-            <a:r>
-              <a:rPr lang="en-US" sz="1500" dirty="0">
-                <a:solidFill>
-                  <a:srgbClr val="E7EDF5"/>
+              <a:t>그리드의 블록 수 (= 1024)</a:t>
+            </a:r>
+            <a:endParaRPr lang="en-US" sz="1550" dirty="0"/>
+          </a:p>
+        </p:txBody>
+      </p:sp>
+      <p:sp>
+        <p:nvSpPr>
+          <p:cNvPr id="20" name="Text 18"/>
+          <p:cNvSpPr/>
+          <p:nvPr/>
+        </p:nvSpPr>
+        <p:spPr>
+          <a:xfrm>
+            <a:off x="9326880" y="5074920"/>
+            <a:ext cx="2103120" cy="621792"/>
+          </a:xfrm>
+          <a:prstGeom prst="rect">
+            <a:avLst/>
+          </a:prstGeom>
+          <a:noFill/>
+          <a:ln/>
+        </p:spPr>
+        <p:txBody>
+          <a:bodyPr wrap="square" lIns="0" tIns="0" rIns="0" bIns="0" rtlCol="0" anchor="ctr"/>
+          <a:lstStyle/>
+          <a:p>
+            <a:pPr algn="r" indent="0" marL="0">
+              <a:buNone/>
+            </a:pPr>
+            <a:r>
+              <a:rPr lang="en-US" sz="1250" i="1" dirty="0">
+                <a:solidFill>
+                  <a:srgbClr val="9FB0C4"/>
                 </a:solidFill>
                 <a:latin typeface="Malgun Gothic" pitchFamily="34" charset="0"/>
                 <a:ea typeface="Malgun Gothic" pitchFamily="34" charset="-122"/>
                 <a:cs typeface="Malgun Gothic" pitchFamily="34" charset="-120"/>
               </a:rPr>
-              <a:t>이 블록이 담당하는 큰 구역의 시작 (블록마다 N·512 word씩 떨어짐)</a:t>
-            </a:r>
-            <a:endParaRPr lang="en-US" sz="1500" dirty="0"/>
-          </a:p>
-        </p:txBody>
-      </p:sp>
-      <p:sp>
-        <p:nvSpPr>
-          <p:cNvPr id="10" name="Text 8"/>
-          <p:cNvSpPr/>
-          <p:nvPr/>
-        </p:nvSpPr>
-        <p:spPr>
-          <a:xfrm>
-            <a:off x="548640" y="4535424"/>
-            <a:ext cx="4206240" cy="640080"/>
-          </a:xfrm>
-          <a:prstGeom prst="rect">
-            <a:avLst/>
-          </a:prstGeom>
-          <a:noFill/>
-          <a:ln/>
-        </p:spPr>
-        <p:txBody>
-          <a:bodyPr wrap="square" lIns="0" tIns="0" rIns="0" bIns="0" rtlCol="0" anchor="t"/>
+              <a:t>모두 같음</a:t>
+            </a:r>
+            <a:endParaRPr lang="en-US" sz="1250" dirty="0"/>
+          </a:p>
+        </p:txBody>
+      </p:sp>
+      <p:sp>
+        <p:nvSpPr>
+          <p:cNvPr id="21" name="Text 19"/>
+          <p:cNvSpPr/>
+          <p:nvPr/>
+        </p:nvSpPr>
+        <p:spPr>
+          <a:xfrm>
+            <a:off x="548640" y="6172200"/>
+            <a:ext cx="11064240" cy="365760"/>
+          </a:xfrm>
+          <a:prstGeom prst="rect">
+            <a:avLst/>
+          </a:prstGeom>
+          <a:noFill/>
+          <a:ln/>
+        </p:spPr>
+        <p:txBody>
+          <a:bodyPr wrap="square" lIns="0" tIns="0" rIns="0" bIns="0" rtlCol="0" anchor="ctr"/>
           <a:lstStyle/>
           <a:p>
             <a:pPr indent="0" marL="0">
               <a:buNone/>
             </a:pPr>
             <a:r>
-              <a:rPr lang="en-US" sz="1400" b="1" dirty="0">
-                <a:solidFill>
-                  <a:srgbClr val="3FB8C4"/>
-                </a:solidFill>
-                <a:latin typeface="Courier New" pitchFamily="34" charset="0"/>
-                <a:ea typeface="Courier New" pitchFamily="34" charset="-122"/>
-                <a:cs typeface="Courier New" pitchFamily="34" charset="-120"/>
-              </a:rPr>
-              <a:t>i * blockDim.x</a:t>
-            </a:r>
-            <a:endParaRPr lang="en-US" sz="1400" dirty="0"/>
-          </a:p>
-        </p:txBody>
-      </p:sp>
-      <p:sp>
-        <p:nvSpPr>
-          <p:cNvPr id="11" name="Text 9"/>
-          <p:cNvSpPr/>
-          <p:nvPr/>
-        </p:nvSpPr>
-        <p:spPr>
-          <a:xfrm>
-            <a:off x="4937760" y="4535424"/>
-            <a:ext cx="6675120" cy="640080"/>
-          </a:xfrm>
-          <a:prstGeom prst="rect">
-            <a:avLst/>
-          </a:prstGeom>
-          <a:noFill/>
-          <a:ln/>
-        </p:spPr>
-        <p:txBody>
-          <a:bodyPr wrap="square" lIns="0" tIns="0" rIns="0" bIns="0" rtlCol="0" anchor="t"/>
-          <a:lstStyle/>
-          <a:p>
-            <a:pPr indent="0" marL="0">
-              <a:lnSpc>
-                <a:spcPct val="105000"/>
-              </a:lnSpc>
-              <a:buNone/>
-            </a:pPr>
-            <a:r>
-              <a:rPr lang="en-US" sz="1500" dirty="0">
-                <a:solidFill>
-                  <a:srgbClr val="E7EDF5"/>
+              <a:rPr lang="en-US" sz="1300" i="1" dirty="0">
+                <a:solidFill>
+                  <a:srgbClr val="9FB0C4"/>
                 </a:solidFill>
                 <a:latin typeface="Malgun Gothic" pitchFamily="34" charset="0"/>
                 <a:ea typeface="Malgun Gothic" pitchFamily="34" charset="-122"/>
                 <a:cs typeface="Malgun Gothic" pitchFamily="34" charset="-120"/>
               </a:rPr>
-              <a:t>블록 안에서 i번째 반복의 오프셋 (한 스레드가 N개 word 담당)</a:t>
-            </a:r>
-            <a:endParaRPr lang="en-US" sz="1500" dirty="0"/>
-          </a:p>
-        </p:txBody>
-      </p:sp>
-      <p:sp>
-        <p:nvSpPr>
-          <p:cNvPr id="12" name="Text 10"/>
-          <p:cNvSpPr/>
-          <p:nvPr/>
-        </p:nvSpPr>
-        <p:spPr>
-          <a:xfrm>
-            <a:off x="548640" y="5248656"/>
-            <a:ext cx="4206240" cy="640080"/>
-          </a:xfrm>
-          <a:prstGeom prst="rect">
-            <a:avLst/>
-          </a:prstGeom>
-          <a:noFill/>
-          <a:ln/>
-        </p:spPr>
-        <p:txBody>
-          <a:bodyPr wrap="square" lIns="0" tIns="0" rIns="0" bIns="0" rtlCol="0" anchor="t"/>
-          <a:lstStyle/>
-          <a:p>
-            <a:pPr indent="0" marL="0">
-              <a:buNone/>
-            </a:pPr>
-            <a:r>
-              <a:rPr lang="en-US" sz="1400" b="1" dirty="0">
-                <a:solidFill>
-                  <a:srgbClr val="F2C079"/>
-                </a:solidFill>
-                <a:latin typeface="Courier New" pitchFamily="34" charset="0"/>
-                <a:ea typeface="Courier New" pitchFamily="34" charset="-122"/>
-                <a:cs typeface="Courier New" pitchFamily="34" charset="-120"/>
-              </a:rPr>
-              <a:t>threadIdx.x</a:t>
-            </a:r>
-            <a:endParaRPr lang="en-US" sz="1400" dirty="0"/>
-          </a:p>
-        </p:txBody>
-      </p:sp>
-      <p:sp>
-        <p:nvSpPr>
-          <p:cNvPr id="13" name="Text 11"/>
-          <p:cNvSpPr/>
-          <p:nvPr/>
-        </p:nvSpPr>
-        <p:spPr>
-          <a:xfrm>
-            <a:off x="4937760" y="5248656"/>
-            <a:ext cx="6675120" cy="640080"/>
-          </a:xfrm>
-          <a:prstGeom prst="rect">
-            <a:avLst/>
-          </a:prstGeom>
-          <a:noFill/>
-          <a:ln/>
-        </p:spPr>
-        <p:txBody>
-          <a:bodyPr wrap="square" lIns="0" tIns="0" rIns="0" bIns="0" rtlCol="0" anchor="t"/>
-          <a:lstStyle/>
-          <a:p>
-            <a:pPr indent="0" marL="0">
-              <a:lnSpc>
-                <a:spcPct val="105000"/>
-              </a:lnSpc>
-              <a:buNone/>
-            </a:pPr>
-            <a:r>
-              <a:rPr lang="en-US" sz="1500" dirty="0">
-                <a:solidFill>
-                  <a:srgbClr val="E7EDF5"/>
-                </a:solidFill>
-                <a:latin typeface="Malgun Gothic" pitchFamily="34" charset="0"/>
-                <a:ea typeface="Malgun Gothic" pitchFamily="34" charset="-122"/>
-                <a:cs typeface="Malgun Gothic" pitchFamily="34" charset="-120"/>
-              </a:rPr>
-              <a:t>그 안에서 내 스레드의 위치 (0~511)</a:t>
-            </a:r>
-            <a:endParaRPr lang="en-US" sz="1500" dirty="0"/>
+              <a:t>이 저장소는 .x 만 씁니다 (1차원). 메모리는 결국 1차원 주소 공간이기 때문입니다.</a:t>
+            </a:r>
+            <a:endParaRPr lang="en-US" sz="1300" dirty="0"/>
           </a:p>
         </p:txBody>
       </p:sp>
@@ -8572,7 +9781,7 @@
                 <a:ea typeface="Courier New" pitchFamily="34" charset="-122"/>
                 <a:cs typeface="Courier New" pitchFamily="34" charset="-120"/>
               </a:rPr>
-              <a:t>6</a:t>
+              <a:t>5</a:t>
             </a:r>
             <a:endParaRPr lang="en-US" sz="2200" dirty="0"/>
           </a:p>
@@ -8611,7 +9820,7 @@
                 <a:ea typeface="Malgun Gothic" pitchFamily="34" charset="-122"/>
                 <a:cs typeface="Malgun Gothic" pitchFamily="34" charset="-120"/>
               </a:rPr>
-              <a:t>왜 이렇게 매핑하나 · 메모리 병합(coalescing)</a:t>
+              <a:t>★ THREAD_ADDRESS · 모든 테스트의 심장</a:t>
             </a:r>
             <a:endParaRPr lang="en-US" sz="2900" dirty="0"/>
           </a:p>
@@ -8619,57 +9828,18 @@
       </p:sp>
       <p:sp>
         <p:nvSpPr>
-          <p:cNvPr id="4" name="Text 2"/>
-          <p:cNvSpPr/>
-          <p:nvPr/>
-        </p:nvSpPr>
-        <p:spPr>
-          <a:xfrm>
-            <a:off x="548640" y="1417320"/>
-            <a:ext cx="11064240" cy="457200"/>
-          </a:xfrm>
-          <a:prstGeom prst="rect">
-            <a:avLst/>
-          </a:prstGeom>
-          <a:noFill/>
-          <a:ln/>
-        </p:spPr>
-        <p:txBody>
-          <a:bodyPr wrap="square" lIns="0" tIns="0" rIns="0" bIns="0" rtlCol="0" anchor="ctr"/>
-          <a:lstStyle/>
-          <a:p>
-            <a:pPr indent="0" marL="0">
-              <a:buNone/>
-            </a:pPr>
-            <a:r>
-              <a:rPr lang="en-US" sz="1550" dirty="0">
-                <a:solidFill>
-                  <a:srgbClr val="9FB0C4"/>
-                </a:solidFill>
-                <a:latin typeface="Malgun Gothic" pitchFamily="34" charset="0"/>
-                <a:ea typeface="Malgun Gothic" pitchFamily="34" charset="-122"/>
-                <a:cs typeface="Malgun Gothic" pitchFamily="34" charset="-120"/>
-              </a:rPr>
-              <a:t>같은 반복 i에서 이웃 스레드(threadIdx.x)가 이웃한 주소를 맡습니다. 이 '인터리빙'이 성능의 열쇠입니다.</a:t>
-            </a:r>
-            <a:endParaRPr lang="en-US" sz="1550" dirty="0"/>
-          </a:p>
-        </p:txBody>
-      </p:sp>
-      <p:sp>
-        <p:nvSpPr>
-          <p:cNvPr id="5" name="Shape 3"/>
-          <p:cNvSpPr/>
-          <p:nvPr/>
-        </p:nvSpPr>
-        <p:spPr>
-          <a:xfrm>
-            <a:off x="576072" y="2148840"/>
-            <a:ext cx="1328166" cy="868680"/>
+          <p:cNvPr id="4" name="Shape 2"/>
+          <p:cNvSpPr/>
+          <p:nvPr/>
+        </p:nvSpPr>
+        <p:spPr>
+          <a:xfrm>
+            <a:off x="548640" y="1463040"/>
+            <a:ext cx="11064240" cy="1371600"/>
           </a:xfrm>
           <a:prstGeom prst="roundRect">
             <a:avLst>
-              <a:gd name="adj" fmla="val 4211"/>
+              <a:gd name="adj" fmla="val 3333"/>
             </a:avLst>
           </a:prstGeom>
           <a:solidFill>
@@ -8677,7 +9847,7 @@
           </a:solidFill>
           <a:ln w="12700">
             <a:solidFill>
-              <a:srgbClr val="E8A33D"/>
+              <a:srgbClr val="2C3A4E"/>
             </a:solidFill>
             <a:prstDash val="solid"/>
           </a:ln>
@@ -8685,345 +9855,163 @@
       </p:sp>
       <p:sp>
         <p:nvSpPr>
-          <p:cNvPr id="6" name="Text 4"/>
-          <p:cNvSpPr/>
-          <p:nvPr/>
-        </p:nvSpPr>
-        <p:spPr>
-          <a:xfrm>
-            <a:off x="548640" y="2276856"/>
-            <a:ext cx="1383030" cy="365760"/>
-          </a:xfrm>
-          <a:prstGeom prst="rect">
-            <a:avLst/>
-          </a:prstGeom>
-          <a:noFill/>
-          <a:ln/>
-        </p:spPr>
-        <p:txBody>
-          <a:bodyPr wrap="square" lIns="0" tIns="0" rIns="0" bIns="0" rtlCol="0" anchor="ctr"/>
-          <a:lstStyle/>
-          <a:p>
-            <a:pPr algn="ctr" indent="0" marL="0">
-              <a:buNone/>
-            </a:pPr>
-            <a:r>
-              <a:rPr lang="en-US" sz="1600" b="1" dirty="0">
-                <a:solidFill>
-                  <a:srgbClr val="E7EDF5"/>
+          <p:cNvPr id="5" name="Text 3"/>
+          <p:cNvSpPr/>
+          <p:nvPr/>
+        </p:nvSpPr>
+        <p:spPr>
+          <a:xfrm>
+            <a:off x="768096" y="1609344"/>
+            <a:ext cx="10625328" cy="1078992"/>
+          </a:xfrm>
+          <a:prstGeom prst="rect">
+            <a:avLst/>
+          </a:prstGeom>
+          <a:noFill/>
+          <a:ln/>
+        </p:spPr>
+        <p:txBody>
+          <a:bodyPr wrap="square" lIns="0" tIns="0" rIns="0" bIns="0" rtlCol="0" anchor="t"/>
+          <a:lstStyle/>
+          <a:p>
+            <a:pPr algn="l" indent="0" marL="0">
+              <a:lnSpc>
+                <a:spcPct val="110000"/>
+              </a:lnSpc>
+              <a:buNone/>
+            </a:pPr>
+            <a:r>
+              <a:rPr lang="en-US" sz="1400" dirty="0">
+                <a:solidFill>
+                  <a:srgbClr val="F2C079"/>
                 </a:solidFill>
                 <a:latin typeface="Courier New" pitchFamily="34" charset="0"/>
                 <a:ea typeface="Courier New" pitchFamily="34" charset="-122"/>
                 <a:cs typeface="Courier New" pitchFamily="34" charset="-120"/>
               </a:rPr>
-              <a:t>T0</a:t>
-            </a:r>
-            <a:endParaRPr lang="en-US" sz="1600" dirty="0"/>
-          </a:p>
-        </p:txBody>
-      </p:sp>
-      <p:sp>
-        <p:nvSpPr>
-          <p:cNvPr id="7" name="Text 5"/>
-          <p:cNvSpPr/>
-          <p:nvPr/>
-        </p:nvSpPr>
-        <p:spPr>
-          <a:xfrm>
-            <a:off x="548640" y="2651760"/>
-            <a:ext cx="1383030" cy="274320"/>
-          </a:xfrm>
-          <a:prstGeom prst="rect">
-            <a:avLst/>
-          </a:prstGeom>
-          <a:noFill/>
-          <a:ln/>
-        </p:spPr>
-        <p:txBody>
-          <a:bodyPr wrap="square" lIns="0" tIns="0" rIns="0" bIns="0" rtlCol="0" anchor="ctr"/>
-          <a:lstStyle/>
-          <a:p>
-            <a:pPr algn="ctr" indent="0" marL="0">
-              <a:buNone/>
-            </a:pPr>
-            <a:r>
-              <a:rPr lang="en-US" sz="1050" dirty="0">
-                <a:solidFill>
-                  <a:srgbClr val="9FB0C4"/>
+              <a:t>#define THREAD_ADDRESS(base, N, i)   \</a:t>
+            </a:r>
+            <a:endParaRPr lang="en-US" sz="1400" dirty="0"/>
+          </a:p>
+          <a:p>
+            <a:pPr algn="l" indent="0" marL="0">
+              <a:lnSpc>
+                <a:spcPct val="110000"/>
+              </a:lnSpc>
+              <a:buNone/>
+            </a:pPr>
+            <a:r>
+              <a:rPr lang="en-US" sz="1400" dirty="0">
+                <a:solidFill>
+                  <a:srgbClr val="E7EDF5"/>
                 </a:solidFill>
                 <a:latin typeface="Courier New" pitchFamily="34" charset="0"/>
                 <a:ea typeface="Courier New" pitchFamily="34" charset="-122"/>
                 <a:cs typeface="Courier New" pitchFamily="34" charset="-120"/>
               </a:rPr>
-              <a:t>+0B</a:t>
-            </a:r>
-            <a:endParaRPr lang="en-US" sz="1050" dirty="0"/>
-          </a:p>
-        </p:txBody>
-      </p:sp>
-      <p:sp>
-        <p:nvSpPr>
-          <p:cNvPr id="8" name="Shape 6"/>
-          <p:cNvSpPr/>
-          <p:nvPr/>
-        </p:nvSpPr>
-        <p:spPr>
-          <a:xfrm>
-            <a:off x="1959102" y="2148840"/>
-            <a:ext cx="1328166" cy="868680"/>
-          </a:xfrm>
-          <a:prstGeom prst="roundRect">
-            <a:avLst>
-              <a:gd name="adj" fmla="val 4211"/>
-            </a:avLst>
-          </a:prstGeom>
-          <a:solidFill>
-            <a:srgbClr val="0B1119"/>
-          </a:solidFill>
-          <a:ln w="12700">
-            <a:solidFill>
-              <a:srgbClr val="3FB8C4"/>
-            </a:solidFill>
-            <a:prstDash val="solid"/>
-          </a:ln>
-        </p:spPr>
-      </p:sp>
-      <p:sp>
-        <p:nvSpPr>
-          <p:cNvPr id="9" name="Text 7"/>
-          <p:cNvSpPr/>
-          <p:nvPr/>
-        </p:nvSpPr>
-        <p:spPr>
-          <a:xfrm>
-            <a:off x="1931670" y="2276856"/>
-            <a:ext cx="1383030" cy="365760"/>
-          </a:xfrm>
-          <a:prstGeom prst="rect">
-            <a:avLst/>
-          </a:prstGeom>
-          <a:noFill/>
-          <a:ln/>
-        </p:spPr>
-        <p:txBody>
-          <a:bodyPr wrap="square" lIns="0" tIns="0" rIns="0" bIns="0" rtlCol="0" anchor="ctr"/>
-          <a:lstStyle/>
-          <a:p>
-            <a:pPr algn="ctr" indent="0" marL="0">
-              <a:buNone/>
-            </a:pPr>
-            <a:r>
-              <a:rPr lang="en-US" sz="1600" b="1" dirty="0">
-                <a:solidFill>
-                  <a:srgbClr val="E7EDF5"/>
+              <a:t>   ( base</a:t>
+            </a:r>
+            <a:pPr algn="l" indent="0" marL="0">
+              <a:lnSpc>
+                <a:spcPct val="110000"/>
+              </a:lnSpc>
+              <a:buNone/>
+            </a:pPr>
+            <a:r>
+              <a:rPr lang="en-US" sz="1400" dirty="0">
+                <a:solidFill>
+                  <a:srgbClr val="E8A33D"/>
                 </a:solidFill>
                 <a:latin typeface="Courier New" pitchFamily="34" charset="0"/>
                 <a:ea typeface="Courier New" pitchFamily="34" charset="-122"/>
                 <a:cs typeface="Courier New" pitchFamily="34" charset="-120"/>
               </a:rPr>
-              <a:t>T1</a:t>
-            </a:r>
-            <a:endParaRPr lang="en-US" sz="1600" dirty="0"/>
-          </a:p>
-        </p:txBody>
-      </p:sp>
-      <p:sp>
-        <p:nvSpPr>
-          <p:cNvPr id="10" name="Text 8"/>
-          <p:cNvSpPr/>
-          <p:nvPr/>
-        </p:nvSpPr>
-        <p:spPr>
-          <a:xfrm>
-            <a:off x="1931670" y="2651760"/>
-            <a:ext cx="1383030" cy="274320"/>
-          </a:xfrm>
-          <a:prstGeom prst="rect">
-            <a:avLst/>
-          </a:prstGeom>
-          <a:noFill/>
-          <a:ln/>
-        </p:spPr>
-        <p:txBody>
-          <a:bodyPr wrap="square" lIns="0" tIns="0" rIns="0" bIns="0" rtlCol="0" anchor="ctr"/>
-          <a:lstStyle/>
-          <a:p>
-            <a:pPr algn="ctr" indent="0" marL="0">
-              <a:buNone/>
-            </a:pPr>
-            <a:r>
-              <a:rPr lang="en-US" sz="1050" dirty="0">
-                <a:solidFill>
-                  <a:srgbClr val="9FB0C4"/>
+              <a:t> + blockIdx.x * N * blockDim.x</a:t>
+            </a:r>
+            <a:pPr algn="l" indent="0" marL="0">
+              <a:lnSpc>
+                <a:spcPct val="110000"/>
+              </a:lnSpc>
+              <a:buNone/>
+            </a:pPr>
+            <a:r>
+              <a:rPr lang="en-US" sz="1400" dirty="0">
+                <a:solidFill>
+                  <a:srgbClr val="3FB8C4"/>
                 </a:solidFill>
                 <a:latin typeface="Courier New" pitchFamily="34" charset="0"/>
                 <a:ea typeface="Courier New" pitchFamily="34" charset="-122"/>
                 <a:cs typeface="Courier New" pitchFamily="34" charset="-120"/>
               </a:rPr>
-              <a:t>+4B</a:t>
-            </a:r>
-            <a:endParaRPr lang="en-US" sz="1050" dirty="0"/>
-          </a:p>
-        </p:txBody>
-      </p:sp>
-      <p:sp>
-        <p:nvSpPr>
-          <p:cNvPr id="11" name="Shape 9"/>
-          <p:cNvSpPr/>
-          <p:nvPr/>
-        </p:nvSpPr>
-        <p:spPr>
-          <a:xfrm>
-            <a:off x="3342132" y="2148840"/>
-            <a:ext cx="1328166" cy="868680"/>
-          </a:xfrm>
-          <a:prstGeom prst="roundRect">
-            <a:avLst>
-              <a:gd name="adj" fmla="val 4211"/>
-            </a:avLst>
-          </a:prstGeom>
-          <a:solidFill>
-            <a:srgbClr val="0B1119"/>
-          </a:solidFill>
-          <a:ln w="12700">
-            <a:solidFill>
-              <a:srgbClr val="E8A33D"/>
-            </a:solidFill>
-            <a:prstDash val="solid"/>
-          </a:ln>
-        </p:spPr>
-      </p:sp>
-      <p:sp>
-        <p:nvSpPr>
-          <p:cNvPr id="12" name="Text 10"/>
-          <p:cNvSpPr/>
-          <p:nvPr/>
-        </p:nvSpPr>
-        <p:spPr>
-          <a:xfrm>
-            <a:off x="3314700" y="2276856"/>
-            <a:ext cx="1383030" cy="365760"/>
-          </a:xfrm>
-          <a:prstGeom prst="rect">
-            <a:avLst/>
-          </a:prstGeom>
-          <a:noFill/>
-          <a:ln/>
-        </p:spPr>
-        <p:txBody>
-          <a:bodyPr wrap="square" lIns="0" tIns="0" rIns="0" bIns="0" rtlCol="0" anchor="ctr"/>
-          <a:lstStyle/>
-          <a:p>
-            <a:pPr algn="ctr" indent="0" marL="0">
-              <a:buNone/>
-            </a:pPr>
-            <a:r>
-              <a:rPr lang="en-US" sz="1600" b="1" dirty="0">
-                <a:solidFill>
-                  <a:srgbClr val="E7EDF5"/>
+              <a:t> + i * blockDim.x</a:t>
+            </a:r>
+            <a:pPr algn="l" indent="0" marL="0">
+              <a:lnSpc>
+                <a:spcPct val="110000"/>
+              </a:lnSpc>
+              <a:buNone/>
+            </a:pPr>
+            <a:r>
+              <a:rPr lang="en-US" sz="1400" dirty="0">
+                <a:solidFill>
+                  <a:srgbClr val="F2C079"/>
                 </a:solidFill>
                 <a:latin typeface="Courier New" pitchFamily="34" charset="0"/>
                 <a:ea typeface="Courier New" pitchFamily="34" charset="-122"/>
                 <a:cs typeface="Courier New" pitchFamily="34" charset="-120"/>
               </a:rPr>
-              <a:t>T2</a:t>
-            </a:r>
-            <a:endParaRPr lang="en-US" sz="1600" dirty="0"/>
-          </a:p>
-        </p:txBody>
-      </p:sp>
-      <p:sp>
-        <p:nvSpPr>
-          <p:cNvPr id="13" name="Text 11"/>
-          <p:cNvSpPr/>
-          <p:nvPr/>
-        </p:nvSpPr>
-        <p:spPr>
-          <a:xfrm>
-            <a:off x="3314700" y="2651760"/>
-            <a:ext cx="1383030" cy="274320"/>
-          </a:xfrm>
-          <a:prstGeom prst="rect">
-            <a:avLst/>
-          </a:prstGeom>
-          <a:noFill/>
-          <a:ln/>
-        </p:spPr>
-        <p:txBody>
-          <a:bodyPr wrap="square" lIns="0" tIns="0" rIns="0" bIns="0" rtlCol="0" anchor="ctr"/>
-          <a:lstStyle/>
-          <a:p>
-            <a:pPr algn="ctr" indent="0" marL="0">
-              <a:buNone/>
-            </a:pPr>
-            <a:r>
-              <a:rPr lang="en-US" sz="1050" dirty="0">
-                <a:solidFill>
-                  <a:srgbClr val="9FB0C4"/>
+              <a:t> + threadIdx.x )</a:t>
+            </a:r>
+            <a:endParaRPr lang="en-US" sz="1400" dirty="0"/>
+          </a:p>
+          <a:p>
+            <a:pPr algn="l" indent="0" marL="0">
+              <a:lnSpc>
+                <a:spcPct val="110000"/>
+              </a:lnSpc>
+              <a:buNone/>
+            </a:pPr>
+            <a:r>
+              <a:rPr lang="en-US" sz="1400" dirty="0">
+                <a:solidFill>
+                  <a:srgbClr val="6B7D94"/>
                 </a:solidFill>
                 <a:latin typeface="Courier New" pitchFamily="34" charset="0"/>
                 <a:ea typeface="Courier New" pitchFamily="34" charset="-122"/>
                 <a:cs typeface="Courier New" pitchFamily="34" charset="-120"/>
               </a:rPr>
-              <a:t>+8B</a:t>
-            </a:r>
-            <a:endParaRPr lang="en-US" sz="1050" dirty="0"/>
-          </a:p>
-        </p:txBody>
-      </p:sp>
-      <p:sp>
-        <p:nvSpPr>
-          <p:cNvPr id="14" name="Shape 12"/>
-          <p:cNvSpPr/>
-          <p:nvPr/>
-        </p:nvSpPr>
-        <p:spPr>
-          <a:xfrm>
-            <a:off x="4725162" y="2148840"/>
-            <a:ext cx="1328166" cy="868680"/>
-          </a:xfrm>
-          <a:prstGeom prst="roundRect">
-            <a:avLst>
-              <a:gd name="adj" fmla="val 4211"/>
-            </a:avLst>
-          </a:prstGeom>
-          <a:solidFill>
-            <a:srgbClr val="0B1119"/>
-          </a:solidFill>
-          <a:ln w="12700">
-            <a:solidFill>
-              <a:srgbClr val="3FB8C4"/>
-            </a:solidFill>
-            <a:prstDash val="solid"/>
-          </a:ln>
-        </p:spPr>
-      </p:sp>
-      <p:sp>
-        <p:nvSpPr>
-          <p:cNvPr id="15" name="Text 13"/>
-          <p:cNvSpPr/>
-          <p:nvPr/>
-        </p:nvSpPr>
-        <p:spPr>
-          <a:xfrm>
-            <a:off x="4697730" y="2276856"/>
-            <a:ext cx="1383030" cy="365760"/>
-          </a:xfrm>
-          <a:prstGeom prst="rect">
-            <a:avLst/>
-          </a:prstGeom>
-          <a:noFill/>
-          <a:ln/>
-        </p:spPr>
-        <p:txBody>
-          <a:bodyPr wrap="square" lIns="0" tIns="0" rIns="0" bIns="0" rtlCol="0" anchor="ctr"/>
-          <a:lstStyle/>
-          <a:p>
-            <a:pPr algn="ctr" indent="0" marL="0">
-              <a:buNone/>
-            </a:pPr>
-            <a:r>
-              <a:rPr lang="en-US" sz="1600" b="1" dirty="0">
+              <a:t>// core.cu:26 — 스레드 t가 i번째 반복에 건드릴 word 주소</a:t>
+            </a:r>
+            <a:endParaRPr lang="en-US" sz="1400" dirty="0"/>
+          </a:p>
+        </p:txBody>
+      </p:sp>
+      <p:sp>
+        <p:nvSpPr>
+          <p:cNvPr id="6" name="Text 4"/>
+          <p:cNvSpPr/>
+          <p:nvPr/>
+        </p:nvSpPr>
+        <p:spPr>
+          <a:xfrm>
+            <a:off x="548640" y="3108960"/>
+            <a:ext cx="4206240" cy="640080"/>
+          </a:xfrm>
+          <a:prstGeom prst="rect">
+            <a:avLst/>
+          </a:prstGeom>
+          <a:noFill/>
+          <a:ln/>
+        </p:spPr>
+        <p:txBody>
+          <a:bodyPr wrap="square" lIns="0" tIns="0" rIns="0" bIns="0" rtlCol="0" anchor="t"/>
+          <a:lstStyle/>
+          <a:p>
+            <a:pPr indent="0" marL="0">
+              <a:buNone/>
+            </a:pPr>
+            <a:r>
+              <a:rPr lang="en-US" sz="1400" b="1" dirty="0">
                 <a:solidFill>
                   <a:srgbClr val="E7EDF5"/>
                 </a:solidFill>
@@ -9031,615 +10019,292 @@
                 <a:ea typeface="Courier New" pitchFamily="34" charset="-122"/>
                 <a:cs typeface="Courier New" pitchFamily="34" charset="-120"/>
               </a:rPr>
-              <a:t>T3</a:t>
-            </a:r>
-            <a:endParaRPr lang="en-US" sz="1600" dirty="0"/>
-          </a:p>
-        </p:txBody>
-      </p:sp>
-      <p:sp>
-        <p:nvSpPr>
-          <p:cNvPr id="16" name="Text 14"/>
-          <p:cNvSpPr/>
-          <p:nvPr/>
-        </p:nvSpPr>
-        <p:spPr>
-          <a:xfrm>
-            <a:off x="4697730" y="2651760"/>
-            <a:ext cx="1383030" cy="274320"/>
-          </a:xfrm>
-          <a:prstGeom prst="rect">
-            <a:avLst/>
-          </a:prstGeom>
-          <a:noFill/>
-          <a:ln/>
-        </p:spPr>
-        <p:txBody>
-          <a:bodyPr wrap="square" lIns="0" tIns="0" rIns="0" bIns="0" rtlCol="0" anchor="ctr"/>
-          <a:lstStyle/>
-          <a:p>
-            <a:pPr algn="ctr" indent="0" marL="0">
-              <a:buNone/>
-            </a:pPr>
-            <a:r>
-              <a:rPr lang="en-US" sz="1050" dirty="0">
-                <a:solidFill>
-                  <a:srgbClr val="9FB0C4"/>
+              <a:t>base</a:t>
+            </a:r>
+            <a:endParaRPr lang="en-US" sz="1400" dirty="0"/>
+          </a:p>
+        </p:txBody>
+      </p:sp>
+      <p:sp>
+        <p:nvSpPr>
+          <p:cNvPr id="7" name="Text 5"/>
+          <p:cNvSpPr/>
+          <p:nvPr/>
+        </p:nvSpPr>
+        <p:spPr>
+          <a:xfrm>
+            <a:off x="4937760" y="3108960"/>
+            <a:ext cx="6675120" cy="640080"/>
+          </a:xfrm>
+          <a:prstGeom prst="rect">
+            <a:avLst/>
+          </a:prstGeom>
+          <a:noFill/>
+          <a:ln/>
+        </p:spPr>
+        <p:txBody>
+          <a:bodyPr wrap="square" lIns="0" tIns="0" rIns="0" bIns="0" rtlCol="0" anchor="t"/>
+          <a:lstStyle/>
+          <a:p>
+            <a:pPr indent="0" marL="0">
+              <a:lnSpc>
+                <a:spcPct val="105000"/>
+              </a:lnSpc>
+              <a:buNone/>
+            </a:pPr>
+            <a:r>
+              <a:rPr lang="en-US" sz="1500" dirty="0">
+                <a:solidFill>
+                  <a:srgbClr val="E7EDF5"/>
+                </a:solidFill>
+                <a:latin typeface="Malgun Gothic" pitchFamily="34" charset="0"/>
+                <a:ea typeface="Malgun Gothic" pitchFamily="34" charset="-122"/>
+                <a:cs typeface="Malgun Gothic" pitchFamily="34" charset="-120"/>
+              </a:rPr>
+              <a:t>테스트 영역의 시작 주소</a:t>
+            </a:r>
+            <a:endParaRPr lang="en-US" sz="1500" dirty="0"/>
+          </a:p>
+        </p:txBody>
+      </p:sp>
+      <p:sp>
+        <p:nvSpPr>
+          <p:cNvPr id="8" name="Text 6"/>
+          <p:cNvSpPr/>
+          <p:nvPr/>
+        </p:nvSpPr>
+        <p:spPr>
+          <a:xfrm>
+            <a:off x="548640" y="3822192"/>
+            <a:ext cx="4206240" cy="640080"/>
+          </a:xfrm>
+          <a:prstGeom prst="rect">
+            <a:avLst/>
+          </a:prstGeom>
+          <a:noFill/>
+          <a:ln/>
+        </p:spPr>
+        <p:txBody>
+          <a:bodyPr wrap="square" lIns="0" tIns="0" rIns="0" bIns="0" rtlCol="0" anchor="t"/>
+          <a:lstStyle/>
+          <a:p>
+            <a:pPr indent="0" marL="0">
+              <a:buNone/>
+            </a:pPr>
+            <a:r>
+              <a:rPr lang="en-US" sz="1400" b="1" dirty="0">
+                <a:solidFill>
+                  <a:srgbClr val="E8A33D"/>
                 </a:solidFill>
                 <a:latin typeface="Courier New" pitchFamily="34" charset="0"/>
                 <a:ea typeface="Courier New" pitchFamily="34" charset="-122"/>
                 <a:cs typeface="Courier New" pitchFamily="34" charset="-120"/>
               </a:rPr>
-              <a:t>+12B</a:t>
-            </a:r>
-            <a:endParaRPr lang="en-US" sz="1050" dirty="0"/>
-          </a:p>
-        </p:txBody>
-      </p:sp>
-      <p:sp>
-        <p:nvSpPr>
-          <p:cNvPr id="17" name="Shape 15"/>
-          <p:cNvSpPr/>
-          <p:nvPr/>
-        </p:nvSpPr>
-        <p:spPr>
-          <a:xfrm>
-            <a:off x="6108192" y="2148840"/>
-            <a:ext cx="1328166" cy="868680"/>
-          </a:xfrm>
-          <a:prstGeom prst="roundRect">
-            <a:avLst>
-              <a:gd name="adj" fmla="val 4211"/>
-            </a:avLst>
-          </a:prstGeom>
-          <a:solidFill>
-            <a:srgbClr val="0B1119"/>
-          </a:solidFill>
-          <a:ln w="12700">
-            <a:solidFill>
-              <a:srgbClr val="E8A33D"/>
-            </a:solidFill>
-            <a:prstDash val="solid"/>
-          </a:ln>
-        </p:spPr>
-      </p:sp>
-      <p:sp>
-        <p:nvSpPr>
-          <p:cNvPr id="18" name="Text 16"/>
-          <p:cNvSpPr/>
-          <p:nvPr/>
-        </p:nvSpPr>
-        <p:spPr>
-          <a:xfrm>
-            <a:off x="6080760" y="2276856"/>
-            <a:ext cx="1383030" cy="365760"/>
-          </a:xfrm>
-          <a:prstGeom prst="rect">
-            <a:avLst/>
-          </a:prstGeom>
-          <a:noFill/>
-          <a:ln/>
-        </p:spPr>
-        <p:txBody>
-          <a:bodyPr wrap="square" lIns="0" tIns="0" rIns="0" bIns="0" rtlCol="0" anchor="ctr"/>
-          <a:lstStyle/>
-          <a:p>
-            <a:pPr algn="ctr" indent="0" marL="0">
-              <a:buNone/>
-            </a:pPr>
-            <a:r>
-              <a:rPr lang="en-US" sz="1600" b="1" dirty="0">
+              <a:t>blockIdx.x * N * blockDim.x</a:t>
+            </a:r>
+            <a:endParaRPr lang="en-US" sz="1400" dirty="0"/>
+          </a:p>
+        </p:txBody>
+      </p:sp>
+      <p:sp>
+        <p:nvSpPr>
+          <p:cNvPr id="9" name="Text 7"/>
+          <p:cNvSpPr/>
+          <p:nvPr/>
+        </p:nvSpPr>
+        <p:spPr>
+          <a:xfrm>
+            <a:off x="4937760" y="3822192"/>
+            <a:ext cx="6675120" cy="640080"/>
+          </a:xfrm>
+          <a:prstGeom prst="rect">
+            <a:avLst/>
+          </a:prstGeom>
+          <a:noFill/>
+          <a:ln/>
+        </p:spPr>
+        <p:txBody>
+          <a:bodyPr wrap="square" lIns="0" tIns="0" rIns="0" bIns="0" rtlCol="0" anchor="t"/>
+          <a:lstStyle/>
+          <a:p>
+            <a:pPr indent="0" marL="0">
+              <a:lnSpc>
+                <a:spcPct val="105000"/>
+              </a:lnSpc>
+              <a:buNone/>
+            </a:pPr>
+            <a:r>
+              <a:rPr lang="en-US" sz="1500" dirty="0">
                 <a:solidFill>
                   <a:srgbClr val="E7EDF5"/>
+                </a:solidFill>
+                <a:latin typeface="Malgun Gothic" pitchFamily="34" charset="0"/>
+                <a:ea typeface="Malgun Gothic" pitchFamily="34" charset="-122"/>
+                <a:cs typeface="Malgun Gothic" pitchFamily="34" charset="-120"/>
+              </a:rPr>
+              <a:t>이 블록이 담당하는 큰 구역의 시작 (블록마다 N·512 word씩 떨어짐)</a:t>
+            </a:r>
+            <a:endParaRPr lang="en-US" sz="1500" dirty="0"/>
+          </a:p>
+        </p:txBody>
+      </p:sp>
+      <p:sp>
+        <p:nvSpPr>
+          <p:cNvPr id="10" name="Text 8"/>
+          <p:cNvSpPr/>
+          <p:nvPr/>
+        </p:nvSpPr>
+        <p:spPr>
+          <a:xfrm>
+            <a:off x="548640" y="4535424"/>
+            <a:ext cx="4206240" cy="640080"/>
+          </a:xfrm>
+          <a:prstGeom prst="rect">
+            <a:avLst/>
+          </a:prstGeom>
+          <a:noFill/>
+          <a:ln/>
+        </p:spPr>
+        <p:txBody>
+          <a:bodyPr wrap="square" lIns="0" tIns="0" rIns="0" bIns="0" rtlCol="0" anchor="t"/>
+          <a:lstStyle/>
+          <a:p>
+            <a:pPr indent="0" marL="0">
+              <a:buNone/>
+            </a:pPr>
+            <a:r>
+              <a:rPr lang="en-US" sz="1400" b="1" dirty="0">
+                <a:solidFill>
+                  <a:srgbClr val="3FB8C4"/>
                 </a:solidFill>
                 <a:latin typeface="Courier New" pitchFamily="34" charset="0"/>
                 <a:ea typeface="Courier New" pitchFamily="34" charset="-122"/>
                 <a:cs typeface="Courier New" pitchFamily="34" charset="-120"/>
               </a:rPr>
-              <a:t>T4</a:t>
-            </a:r>
-            <a:endParaRPr lang="en-US" sz="1600" dirty="0"/>
-          </a:p>
-        </p:txBody>
-      </p:sp>
-      <p:sp>
-        <p:nvSpPr>
-          <p:cNvPr id="19" name="Text 17"/>
-          <p:cNvSpPr/>
-          <p:nvPr/>
-        </p:nvSpPr>
-        <p:spPr>
-          <a:xfrm>
-            <a:off x="6080760" y="2651760"/>
-            <a:ext cx="1383030" cy="274320"/>
-          </a:xfrm>
-          <a:prstGeom prst="rect">
-            <a:avLst/>
-          </a:prstGeom>
-          <a:noFill/>
-          <a:ln/>
-        </p:spPr>
-        <p:txBody>
-          <a:bodyPr wrap="square" lIns="0" tIns="0" rIns="0" bIns="0" rtlCol="0" anchor="ctr"/>
-          <a:lstStyle/>
-          <a:p>
-            <a:pPr algn="ctr" indent="0" marL="0">
-              <a:buNone/>
-            </a:pPr>
-            <a:r>
-              <a:rPr lang="en-US" sz="1050" dirty="0">
-                <a:solidFill>
-                  <a:srgbClr val="9FB0C4"/>
+              <a:t>i * blockDim.x</a:t>
+            </a:r>
+            <a:endParaRPr lang="en-US" sz="1400" dirty="0"/>
+          </a:p>
+        </p:txBody>
+      </p:sp>
+      <p:sp>
+        <p:nvSpPr>
+          <p:cNvPr id="11" name="Text 9"/>
+          <p:cNvSpPr/>
+          <p:nvPr/>
+        </p:nvSpPr>
+        <p:spPr>
+          <a:xfrm>
+            <a:off x="4937760" y="4535424"/>
+            <a:ext cx="6675120" cy="640080"/>
+          </a:xfrm>
+          <a:prstGeom prst="rect">
+            <a:avLst/>
+          </a:prstGeom>
+          <a:noFill/>
+          <a:ln/>
+        </p:spPr>
+        <p:txBody>
+          <a:bodyPr wrap="square" lIns="0" tIns="0" rIns="0" bIns="0" rtlCol="0" anchor="t"/>
+          <a:lstStyle/>
+          <a:p>
+            <a:pPr indent="0" marL="0">
+              <a:lnSpc>
+                <a:spcPct val="105000"/>
+              </a:lnSpc>
+              <a:buNone/>
+            </a:pPr>
+            <a:r>
+              <a:rPr lang="en-US" sz="1500" dirty="0">
+                <a:solidFill>
+                  <a:srgbClr val="E7EDF5"/>
+                </a:solidFill>
+                <a:latin typeface="Malgun Gothic" pitchFamily="34" charset="0"/>
+                <a:ea typeface="Malgun Gothic" pitchFamily="34" charset="-122"/>
+                <a:cs typeface="Malgun Gothic" pitchFamily="34" charset="-120"/>
+              </a:rPr>
+              <a:t>블록 안에서 i번째 반복의 오프셋 (한 스레드가 N개 word 담당)</a:t>
+            </a:r>
+            <a:endParaRPr lang="en-US" sz="1500" dirty="0"/>
+          </a:p>
+        </p:txBody>
+      </p:sp>
+      <p:sp>
+        <p:nvSpPr>
+          <p:cNvPr id="12" name="Text 10"/>
+          <p:cNvSpPr/>
+          <p:nvPr/>
+        </p:nvSpPr>
+        <p:spPr>
+          <a:xfrm>
+            <a:off x="548640" y="5248656"/>
+            <a:ext cx="4206240" cy="640080"/>
+          </a:xfrm>
+          <a:prstGeom prst="rect">
+            <a:avLst/>
+          </a:prstGeom>
+          <a:noFill/>
+          <a:ln/>
+        </p:spPr>
+        <p:txBody>
+          <a:bodyPr wrap="square" lIns="0" tIns="0" rIns="0" bIns="0" rtlCol="0" anchor="t"/>
+          <a:lstStyle/>
+          <a:p>
+            <a:pPr indent="0" marL="0">
+              <a:buNone/>
+            </a:pPr>
+            <a:r>
+              <a:rPr lang="en-US" sz="1400" b="1" dirty="0">
+                <a:solidFill>
+                  <a:srgbClr val="F2C079"/>
                 </a:solidFill>
                 <a:latin typeface="Courier New" pitchFamily="34" charset="0"/>
                 <a:ea typeface="Courier New" pitchFamily="34" charset="-122"/>
                 <a:cs typeface="Courier New" pitchFamily="34" charset="-120"/>
               </a:rPr>
-              <a:t>+16B</a:t>
-            </a:r>
-            <a:endParaRPr lang="en-US" sz="1050" dirty="0"/>
-          </a:p>
-        </p:txBody>
-      </p:sp>
-      <p:sp>
-        <p:nvSpPr>
-          <p:cNvPr id="20" name="Shape 18"/>
-          <p:cNvSpPr/>
-          <p:nvPr/>
-        </p:nvSpPr>
-        <p:spPr>
-          <a:xfrm>
-            <a:off x="7491222" y="2148840"/>
-            <a:ext cx="1328166" cy="868680"/>
-          </a:xfrm>
-          <a:prstGeom prst="roundRect">
-            <a:avLst>
-              <a:gd name="adj" fmla="val 4211"/>
-            </a:avLst>
-          </a:prstGeom>
-          <a:solidFill>
-            <a:srgbClr val="0B1119"/>
-          </a:solidFill>
-          <a:ln w="12700">
-            <a:solidFill>
-              <a:srgbClr val="3FB8C4"/>
-            </a:solidFill>
-            <a:prstDash val="solid"/>
-          </a:ln>
-        </p:spPr>
-      </p:sp>
-      <p:sp>
-        <p:nvSpPr>
-          <p:cNvPr id="21" name="Text 19"/>
-          <p:cNvSpPr/>
-          <p:nvPr/>
-        </p:nvSpPr>
-        <p:spPr>
-          <a:xfrm>
-            <a:off x="7463790" y="2276856"/>
-            <a:ext cx="1383030" cy="365760"/>
-          </a:xfrm>
-          <a:prstGeom prst="rect">
-            <a:avLst/>
-          </a:prstGeom>
-          <a:noFill/>
-          <a:ln/>
-        </p:spPr>
-        <p:txBody>
-          <a:bodyPr wrap="square" lIns="0" tIns="0" rIns="0" bIns="0" rtlCol="0" anchor="ctr"/>
-          <a:lstStyle/>
-          <a:p>
-            <a:pPr algn="ctr" indent="0" marL="0">
-              <a:buNone/>
-            </a:pPr>
-            <a:r>
-              <a:rPr lang="en-US" sz="1600" b="1" dirty="0">
+              <a:t>threadIdx.x</a:t>
+            </a:r>
+            <a:endParaRPr lang="en-US" sz="1400" dirty="0"/>
+          </a:p>
+        </p:txBody>
+      </p:sp>
+      <p:sp>
+        <p:nvSpPr>
+          <p:cNvPr id="13" name="Text 11"/>
+          <p:cNvSpPr/>
+          <p:nvPr/>
+        </p:nvSpPr>
+        <p:spPr>
+          <a:xfrm>
+            <a:off x="4937760" y="5248656"/>
+            <a:ext cx="6675120" cy="640080"/>
+          </a:xfrm>
+          <a:prstGeom prst="rect">
+            <a:avLst/>
+          </a:prstGeom>
+          <a:noFill/>
+          <a:ln/>
+        </p:spPr>
+        <p:txBody>
+          <a:bodyPr wrap="square" lIns="0" tIns="0" rIns="0" bIns="0" rtlCol="0" anchor="t"/>
+          <a:lstStyle/>
+          <a:p>
+            <a:pPr indent="0" marL="0">
+              <a:lnSpc>
+                <a:spcPct val="105000"/>
+              </a:lnSpc>
+              <a:buNone/>
+            </a:pPr>
+            <a:r>
+              <a:rPr lang="en-US" sz="1500" dirty="0">
                 <a:solidFill>
                   <a:srgbClr val="E7EDF5"/>
-                </a:solidFill>
-                <a:latin typeface="Courier New" pitchFamily="34" charset="0"/>
-                <a:ea typeface="Courier New" pitchFamily="34" charset="-122"/>
-                <a:cs typeface="Courier New" pitchFamily="34" charset="-120"/>
-              </a:rPr>
-              <a:t>T5</a:t>
-            </a:r>
-            <a:endParaRPr lang="en-US" sz="1600" dirty="0"/>
-          </a:p>
-        </p:txBody>
-      </p:sp>
-      <p:sp>
-        <p:nvSpPr>
-          <p:cNvPr id="22" name="Text 20"/>
-          <p:cNvSpPr/>
-          <p:nvPr/>
-        </p:nvSpPr>
-        <p:spPr>
-          <a:xfrm>
-            <a:off x="7463790" y="2651760"/>
-            <a:ext cx="1383030" cy="274320"/>
-          </a:xfrm>
-          <a:prstGeom prst="rect">
-            <a:avLst/>
-          </a:prstGeom>
-          <a:noFill/>
-          <a:ln/>
-        </p:spPr>
-        <p:txBody>
-          <a:bodyPr wrap="square" lIns="0" tIns="0" rIns="0" bIns="0" rtlCol="0" anchor="ctr"/>
-          <a:lstStyle/>
-          <a:p>
-            <a:pPr algn="ctr" indent="0" marL="0">
-              <a:buNone/>
-            </a:pPr>
-            <a:r>
-              <a:rPr lang="en-US" sz="1050" dirty="0">
-                <a:solidFill>
-                  <a:srgbClr val="9FB0C4"/>
-                </a:solidFill>
-                <a:latin typeface="Courier New" pitchFamily="34" charset="0"/>
-                <a:ea typeface="Courier New" pitchFamily="34" charset="-122"/>
-                <a:cs typeface="Courier New" pitchFamily="34" charset="-120"/>
-              </a:rPr>
-              <a:t>+20B</a:t>
-            </a:r>
-            <a:endParaRPr lang="en-US" sz="1050" dirty="0"/>
-          </a:p>
-        </p:txBody>
-      </p:sp>
-      <p:sp>
-        <p:nvSpPr>
-          <p:cNvPr id="23" name="Shape 21"/>
-          <p:cNvSpPr/>
-          <p:nvPr/>
-        </p:nvSpPr>
-        <p:spPr>
-          <a:xfrm>
-            <a:off x="8874252" y="2148840"/>
-            <a:ext cx="1328166" cy="868680"/>
-          </a:xfrm>
-          <a:prstGeom prst="roundRect">
-            <a:avLst>
-              <a:gd name="adj" fmla="val 4211"/>
-            </a:avLst>
-          </a:prstGeom>
-          <a:solidFill>
-            <a:srgbClr val="0B1119"/>
-          </a:solidFill>
-          <a:ln w="12700">
-            <a:solidFill>
-              <a:srgbClr val="E8A33D"/>
-            </a:solidFill>
-            <a:prstDash val="solid"/>
-          </a:ln>
-        </p:spPr>
-      </p:sp>
-      <p:sp>
-        <p:nvSpPr>
-          <p:cNvPr id="24" name="Text 22"/>
-          <p:cNvSpPr/>
-          <p:nvPr/>
-        </p:nvSpPr>
-        <p:spPr>
-          <a:xfrm>
-            <a:off x="8846820" y="2276856"/>
-            <a:ext cx="1383030" cy="365760"/>
-          </a:xfrm>
-          <a:prstGeom prst="rect">
-            <a:avLst/>
-          </a:prstGeom>
-          <a:noFill/>
-          <a:ln/>
-        </p:spPr>
-        <p:txBody>
-          <a:bodyPr wrap="square" lIns="0" tIns="0" rIns="0" bIns="0" rtlCol="0" anchor="ctr"/>
-          <a:lstStyle/>
-          <a:p>
-            <a:pPr algn="ctr" indent="0" marL="0">
-              <a:buNone/>
-            </a:pPr>
-            <a:r>
-              <a:rPr lang="en-US" sz="1600" b="1" dirty="0">
-                <a:solidFill>
-                  <a:srgbClr val="E7EDF5"/>
-                </a:solidFill>
-                <a:latin typeface="Courier New" pitchFamily="34" charset="0"/>
-                <a:ea typeface="Courier New" pitchFamily="34" charset="-122"/>
-                <a:cs typeface="Courier New" pitchFamily="34" charset="-120"/>
-              </a:rPr>
-              <a:t>T6</a:t>
-            </a:r>
-            <a:endParaRPr lang="en-US" sz="1600" dirty="0"/>
-          </a:p>
-        </p:txBody>
-      </p:sp>
-      <p:sp>
-        <p:nvSpPr>
-          <p:cNvPr id="25" name="Text 23"/>
-          <p:cNvSpPr/>
-          <p:nvPr/>
-        </p:nvSpPr>
-        <p:spPr>
-          <a:xfrm>
-            <a:off x="8846820" y="2651760"/>
-            <a:ext cx="1383030" cy="274320"/>
-          </a:xfrm>
-          <a:prstGeom prst="rect">
-            <a:avLst/>
-          </a:prstGeom>
-          <a:noFill/>
-          <a:ln/>
-        </p:spPr>
-        <p:txBody>
-          <a:bodyPr wrap="square" lIns="0" tIns="0" rIns="0" bIns="0" rtlCol="0" anchor="ctr"/>
-          <a:lstStyle/>
-          <a:p>
-            <a:pPr algn="ctr" indent="0" marL="0">
-              <a:buNone/>
-            </a:pPr>
-            <a:r>
-              <a:rPr lang="en-US" sz="1050" dirty="0">
-                <a:solidFill>
-                  <a:srgbClr val="9FB0C4"/>
-                </a:solidFill>
-                <a:latin typeface="Courier New" pitchFamily="34" charset="0"/>
-                <a:ea typeface="Courier New" pitchFamily="34" charset="-122"/>
-                <a:cs typeface="Courier New" pitchFamily="34" charset="-120"/>
-              </a:rPr>
-              <a:t>+24B</a:t>
-            </a:r>
-            <a:endParaRPr lang="en-US" sz="1050" dirty="0"/>
-          </a:p>
-        </p:txBody>
-      </p:sp>
-      <p:sp>
-        <p:nvSpPr>
-          <p:cNvPr id="26" name="Shape 24"/>
-          <p:cNvSpPr/>
-          <p:nvPr/>
-        </p:nvSpPr>
-        <p:spPr>
-          <a:xfrm>
-            <a:off x="10257282" y="2148840"/>
-            <a:ext cx="1328166" cy="868680"/>
-          </a:xfrm>
-          <a:prstGeom prst="roundRect">
-            <a:avLst>
-              <a:gd name="adj" fmla="val 4211"/>
-            </a:avLst>
-          </a:prstGeom>
-          <a:solidFill>
-            <a:srgbClr val="0B1119"/>
-          </a:solidFill>
-          <a:ln w="12700">
-            <a:solidFill>
-              <a:srgbClr val="3FB8C4"/>
-            </a:solidFill>
-            <a:prstDash val="solid"/>
-          </a:ln>
-        </p:spPr>
-      </p:sp>
-      <p:sp>
-        <p:nvSpPr>
-          <p:cNvPr id="27" name="Text 25"/>
-          <p:cNvSpPr/>
-          <p:nvPr/>
-        </p:nvSpPr>
-        <p:spPr>
-          <a:xfrm>
-            <a:off x="10229850" y="2276856"/>
-            <a:ext cx="1383030" cy="365760"/>
-          </a:xfrm>
-          <a:prstGeom prst="rect">
-            <a:avLst/>
-          </a:prstGeom>
-          <a:noFill/>
-          <a:ln/>
-        </p:spPr>
-        <p:txBody>
-          <a:bodyPr wrap="square" lIns="0" tIns="0" rIns="0" bIns="0" rtlCol="0" anchor="ctr"/>
-          <a:lstStyle/>
-          <a:p>
-            <a:pPr algn="ctr" indent="0" marL="0">
-              <a:buNone/>
-            </a:pPr>
-            <a:r>
-              <a:rPr lang="en-US" sz="1600" b="1" dirty="0">
-                <a:solidFill>
-                  <a:srgbClr val="E7EDF5"/>
-                </a:solidFill>
-                <a:latin typeface="Courier New" pitchFamily="34" charset="0"/>
-                <a:ea typeface="Courier New" pitchFamily="34" charset="-122"/>
-                <a:cs typeface="Courier New" pitchFamily="34" charset="-120"/>
-              </a:rPr>
-              <a:t>…</a:t>
-            </a:r>
-            <a:endParaRPr lang="en-US" sz="1600" dirty="0"/>
-          </a:p>
-        </p:txBody>
-      </p:sp>
-      <p:sp>
-        <p:nvSpPr>
-          <p:cNvPr id="28" name="Text 26"/>
-          <p:cNvSpPr/>
-          <p:nvPr/>
-        </p:nvSpPr>
-        <p:spPr>
-          <a:xfrm>
-            <a:off x="10229850" y="2651760"/>
-            <a:ext cx="1383030" cy="274320"/>
-          </a:xfrm>
-          <a:prstGeom prst="rect">
-            <a:avLst/>
-          </a:prstGeom>
-          <a:noFill/>
-          <a:ln/>
-        </p:spPr>
-        <p:txBody>
-          <a:bodyPr wrap="square" lIns="0" tIns="0" rIns="0" bIns="0" rtlCol="0" anchor="ctr"/>
-          <a:lstStyle/>
-          <a:p>
-            <a:pPr algn="ctr" indent="0" marL="0">
-              <a:buNone/>
-            </a:pPr>
-            <a:endParaRPr lang="en-US" sz="1050" dirty="0"/>
-          </a:p>
-        </p:txBody>
-      </p:sp>
-      <p:sp>
-        <p:nvSpPr>
-          <p:cNvPr id="29" name="Text 27"/>
-          <p:cNvSpPr/>
-          <p:nvPr/>
-        </p:nvSpPr>
-        <p:spPr>
-          <a:xfrm>
-            <a:off x="548640" y="3108960"/>
-            <a:ext cx="11064240" cy="274320"/>
-          </a:xfrm>
-          <a:prstGeom prst="rect">
-            <a:avLst/>
-          </a:prstGeom>
-          <a:noFill/>
-          <a:ln/>
-        </p:spPr>
-        <p:txBody>
-          <a:bodyPr wrap="square" lIns="0" tIns="0" rIns="0" bIns="0" rtlCol="0" anchor="ctr"/>
-          <a:lstStyle/>
-          <a:p>
-            <a:pPr algn="ctr" indent="0" marL="0">
-              <a:buNone/>
-            </a:pPr>
-            <a:r>
-              <a:rPr lang="en-US" sz="1200" i="1" dirty="0">
-                <a:solidFill>
-                  <a:srgbClr val="9FB0C4"/>
                 </a:solidFill>
                 <a:latin typeface="Malgun Gothic" pitchFamily="34" charset="0"/>
                 <a:ea typeface="Malgun Gothic" pitchFamily="34" charset="-122"/>
                 <a:cs typeface="Malgun Gothic" pitchFamily="34" charset="-120"/>
               </a:rPr>
-              <a:t>연속된 메모리 주소 →</a:t>
-            </a:r>
-            <a:endParaRPr lang="en-US" sz="1200" dirty="0"/>
-          </a:p>
-        </p:txBody>
-      </p:sp>
-      <p:sp>
-        <p:nvSpPr>
-          <p:cNvPr id="30" name="Shape 28"/>
-          <p:cNvSpPr/>
-          <p:nvPr/>
-        </p:nvSpPr>
-        <p:spPr>
-          <a:xfrm>
-            <a:off x="548640" y="3794760"/>
-            <a:ext cx="11064240" cy="1920240"/>
-          </a:xfrm>
-          <a:prstGeom prst="roundRect">
-            <a:avLst>
-              <a:gd name="adj" fmla="val 3810"/>
-            </a:avLst>
-          </a:prstGeom>
-          <a:solidFill>
-            <a:srgbClr val="18212E"/>
-          </a:solidFill>
-          <a:ln w="19050">
-            <a:solidFill>
-              <a:srgbClr val="3FB8C4"/>
-            </a:solidFill>
-            <a:prstDash val="solid"/>
-          </a:ln>
-        </p:spPr>
-      </p:sp>
-      <p:sp>
-        <p:nvSpPr>
-          <p:cNvPr id="31" name="Text 29"/>
-          <p:cNvSpPr/>
-          <p:nvPr/>
-        </p:nvSpPr>
-        <p:spPr>
-          <a:xfrm>
-            <a:off x="868680" y="4023360"/>
-            <a:ext cx="10424160" cy="1554480"/>
-          </a:xfrm>
-          <a:prstGeom prst="rect">
-            <a:avLst/>
-          </a:prstGeom>
-          <a:noFill/>
-          <a:ln/>
-        </p:spPr>
-        <p:txBody>
-          <a:bodyPr wrap="square" lIns="0" tIns="0" rIns="0" bIns="0" rtlCol="0" anchor="t"/>
-          <a:lstStyle/>
-          <a:p>
-            <a:pPr marL="342900" indent="-342900">
-              <a:lnSpc>
-                <a:spcPct val="105000"/>
-              </a:lnSpc>
-              <a:spcAft>
-                <a:spcPts val="900"/>
-              </a:spcAft>
-              <a:buSzPct val="100000"/>
-              <a:buChar char="•"/>
-            </a:pPr>
-            <a:r>
-              <a:rPr lang="en-US" sz="1500" dirty="0">
-                <a:solidFill>
-                  <a:srgbClr val="E7EDF5"/>
-                </a:solidFill>
-                <a:latin typeface="Malgun Gothic" pitchFamily="34" charset="0"/>
-                <a:ea typeface="Malgun Gothic" pitchFamily="34" charset="-122"/>
-                <a:cs typeface="Malgun Gothic" pitchFamily="34" charset="-120"/>
-              </a:rPr>
-              <a:t>워프(warp, 32스레드)의 접근이 하나의 메모리 트랜잭션으로 묶인다 → 대역폭 최대 활용</a:t>
-            </a:r>
-            <a:endParaRPr lang="en-US" sz="1500" dirty="0"/>
-          </a:p>
-          <a:p>
-            <a:pPr marL="342900" indent="-342900">
-              <a:lnSpc>
-                <a:spcPct val="105000"/>
-              </a:lnSpc>
-              <a:spcAft>
-                <a:spcPts val="900"/>
-              </a:spcAft>
-              <a:buSzPct val="100000"/>
-              <a:buChar char="•"/>
-            </a:pPr>
-            <a:r>
-              <a:rPr lang="en-US" sz="1500" dirty="0">
-                <a:solidFill>
-                  <a:srgbClr val="E7EDF5"/>
-                </a:solidFill>
-                <a:latin typeface="Malgun Gothic" pitchFamily="34" charset="0"/>
-                <a:ea typeface="Malgun Gothic" pitchFamily="34" charset="-122"/>
-                <a:cs typeface="Malgun Gothic" pitchFamily="34" charset="-120"/>
-              </a:rPr>
-              <a:t>만약 스레드가 큰 간격으로 흩어지면 트랜잭션이 쪼개져 느려진다 (uncoalesced)</a:t>
-            </a:r>
-            <a:endParaRPr lang="en-US" sz="1500" dirty="0"/>
-          </a:p>
-          <a:p>
-            <a:pPr marL="342900" indent="-342900">
-              <a:lnSpc>
-                <a:spcPct val="105000"/>
-              </a:lnSpc>
-              <a:spcAft>
-                <a:spcPts val="900"/>
-              </a:spcAft>
-              <a:buSzPct val="100000"/>
-              <a:buChar char="•"/>
-            </a:pPr>
-            <a:r>
-              <a:rPr lang="en-US" sz="1500" dirty="0">
-                <a:solidFill>
-                  <a:srgbClr val="E7EDF5"/>
-                </a:solidFill>
-                <a:latin typeface="Malgun Gothic" pitchFamily="34" charset="0"/>
-                <a:ea typeface="Malgun Gothic" pitchFamily="34" charset="-122"/>
-                <a:cs typeface="Malgun Gothic" pitchFamily="34" charset="-120"/>
-              </a:rPr>
-              <a:t>블록은 N·blockDim.x word씩 널찍이 떨어진 구역을 담당해 전체 영역을 빈틈없이 덮는다</a:t>
+              <a:t>그 안에서 내 스레드의 위치 (0~511)</a:t>
             </a:r>
             <a:endParaRPr lang="en-US" sz="1500" dirty="0"/>
           </a:p>
@@ -9714,7 +10379,7 @@
                 <a:ea typeface="Courier New" pitchFamily="34" charset="-122"/>
                 <a:cs typeface="Courier New" pitchFamily="34" charset="-120"/>
               </a:rPr>
-              <a:t>7</a:t>
+              <a:t>6</a:t>
             </a:r>
             <a:endParaRPr lang="en-US" sz="2200" dirty="0"/>
           </a:p>
@@ -9753,7 +10418,7 @@
                 <a:ea typeface="Malgun Gothic" pitchFamily="34" charset="-122"/>
                 <a:cs typeface="Malgun Gothic" pitchFamily="34" charset="-120"/>
               </a:rPr>
-              <a:t>첫 커널 완독 · deviceWriteConstant</a:t>
+              <a:t>왜 이렇게 매핑하나 · 메모리 병합(coalescing)</a:t>
             </a:r>
             <a:endParaRPr lang="en-US" sz="2900" dirty="0"/>
           </a:p>
@@ -9761,18 +10426,57 @@
       </p:sp>
       <p:sp>
         <p:nvSpPr>
-          <p:cNvPr id="4" name="Shape 2"/>
-          <p:cNvSpPr/>
-          <p:nvPr/>
-        </p:nvSpPr>
-        <p:spPr>
-          <a:xfrm>
-            <a:off x="548640" y="1508760"/>
-            <a:ext cx="11064240" cy="2651760"/>
+          <p:cNvPr id="4" name="Text 2"/>
+          <p:cNvSpPr/>
+          <p:nvPr/>
+        </p:nvSpPr>
+        <p:spPr>
+          <a:xfrm>
+            <a:off x="548640" y="1417320"/>
+            <a:ext cx="11064240" cy="457200"/>
+          </a:xfrm>
+          <a:prstGeom prst="rect">
+            <a:avLst/>
+          </a:prstGeom>
+          <a:noFill/>
+          <a:ln/>
+        </p:spPr>
+        <p:txBody>
+          <a:bodyPr wrap="square" lIns="0" tIns="0" rIns="0" bIns="0" rtlCol="0" anchor="ctr"/>
+          <a:lstStyle/>
+          <a:p>
+            <a:pPr indent="0" marL="0">
+              <a:buNone/>
+            </a:pPr>
+            <a:r>
+              <a:rPr lang="en-US" sz="1550" dirty="0">
+                <a:solidFill>
+                  <a:srgbClr val="9FB0C4"/>
+                </a:solidFill>
+                <a:latin typeface="Malgun Gothic" pitchFamily="34" charset="0"/>
+                <a:ea typeface="Malgun Gothic" pitchFamily="34" charset="-122"/>
+                <a:cs typeface="Malgun Gothic" pitchFamily="34" charset="-120"/>
+              </a:rPr>
+              <a:t>같은 반복 i에서 이웃 스레드(threadIdx.x)가 이웃한 주소를 맡습니다. 이 '인터리빙'이 성능의 열쇠입니다.</a:t>
+            </a:r>
+            <a:endParaRPr lang="en-US" sz="1550" dirty="0"/>
+          </a:p>
+        </p:txBody>
+      </p:sp>
+      <p:sp>
+        <p:nvSpPr>
+          <p:cNvPr id="5" name="Shape 3"/>
+          <p:cNvSpPr/>
+          <p:nvPr/>
+        </p:nvSpPr>
+        <p:spPr>
+          <a:xfrm>
+            <a:off x="576072" y="2148840"/>
+            <a:ext cx="1328166" cy="868680"/>
           </a:xfrm>
           <a:prstGeom prst="roundRect">
             <a:avLst>
-              <a:gd name="adj" fmla="val 1724"/>
+              <a:gd name="adj" fmla="val 4211"/>
             </a:avLst>
           </a:prstGeom>
           <a:solidFill>
@@ -9780,7 +10484,7 @@
           </a:solidFill>
           <a:ln w="12700">
             <a:solidFill>
-              <a:srgbClr val="2C3A4E"/>
+              <a:srgbClr val="E8A33D"/>
             </a:solidFill>
             <a:prstDash val="solid"/>
           </a:ln>
@@ -9788,73 +10492,135 @@
       </p:sp>
       <p:sp>
         <p:nvSpPr>
-          <p:cNvPr id="5" name="Text 3"/>
-          <p:cNvSpPr/>
-          <p:nvPr/>
-        </p:nvSpPr>
-        <p:spPr>
-          <a:xfrm>
-            <a:off x="768096" y="1655064"/>
-            <a:ext cx="10625328" cy="2359152"/>
-          </a:xfrm>
-          <a:prstGeom prst="rect">
-            <a:avLst/>
-          </a:prstGeom>
-          <a:noFill/>
-          <a:ln/>
-        </p:spPr>
-        <p:txBody>
-          <a:bodyPr wrap="square" lIns="0" tIns="0" rIns="0" bIns="0" rtlCol="0" anchor="t"/>
-          <a:lstStyle/>
-          <a:p>
-            <a:pPr algn="l" indent="0" marL="0">
-              <a:lnSpc>
-                <a:spcPct val="110000"/>
-              </a:lnSpc>
-              <a:buNone/>
-            </a:pPr>
-            <a:r>
-              <a:rPr lang="en-US" sz="1400" dirty="0">
-                <a:solidFill>
-                  <a:srgbClr val="E8A33D"/>
+          <p:cNvPr id="6" name="Text 4"/>
+          <p:cNvSpPr/>
+          <p:nvPr/>
+        </p:nvSpPr>
+        <p:spPr>
+          <a:xfrm>
+            <a:off x="548640" y="2276856"/>
+            <a:ext cx="1383030" cy="365760"/>
+          </a:xfrm>
+          <a:prstGeom prst="rect">
+            <a:avLst/>
+          </a:prstGeom>
+          <a:noFill/>
+          <a:ln/>
+        </p:spPr>
+        <p:txBody>
+          <a:bodyPr wrap="square" lIns="0" tIns="0" rIns="0" bIns="0" rtlCol="0" anchor="ctr"/>
+          <a:lstStyle/>
+          <a:p>
+            <a:pPr algn="ctr" indent="0" marL="0">
+              <a:buNone/>
+            </a:pPr>
+            <a:r>
+              <a:rPr lang="en-US" sz="1600" b="1" dirty="0">
+                <a:solidFill>
+                  <a:srgbClr val="E7EDF5"/>
                 </a:solidFill>
                 <a:latin typeface="Courier New" pitchFamily="34" charset="0"/>
                 <a:ea typeface="Courier New" pitchFamily="34" charset="-122"/>
                 <a:cs typeface="Courier New" pitchFamily="34" charset="-120"/>
               </a:rPr>
-              <a:t>__global__ void</a:t>
-            </a:r>
-            <a:endParaRPr lang="en-US" sz="1400" dirty="0"/>
-          </a:p>
-          <a:p>
-            <a:pPr algn="l" indent="0" marL="0">
-              <a:lnSpc>
-                <a:spcPct val="110000"/>
-              </a:lnSpc>
-              <a:buNone/>
-            </a:pPr>
-            <a:r>
-              <a:rPr lang="en-US" sz="1400" dirty="0">
-                <a:solidFill>
-                  <a:srgbClr val="E7EDF5"/>
+              <a:t>T0</a:t>
+            </a:r>
+            <a:endParaRPr lang="en-US" sz="1600" dirty="0"/>
+          </a:p>
+        </p:txBody>
+      </p:sp>
+      <p:sp>
+        <p:nvSpPr>
+          <p:cNvPr id="7" name="Text 5"/>
+          <p:cNvSpPr/>
+          <p:nvPr/>
+        </p:nvSpPr>
+        <p:spPr>
+          <a:xfrm>
+            <a:off x="548640" y="2651760"/>
+            <a:ext cx="1383030" cy="274320"/>
+          </a:xfrm>
+          <a:prstGeom prst="rect">
+            <a:avLst/>
+          </a:prstGeom>
+          <a:noFill/>
+          <a:ln/>
+        </p:spPr>
+        <p:txBody>
+          <a:bodyPr wrap="square" lIns="0" tIns="0" rIns="0" bIns="0" rtlCol="0" anchor="ctr"/>
+          <a:lstStyle/>
+          <a:p>
+            <a:pPr algn="ctr" indent="0" marL="0">
+              <a:buNone/>
+            </a:pPr>
+            <a:r>
+              <a:rPr lang="en-US" sz="1050" dirty="0">
+                <a:solidFill>
+                  <a:srgbClr val="9FB0C4"/>
                 </a:solidFill>
                 <a:latin typeface="Courier New" pitchFamily="34" charset="0"/>
                 <a:ea typeface="Courier New" pitchFamily="34" charset="-122"/>
                 <a:cs typeface="Courier New" pitchFamily="34" charset="-120"/>
               </a:rPr>
-              <a:t>deviceWriteConstant(uint* base, uint N, const uint constant) {</a:t>
-            </a:r>
-            <a:endParaRPr lang="en-US" sz="1400" dirty="0"/>
-          </a:p>
-          <a:p>
-            <a:pPr algn="l" indent="0" marL="0">
-              <a:lnSpc>
-                <a:spcPct val="110000"/>
-              </a:lnSpc>
-              <a:buNone/>
-            </a:pPr>
-            <a:r>
-              <a:rPr lang="en-US" sz="1400" dirty="0">
+              <a:t>+0B</a:t>
+            </a:r>
+            <a:endParaRPr lang="en-US" sz="1050" dirty="0"/>
+          </a:p>
+        </p:txBody>
+      </p:sp>
+      <p:sp>
+        <p:nvSpPr>
+          <p:cNvPr id="8" name="Shape 6"/>
+          <p:cNvSpPr/>
+          <p:nvPr/>
+        </p:nvSpPr>
+        <p:spPr>
+          <a:xfrm>
+            <a:off x="1959102" y="2148840"/>
+            <a:ext cx="1328166" cy="868680"/>
+          </a:xfrm>
+          <a:prstGeom prst="roundRect">
+            <a:avLst>
+              <a:gd name="adj" fmla="val 4211"/>
+            </a:avLst>
+          </a:prstGeom>
+          <a:solidFill>
+            <a:srgbClr val="0B1119"/>
+          </a:solidFill>
+          <a:ln w="12700">
+            <a:solidFill>
+              <a:srgbClr val="3FB8C4"/>
+            </a:solidFill>
+            <a:prstDash val="solid"/>
+          </a:ln>
+        </p:spPr>
+      </p:sp>
+      <p:sp>
+        <p:nvSpPr>
+          <p:cNvPr id="9" name="Text 7"/>
+          <p:cNvSpPr/>
+          <p:nvPr/>
+        </p:nvSpPr>
+        <p:spPr>
+          <a:xfrm>
+            <a:off x="1931670" y="2276856"/>
+            <a:ext cx="1383030" cy="365760"/>
+          </a:xfrm>
+          <a:prstGeom prst="rect">
+            <a:avLst/>
+          </a:prstGeom>
+          <a:noFill/>
+          <a:ln/>
+        </p:spPr>
+        <p:txBody>
+          <a:bodyPr wrap="square" lIns="0" tIns="0" rIns="0" bIns="0" rtlCol="0" anchor="ctr"/>
+          <a:lstStyle/>
+          <a:p>
+            <a:pPr algn="ctr" indent="0" marL="0">
+              <a:buNone/>
+            </a:pPr>
+            <a:r>
+              <a:rPr lang="en-US" sz="1600" b="1" dirty="0">
                 <a:solidFill>
                   <a:srgbClr val="E7EDF5"/>
                 </a:solidFill>
@@ -9862,39 +10628,104 @@
                 <a:ea typeface="Courier New" pitchFamily="34" charset="-122"/>
                 <a:cs typeface="Courier New" pitchFamily="34" charset="-120"/>
               </a:rPr>
-              <a:t>    for (uint i = 0; i &lt; N; i++) {</a:t>
-            </a:r>
-            <a:endParaRPr lang="en-US" sz="1400" dirty="0"/>
-          </a:p>
-          <a:p>
-            <a:pPr algn="l" indent="0" marL="0">
-              <a:lnSpc>
-                <a:spcPct val="110000"/>
-              </a:lnSpc>
-              <a:buNone/>
-            </a:pPr>
-            <a:r>
-              <a:rPr lang="en-US" sz="1400" dirty="0">
-                <a:solidFill>
-                  <a:srgbClr val="F2C079"/>
+              <a:t>T1</a:t>
+            </a:r>
+            <a:endParaRPr lang="en-US" sz="1600" dirty="0"/>
+          </a:p>
+        </p:txBody>
+      </p:sp>
+      <p:sp>
+        <p:nvSpPr>
+          <p:cNvPr id="10" name="Text 8"/>
+          <p:cNvSpPr/>
+          <p:nvPr/>
+        </p:nvSpPr>
+        <p:spPr>
+          <a:xfrm>
+            <a:off x="1931670" y="2651760"/>
+            <a:ext cx="1383030" cy="274320"/>
+          </a:xfrm>
+          <a:prstGeom prst="rect">
+            <a:avLst/>
+          </a:prstGeom>
+          <a:noFill/>
+          <a:ln/>
+        </p:spPr>
+        <p:txBody>
+          <a:bodyPr wrap="square" lIns="0" tIns="0" rIns="0" bIns="0" rtlCol="0" anchor="ctr"/>
+          <a:lstStyle/>
+          <a:p>
+            <a:pPr algn="ctr" indent="0" marL="0">
+              <a:buNone/>
+            </a:pPr>
+            <a:r>
+              <a:rPr lang="en-US" sz="1050" dirty="0">
+                <a:solidFill>
+                  <a:srgbClr val="9FB0C4"/>
                 </a:solidFill>
                 <a:latin typeface="Courier New" pitchFamily="34" charset="0"/>
                 <a:ea typeface="Courier New" pitchFamily="34" charset="-122"/>
                 <a:cs typeface="Courier New" pitchFamily="34" charset="-120"/>
               </a:rPr>
-              <a:t>        *(THREAD_ADDRESS(base, N, i)) = constant;   // 각 스레드가 자기 word들을 채움</a:t>
-            </a:r>
-            <a:endParaRPr lang="en-US" sz="1400" dirty="0"/>
-          </a:p>
-          <a:p>
-            <a:pPr algn="l" indent="0" marL="0">
-              <a:lnSpc>
-                <a:spcPct val="110000"/>
-              </a:lnSpc>
-              <a:buNone/>
-            </a:pPr>
-            <a:r>
-              <a:rPr lang="en-US" sz="1400" dirty="0">
+              <a:t>+4B</a:t>
+            </a:r>
+            <a:endParaRPr lang="en-US" sz="1050" dirty="0"/>
+          </a:p>
+        </p:txBody>
+      </p:sp>
+      <p:sp>
+        <p:nvSpPr>
+          <p:cNvPr id="11" name="Shape 9"/>
+          <p:cNvSpPr/>
+          <p:nvPr/>
+        </p:nvSpPr>
+        <p:spPr>
+          <a:xfrm>
+            <a:off x="3342132" y="2148840"/>
+            <a:ext cx="1328166" cy="868680"/>
+          </a:xfrm>
+          <a:prstGeom prst="roundRect">
+            <a:avLst>
+              <a:gd name="adj" fmla="val 4211"/>
+            </a:avLst>
+          </a:prstGeom>
+          <a:solidFill>
+            <a:srgbClr val="0B1119"/>
+          </a:solidFill>
+          <a:ln w="12700">
+            <a:solidFill>
+              <a:srgbClr val="E8A33D"/>
+            </a:solidFill>
+            <a:prstDash val="solid"/>
+          </a:ln>
+        </p:spPr>
+      </p:sp>
+      <p:sp>
+        <p:nvSpPr>
+          <p:cNvPr id="12" name="Text 10"/>
+          <p:cNvSpPr/>
+          <p:nvPr/>
+        </p:nvSpPr>
+        <p:spPr>
+          <a:xfrm>
+            <a:off x="3314700" y="2276856"/>
+            <a:ext cx="1383030" cy="365760"/>
+          </a:xfrm>
+          <a:prstGeom prst="rect">
+            <a:avLst/>
+          </a:prstGeom>
+          <a:noFill/>
+          <a:ln/>
+        </p:spPr>
+        <p:txBody>
+          <a:bodyPr wrap="square" lIns="0" tIns="0" rIns="0" bIns="0" rtlCol="0" anchor="ctr"/>
+          <a:lstStyle/>
+          <a:p>
+            <a:pPr algn="ctr" indent="0" marL="0">
+              <a:buNone/>
+            </a:pPr>
+            <a:r>
+              <a:rPr lang="en-US" sz="1600" b="1" dirty="0">
                 <a:solidFill>
                   <a:srgbClr val="E7EDF5"/>
                 </a:solidFill>
@@ -9902,46 +10733,618 @@
                 <a:ea typeface="Courier New" pitchFamily="34" charset="-122"/>
                 <a:cs typeface="Courier New" pitchFamily="34" charset="-120"/>
               </a:rPr>
-              <a:t>    }</a:t>
-            </a:r>
-            <a:endParaRPr lang="en-US" sz="1400" dirty="0"/>
-          </a:p>
-          <a:p>
-            <a:pPr algn="l" indent="0" marL="0">
-              <a:lnSpc>
-                <a:spcPct val="110000"/>
-              </a:lnSpc>
-              <a:buNone/>
-            </a:pPr>
-            <a:r>
-              <a:rPr lang="en-US" sz="1400" dirty="0">
-                <a:solidFill>
-                  <a:srgbClr val="E7EDF5"/>
+              <a:t>T2</a:t>
+            </a:r>
+            <a:endParaRPr lang="en-US" sz="1600" dirty="0"/>
+          </a:p>
+        </p:txBody>
+      </p:sp>
+      <p:sp>
+        <p:nvSpPr>
+          <p:cNvPr id="13" name="Text 11"/>
+          <p:cNvSpPr/>
+          <p:nvPr/>
+        </p:nvSpPr>
+        <p:spPr>
+          <a:xfrm>
+            <a:off x="3314700" y="2651760"/>
+            <a:ext cx="1383030" cy="274320"/>
+          </a:xfrm>
+          <a:prstGeom prst="rect">
+            <a:avLst/>
+          </a:prstGeom>
+          <a:noFill/>
+          <a:ln/>
+        </p:spPr>
+        <p:txBody>
+          <a:bodyPr wrap="square" lIns="0" tIns="0" rIns="0" bIns="0" rtlCol="0" anchor="ctr"/>
+          <a:lstStyle/>
+          <a:p>
+            <a:pPr algn="ctr" indent="0" marL="0">
+              <a:buNone/>
+            </a:pPr>
+            <a:r>
+              <a:rPr lang="en-US" sz="1050" dirty="0">
+                <a:solidFill>
+                  <a:srgbClr val="9FB0C4"/>
                 </a:solidFill>
                 <a:latin typeface="Courier New" pitchFamily="34" charset="0"/>
                 <a:ea typeface="Courier New" pitchFamily="34" charset="-122"/>
                 <a:cs typeface="Courier New" pitchFamily="34" charset="-120"/>
               </a:rPr>
-              <a:t>}</a:t>
-            </a:r>
-            <a:endParaRPr lang="en-US" sz="1400" dirty="0"/>
-          </a:p>
-        </p:txBody>
-      </p:sp>
-      <p:sp>
-        <p:nvSpPr>
-          <p:cNvPr id="6" name="Shape 4"/>
-          <p:cNvSpPr/>
-          <p:nvPr/>
-        </p:nvSpPr>
-        <p:spPr>
-          <a:xfrm>
-            <a:off x="548640" y="4343400"/>
-            <a:ext cx="11064240" cy="1371600"/>
+              <a:t>+8B</a:t>
+            </a:r>
+            <a:endParaRPr lang="en-US" sz="1050" dirty="0"/>
+          </a:p>
+        </p:txBody>
+      </p:sp>
+      <p:sp>
+        <p:nvSpPr>
+          <p:cNvPr id="14" name="Shape 12"/>
+          <p:cNvSpPr/>
+          <p:nvPr/>
+        </p:nvSpPr>
+        <p:spPr>
+          <a:xfrm>
+            <a:off x="4725162" y="2148840"/>
+            <a:ext cx="1328166" cy="868680"/>
           </a:xfrm>
           <a:prstGeom prst="roundRect">
             <a:avLst>
-              <a:gd name="adj" fmla="val 5333"/>
+              <a:gd name="adj" fmla="val 4211"/>
+            </a:avLst>
+          </a:prstGeom>
+          <a:solidFill>
+            <a:srgbClr val="0B1119"/>
+          </a:solidFill>
+          <a:ln w="12700">
+            <a:solidFill>
+              <a:srgbClr val="3FB8C4"/>
+            </a:solidFill>
+            <a:prstDash val="solid"/>
+          </a:ln>
+        </p:spPr>
+      </p:sp>
+      <p:sp>
+        <p:nvSpPr>
+          <p:cNvPr id="15" name="Text 13"/>
+          <p:cNvSpPr/>
+          <p:nvPr/>
+        </p:nvSpPr>
+        <p:spPr>
+          <a:xfrm>
+            <a:off x="4697730" y="2276856"/>
+            <a:ext cx="1383030" cy="365760"/>
+          </a:xfrm>
+          <a:prstGeom prst="rect">
+            <a:avLst/>
+          </a:prstGeom>
+          <a:noFill/>
+          <a:ln/>
+        </p:spPr>
+        <p:txBody>
+          <a:bodyPr wrap="square" lIns="0" tIns="0" rIns="0" bIns="0" rtlCol="0" anchor="ctr"/>
+          <a:lstStyle/>
+          <a:p>
+            <a:pPr algn="ctr" indent="0" marL="0">
+              <a:buNone/>
+            </a:pPr>
+            <a:r>
+              <a:rPr lang="en-US" sz="1600" b="1" dirty="0">
+                <a:solidFill>
+                  <a:srgbClr val="E7EDF5"/>
+                </a:solidFill>
+                <a:latin typeface="Courier New" pitchFamily="34" charset="0"/>
+                <a:ea typeface="Courier New" pitchFamily="34" charset="-122"/>
+                <a:cs typeface="Courier New" pitchFamily="34" charset="-120"/>
+              </a:rPr>
+              <a:t>T3</a:t>
+            </a:r>
+            <a:endParaRPr lang="en-US" sz="1600" dirty="0"/>
+          </a:p>
+        </p:txBody>
+      </p:sp>
+      <p:sp>
+        <p:nvSpPr>
+          <p:cNvPr id="16" name="Text 14"/>
+          <p:cNvSpPr/>
+          <p:nvPr/>
+        </p:nvSpPr>
+        <p:spPr>
+          <a:xfrm>
+            <a:off x="4697730" y="2651760"/>
+            <a:ext cx="1383030" cy="274320"/>
+          </a:xfrm>
+          <a:prstGeom prst="rect">
+            <a:avLst/>
+          </a:prstGeom>
+          <a:noFill/>
+          <a:ln/>
+        </p:spPr>
+        <p:txBody>
+          <a:bodyPr wrap="square" lIns="0" tIns="0" rIns="0" bIns="0" rtlCol="0" anchor="ctr"/>
+          <a:lstStyle/>
+          <a:p>
+            <a:pPr algn="ctr" indent="0" marL="0">
+              <a:buNone/>
+            </a:pPr>
+            <a:r>
+              <a:rPr lang="en-US" sz="1050" dirty="0">
+                <a:solidFill>
+                  <a:srgbClr val="9FB0C4"/>
+                </a:solidFill>
+                <a:latin typeface="Courier New" pitchFamily="34" charset="0"/>
+                <a:ea typeface="Courier New" pitchFamily="34" charset="-122"/>
+                <a:cs typeface="Courier New" pitchFamily="34" charset="-120"/>
+              </a:rPr>
+              <a:t>+12B</a:t>
+            </a:r>
+            <a:endParaRPr lang="en-US" sz="1050" dirty="0"/>
+          </a:p>
+        </p:txBody>
+      </p:sp>
+      <p:sp>
+        <p:nvSpPr>
+          <p:cNvPr id="17" name="Shape 15"/>
+          <p:cNvSpPr/>
+          <p:nvPr/>
+        </p:nvSpPr>
+        <p:spPr>
+          <a:xfrm>
+            <a:off x="6108192" y="2148840"/>
+            <a:ext cx="1328166" cy="868680"/>
+          </a:xfrm>
+          <a:prstGeom prst="roundRect">
+            <a:avLst>
+              <a:gd name="adj" fmla="val 4211"/>
+            </a:avLst>
+          </a:prstGeom>
+          <a:solidFill>
+            <a:srgbClr val="0B1119"/>
+          </a:solidFill>
+          <a:ln w="12700">
+            <a:solidFill>
+              <a:srgbClr val="E8A33D"/>
+            </a:solidFill>
+            <a:prstDash val="solid"/>
+          </a:ln>
+        </p:spPr>
+      </p:sp>
+      <p:sp>
+        <p:nvSpPr>
+          <p:cNvPr id="18" name="Text 16"/>
+          <p:cNvSpPr/>
+          <p:nvPr/>
+        </p:nvSpPr>
+        <p:spPr>
+          <a:xfrm>
+            <a:off x="6080760" y="2276856"/>
+            <a:ext cx="1383030" cy="365760"/>
+          </a:xfrm>
+          <a:prstGeom prst="rect">
+            <a:avLst/>
+          </a:prstGeom>
+          <a:noFill/>
+          <a:ln/>
+        </p:spPr>
+        <p:txBody>
+          <a:bodyPr wrap="square" lIns="0" tIns="0" rIns="0" bIns="0" rtlCol="0" anchor="ctr"/>
+          <a:lstStyle/>
+          <a:p>
+            <a:pPr algn="ctr" indent="0" marL="0">
+              <a:buNone/>
+            </a:pPr>
+            <a:r>
+              <a:rPr lang="en-US" sz="1600" b="1" dirty="0">
+                <a:solidFill>
+                  <a:srgbClr val="E7EDF5"/>
+                </a:solidFill>
+                <a:latin typeface="Courier New" pitchFamily="34" charset="0"/>
+                <a:ea typeface="Courier New" pitchFamily="34" charset="-122"/>
+                <a:cs typeface="Courier New" pitchFamily="34" charset="-120"/>
+              </a:rPr>
+              <a:t>T4</a:t>
+            </a:r>
+            <a:endParaRPr lang="en-US" sz="1600" dirty="0"/>
+          </a:p>
+        </p:txBody>
+      </p:sp>
+      <p:sp>
+        <p:nvSpPr>
+          <p:cNvPr id="19" name="Text 17"/>
+          <p:cNvSpPr/>
+          <p:nvPr/>
+        </p:nvSpPr>
+        <p:spPr>
+          <a:xfrm>
+            <a:off x="6080760" y="2651760"/>
+            <a:ext cx="1383030" cy="274320"/>
+          </a:xfrm>
+          <a:prstGeom prst="rect">
+            <a:avLst/>
+          </a:prstGeom>
+          <a:noFill/>
+          <a:ln/>
+        </p:spPr>
+        <p:txBody>
+          <a:bodyPr wrap="square" lIns="0" tIns="0" rIns="0" bIns="0" rtlCol="0" anchor="ctr"/>
+          <a:lstStyle/>
+          <a:p>
+            <a:pPr algn="ctr" indent="0" marL="0">
+              <a:buNone/>
+            </a:pPr>
+            <a:r>
+              <a:rPr lang="en-US" sz="1050" dirty="0">
+                <a:solidFill>
+                  <a:srgbClr val="9FB0C4"/>
+                </a:solidFill>
+                <a:latin typeface="Courier New" pitchFamily="34" charset="0"/>
+                <a:ea typeface="Courier New" pitchFamily="34" charset="-122"/>
+                <a:cs typeface="Courier New" pitchFamily="34" charset="-120"/>
+              </a:rPr>
+              <a:t>+16B</a:t>
+            </a:r>
+            <a:endParaRPr lang="en-US" sz="1050" dirty="0"/>
+          </a:p>
+        </p:txBody>
+      </p:sp>
+      <p:sp>
+        <p:nvSpPr>
+          <p:cNvPr id="20" name="Shape 18"/>
+          <p:cNvSpPr/>
+          <p:nvPr/>
+        </p:nvSpPr>
+        <p:spPr>
+          <a:xfrm>
+            <a:off x="7491222" y="2148840"/>
+            <a:ext cx="1328166" cy="868680"/>
+          </a:xfrm>
+          <a:prstGeom prst="roundRect">
+            <a:avLst>
+              <a:gd name="adj" fmla="val 4211"/>
+            </a:avLst>
+          </a:prstGeom>
+          <a:solidFill>
+            <a:srgbClr val="0B1119"/>
+          </a:solidFill>
+          <a:ln w="12700">
+            <a:solidFill>
+              <a:srgbClr val="3FB8C4"/>
+            </a:solidFill>
+            <a:prstDash val="solid"/>
+          </a:ln>
+        </p:spPr>
+      </p:sp>
+      <p:sp>
+        <p:nvSpPr>
+          <p:cNvPr id="21" name="Text 19"/>
+          <p:cNvSpPr/>
+          <p:nvPr/>
+        </p:nvSpPr>
+        <p:spPr>
+          <a:xfrm>
+            <a:off x="7463790" y="2276856"/>
+            <a:ext cx="1383030" cy="365760"/>
+          </a:xfrm>
+          <a:prstGeom prst="rect">
+            <a:avLst/>
+          </a:prstGeom>
+          <a:noFill/>
+          <a:ln/>
+        </p:spPr>
+        <p:txBody>
+          <a:bodyPr wrap="square" lIns="0" tIns="0" rIns="0" bIns="0" rtlCol="0" anchor="ctr"/>
+          <a:lstStyle/>
+          <a:p>
+            <a:pPr algn="ctr" indent="0" marL="0">
+              <a:buNone/>
+            </a:pPr>
+            <a:r>
+              <a:rPr lang="en-US" sz="1600" b="1" dirty="0">
+                <a:solidFill>
+                  <a:srgbClr val="E7EDF5"/>
+                </a:solidFill>
+                <a:latin typeface="Courier New" pitchFamily="34" charset="0"/>
+                <a:ea typeface="Courier New" pitchFamily="34" charset="-122"/>
+                <a:cs typeface="Courier New" pitchFamily="34" charset="-120"/>
+              </a:rPr>
+              <a:t>T5</a:t>
+            </a:r>
+            <a:endParaRPr lang="en-US" sz="1600" dirty="0"/>
+          </a:p>
+        </p:txBody>
+      </p:sp>
+      <p:sp>
+        <p:nvSpPr>
+          <p:cNvPr id="22" name="Text 20"/>
+          <p:cNvSpPr/>
+          <p:nvPr/>
+        </p:nvSpPr>
+        <p:spPr>
+          <a:xfrm>
+            <a:off x="7463790" y="2651760"/>
+            <a:ext cx="1383030" cy="274320"/>
+          </a:xfrm>
+          <a:prstGeom prst="rect">
+            <a:avLst/>
+          </a:prstGeom>
+          <a:noFill/>
+          <a:ln/>
+        </p:spPr>
+        <p:txBody>
+          <a:bodyPr wrap="square" lIns="0" tIns="0" rIns="0" bIns="0" rtlCol="0" anchor="ctr"/>
+          <a:lstStyle/>
+          <a:p>
+            <a:pPr algn="ctr" indent="0" marL="0">
+              <a:buNone/>
+            </a:pPr>
+            <a:r>
+              <a:rPr lang="en-US" sz="1050" dirty="0">
+                <a:solidFill>
+                  <a:srgbClr val="9FB0C4"/>
+                </a:solidFill>
+                <a:latin typeface="Courier New" pitchFamily="34" charset="0"/>
+                <a:ea typeface="Courier New" pitchFamily="34" charset="-122"/>
+                <a:cs typeface="Courier New" pitchFamily="34" charset="-120"/>
+              </a:rPr>
+              <a:t>+20B</a:t>
+            </a:r>
+            <a:endParaRPr lang="en-US" sz="1050" dirty="0"/>
+          </a:p>
+        </p:txBody>
+      </p:sp>
+      <p:sp>
+        <p:nvSpPr>
+          <p:cNvPr id="23" name="Shape 21"/>
+          <p:cNvSpPr/>
+          <p:nvPr/>
+        </p:nvSpPr>
+        <p:spPr>
+          <a:xfrm>
+            <a:off x="8874252" y="2148840"/>
+            <a:ext cx="1328166" cy="868680"/>
+          </a:xfrm>
+          <a:prstGeom prst="roundRect">
+            <a:avLst>
+              <a:gd name="adj" fmla="val 4211"/>
+            </a:avLst>
+          </a:prstGeom>
+          <a:solidFill>
+            <a:srgbClr val="0B1119"/>
+          </a:solidFill>
+          <a:ln w="12700">
+            <a:solidFill>
+              <a:srgbClr val="E8A33D"/>
+            </a:solidFill>
+            <a:prstDash val="solid"/>
+          </a:ln>
+        </p:spPr>
+      </p:sp>
+      <p:sp>
+        <p:nvSpPr>
+          <p:cNvPr id="24" name="Text 22"/>
+          <p:cNvSpPr/>
+          <p:nvPr/>
+        </p:nvSpPr>
+        <p:spPr>
+          <a:xfrm>
+            <a:off x="8846820" y="2276856"/>
+            <a:ext cx="1383030" cy="365760"/>
+          </a:xfrm>
+          <a:prstGeom prst="rect">
+            <a:avLst/>
+          </a:prstGeom>
+          <a:noFill/>
+          <a:ln/>
+        </p:spPr>
+        <p:txBody>
+          <a:bodyPr wrap="square" lIns="0" tIns="0" rIns="0" bIns="0" rtlCol="0" anchor="ctr"/>
+          <a:lstStyle/>
+          <a:p>
+            <a:pPr algn="ctr" indent="0" marL="0">
+              <a:buNone/>
+            </a:pPr>
+            <a:r>
+              <a:rPr lang="en-US" sz="1600" b="1" dirty="0">
+                <a:solidFill>
+                  <a:srgbClr val="E7EDF5"/>
+                </a:solidFill>
+                <a:latin typeface="Courier New" pitchFamily="34" charset="0"/>
+                <a:ea typeface="Courier New" pitchFamily="34" charset="-122"/>
+                <a:cs typeface="Courier New" pitchFamily="34" charset="-120"/>
+              </a:rPr>
+              <a:t>T6</a:t>
+            </a:r>
+            <a:endParaRPr lang="en-US" sz="1600" dirty="0"/>
+          </a:p>
+        </p:txBody>
+      </p:sp>
+      <p:sp>
+        <p:nvSpPr>
+          <p:cNvPr id="25" name="Text 23"/>
+          <p:cNvSpPr/>
+          <p:nvPr/>
+        </p:nvSpPr>
+        <p:spPr>
+          <a:xfrm>
+            <a:off x="8846820" y="2651760"/>
+            <a:ext cx="1383030" cy="274320"/>
+          </a:xfrm>
+          <a:prstGeom prst="rect">
+            <a:avLst/>
+          </a:prstGeom>
+          <a:noFill/>
+          <a:ln/>
+        </p:spPr>
+        <p:txBody>
+          <a:bodyPr wrap="square" lIns="0" tIns="0" rIns="0" bIns="0" rtlCol="0" anchor="ctr"/>
+          <a:lstStyle/>
+          <a:p>
+            <a:pPr algn="ctr" indent="0" marL="0">
+              <a:buNone/>
+            </a:pPr>
+            <a:r>
+              <a:rPr lang="en-US" sz="1050" dirty="0">
+                <a:solidFill>
+                  <a:srgbClr val="9FB0C4"/>
+                </a:solidFill>
+                <a:latin typeface="Courier New" pitchFamily="34" charset="0"/>
+                <a:ea typeface="Courier New" pitchFamily="34" charset="-122"/>
+                <a:cs typeface="Courier New" pitchFamily="34" charset="-120"/>
+              </a:rPr>
+              <a:t>+24B</a:t>
+            </a:r>
+            <a:endParaRPr lang="en-US" sz="1050" dirty="0"/>
+          </a:p>
+        </p:txBody>
+      </p:sp>
+      <p:sp>
+        <p:nvSpPr>
+          <p:cNvPr id="26" name="Shape 24"/>
+          <p:cNvSpPr/>
+          <p:nvPr/>
+        </p:nvSpPr>
+        <p:spPr>
+          <a:xfrm>
+            <a:off x="10257282" y="2148840"/>
+            <a:ext cx="1328166" cy="868680"/>
+          </a:xfrm>
+          <a:prstGeom prst="roundRect">
+            <a:avLst>
+              <a:gd name="adj" fmla="val 4211"/>
+            </a:avLst>
+          </a:prstGeom>
+          <a:solidFill>
+            <a:srgbClr val="0B1119"/>
+          </a:solidFill>
+          <a:ln w="12700">
+            <a:solidFill>
+              <a:srgbClr val="3FB8C4"/>
+            </a:solidFill>
+            <a:prstDash val="solid"/>
+          </a:ln>
+        </p:spPr>
+      </p:sp>
+      <p:sp>
+        <p:nvSpPr>
+          <p:cNvPr id="27" name="Text 25"/>
+          <p:cNvSpPr/>
+          <p:nvPr/>
+        </p:nvSpPr>
+        <p:spPr>
+          <a:xfrm>
+            <a:off x="10229850" y="2276856"/>
+            <a:ext cx="1383030" cy="365760"/>
+          </a:xfrm>
+          <a:prstGeom prst="rect">
+            <a:avLst/>
+          </a:prstGeom>
+          <a:noFill/>
+          <a:ln/>
+        </p:spPr>
+        <p:txBody>
+          <a:bodyPr wrap="square" lIns="0" tIns="0" rIns="0" bIns="0" rtlCol="0" anchor="ctr"/>
+          <a:lstStyle/>
+          <a:p>
+            <a:pPr algn="ctr" indent="0" marL="0">
+              <a:buNone/>
+            </a:pPr>
+            <a:r>
+              <a:rPr lang="en-US" sz="1600" b="1" dirty="0">
+                <a:solidFill>
+                  <a:srgbClr val="E7EDF5"/>
+                </a:solidFill>
+                <a:latin typeface="Courier New" pitchFamily="34" charset="0"/>
+                <a:ea typeface="Courier New" pitchFamily="34" charset="-122"/>
+                <a:cs typeface="Courier New" pitchFamily="34" charset="-120"/>
+              </a:rPr>
+              <a:t>…</a:t>
+            </a:r>
+            <a:endParaRPr lang="en-US" sz="1600" dirty="0"/>
+          </a:p>
+        </p:txBody>
+      </p:sp>
+      <p:sp>
+        <p:nvSpPr>
+          <p:cNvPr id="28" name="Text 26"/>
+          <p:cNvSpPr/>
+          <p:nvPr/>
+        </p:nvSpPr>
+        <p:spPr>
+          <a:xfrm>
+            <a:off x="10229850" y="2651760"/>
+            <a:ext cx="1383030" cy="274320"/>
+          </a:xfrm>
+          <a:prstGeom prst="rect">
+            <a:avLst/>
+          </a:prstGeom>
+          <a:noFill/>
+          <a:ln/>
+        </p:spPr>
+        <p:txBody>
+          <a:bodyPr wrap="square" lIns="0" tIns="0" rIns="0" bIns="0" rtlCol="0" anchor="ctr"/>
+          <a:lstStyle/>
+          <a:p>
+            <a:pPr algn="ctr" indent="0" marL="0">
+              <a:buNone/>
+            </a:pPr>
+            <a:endParaRPr lang="en-US" sz="1050" dirty="0"/>
+          </a:p>
+        </p:txBody>
+      </p:sp>
+      <p:sp>
+        <p:nvSpPr>
+          <p:cNvPr id="29" name="Text 27"/>
+          <p:cNvSpPr/>
+          <p:nvPr/>
+        </p:nvSpPr>
+        <p:spPr>
+          <a:xfrm>
+            <a:off x="548640" y="3108960"/>
+            <a:ext cx="11064240" cy="274320"/>
+          </a:xfrm>
+          <a:prstGeom prst="rect">
+            <a:avLst/>
+          </a:prstGeom>
+          <a:noFill/>
+          <a:ln/>
+        </p:spPr>
+        <p:txBody>
+          <a:bodyPr wrap="square" lIns="0" tIns="0" rIns="0" bIns="0" rtlCol="0" anchor="ctr"/>
+          <a:lstStyle/>
+          <a:p>
+            <a:pPr algn="ctr" indent="0" marL="0">
+              <a:buNone/>
+            </a:pPr>
+            <a:r>
+              <a:rPr lang="en-US" sz="1200" i="1" dirty="0">
+                <a:solidFill>
+                  <a:srgbClr val="9FB0C4"/>
+                </a:solidFill>
+                <a:latin typeface="Malgun Gothic" pitchFamily="34" charset="0"/>
+                <a:ea typeface="Malgun Gothic" pitchFamily="34" charset="-122"/>
+                <a:cs typeface="Malgun Gothic" pitchFamily="34" charset="-120"/>
+              </a:rPr>
+              <a:t>연속된 메모리 주소 →</a:t>
+            </a:r>
+            <a:endParaRPr lang="en-US" sz="1200" dirty="0"/>
+          </a:p>
+        </p:txBody>
+      </p:sp>
+      <p:sp>
+        <p:nvSpPr>
+          <p:cNvPr id="30" name="Shape 28"/>
+          <p:cNvSpPr/>
+          <p:nvPr/>
+        </p:nvSpPr>
+        <p:spPr>
+          <a:xfrm>
+            <a:off x="548640" y="3794760"/>
+            <a:ext cx="11064240" cy="1920240"/>
+          </a:xfrm>
+          <a:prstGeom prst="roundRect">
+            <a:avLst>
+              <a:gd name="adj" fmla="val 3810"/>
             </a:avLst>
           </a:prstGeom>
           <a:solidFill>
@@ -9949,7 +11352,7 @@
           </a:solidFill>
           <a:ln w="19050">
             <a:solidFill>
-              <a:srgbClr val="E8A33D"/>
+              <a:srgbClr val="3FB8C4"/>
             </a:solidFill>
             <a:prstDash val="solid"/>
           </a:ln>
@@ -9957,14 +11360,14 @@
       </p:sp>
       <p:sp>
         <p:nvSpPr>
-          <p:cNvPr id="7" name="Text 5"/>
-          <p:cNvSpPr/>
-          <p:nvPr/>
-        </p:nvSpPr>
-        <p:spPr>
-          <a:xfrm>
-            <a:off x="822960" y="4480560"/>
-            <a:ext cx="10515600" cy="1097280"/>
+          <p:cNvPr id="31" name="Text 29"/>
+          <p:cNvSpPr/>
+          <p:nvPr/>
+        </p:nvSpPr>
+        <p:spPr>
+          <a:xfrm>
+            <a:off x="868680" y="4023360"/>
+            <a:ext cx="10424160" cy="1554480"/>
           </a:xfrm>
           <a:prstGeom prst="rect">
             <a:avLst/>
@@ -9976,14 +11379,18 @@
           <a:bodyPr wrap="square" lIns="0" tIns="0" rIns="0" bIns="0" rtlCol="0" anchor="t"/>
           <a:lstStyle/>
           <a:p>
-            <a:pPr indent="0" marL="0">
+            <a:pPr marL="342900" indent="-342900">
               <a:lnSpc>
-                <a:spcPct val="115000"/>
+                <a:spcPct val="105000"/>
               </a:lnSpc>
-              <a:buNone/>
-            </a:pPr>
-            <a:r>
-              <a:rPr lang="en-US" sz="1550" dirty="0">
+              <a:spcAft>
+                <a:spcPts val="900"/>
+              </a:spcAft>
+              <a:buSzPct val="100000"/>
+              <a:buChar char="•"/>
+            </a:pPr>
+            <a:r>
+              <a:rPr lang="en-US" sz="1500" dirty="0">
                 <a:solidFill>
                   <a:srgbClr val="E7EDF5"/>
                 </a:solidFill>
@@ -9991,33 +11398,47 @@
                 <a:ea typeface="Malgun Gothic" pitchFamily="34" charset="-122"/>
                 <a:cs typeface="Malgun Gothic" pitchFamily="34" charset="-120"/>
               </a:rPr>
-              <a:t>놀랍도록 단순합니다. </a:t>
-            </a:r>
-            <a:pPr indent="0" marL="0">
+              <a:t>워프(warp, 32스레드)의 접근이 하나의 메모리 트랜잭션으로 묶인다 → 대역폭 최대 활용</a:t>
+            </a:r>
+            <a:endParaRPr lang="en-US" sz="1500" dirty="0"/>
+          </a:p>
+          <a:p>
+            <a:pPr marL="342900" indent="-342900">
               <a:lnSpc>
-                <a:spcPct val="115000"/>
+                <a:spcPct val="105000"/>
               </a:lnSpc>
-              <a:buNone/>
-            </a:pPr>
-            <a:r>
-              <a:rPr lang="en-US" sz="1550" b="1" dirty="0">
-                <a:solidFill>
-                  <a:srgbClr val="E8A33D"/>
+              <a:spcAft>
+                <a:spcPts val="900"/>
+              </a:spcAft>
+              <a:buSzPct val="100000"/>
+              <a:buChar char="•"/>
+            </a:pPr>
+            <a:r>
+              <a:rPr lang="en-US" sz="1500" dirty="0">
+                <a:solidFill>
+                  <a:srgbClr val="E7EDF5"/>
                 </a:solidFill>
                 <a:latin typeface="Malgun Gothic" pitchFamily="34" charset="0"/>
                 <a:ea typeface="Malgun Gothic" pitchFamily="34" charset="-122"/>
                 <a:cs typeface="Malgun Gothic" pitchFamily="34" charset="-120"/>
               </a:rPr>
-              <a:t>경계 검사가 없는 이유</a:t>
-            </a:r>
-            <a:pPr indent="0" marL="0">
+              <a:t>만약 스레드가 큰 간격으로 흩어지면 트랜잭션이 쪼개져 느려진다 (uncoalesced)</a:t>
+            </a:r>
+            <a:endParaRPr lang="en-US" sz="1500" dirty="0"/>
+          </a:p>
+          <a:p>
+            <a:pPr marL="342900" indent="-342900">
               <a:lnSpc>
-                <a:spcPct val="115000"/>
+                <a:spcPct val="105000"/>
               </a:lnSpc>
-              <a:buNone/>
-            </a:pPr>
-            <a:r>
-              <a:rPr lang="en-US" sz="1550" dirty="0">
+              <a:spcAft>
+                <a:spcPts val="900"/>
+              </a:spcAft>
+              <a:buSzPct val="100000"/>
+              <a:buChar char="•"/>
+            </a:pPr>
+            <a:r>
+              <a:rPr lang="en-US" sz="1500" dirty="0">
                 <a:solidFill>
                   <a:srgbClr val="E7EDF5"/>
                 </a:solidFill>
@@ -10025,48 +11446,9 @@
                 <a:ea typeface="Malgun Gothic" pitchFamily="34" charset="-122"/>
                 <a:cs typeface="Malgun Gothic" pitchFamily="34" charset="-120"/>
               </a:rPr>
-              <a:t>: 테스트 영역은 항상 2·N MiB의 배수로 할당되어 그리드에 딱 맞으므로, 범위를 벗어나는 스레드가 없습니다. 복잡함은 THREAD_ADDRESS 매크로가 모두 흡수했습니다.</a:t>
-            </a:r>
-            <a:endParaRPr lang="en-US" sz="1550" dirty="0"/>
-          </a:p>
-        </p:txBody>
-      </p:sp>
-      <p:sp>
-        <p:nvSpPr>
-          <p:cNvPr id="8" name="Text 6"/>
-          <p:cNvSpPr/>
-          <p:nvPr/>
-        </p:nvSpPr>
-        <p:spPr>
-          <a:xfrm>
-            <a:off x="548640" y="5852160"/>
-            <a:ext cx="11064240" cy="365760"/>
-          </a:xfrm>
-          <a:prstGeom prst="rect">
-            <a:avLst/>
-          </a:prstGeom>
-          <a:noFill/>
-          <a:ln/>
-        </p:spPr>
-        <p:txBody>
-          <a:bodyPr wrap="square" lIns="0" tIns="0" rIns="0" bIns="0" rtlCol="0" anchor="ctr"/>
-          <a:lstStyle/>
-          <a:p>
-            <a:pPr indent="0" marL="0">
-              <a:buNone/>
-            </a:pPr>
-            <a:r>
-              <a:rPr lang="en-US" sz="1300" i="1" dirty="0">
-                <a:solidFill>
-                  <a:srgbClr val="9FB0C4"/>
-                </a:solidFill>
-                <a:latin typeface="Malgun Gothic" pitchFamily="34" charset="0"/>
-                <a:ea typeface="Malgun Gothic" pitchFamily="34" charset="-122"/>
-                <a:cs typeface="Malgun Gothic" pitchFamily="34" charset="-120"/>
-              </a:rPr>
-              <a:t>core.cu:189 — N개 반복으로 스레드 하나가 여러 word를 담당합니다.</a:t>
-            </a:r>
-            <a:endParaRPr lang="en-US" sz="1300" dirty="0"/>
+              <a:t>블록은 N·blockDim.x word씩 널찍이 떨어진 구역을 담당해 전체 영역을 빈틈없이 덮는다</a:t>
+            </a:r>
+            <a:endParaRPr lang="en-US" sz="1500" dirty="0"/>
           </a:p>
         </p:txBody>
       </p:sp>
@@ -10139,7 +11521,7 @@
                 <a:ea typeface="Courier New" pitchFamily="34" charset="-122"/>
                 <a:cs typeface="Courier New" pitchFamily="34" charset="-120"/>
               </a:rPr>
-              <a:t>8</a:t>
+              <a:t>7</a:t>
             </a:r>
             <a:endParaRPr lang="en-US" sz="2200" dirty="0"/>
           </a:p>
@@ -10178,7 +11560,7 @@
                 <a:ea typeface="Malgun Gothic" pitchFamily="34" charset="-122"/>
                 <a:cs typeface="Malgun Gothic" pitchFamily="34" charset="-120"/>
               </a:rPr>
-              <a:t>호스트가 커널을 부르는 법</a:t>
+              <a:t>첫 커널 완독 · deviceWriteConstant</a:t>
             </a:r>
             <a:endParaRPr lang="en-US" sz="2900" dirty="0"/>
           </a:p>
@@ -10192,12 +11574,12 @@
         </p:nvSpPr>
         <p:spPr>
           <a:xfrm>
-            <a:off x="548640" y="1554480"/>
-            <a:ext cx="11064240" cy="1234440"/>
+            <a:off x="548640" y="1508760"/>
+            <a:ext cx="11064240" cy="2651760"/>
           </a:xfrm>
           <a:prstGeom prst="roundRect">
             <a:avLst>
-              <a:gd name="adj" fmla="val 3704"/>
+              <a:gd name="adj" fmla="val 1724"/>
             </a:avLst>
           </a:prstGeom>
           <a:solidFill>
@@ -10219,8 +11601,8 @@
         </p:nvSpPr>
         <p:spPr>
           <a:xfrm>
-            <a:off x="768096" y="1700784"/>
-            <a:ext cx="10625328" cy="941832"/>
+            <a:off x="768096" y="1655064"/>
+            <a:ext cx="10625328" cy="2359152"/>
           </a:xfrm>
           <a:prstGeom prst="rect">
             <a:avLst/>
@@ -10239,17 +11621,17 @@
               <a:buNone/>
             </a:pPr>
             <a:r>
-              <a:rPr lang="en-US" sz="1350" dirty="0">
-                <a:solidFill>
-                  <a:srgbClr val="6B7D94"/>
+              <a:rPr lang="en-US" sz="1400" dirty="0">
+                <a:solidFill>
+                  <a:srgbClr val="E8A33D"/>
                 </a:solidFill>
                 <a:latin typeface="Courier New" pitchFamily="34" charset="0"/>
                 <a:ea typeface="Courier New" pitchFamily="34" charset="-122"/>
                 <a:cs typeface="Courier New" pitchFamily="34" charset="-120"/>
               </a:rPr>
-              <a:t>// core.cu:185 — gpuWriteConstant (호스트 함수)</a:t>
-            </a:r>
-            <a:endParaRPr lang="en-US" sz="1350" dirty="0"/>
+              <a:t>__global__ void</a:t>
+            </a:r>
+            <a:endParaRPr lang="en-US" sz="1400" dirty="0"/>
           </a:p>
           <a:p>
             <a:pPr algn="l" indent="0" marL="0">
@@ -10259,16 +11641,19 @@
               <a:buNone/>
             </a:pPr>
             <a:r>
-              <a:rPr lang="en-US" sz="1350" dirty="0">
-                <a:solidFill>
-                  <a:srgbClr val="E8A33D"/>
+              <a:rPr lang="en-US" sz="1400" dirty="0">
+                <a:solidFill>
+                  <a:srgbClr val="E7EDF5"/>
                 </a:solidFill>
                 <a:latin typeface="Courier New" pitchFamily="34" charset="0"/>
                 <a:ea typeface="Courier New" pitchFamily="34" charset="-122"/>
                 <a:cs typeface="Courier New" pitchFamily="34" charset="-120"/>
               </a:rPr>
-              <a:t>deviceWriteConstant</a:t>
-            </a:r>
+              <a:t>deviceWriteConstant(uint* base, uint N, const uint constant) {</a:t>
+            </a:r>
+            <a:endParaRPr lang="en-US" sz="1400" dirty="0"/>
+          </a:p>
+          <a:p>
             <a:pPr algn="l" indent="0" marL="0">
               <a:lnSpc>
                 <a:spcPct val="110000"/>
@@ -10276,16 +11661,19 @@
               <a:buNone/>
             </a:pPr>
             <a:r>
-              <a:rPr lang="en-US" sz="1350" b="1" dirty="0">
-                <a:solidFill>
-                  <a:srgbClr val="3FB8C4"/>
+              <a:rPr lang="en-US" sz="1400" dirty="0">
+                <a:solidFill>
+                  <a:srgbClr val="E7EDF5"/>
                 </a:solidFill>
                 <a:latin typeface="Courier New" pitchFamily="34" charset="0"/>
                 <a:ea typeface="Courier New" pitchFamily="34" charset="-122"/>
                 <a:cs typeface="Courier New" pitchFamily="34" charset="-120"/>
               </a:rPr>
-              <a:t>&lt;&lt;&lt;nBlocks, nThreads&gt;&gt;&gt;</a:t>
-            </a:r>
+              <a:t>    for (uint i = 0; i &lt; N; i++) {</a:t>
+            </a:r>
+            <a:endParaRPr lang="en-US" sz="1400" dirty="0"/>
+          </a:p>
+          <a:p>
             <a:pPr algn="l" indent="0" marL="0">
               <a:lnSpc>
                 <a:spcPct val="110000"/>
@@ -10293,17 +11681,17 @@
               <a:buNone/>
             </a:pPr>
             <a:r>
-              <a:rPr lang="en-US" sz="1350" dirty="0">
-                <a:solidFill>
-                  <a:srgbClr val="E7EDF5"/>
+              <a:rPr lang="en-US" sz="1400" dirty="0">
+                <a:solidFill>
+                  <a:srgbClr val="F2C079"/>
                 </a:solidFill>
                 <a:latin typeface="Courier New" pitchFamily="34" charset="0"/>
                 <a:ea typeface="Courier New" pitchFamily="34" charset="-122"/>
                 <a:cs typeface="Courier New" pitchFamily="34" charset="-120"/>
               </a:rPr>
-              <a:t>(base, N, constant);</a:t>
-            </a:r>
-            <a:endParaRPr lang="en-US" sz="1350" dirty="0"/>
+              <a:t>        *(THREAD_ADDRESS(base, N, i)) = constant;   // 각 스레드가 자기 word들을 채움</a:t>
+            </a:r>
+            <a:endParaRPr lang="en-US" sz="1400" dirty="0"/>
           </a:p>
           <a:p>
             <a:pPr algn="l" indent="0" marL="0">
@@ -10313,87 +11701,54 @@
               <a:buNone/>
             </a:pPr>
             <a:r>
-              <a:rPr lang="en-US" sz="1350" dirty="0">
-                <a:solidFill>
-                  <a:srgbClr val="6B7D94"/>
+              <a:rPr lang="en-US" sz="1400" dirty="0">
+                <a:solidFill>
+                  <a:srgbClr val="E7EDF5"/>
                 </a:solidFill>
                 <a:latin typeface="Courier New" pitchFamily="34" charset="0"/>
                 <a:ea typeface="Courier New" pitchFamily="34" charset="-122"/>
                 <a:cs typeface="Courier New" pitchFamily="34" charset="-120"/>
               </a:rPr>
-              <a:t>//         ▲ 1024      ▲ 512</a:t>
-            </a:r>
-            <a:endParaRPr lang="en-US" sz="1350" dirty="0"/>
-          </a:p>
-        </p:txBody>
-      </p:sp>
-      <p:sp>
-        <p:nvSpPr>
-          <p:cNvPr id="6" name="Text 4"/>
-          <p:cNvSpPr/>
-          <p:nvPr/>
-        </p:nvSpPr>
-        <p:spPr>
-          <a:xfrm>
-            <a:off x="548640" y="3017520"/>
-            <a:ext cx="11064240" cy="822960"/>
-          </a:xfrm>
-          <a:prstGeom prst="rect">
-            <a:avLst/>
-          </a:prstGeom>
-          <a:noFill/>
-          <a:ln/>
-        </p:spPr>
-        <p:txBody>
-          <a:bodyPr wrap="square" lIns="0" tIns="0" rIns="0" bIns="0" rtlCol="0" anchor="t"/>
-          <a:lstStyle/>
-          <a:p>
-            <a:pPr indent="0" marL="0">
-              <a:buNone/>
-            </a:pPr>
-            <a:r>
-              <a:rPr lang="en-US" sz="1700" b="1" dirty="0">
-                <a:solidFill>
-                  <a:srgbClr val="3FB8C4"/>
-                </a:solidFill>
-                <a:latin typeface="Malgun Gothic" pitchFamily="34" charset="0"/>
-                <a:ea typeface="Malgun Gothic" pitchFamily="34" charset="-122"/>
-                <a:cs typeface="Malgun Gothic" pitchFamily="34" charset="-120"/>
-              </a:rPr>
-              <a:t>&lt;&lt;&lt;nBlocks, nThreads&gt;&gt;&gt;</a:t>
-            </a:r>
-            <a:pPr indent="0" marL="0">
-              <a:buNone/>
-            </a:pPr>
-            <a:r>
-              <a:rPr lang="en-US" sz="1700" dirty="0">
+              <a:t>    }</a:t>
+            </a:r>
+            <a:endParaRPr lang="en-US" sz="1400" dirty="0"/>
+          </a:p>
+          <a:p>
+            <a:pPr algn="l" indent="0" marL="0">
+              <a:lnSpc>
+                <a:spcPct val="110000"/>
+              </a:lnSpc>
+              <a:buNone/>
+            </a:pPr>
+            <a:r>
+              <a:rPr lang="en-US" sz="1400" dirty="0">
                 <a:solidFill>
                   <a:srgbClr val="E7EDF5"/>
                 </a:solidFill>
-                <a:latin typeface="Malgun Gothic" pitchFamily="34" charset="0"/>
-                <a:ea typeface="Malgun Gothic" pitchFamily="34" charset="-122"/>
-                <a:cs typeface="Malgun Gothic" pitchFamily="34" charset="-120"/>
-              </a:rPr>
-              <a:t> 삼중 꺾쇠가 실행 구성입니다. CPU 코드 한 줄이지만, 이 호출로 GPU에서 52만 개 스레드가 깨어납니다.</a:t>
-            </a:r>
-            <a:endParaRPr lang="en-US" sz="1700" dirty="0"/>
-          </a:p>
-        </p:txBody>
-      </p:sp>
-      <p:sp>
-        <p:nvSpPr>
-          <p:cNvPr id="7" name="Shape 5"/>
-          <p:cNvSpPr/>
-          <p:nvPr/>
-        </p:nvSpPr>
-        <p:spPr>
-          <a:xfrm>
-            <a:off x="548640" y="3977640"/>
-            <a:ext cx="11064240" cy="1737360"/>
+                <a:latin typeface="Courier New" pitchFamily="34" charset="0"/>
+                <a:ea typeface="Courier New" pitchFamily="34" charset="-122"/>
+                <a:cs typeface="Courier New" pitchFamily="34" charset="-120"/>
+              </a:rPr>
+              <a:t>}</a:t>
+            </a:r>
+            <a:endParaRPr lang="en-US" sz="1400" dirty="0"/>
+          </a:p>
+        </p:txBody>
+      </p:sp>
+      <p:sp>
+        <p:nvSpPr>
+          <p:cNvPr id="6" name="Shape 4"/>
+          <p:cNvSpPr/>
+          <p:nvPr/>
+        </p:nvSpPr>
+        <p:spPr>
+          <a:xfrm>
+            <a:off x="548640" y="4343400"/>
+            <a:ext cx="11064240" cy="1371600"/>
           </a:xfrm>
           <a:prstGeom prst="roundRect">
             <a:avLst>
-              <a:gd name="adj" fmla="val 4211"/>
+              <a:gd name="adj" fmla="val 5333"/>
             </a:avLst>
           </a:prstGeom>
           <a:solidFill>
@@ -10409,129 +11764,116 @@
       </p:sp>
       <p:sp>
         <p:nvSpPr>
-          <p:cNvPr id="8" name="Text 6"/>
-          <p:cNvSpPr/>
-          <p:nvPr/>
-        </p:nvSpPr>
-        <p:spPr>
-          <a:xfrm>
-            <a:off x="822960" y="4160520"/>
-            <a:ext cx="10515600" cy="365760"/>
-          </a:xfrm>
-          <a:prstGeom prst="rect">
-            <a:avLst/>
-          </a:prstGeom>
-          <a:noFill/>
-          <a:ln/>
-        </p:spPr>
-        <p:txBody>
-          <a:bodyPr wrap="square" lIns="0" tIns="0" rIns="0" bIns="0" rtlCol="0" anchor="ctr"/>
+          <p:cNvPr id="7" name="Text 5"/>
+          <p:cNvSpPr/>
+          <p:nvPr/>
+        </p:nvSpPr>
+        <p:spPr>
+          <a:xfrm>
+            <a:off x="822960" y="4480560"/>
+            <a:ext cx="10515600" cy="1097280"/>
+          </a:xfrm>
+          <a:prstGeom prst="rect">
+            <a:avLst/>
+          </a:prstGeom>
+          <a:noFill/>
+          <a:ln/>
+        </p:spPr>
+        <p:txBody>
+          <a:bodyPr wrap="square" lIns="0" tIns="0" rIns="0" bIns="0" rtlCol="0" anchor="t"/>
           <a:lstStyle/>
           <a:p>
             <a:pPr indent="0" marL="0">
-              <a:buNone/>
-            </a:pPr>
-            <a:r>
-              <a:rPr lang="en-US" sz="1600" b="1" dirty="0">
-                <a:solidFill>
-                  <a:srgbClr val="E8A33D"/>
+              <a:lnSpc>
+                <a:spcPct val="115000"/>
+              </a:lnSpc>
+              <a:buNone/>
+            </a:pPr>
+            <a:r>
+              <a:rPr lang="en-US" sz="1550" dirty="0">
+                <a:solidFill>
+                  <a:srgbClr val="E7EDF5"/>
                 </a:solidFill>
                 <a:latin typeface="Malgun Gothic" pitchFamily="34" charset="0"/>
                 <a:ea typeface="Malgun Gothic" pitchFamily="34" charset="-122"/>
                 <a:cs typeface="Malgun Gothic" pitchFamily="34" charset="-120"/>
               </a:rPr>
-              <a:t>nBlocks·nThreads는 어디서 오나?</a:t>
-            </a:r>
-            <a:endParaRPr lang="en-US" sz="1600" dirty="0"/>
-          </a:p>
-        </p:txBody>
-      </p:sp>
-      <p:sp>
-        <p:nvSpPr>
-          <p:cNvPr id="9" name="Shape 7"/>
-          <p:cNvSpPr/>
-          <p:nvPr/>
-        </p:nvSpPr>
-        <p:spPr>
-          <a:xfrm>
-            <a:off x="822960" y="4572000"/>
-            <a:ext cx="10515600" cy="1005840"/>
-          </a:xfrm>
-          <a:prstGeom prst="roundRect">
-            <a:avLst>
-              <a:gd name="adj" fmla="val 4545"/>
-            </a:avLst>
-          </a:prstGeom>
-          <a:solidFill>
-            <a:srgbClr val="0B1119"/>
-          </a:solidFill>
-          <a:ln w="12700">
-            <a:solidFill>
-              <a:srgbClr val="2C3A4E"/>
-            </a:solidFill>
-            <a:prstDash val="solid"/>
-          </a:ln>
-        </p:spPr>
-      </p:sp>
-      <p:sp>
-        <p:nvSpPr>
-          <p:cNvPr id="10" name="Text 8"/>
-          <p:cNvSpPr/>
-          <p:nvPr/>
-        </p:nvSpPr>
-        <p:spPr>
-          <a:xfrm>
-            <a:off x="1042416" y="4718304"/>
-            <a:ext cx="10076688" cy="713232"/>
-          </a:xfrm>
-          <a:prstGeom prst="rect">
-            <a:avLst/>
-          </a:prstGeom>
-          <a:noFill/>
-          <a:ln/>
-        </p:spPr>
-        <p:txBody>
-          <a:bodyPr wrap="square" lIns="0" tIns="0" rIns="0" bIns="0" rtlCol="0" anchor="t"/>
-          <a:lstStyle/>
-          <a:p>
-            <a:pPr algn="l" indent="0" marL="0">
+              <a:t>놀랍도록 단순합니다. </a:t>
+            </a:r>
+            <a:pPr indent="0" marL="0">
               <a:lnSpc>
-                <a:spcPct val="110000"/>
+                <a:spcPct val="115000"/>
               </a:lnSpc>
               <a:buNone/>
             </a:pPr>
             <a:r>
-              <a:rPr lang="en-US" sz="1250" dirty="0">
-                <a:solidFill>
-                  <a:srgbClr val="6B7D94"/>
-                </a:solidFill>
-                <a:latin typeface="Courier New" pitchFamily="34" charset="0"/>
-                <a:ea typeface="Courier New" pitchFamily="34" charset="-122"/>
-                <a:cs typeface="Courier New" pitchFamily="34" charset="-120"/>
-              </a:rPr>
-              <a:t>// core.h:78 — memtestState 클래스의 상수 멤버</a:t>
-            </a:r>
-            <a:endParaRPr lang="en-US" sz="1250" dirty="0"/>
-          </a:p>
-          <a:p>
-            <a:pPr algn="l" indent="0" marL="0">
+              <a:rPr lang="en-US" sz="1550" b="1" dirty="0">
+                <a:solidFill>
+                  <a:srgbClr val="E8A33D"/>
+                </a:solidFill>
+                <a:latin typeface="Malgun Gothic" pitchFamily="34" charset="0"/>
+                <a:ea typeface="Malgun Gothic" pitchFamily="34" charset="-122"/>
+                <a:cs typeface="Malgun Gothic" pitchFamily="34" charset="-120"/>
+              </a:rPr>
+              <a:t>경계 검사가 없는 이유</a:t>
+            </a:r>
+            <a:pPr indent="0" marL="0">
               <a:lnSpc>
-                <a:spcPct val="110000"/>
+                <a:spcPct val="115000"/>
               </a:lnSpc>
               <a:buNone/>
             </a:pPr>
             <a:r>
-              <a:rPr lang="en-US" sz="1250" dirty="0">
+              <a:rPr lang="en-US" sz="1550" dirty="0">
                 <a:solidFill>
                   <a:srgbClr val="E7EDF5"/>
                 </a:solidFill>
-                <a:latin typeface="Courier New" pitchFamily="34" charset="0"/>
-                <a:ea typeface="Courier New" pitchFamily="34" charset="-122"/>
-                <a:cs typeface="Courier New" pitchFamily="34" charset="-120"/>
-              </a:rPr>
-              <a:t>memtestState() : nBlocks(1024), nThreads(512), ... {};</a:t>
-            </a:r>
-            <a:endParaRPr lang="en-US" sz="1250" dirty="0"/>
+                <a:latin typeface="Malgun Gothic" pitchFamily="34" charset="0"/>
+                <a:ea typeface="Malgun Gothic" pitchFamily="34" charset="-122"/>
+                <a:cs typeface="Malgun Gothic" pitchFamily="34" charset="-120"/>
+              </a:rPr>
+              <a:t>: 테스트 영역은 항상 2·N MiB의 배수로 할당되어 그리드에 딱 맞으므로, 범위를 벗어나는 스레드가 없습니다. 복잡함은 THREAD_ADDRESS 매크로가 모두 흡수했습니다.</a:t>
+            </a:r>
+            <a:endParaRPr lang="en-US" sz="1550" dirty="0"/>
+          </a:p>
+        </p:txBody>
+      </p:sp>
+      <p:sp>
+        <p:nvSpPr>
+          <p:cNvPr id="8" name="Text 6"/>
+          <p:cNvSpPr/>
+          <p:nvPr/>
+        </p:nvSpPr>
+        <p:spPr>
+          <a:xfrm>
+            <a:off x="548640" y="5852160"/>
+            <a:ext cx="11064240" cy="365760"/>
+          </a:xfrm>
+          <a:prstGeom prst="rect">
+            <a:avLst/>
+          </a:prstGeom>
+          <a:noFill/>
+          <a:ln/>
+        </p:spPr>
+        <p:txBody>
+          <a:bodyPr wrap="square" lIns="0" tIns="0" rIns="0" bIns="0" rtlCol="0" anchor="ctr"/>
+          <a:lstStyle/>
+          <a:p>
+            <a:pPr indent="0" marL="0">
+              <a:buNone/>
+            </a:pPr>
+            <a:r>
+              <a:rPr lang="en-US" sz="1300" i="1" dirty="0">
+                <a:solidFill>
+                  <a:srgbClr val="9FB0C4"/>
+                </a:solidFill>
+                <a:latin typeface="Malgun Gothic" pitchFamily="34" charset="0"/>
+                <a:ea typeface="Malgun Gothic" pitchFamily="34" charset="-122"/>
+                <a:cs typeface="Malgun Gothic" pitchFamily="34" charset="-120"/>
+              </a:rPr>
+              <a:t>core.cu:189 — N개 반복으로 스레드 하나가 여러 word를 담당합니다.</a:t>
+            </a:r>
+            <a:endParaRPr lang="en-US" sz="1300" dirty="0"/>
           </a:p>
         </p:txBody>
       </p:sp>

--- a/docs/seminar/slides/세션1_스레드모델과_주소매핑.pptx
+++ b/docs/seminar/slides/세션1_스레드모델과_주소매핑.pptx
@@ -19,9 +19,10 @@
     <p:sldId id="267" r:id="rId13"/>
     <p:sldId id="268" r:id="rId14"/>
     <p:sldId id="269" r:id="rId15"/>
+    <p:sldId id="270" r:id="rId16"/>
   </p:sldIdLst>
   <p:notesMasterIdLst>
-    <p:notesMasterId r:id="rId16"/>
+    <p:notesMasterId r:id="rId17"/>
   </p:notesMasterIdLst>
   <p:sldSz cx="12192000" cy="6858000"/>
   <p:notesSz cx="6858000" cy="12192000"/>
@@ -603,7 +604,7 @@
           <a:p>
             <a:r>
               <a:rPr lang="en-US" dirty="0"/>
-              <a:t>THREAD_ADDRESS 덕에 커널 본문이 3줄. 인덱싱 복잡도를 매크로로 캡슐화하는 설계를 칭찬하세요.</a:t>
+              <a:t>coalescing은 세션 3(성능)의 복선. 여기서는 '이웃 스레드=이웃 주소'라는 직관만 각인시키면 됩니다.</a:t>
             </a:r>
             <a:endParaRPr lang="en-US" dirty="0"/>
           </a:p>
@@ -691,7 +692,7 @@
           <a:p>
             <a:r>
               <a:rPr lang="en-US" dirty="0"/>
-              <a:t>커널 launch는 비동기입니다(호스트는 곧바로 리턴). 이 성질은 세션 3·4에서 타이밍·오류와 함께 다룹니다.</a:t>
+              <a:t>THREAD_ADDRESS 덕에 커널 본문이 3줄. 인덱싱 복잡도를 매크로로 캡슐화하는 설계를 칭찬하세요.</a:t>
             </a:r>
             <a:endParaRPr lang="en-US" dirty="0"/>
           </a:p>
@@ -779,7 +780,7 @@
           <a:p>
             <a:r>
               <a:rPr lang="en-US" dirty="0"/>
-              <a:t>launch = CPU 한 줄 → GPU가 블록을 SM에 분배 → 워프 실행 → 완료. 호스트는 비동기로 리턴한다는 점이 다음 세션들의 복선.</a:t>
+              <a:t>커널 launch는 비동기입니다(호스트는 곧바로 리턴). 이 성질은 세션 3·4에서 타이밍·오류와 함께 다룹니다.</a:t>
             </a:r>
             <a:endParaRPr lang="en-US" dirty="0"/>
           </a:p>
@@ -867,7 +868,7 @@
           <a:p>
             <a:r>
               <a:rPr lang="en-US" dirty="0"/>
-              <a:t>네 가지 목표(슬라이드 2)로 돌아가 자가 점검을 유도하세요.</a:t>
+              <a:t>launch = CPU 한 줄 → GPU가 블록을 SM에 분배 → 워프 실행 → 완료. 호스트는 비동기로 리턴한다는 점이 다음 세션들의 복선.</a:t>
             </a:r>
             <a:endParaRPr lang="en-US" dirty="0"/>
           </a:p>
@@ -955,7 +956,7 @@
           <a:p>
             <a:r>
               <a:rPr lang="en-US" dirty="0"/>
-              <a:t/>
+              <a:t>네 가지 목표(슬라이드 2)로 돌아가 자가 점검을 유도하세요.</a:t>
             </a:r>
             <a:endParaRPr lang="en-US" dirty="0"/>
           </a:p>
@@ -979,6 +980,94 @@
             <a:fld id="{F7021451-1387-4CA6-816F-3879F97B5CBC}" type="slidenum">
               <a:rPr lang="en-US"/>
               <a:t>14</a:t>
+            </a:fld>
+            <a:endParaRPr lang="en-US"/>
+          </a:p>
+        </p:txBody>
+      </p:sp>
+    </p:spTree>
+    <p:extLst>
+      <p:ext uri="{BB962C8B-B14F-4D97-AF65-F5344CB8AC3E}">
+        <p14:creationId xmlns:p14="http://schemas.microsoft.com/office/powerpoint/2010/main" val="1024086991"/>
+      </p:ext>
+    </p:extLst>
+  </p:cSld>
+  <p:clrMapOvr>
+    <a:masterClrMapping/>
+  </p:clrMapOvr>
+</p:notes>
+</file>
+
+<file path=ppt/notesSlides/notesSlide15.xml><?xml version="1.0" encoding="utf-8"?>
+<p:notes xmlns:a="http://schemas.openxmlformats.org/drawingml/2006/main" xmlns:r="http://schemas.openxmlformats.org/officeDocument/2006/relationships" xmlns:p="http://schemas.openxmlformats.org/presentationml/2006/main">
+  <p:cSld>
+    <p:spTree>
+      <p:nvGrpSpPr>
+        <p:cNvPr id="1" name=""/>
+        <p:cNvGrpSpPr/>
+        <p:nvPr/>
+      </p:nvGrpSpPr>
+      <p:grpSpPr>
+        <a:xfrm>
+          <a:off x="0" y="0"/>
+          <a:ext cx="0" cy="0"/>
+          <a:chOff x="0" y="0"/>
+          <a:chExt cx="0" cy="0"/>
+        </a:xfrm>
+      </p:grpSpPr>
+      <p:sp>
+        <p:nvSpPr>
+          <p:cNvPr id="2" name="Slide Image Placeholder 1"/>
+          <p:cNvSpPr>
+            <a:spLocks noGrp="1" noRot="1" noChangeAspect="1"/>
+          </p:cNvSpPr>
+          <p:nvPr>
+            <p:ph type="sldImg"/>
+          </p:nvPr>
+        </p:nvSpPr>
+        <p:spPr/>
+      </p:sp>
+      <p:sp>
+        <p:nvSpPr>
+          <p:cNvPr id="3" name="Notes Placeholder 2"/>
+          <p:cNvSpPr>
+            <a:spLocks noGrp="1"/>
+          </p:cNvSpPr>
+          <p:nvPr>
+            <p:ph type="body" idx="1"/>
+          </p:nvPr>
+        </p:nvSpPr>
+        <p:spPr/>
+        <p:txBody>
+          <a:bodyPr/>
+          <a:lstStyle/>
+          <a:p>
+            <a:r>
+              <a:rPr lang="en-US" dirty="0"/>
+              <a:t/>
+            </a:r>
+            <a:endParaRPr lang="en-US" dirty="0"/>
+          </a:p>
+        </p:txBody>
+      </p:sp>
+      <p:sp>
+        <p:nvSpPr>
+          <p:cNvPr id="4" name="Slide Number Placeholder 3"/>
+          <p:cNvSpPr>
+            <a:spLocks noGrp="1"/>
+          </p:cNvSpPr>
+          <p:nvPr>
+            <p:ph type="sldNum" sz="quarter" idx="10"/>
+          </p:nvPr>
+        </p:nvSpPr>
+        <p:spPr/>
+        <p:txBody>
+          <a:bodyPr/>
+          <a:lstStyle/>
+          <a:p>
+            <a:fld id="{F7021451-1387-4CA6-816F-3879F97B5CBC}" type="slidenum">
+              <a:rPr lang="en-US"/>
+              <a:t>15</a:t>
             </a:fld>
             <a:endParaRPr lang="en-US"/>
           </a:p>
@@ -1571,7 +1660,7 @@
           <a:p>
             <a:r>
               <a:rPr lang="en-US" dirty="0"/>
-              <a:t>이 한 줄이 모든 write/verify 커널에 등장합니다. 각 항의 역할을 손가락으로 짚어가며 읽으세요.</a:t>
+              <a:t>2단 레이아웃(그리드→블록→스레드)과 globalIdx 계산을 한 장에 시각화. 다음 슬라이드 THREAD_ADDRESS의 전제입니다.</a:t>
             </a:r>
             <a:endParaRPr lang="en-US" dirty="0"/>
           </a:p>
@@ -1659,7 +1748,7 @@
           <a:p>
             <a:r>
               <a:rPr lang="en-US" dirty="0"/>
-              <a:t>coalescing은 세션 3(성능)의 복선. 여기서는 '이웃 스레드=이웃 주소'라는 직관만 각인시키면 됩니다.</a:t>
+              <a:t>이 한 줄이 모든 write/verify 커널에 등장합니다. 각 항의 역할을 손가락으로 짚어가며 읽으세요.</a:t>
             </a:r>
             <a:endParaRPr lang="en-US" dirty="0"/>
           </a:p>
@@ -2369,7 +2458,7 @@
                 <a:ea typeface="Courier New" pitchFamily="34" charset="-122"/>
                 <a:cs typeface="Courier New" pitchFamily="34" charset="-120"/>
               </a:rPr>
-              <a:t>7</a:t>
+              <a:t>6</a:t>
             </a:r>
             <a:endParaRPr lang="en-US" sz="2200" dirty="0"/>
           </a:p>
@@ -2408,7 +2497,7 @@
                 <a:ea typeface="Malgun Gothic" pitchFamily="34" charset="-122"/>
                 <a:cs typeface="Malgun Gothic" pitchFamily="34" charset="-120"/>
               </a:rPr>
-              <a:t>첫 커널 완독 · deviceWriteConstant</a:t>
+              <a:t>왜 이렇게 매핑하나 · 메모리 병합(coalescing)</a:t>
             </a:r>
             <a:endParaRPr lang="en-US" sz="2900" dirty="0"/>
           </a:p>
@@ -2416,18 +2505,57 @@
       </p:sp>
       <p:sp>
         <p:nvSpPr>
-          <p:cNvPr id="4" name="Shape 2"/>
-          <p:cNvSpPr/>
-          <p:nvPr/>
-        </p:nvSpPr>
-        <p:spPr>
-          <a:xfrm>
-            <a:off x="548640" y="1508760"/>
-            <a:ext cx="11064240" cy="2651760"/>
+          <p:cNvPr id="4" name="Text 2"/>
+          <p:cNvSpPr/>
+          <p:nvPr/>
+        </p:nvSpPr>
+        <p:spPr>
+          <a:xfrm>
+            <a:off x="548640" y="1417320"/>
+            <a:ext cx="11064240" cy="457200"/>
+          </a:xfrm>
+          <a:prstGeom prst="rect">
+            <a:avLst/>
+          </a:prstGeom>
+          <a:noFill/>
+          <a:ln/>
+        </p:spPr>
+        <p:txBody>
+          <a:bodyPr wrap="square" lIns="0" tIns="0" rIns="0" bIns="0" rtlCol="0" anchor="ctr"/>
+          <a:lstStyle/>
+          <a:p>
+            <a:pPr indent="0" marL="0">
+              <a:buNone/>
+            </a:pPr>
+            <a:r>
+              <a:rPr lang="en-US" sz="1550" dirty="0">
+                <a:solidFill>
+                  <a:srgbClr val="9FB0C4"/>
+                </a:solidFill>
+                <a:latin typeface="Malgun Gothic" pitchFamily="34" charset="0"/>
+                <a:ea typeface="Malgun Gothic" pitchFamily="34" charset="-122"/>
+                <a:cs typeface="Malgun Gothic" pitchFamily="34" charset="-120"/>
+              </a:rPr>
+              <a:t>같은 반복 i에서 이웃 스레드(threadIdx.x)가 이웃한 주소를 맡습니다. 이 '인터리빙'이 성능의 열쇠입니다.</a:t>
+            </a:r>
+            <a:endParaRPr lang="en-US" sz="1550" dirty="0"/>
+          </a:p>
+        </p:txBody>
+      </p:sp>
+      <p:sp>
+        <p:nvSpPr>
+          <p:cNvPr id="5" name="Shape 3"/>
+          <p:cNvSpPr/>
+          <p:nvPr/>
+        </p:nvSpPr>
+        <p:spPr>
+          <a:xfrm>
+            <a:off x="576072" y="2148840"/>
+            <a:ext cx="1328166" cy="868680"/>
           </a:xfrm>
           <a:prstGeom prst="roundRect">
             <a:avLst>
-              <a:gd name="adj" fmla="val 1724"/>
+              <a:gd name="adj" fmla="val 4211"/>
             </a:avLst>
           </a:prstGeom>
           <a:solidFill>
@@ -2435,7 +2563,7 @@
           </a:solidFill>
           <a:ln w="12700">
             <a:solidFill>
-              <a:srgbClr val="2C3A4E"/>
+              <a:srgbClr val="E8A33D"/>
             </a:solidFill>
             <a:prstDash val="solid"/>
           </a:ln>
@@ -2443,73 +2571,135 @@
       </p:sp>
       <p:sp>
         <p:nvSpPr>
-          <p:cNvPr id="5" name="Text 3"/>
-          <p:cNvSpPr/>
-          <p:nvPr/>
-        </p:nvSpPr>
-        <p:spPr>
-          <a:xfrm>
-            <a:off x="768096" y="1655064"/>
-            <a:ext cx="10625328" cy="2359152"/>
-          </a:xfrm>
-          <a:prstGeom prst="rect">
-            <a:avLst/>
-          </a:prstGeom>
-          <a:noFill/>
-          <a:ln/>
-        </p:spPr>
-        <p:txBody>
-          <a:bodyPr wrap="square" lIns="0" tIns="0" rIns="0" bIns="0" rtlCol="0" anchor="t"/>
-          <a:lstStyle/>
-          <a:p>
-            <a:pPr algn="l" indent="0" marL="0">
-              <a:lnSpc>
-                <a:spcPct val="110000"/>
-              </a:lnSpc>
-              <a:buNone/>
-            </a:pPr>
-            <a:r>
-              <a:rPr lang="en-US" sz="1400" dirty="0">
-                <a:solidFill>
-                  <a:srgbClr val="E8A33D"/>
+          <p:cNvPr id="6" name="Text 4"/>
+          <p:cNvSpPr/>
+          <p:nvPr/>
+        </p:nvSpPr>
+        <p:spPr>
+          <a:xfrm>
+            <a:off x="548640" y="2276856"/>
+            <a:ext cx="1383030" cy="365760"/>
+          </a:xfrm>
+          <a:prstGeom prst="rect">
+            <a:avLst/>
+          </a:prstGeom>
+          <a:noFill/>
+          <a:ln/>
+        </p:spPr>
+        <p:txBody>
+          <a:bodyPr wrap="square" lIns="0" tIns="0" rIns="0" bIns="0" rtlCol="0" anchor="ctr"/>
+          <a:lstStyle/>
+          <a:p>
+            <a:pPr algn="ctr" indent="0" marL="0">
+              <a:buNone/>
+            </a:pPr>
+            <a:r>
+              <a:rPr lang="en-US" sz="1600" b="1" dirty="0">
+                <a:solidFill>
+                  <a:srgbClr val="E7EDF5"/>
                 </a:solidFill>
                 <a:latin typeface="Courier New" pitchFamily="34" charset="0"/>
                 <a:ea typeface="Courier New" pitchFamily="34" charset="-122"/>
                 <a:cs typeface="Courier New" pitchFamily="34" charset="-120"/>
               </a:rPr>
-              <a:t>__global__ void</a:t>
-            </a:r>
-            <a:endParaRPr lang="en-US" sz="1400" dirty="0"/>
-          </a:p>
-          <a:p>
-            <a:pPr algn="l" indent="0" marL="0">
-              <a:lnSpc>
-                <a:spcPct val="110000"/>
-              </a:lnSpc>
-              <a:buNone/>
-            </a:pPr>
-            <a:r>
-              <a:rPr lang="en-US" sz="1400" dirty="0">
-                <a:solidFill>
-                  <a:srgbClr val="E7EDF5"/>
+              <a:t>T0</a:t>
+            </a:r>
+            <a:endParaRPr lang="en-US" sz="1600" dirty="0"/>
+          </a:p>
+        </p:txBody>
+      </p:sp>
+      <p:sp>
+        <p:nvSpPr>
+          <p:cNvPr id="7" name="Text 5"/>
+          <p:cNvSpPr/>
+          <p:nvPr/>
+        </p:nvSpPr>
+        <p:spPr>
+          <a:xfrm>
+            <a:off x="548640" y="2651760"/>
+            <a:ext cx="1383030" cy="274320"/>
+          </a:xfrm>
+          <a:prstGeom prst="rect">
+            <a:avLst/>
+          </a:prstGeom>
+          <a:noFill/>
+          <a:ln/>
+        </p:spPr>
+        <p:txBody>
+          <a:bodyPr wrap="square" lIns="0" tIns="0" rIns="0" bIns="0" rtlCol="0" anchor="ctr"/>
+          <a:lstStyle/>
+          <a:p>
+            <a:pPr algn="ctr" indent="0" marL="0">
+              <a:buNone/>
+            </a:pPr>
+            <a:r>
+              <a:rPr lang="en-US" sz="1050" dirty="0">
+                <a:solidFill>
+                  <a:srgbClr val="9FB0C4"/>
                 </a:solidFill>
                 <a:latin typeface="Courier New" pitchFamily="34" charset="0"/>
                 <a:ea typeface="Courier New" pitchFamily="34" charset="-122"/>
                 <a:cs typeface="Courier New" pitchFamily="34" charset="-120"/>
               </a:rPr>
-              <a:t>deviceWriteConstant(uint* base, uint N, const uint constant) {</a:t>
-            </a:r>
-            <a:endParaRPr lang="en-US" sz="1400" dirty="0"/>
-          </a:p>
-          <a:p>
-            <a:pPr algn="l" indent="0" marL="0">
-              <a:lnSpc>
-                <a:spcPct val="110000"/>
-              </a:lnSpc>
-              <a:buNone/>
-            </a:pPr>
-            <a:r>
-              <a:rPr lang="en-US" sz="1400" dirty="0">
+              <a:t>+0B</a:t>
+            </a:r>
+            <a:endParaRPr lang="en-US" sz="1050" dirty="0"/>
+          </a:p>
+        </p:txBody>
+      </p:sp>
+      <p:sp>
+        <p:nvSpPr>
+          <p:cNvPr id="8" name="Shape 6"/>
+          <p:cNvSpPr/>
+          <p:nvPr/>
+        </p:nvSpPr>
+        <p:spPr>
+          <a:xfrm>
+            <a:off x="1959102" y="2148840"/>
+            <a:ext cx="1328166" cy="868680"/>
+          </a:xfrm>
+          <a:prstGeom prst="roundRect">
+            <a:avLst>
+              <a:gd name="adj" fmla="val 4211"/>
+            </a:avLst>
+          </a:prstGeom>
+          <a:solidFill>
+            <a:srgbClr val="0B1119"/>
+          </a:solidFill>
+          <a:ln w="12700">
+            <a:solidFill>
+              <a:srgbClr val="3FB8C4"/>
+            </a:solidFill>
+            <a:prstDash val="solid"/>
+          </a:ln>
+        </p:spPr>
+      </p:sp>
+      <p:sp>
+        <p:nvSpPr>
+          <p:cNvPr id="9" name="Text 7"/>
+          <p:cNvSpPr/>
+          <p:nvPr/>
+        </p:nvSpPr>
+        <p:spPr>
+          <a:xfrm>
+            <a:off x="1931670" y="2276856"/>
+            <a:ext cx="1383030" cy="365760"/>
+          </a:xfrm>
+          <a:prstGeom prst="rect">
+            <a:avLst/>
+          </a:prstGeom>
+          <a:noFill/>
+          <a:ln/>
+        </p:spPr>
+        <p:txBody>
+          <a:bodyPr wrap="square" lIns="0" tIns="0" rIns="0" bIns="0" rtlCol="0" anchor="ctr"/>
+          <a:lstStyle/>
+          <a:p>
+            <a:pPr algn="ctr" indent="0" marL="0">
+              <a:buNone/>
+            </a:pPr>
+            <a:r>
+              <a:rPr lang="en-US" sz="1600" b="1" dirty="0">
                 <a:solidFill>
                   <a:srgbClr val="E7EDF5"/>
                 </a:solidFill>
@@ -2517,39 +2707,104 @@
                 <a:ea typeface="Courier New" pitchFamily="34" charset="-122"/>
                 <a:cs typeface="Courier New" pitchFamily="34" charset="-120"/>
               </a:rPr>
-              <a:t>    for (uint i = 0; i &lt; N; i++) {</a:t>
-            </a:r>
-            <a:endParaRPr lang="en-US" sz="1400" dirty="0"/>
-          </a:p>
-          <a:p>
-            <a:pPr algn="l" indent="0" marL="0">
-              <a:lnSpc>
-                <a:spcPct val="110000"/>
-              </a:lnSpc>
-              <a:buNone/>
-            </a:pPr>
-            <a:r>
-              <a:rPr lang="en-US" sz="1400" dirty="0">
-                <a:solidFill>
-                  <a:srgbClr val="F2C079"/>
+              <a:t>T1</a:t>
+            </a:r>
+            <a:endParaRPr lang="en-US" sz="1600" dirty="0"/>
+          </a:p>
+        </p:txBody>
+      </p:sp>
+      <p:sp>
+        <p:nvSpPr>
+          <p:cNvPr id="10" name="Text 8"/>
+          <p:cNvSpPr/>
+          <p:nvPr/>
+        </p:nvSpPr>
+        <p:spPr>
+          <a:xfrm>
+            <a:off x="1931670" y="2651760"/>
+            <a:ext cx="1383030" cy="274320"/>
+          </a:xfrm>
+          <a:prstGeom prst="rect">
+            <a:avLst/>
+          </a:prstGeom>
+          <a:noFill/>
+          <a:ln/>
+        </p:spPr>
+        <p:txBody>
+          <a:bodyPr wrap="square" lIns="0" tIns="0" rIns="0" bIns="0" rtlCol="0" anchor="ctr"/>
+          <a:lstStyle/>
+          <a:p>
+            <a:pPr algn="ctr" indent="0" marL="0">
+              <a:buNone/>
+            </a:pPr>
+            <a:r>
+              <a:rPr lang="en-US" sz="1050" dirty="0">
+                <a:solidFill>
+                  <a:srgbClr val="9FB0C4"/>
                 </a:solidFill>
                 <a:latin typeface="Courier New" pitchFamily="34" charset="0"/>
                 <a:ea typeface="Courier New" pitchFamily="34" charset="-122"/>
                 <a:cs typeface="Courier New" pitchFamily="34" charset="-120"/>
               </a:rPr>
-              <a:t>        *(THREAD_ADDRESS(base, N, i)) = constant;   // 각 스레드가 자기 word들을 채움</a:t>
-            </a:r>
-            <a:endParaRPr lang="en-US" sz="1400" dirty="0"/>
-          </a:p>
-          <a:p>
-            <a:pPr algn="l" indent="0" marL="0">
-              <a:lnSpc>
-                <a:spcPct val="110000"/>
-              </a:lnSpc>
-              <a:buNone/>
-            </a:pPr>
-            <a:r>
-              <a:rPr lang="en-US" sz="1400" dirty="0">
+              <a:t>+4B</a:t>
+            </a:r>
+            <a:endParaRPr lang="en-US" sz="1050" dirty="0"/>
+          </a:p>
+        </p:txBody>
+      </p:sp>
+      <p:sp>
+        <p:nvSpPr>
+          <p:cNvPr id="11" name="Shape 9"/>
+          <p:cNvSpPr/>
+          <p:nvPr/>
+        </p:nvSpPr>
+        <p:spPr>
+          <a:xfrm>
+            <a:off x="3342132" y="2148840"/>
+            <a:ext cx="1328166" cy="868680"/>
+          </a:xfrm>
+          <a:prstGeom prst="roundRect">
+            <a:avLst>
+              <a:gd name="adj" fmla="val 4211"/>
+            </a:avLst>
+          </a:prstGeom>
+          <a:solidFill>
+            <a:srgbClr val="0B1119"/>
+          </a:solidFill>
+          <a:ln w="12700">
+            <a:solidFill>
+              <a:srgbClr val="E8A33D"/>
+            </a:solidFill>
+            <a:prstDash val="solid"/>
+          </a:ln>
+        </p:spPr>
+      </p:sp>
+      <p:sp>
+        <p:nvSpPr>
+          <p:cNvPr id="12" name="Text 10"/>
+          <p:cNvSpPr/>
+          <p:nvPr/>
+        </p:nvSpPr>
+        <p:spPr>
+          <a:xfrm>
+            <a:off x="3314700" y="2276856"/>
+            <a:ext cx="1383030" cy="365760"/>
+          </a:xfrm>
+          <a:prstGeom prst="rect">
+            <a:avLst/>
+          </a:prstGeom>
+          <a:noFill/>
+          <a:ln/>
+        </p:spPr>
+        <p:txBody>
+          <a:bodyPr wrap="square" lIns="0" tIns="0" rIns="0" bIns="0" rtlCol="0" anchor="ctr"/>
+          <a:lstStyle/>
+          <a:p>
+            <a:pPr algn="ctr" indent="0" marL="0">
+              <a:buNone/>
+            </a:pPr>
+            <a:r>
+              <a:rPr lang="en-US" sz="1600" b="1" dirty="0">
                 <a:solidFill>
                   <a:srgbClr val="E7EDF5"/>
                 </a:solidFill>
@@ -2557,46 +2812,618 @@
                 <a:ea typeface="Courier New" pitchFamily="34" charset="-122"/>
                 <a:cs typeface="Courier New" pitchFamily="34" charset="-120"/>
               </a:rPr>
-              <a:t>    }</a:t>
-            </a:r>
-            <a:endParaRPr lang="en-US" sz="1400" dirty="0"/>
-          </a:p>
-          <a:p>
-            <a:pPr algn="l" indent="0" marL="0">
-              <a:lnSpc>
-                <a:spcPct val="110000"/>
-              </a:lnSpc>
-              <a:buNone/>
-            </a:pPr>
-            <a:r>
-              <a:rPr lang="en-US" sz="1400" dirty="0">
-                <a:solidFill>
-                  <a:srgbClr val="E7EDF5"/>
+              <a:t>T2</a:t>
+            </a:r>
+            <a:endParaRPr lang="en-US" sz="1600" dirty="0"/>
+          </a:p>
+        </p:txBody>
+      </p:sp>
+      <p:sp>
+        <p:nvSpPr>
+          <p:cNvPr id="13" name="Text 11"/>
+          <p:cNvSpPr/>
+          <p:nvPr/>
+        </p:nvSpPr>
+        <p:spPr>
+          <a:xfrm>
+            <a:off x="3314700" y="2651760"/>
+            <a:ext cx="1383030" cy="274320"/>
+          </a:xfrm>
+          <a:prstGeom prst="rect">
+            <a:avLst/>
+          </a:prstGeom>
+          <a:noFill/>
+          <a:ln/>
+        </p:spPr>
+        <p:txBody>
+          <a:bodyPr wrap="square" lIns="0" tIns="0" rIns="0" bIns="0" rtlCol="0" anchor="ctr"/>
+          <a:lstStyle/>
+          <a:p>
+            <a:pPr algn="ctr" indent="0" marL="0">
+              <a:buNone/>
+            </a:pPr>
+            <a:r>
+              <a:rPr lang="en-US" sz="1050" dirty="0">
+                <a:solidFill>
+                  <a:srgbClr val="9FB0C4"/>
                 </a:solidFill>
                 <a:latin typeface="Courier New" pitchFamily="34" charset="0"/>
                 <a:ea typeface="Courier New" pitchFamily="34" charset="-122"/>
                 <a:cs typeface="Courier New" pitchFamily="34" charset="-120"/>
               </a:rPr>
-              <a:t>}</a:t>
-            </a:r>
-            <a:endParaRPr lang="en-US" sz="1400" dirty="0"/>
-          </a:p>
-        </p:txBody>
-      </p:sp>
-      <p:sp>
-        <p:nvSpPr>
-          <p:cNvPr id="6" name="Shape 4"/>
-          <p:cNvSpPr/>
-          <p:nvPr/>
-        </p:nvSpPr>
-        <p:spPr>
-          <a:xfrm>
-            <a:off x="548640" y="4343400"/>
-            <a:ext cx="11064240" cy="1371600"/>
+              <a:t>+8B</a:t>
+            </a:r>
+            <a:endParaRPr lang="en-US" sz="1050" dirty="0"/>
+          </a:p>
+        </p:txBody>
+      </p:sp>
+      <p:sp>
+        <p:nvSpPr>
+          <p:cNvPr id="14" name="Shape 12"/>
+          <p:cNvSpPr/>
+          <p:nvPr/>
+        </p:nvSpPr>
+        <p:spPr>
+          <a:xfrm>
+            <a:off x="4725162" y="2148840"/>
+            <a:ext cx="1328166" cy="868680"/>
           </a:xfrm>
           <a:prstGeom prst="roundRect">
             <a:avLst>
-              <a:gd name="adj" fmla="val 5333"/>
+              <a:gd name="adj" fmla="val 4211"/>
+            </a:avLst>
+          </a:prstGeom>
+          <a:solidFill>
+            <a:srgbClr val="0B1119"/>
+          </a:solidFill>
+          <a:ln w="12700">
+            <a:solidFill>
+              <a:srgbClr val="3FB8C4"/>
+            </a:solidFill>
+            <a:prstDash val="solid"/>
+          </a:ln>
+        </p:spPr>
+      </p:sp>
+      <p:sp>
+        <p:nvSpPr>
+          <p:cNvPr id="15" name="Text 13"/>
+          <p:cNvSpPr/>
+          <p:nvPr/>
+        </p:nvSpPr>
+        <p:spPr>
+          <a:xfrm>
+            <a:off x="4697730" y="2276856"/>
+            <a:ext cx="1383030" cy="365760"/>
+          </a:xfrm>
+          <a:prstGeom prst="rect">
+            <a:avLst/>
+          </a:prstGeom>
+          <a:noFill/>
+          <a:ln/>
+        </p:spPr>
+        <p:txBody>
+          <a:bodyPr wrap="square" lIns="0" tIns="0" rIns="0" bIns="0" rtlCol="0" anchor="ctr"/>
+          <a:lstStyle/>
+          <a:p>
+            <a:pPr algn="ctr" indent="0" marL="0">
+              <a:buNone/>
+            </a:pPr>
+            <a:r>
+              <a:rPr lang="en-US" sz="1600" b="1" dirty="0">
+                <a:solidFill>
+                  <a:srgbClr val="E7EDF5"/>
+                </a:solidFill>
+                <a:latin typeface="Courier New" pitchFamily="34" charset="0"/>
+                <a:ea typeface="Courier New" pitchFamily="34" charset="-122"/>
+                <a:cs typeface="Courier New" pitchFamily="34" charset="-120"/>
+              </a:rPr>
+              <a:t>T3</a:t>
+            </a:r>
+            <a:endParaRPr lang="en-US" sz="1600" dirty="0"/>
+          </a:p>
+        </p:txBody>
+      </p:sp>
+      <p:sp>
+        <p:nvSpPr>
+          <p:cNvPr id="16" name="Text 14"/>
+          <p:cNvSpPr/>
+          <p:nvPr/>
+        </p:nvSpPr>
+        <p:spPr>
+          <a:xfrm>
+            <a:off x="4697730" y="2651760"/>
+            <a:ext cx="1383030" cy="274320"/>
+          </a:xfrm>
+          <a:prstGeom prst="rect">
+            <a:avLst/>
+          </a:prstGeom>
+          <a:noFill/>
+          <a:ln/>
+        </p:spPr>
+        <p:txBody>
+          <a:bodyPr wrap="square" lIns="0" tIns="0" rIns="0" bIns="0" rtlCol="0" anchor="ctr"/>
+          <a:lstStyle/>
+          <a:p>
+            <a:pPr algn="ctr" indent="0" marL="0">
+              <a:buNone/>
+            </a:pPr>
+            <a:r>
+              <a:rPr lang="en-US" sz="1050" dirty="0">
+                <a:solidFill>
+                  <a:srgbClr val="9FB0C4"/>
+                </a:solidFill>
+                <a:latin typeface="Courier New" pitchFamily="34" charset="0"/>
+                <a:ea typeface="Courier New" pitchFamily="34" charset="-122"/>
+                <a:cs typeface="Courier New" pitchFamily="34" charset="-120"/>
+              </a:rPr>
+              <a:t>+12B</a:t>
+            </a:r>
+            <a:endParaRPr lang="en-US" sz="1050" dirty="0"/>
+          </a:p>
+        </p:txBody>
+      </p:sp>
+      <p:sp>
+        <p:nvSpPr>
+          <p:cNvPr id="17" name="Shape 15"/>
+          <p:cNvSpPr/>
+          <p:nvPr/>
+        </p:nvSpPr>
+        <p:spPr>
+          <a:xfrm>
+            <a:off x="6108192" y="2148840"/>
+            <a:ext cx="1328166" cy="868680"/>
+          </a:xfrm>
+          <a:prstGeom prst="roundRect">
+            <a:avLst>
+              <a:gd name="adj" fmla="val 4211"/>
+            </a:avLst>
+          </a:prstGeom>
+          <a:solidFill>
+            <a:srgbClr val="0B1119"/>
+          </a:solidFill>
+          <a:ln w="12700">
+            <a:solidFill>
+              <a:srgbClr val="E8A33D"/>
+            </a:solidFill>
+            <a:prstDash val="solid"/>
+          </a:ln>
+        </p:spPr>
+      </p:sp>
+      <p:sp>
+        <p:nvSpPr>
+          <p:cNvPr id="18" name="Text 16"/>
+          <p:cNvSpPr/>
+          <p:nvPr/>
+        </p:nvSpPr>
+        <p:spPr>
+          <a:xfrm>
+            <a:off x="6080760" y="2276856"/>
+            <a:ext cx="1383030" cy="365760"/>
+          </a:xfrm>
+          <a:prstGeom prst="rect">
+            <a:avLst/>
+          </a:prstGeom>
+          <a:noFill/>
+          <a:ln/>
+        </p:spPr>
+        <p:txBody>
+          <a:bodyPr wrap="square" lIns="0" tIns="0" rIns="0" bIns="0" rtlCol="0" anchor="ctr"/>
+          <a:lstStyle/>
+          <a:p>
+            <a:pPr algn="ctr" indent="0" marL="0">
+              <a:buNone/>
+            </a:pPr>
+            <a:r>
+              <a:rPr lang="en-US" sz="1600" b="1" dirty="0">
+                <a:solidFill>
+                  <a:srgbClr val="E7EDF5"/>
+                </a:solidFill>
+                <a:latin typeface="Courier New" pitchFamily="34" charset="0"/>
+                <a:ea typeface="Courier New" pitchFamily="34" charset="-122"/>
+                <a:cs typeface="Courier New" pitchFamily="34" charset="-120"/>
+              </a:rPr>
+              <a:t>T4</a:t>
+            </a:r>
+            <a:endParaRPr lang="en-US" sz="1600" dirty="0"/>
+          </a:p>
+        </p:txBody>
+      </p:sp>
+      <p:sp>
+        <p:nvSpPr>
+          <p:cNvPr id="19" name="Text 17"/>
+          <p:cNvSpPr/>
+          <p:nvPr/>
+        </p:nvSpPr>
+        <p:spPr>
+          <a:xfrm>
+            <a:off x="6080760" y="2651760"/>
+            <a:ext cx="1383030" cy="274320"/>
+          </a:xfrm>
+          <a:prstGeom prst="rect">
+            <a:avLst/>
+          </a:prstGeom>
+          <a:noFill/>
+          <a:ln/>
+        </p:spPr>
+        <p:txBody>
+          <a:bodyPr wrap="square" lIns="0" tIns="0" rIns="0" bIns="0" rtlCol="0" anchor="ctr"/>
+          <a:lstStyle/>
+          <a:p>
+            <a:pPr algn="ctr" indent="0" marL="0">
+              <a:buNone/>
+            </a:pPr>
+            <a:r>
+              <a:rPr lang="en-US" sz="1050" dirty="0">
+                <a:solidFill>
+                  <a:srgbClr val="9FB0C4"/>
+                </a:solidFill>
+                <a:latin typeface="Courier New" pitchFamily="34" charset="0"/>
+                <a:ea typeface="Courier New" pitchFamily="34" charset="-122"/>
+                <a:cs typeface="Courier New" pitchFamily="34" charset="-120"/>
+              </a:rPr>
+              <a:t>+16B</a:t>
+            </a:r>
+            <a:endParaRPr lang="en-US" sz="1050" dirty="0"/>
+          </a:p>
+        </p:txBody>
+      </p:sp>
+      <p:sp>
+        <p:nvSpPr>
+          <p:cNvPr id="20" name="Shape 18"/>
+          <p:cNvSpPr/>
+          <p:nvPr/>
+        </p:nvSpPr>
+        <p:spPr>
+          <a:xfrm>
+            <a:off x="7491222" y="2148840"/>
+            <a:ext cx="1328166" cy="868680"/>
+          </a:xfrm>
+          <a:prstGeom prst="roundRect">
+            <a:avLst>
+              <a:gd name="adj" fmla="val 4211"/>
+            </a:avLst>
+          </a:prstGeom>
+          <a:solidFill>
+            <a:srgbClr val="0B1119"/>
+          </a:solidFill>
+          <a:ln w="12700">
+            <a:solidFill>
+              <a:srgbClr val="3FB8C4"/>
+            </a:solidFill>
+            <a:prstDash val="solid"/>
+          </a:ln>
+        </p:spPr>
+      </p:sp>
+      <p:sp>
+        <p:nvSpPr>
+          <p:cNvPr id="21" name="Text 19"/>
+          <p:cNvSpPr/>
+          <p:nvPr/>
+        </p:nvSpPr>
+        <p:spPr>
+          <a:xfrm>
+            <a:off x="7463790" y="2276856"/>
+            <a:ext cx="1383030" cy="365760"/>
+          </a:xfrm>
+          <a:prstGeom prst="rect">
+            <a:avLst/>
+          </a:prstGeom>
+          <a:noFill/>
+          <a:ln/>
+        </p:spPr>
+        <p:txBody>
+          <a:bodyPr wrap="square" lIns="0" tIns="0" rIns="0" bIns="0" rtlCol="0" anchor="ctr"/>
+          <a:lstStyle/>
+          <a:p>
+            <a:pPr algn="ctr" indent="0" marL="0">
+              <a:buNone/>
+            </a:pPr>
+            <a:r>
+              <a:rPr lang="en-US" sz="1600" b="1" dirty="0">
+                <a:solidFill>
+                  <a:srgbClr val="E7EDF5"/>
+                </a:solidFill>
+                <a:latin typeface="Courier New" pitchFamily="34" charset="0"/>
+                <a:ea typeface="Courier New" pitchFamily="34" charset="-122"/>
+                <a:cs typeface="Courier New" pitchFamily="34" charset="-120"/>
+              </a:rPr>
+              <a:t>T5</a:t>
+            </a:r>
+            <a:endParaRPr lang="en-US" sz="1600" dirty="0"/>
+          </a:p>
+        </p:txBody>
+      </p:sp>
+      <p:sp>
+        <p:nvSpPr>
+          <p:cNvPr id="22" name="Text 20"/>
+          <p:cNvSpPr/>
+          <p:nvPr/>
+        </p:nvSpPr>
+        <p:spPr>
+          <a:xfrm>
+            <a:off x="7463790" y="2651760"/>
+            <a:ext cx="1383030" cy="274320"/>
+          </a:xfrm>
+          <a:prstGeom prst="rect">
+            <a:avLst/>
+          </a:prstGeom>
+          <a:noFill/>
+          <a:ln/>
+        </p:spPr>
+        <p:txBody>
+          <a:bodyPr wrap="square" lIns="0" tIns="0" rIns="0" bIns="0" rtlCol="0" anchor="ctr"/>
+          <a:lstStyle/>
+          <a:p>
+            <a:pPr algn="ctr" indent="0" marL="0">
+              <a:buNone/>
+            </a:pPr>
+            <a:r>
+              <a:rPr lang="en-US" sz="1050" dirty="0">
+                <a:solidFill>
+                  <a:srgbClr val="9FB0C4"/>
+                </a:solidFill>
+                <a:latin typeface="Courier New" pitchFamily="34" charset="0"/>
+                <a:ea typeface="Courier New" pitchFamily="34" charset="-122"/>
+                <a:cs typeface="Courier New" pitchFamily="34" charset="-120"/>
+              </a:rPr>
+              <a:t>+20B</a:t>
+            </a:r>
+            <a:endParaRPr lang="en-US" sz="1050" dirty="0"/>
+          </a:p>
+        </p:txBody>
+      </p:sp>
+      <p:sp>
+        <p:nvSpPr>
+          <p:cNvPr id="23" name="Shape 21"/>
+          <p:cNvSpPr/>
+          <p:nvPr/>
+        </p:nvSpPr>
+        <p:spPr>
+          <a:xfrm>
+            <a:off x="8874252" y="2148840"/>
+            <a:ext cx="1328166" cy="868680"/>
+          </a:xfrm>
+          <a:prstGeom prst="roundRect">
+            <a:avLst>
+              <a:gd name="adj" fmla="val 4211"/>
+            </a:avLst>
+          </a:prstGeom>
+          <a:solidFill>
+            <a:srgbClr val="0B1119"/>
+          </a:solidFill>
+          <a:ln w="12700">
+            <a:solidFill>
+              <a:srgbClr val="E8A33D"/>
+            </a:solidFill>
+            <a:prstDash val="solid"/>
+          </a:ln>
+        </p:spPr>
+      </p:sp>
+      <p:sp>
+        <p:nvSpPr>
+          <p:cNvPr id="24" name="Text 22"/>
+          <p:cNvSpPr/>
+          <p:nvPr/>
+        </p:nvSpPr>
+        <p:spPr>
+          <a:xfrm>
+            <a:off x="8846820" y="2276856"/>
+            <a:ext cx="1383030" cy="365760"/>
+          </a:xfrm>
+          <a:prstGeom prst="rect">
+            <a:avLst/>
+          </a:prstGeom>
+          <a:noFill/>
+          <a:ln/>
+        </p:spPr>
+        <p:txBody>
+          <a:bodyPr wrap="square" lIns="0" tIns="0" rIns="0" bIns="0" rtlCol="0" anchor="ctr"/>
+          <a:lstStyle/>
+          <a:p>
+            <a:pPr algn="ctr" indent="0" marL="0">
+              <a:buNone/>
+            </a:pPr>
+            <a:r>
+              <a:rPr lang="en-US" sz="1600" b="1" dirty="0">
+                <a:solidFill>
+                  <a:srgbClr val="E7EDF5"/>
+                </a:solidFill>
+                <a:latin typeface="Courier New" pitchFamily="34" charset="0"/>
+                <a:ea typeface="Courier New" pitchFamily="34" charset="-122"/>
+                <a:cs typeface="Courier New" pitchFamily="34" charset="-120"/>
+              </a:rPr>
+              <a:t>T6</a:t>
+            </a:r>
+            <a:endParaRPr lang="en-US" sz="1600" dirty="0"/>
+          </a:p>
+        </p:txBody>
+      </p:sp>
+      <p:sp>
+        <p:nvSpPr>
+          <p:cNvPr id="25" name="Text 23"/>
+          <p:cNvSpPr/>
+          <p:nvPr/>
+        </p:nvSpPr>
+        <p:spPr>
+          <a:xfrm>
+            <a:off x="8846820" y="2651760"/>
+            <a:ext cx="1383030" cy="274320"/>
+          </a:xfrm>
+          <a:prstGeom prst="rect">
+            <a:avLst/>
+          </a:prstGeom>
+          <a:noFill/>
+          <a:ln/>
+        </p:spPr>
+        <p:txBody>
+          <a:bodyPr wrap="square" lIns="0" tIns="0" rIns="0" bIns="0" rtlCol="0" anchor="ctr"/>
+          <a:lstStyle/>
+          <a:p>
+            <a:pPr algn="ctr" indent="0" marL="0">
+              <a:buNone/>
+            </a:pPr>
+            <a:r>
+              <a:rPr lang="en-US" sz="1050" dirty="0">
+                <a:solidFill>
+                  <a:srgbClr val="9FB0C4"/>
+                </a:solidFill>
+                <a:latin typeface="Courier New" pitchFamily="34" charset="0"/>
+                <a:ea typeface="Courier New" pitchFamily="34" charset="-122"/>
+                <a:cs typeface="Courier New" pitchFamily="34" charset="-120"/>
+              </a:rPr>
+              <a:t>+24B</a:t>
+            </a:r>
+            <a:endParaRPr lang="en-US" sz="1050" dirty="0"/>
+          </a:p>
+        </p:txBody>
+      </p:sp>
+      <p:sp>
+        <p:nvSpPr>
+          <p:cNvPr id="26" name="Shape 24"/>
+          <p:cNvSpPr/>
+          <p:nvPr/>
+        </p:nvSpPr>
+        <p:spPr>
+          <a:xfrm>
+            <a:off x="10257282" y="2148840"/>
+            <a:ext cx="1328166" cy="868680"/>
+          </a:xfrm>
+          <a:prstGeom prst="roundRect">
+            <a:avLst>
+              <a:gd name="adj" fmla="val 4211"/>
+            </a:avLst>
+          </a:prstGeom>
+          <a:solidFill>
+            <a:srgbClr val="0B1119"/>
+          </a:solidFill>
+          <a:ln w="12700">
+            <a:solidFill>
+              <a:srgbClr val="3FB8C4"/>
+            </a:solidFill>
+            <a:prstDash val="solid"/>
+          </a:ln>
+        </p:spPr>
+      </p:sp>
+      <p:sp>
+        <p:nvSpPr>
+          <p:cNvPr id="27" name="Text 25"/>
+          <p:cNvSpPr/>
+          <p:nvPr/>
+        </p:nvSpPr>
+        <p:spPr>
+          <a:xfrm>
+            <a:off x="10229850" y="2276856"/>
+            <a:ext cx="1383030" cy="365760"/>
+          </a:xfrm>
+          <a:prstGeom prst="rect">
+            <a:avLst/>
+          </a:prstGeom>
+          <a:noFill/>
+          <a:ln/>
+        </p:spPr>
+        <p:txBody>
+          <a:bodyPr wrap="square" lIns="0" tIns="0" rIns="0" bIns="0" rtlCol="0" anchor="ctr"/>
+          <a:lstStyle/>
+          <a:p>
+            <a:pPr algn="ctr" indent="0" marL="0">
+              <a:buNone/>
+            </a:pPr>
+            <a:r>
+              <a:rPr lang="en-US" sz="1600" b="1" dirty="0">
+                <a:solidFill>
+                  <a:srgbClr val="E7EDF5"/>
+                </a:solidFill>
+                <a:latin typeface="Courier New" pitchFamily="34" charset="0"/>
+                <a:ea typeface="Courier New" pitchFamily="34" charset="-122"/>
+                <a:cs typeface="Courier New" pitchFamily="34" charset="-120"/>
+              </a:rPr>
+              <a:t>…</a:t>
+            </a:r>
+            <a:endParaRPr lang="en-US" sz="1600" dirty="0"/>
+          </a:p>
+        </p:txBody>
+      </p:sp>
+      <p:sp>
+        <p:nvSpPr>
+          <p:cNvPr id="28" name="Text 26"/>
+          <p:cNvSpPr/>
+          <p:nvPr/>
+        </p:nvSpPr>
+        <p:spPr>
+          <a:xfrm>
+            <a:off x="10229850" y="2651760"/>
+            <a:ext cx="1383030" cy="274320"/>
+          </a:xfrm>
+          <a:prstGeom prst="rect">
+            <a:avLst/>
+          </a:prstGeom>
+          <a:noFill/>
+          <a:ln/>
+        </p:spPr>
+        <p:txBody>
+          <a:bodyPr wrap="square" lIns="0" tIns="0" rIns="0" bIns="0" rtlCol="0" anchor="ctr"/>
+          <a:lstStyle/>
+          <a:p>
+            <a:pPr algn="ctr" indent="0" marL="0">
+              <a:buNone/>
+            </a:pPr>
+            <a:endParaRPr lang="en-US" sz="1050" dirty="0"/>
+          </a:p>
+        </p:txBody>
+      </p:sp>
+      <p:sp>
+        <p:nvSpPr>
+          <p:cNvPr id="29" name="Text 27"/>
+          <p:cNvSpPr/>
+          <p:nvPr/>
+        </p:nvSpPr>
+        <p:spPr>
+          <a:xfrm>
+            <a:off x="548640" y="3108960"/>
+            <a:ext cx="11064240" cy="274320"/>
+          </a:xfrm>
+          <a:prstGeom prst="rect">
+            <a:avLst/>
+          </a:prstGeom>
+          <a:noFill/>
+          <a:ln/>
+        </p:spPr>
+        <p:txBody>
+          <a:bodyPr wrap="square" lIns="0" tIns="0" rIns="0" bIns="0" rtlCol="0" anchor="ctr"/>
+          <a:lstStyle/>
+          <a:p>
+            <a:pPr algn="ctr" indent="0" marL="0">
+              <a:buNone/>
+            </a:pPr>
+            <a:r>
+              <a:rPr lang="en-US" sz="1200" i="1" dirty="0">
+                <a:solidFill>
+                  <a:srgbClr val="9FB0C4"/>
+                </a:solidFill>
+                <a:latin typeface="Malgun Gothic" pitchFamily="34" charset="0"/>
+                <a:ea typeface="Malgun Gothic" pitchFamily="34" charset="-122"/>
+                <a:cs typeface="Malgun Gothic" pitchFamily="34" charset="-120"/>
+              </a:rPr>
+              <a:t>연속된 메모리 주소 →</a:t>
+            </a:r>
+            <a:endParaRPr lang="en-US" sz="1200" dirty="0"/>
+          </a:p>
+        </p:txBody>
+      </p:sp>
+      <p:sp>
+        <p:nvSpPr>
+          <p:cNvPr id="30" name="Shape 28"/>
+          <p:cNvSpPr/>
+          <p:nvPr/>
+        </p:nvSpPr>
+        <p:spPr>
+          <a:xfrm>
+            <a:off x="548640" y="3794760"/>
+            <a:ext cx="11064240" cy="1920240"/>
+          </a:xfrm>
+          <a:prstGeom prst="roundRect">
+            <a:avLst>
+              <a:gd name="adj" fmla="val 3810"/>
             </a:avLst>
           </a:prstGeom>
           <a:solidFill>
@@ -2604,7 +3431,7 @@
           </a:solidFill>
           <a:ln w="19050">
             <a:solidFill>
-              <a:srgbClr val="E8A33D"/>
+              <a:srgbClr val="3FB8C4"/>
             </a:solidFill>
             <a:prstDash val="solid"/>
           </a:ln>
@@ -2612,14 +3439,14 @@
       </p:sp>
       <p:sp>
         <p:nvSpPr>
-          <p:cNvPr id="7" name="Text 5"/>
-          <p:cNvSpPr/>
-          <p:nvPr/>
-        </p:nvSpPr>
-        <p:spPr>
-          <a:xfrm>
-            <a:off x="822960" y="4480560"/>
-            <a:ext cx="10515600" cy="1097280"/>
+          <p:cNvPr id="31" name="Text 29"/>
+          <p:cNvSpPr/>
+          <p:nvPr/>
+        </p:nvSpPr>
+        <p:spPr>
+          <a:xfrm>
+            <a:off x="868680" y="4023360"/>
+            <a:ext cx="10424160" cy="1554480"/>
           </a:xfrm>
           <a:prstGeom prst="rect">
             <a:avLst/>
@@ -2631,14 +3458,18 @@
           <a:bodyPr wrap="square" lIns="0" tIns="0" rIns="0" bIns="0" rtlCol="0" anchor="t"/>
           <a:lstStyle/>
           <a:p>
-            <a:pPr indent="0" marL="0">
+            <a:pPr marL="342900" indent="-342900">
               <a:lnSpc>
-                <a:spcPct val="115000"/>
+                <a:spcPct val="105000"/>
               </a:lnSpc>
-              <a:buNone/>
-            </a:pPr>
-            <a:r>
-              <a:rPr lang="en-US" sz="1550" dirty="0">
+              <a:spcAft>
+                <a:spcPts val="900"/>
+              </a:spcAft>
+              <a:buSzPct val="100000"/>
+              <a:buChar char="•"/>
+            </a:pPr>
+            <a:r>
+              <a:rPr lang="en-US" sz="1500" dirty="0">
                 <a:solidFill>
                   <a:srgbClr val="E7EDF5"/>
                 </a:solidFill>
@@ -2646,33 +3477,47 @@
                 <a:ea typeface="Malgun Gothic" pitchFamily="34" charset="-122"/>
                 <a:cs typeface="Malgun Gothic" pitchFamily="34" charset="-120"/>
               </a:rPr>
-              <a:t>놀랍도록 단순합니다. </a:t>
-            </a:r>
-            <a:pPr indent="0" marL="0">
+              <a:t>워프(warp, 32스레드)의 접근이 하나의 메모리 트랜잭션으로 묶인다 → 대역폭 최대 활용</a:t>
+            </a:r>
+            <a:endParaRPr lang="en-US" sz="1500" dirty="0"/>
+          </a:p>
+          <a:p>
+            <a:pPr marL="342900" indent="-342900">
               <a:lnSpc>
-                <a:spcPct val="115000"/>
+                <a:spcPct val="105000"/>
               </a:lnSpc>
-              <a:buNone/>
-            </a:pPr>
-            <a:r>
-              <a:rPr lang="en-US" sz="1550" b="1" dirty="0">
-                <a:solidFill>
-                  <a:srgbClr val="E8A33D"/>
+              <a:spcAft>
+                <a:spcPts val="900"/>
+              </a:spcAft>
+              <a:buSzPct val="100000"/>
+              <a:buChar char="•"/>
+            </a:pPr>
+            <a:r>
+              <a:rPr lang="en-US" sz="1500" dirty="0">
+                <a:solidFill>
+                  <a:srgbClr val="E7EDF5"/>
                 </a:solidFill>
                 <a:latin typeface="Malgun Gothic" pitchFamily="34" charset="0"/>
                 <a:ea typeface="Malgun Gothic" pitchFamily="34" charset="-122"/>
                 <a:cs typeface="Malgun Gothic" pitchFamily="34" charset="-120"/>
               </a:rPr>
-              <a:t>경계 검사가 없는 이유</a:t>
-            </a:r>
-            <a:pPr indent="0" marL="0">
+              <a:t>만약 스레드가 큰 간격으로 흩어지면 트랜잭션이 쪼개져 느려진다 (uncoalesced)</a:t>
+            </a:r>
+            <a:endParaRPr lang="en-US" sz="1500" dirty="0"/>
+          </a:p>
+          <a:p>
+            <a:pPr marL="342900" indent="-342900">
               <a:lnSpc>
-                <a:spcPct val="115000"/>
+                <a:spcPct val="105000"/>
               </a:lnSpc>
-              <a:buNone/>
-            </a:pPr>
-            <a:r>
-              <a:rPr lang="en-US" sz="1550" dirty="0">
+              <a:spcAft>
+                <a:spcPts val="900"/>
+              </a:spcAft>
+              <a:buSzPct val="100000"/>
+              <a:buChar char="•"/>
+            </a:pPr>
+            <a:r>
+              <a:rPr lang="en-US" sz="1500" dirty="0">
                 <a:solidFill>
                   <a:srgbClr val="E7EDF5"/>
                 </a:solidFill>
@@ -2680,48 +3525,9 @@
                 <a:ea typeface="Malgun Gothic" pitchFamily="34" charset="-122"/>
                 <a:cs typeface="Malgun Gothic" pitchFamily="34" charset="-120"/>
               </a:rPr>
-              <a:t>: 테스트 영역은 항상 2·N MiB의 배수로 할당되어 그리드에 딱 맞으므로, 범위를 벗어나는 스레드가 없습니다. 복잡함은 THREAD_ADDRESS 매크로가 모두 흡수했습니다.</a:t>
-            </a:r>
-            <a:endParaRPr lang="en-US" sz="1550" dirty="0"/>
-          </a:p>
-        </p:txBody>
-      </p:sp>
-      <p:sp>
-        <p:nvSpPr>
-          <p:cNvPr id="8" name="Text 6"/>
-          <p:cNvSpPr/>
-          <p:nvPr/>
-        </p:nvSpPr>
-        <p:spPr>
-          <a:xfrm>
-            <a:off x="548640" y="5852160"/>
-            <a:ext cx="11064240" cy="365760"/>
-          </a:xfrm>
-          <a:prstGeom prst="rect">
-            <a:avLst/>
-          </a:prstGeom>
-          <a:noFill/>
-          <a:ln/>
-        </p:spPr>
-        <p:txBody>
-          <a:bodyPr wrap="square" lIns="0" tIns="0" rIns="0" bIns="0" rtlCol="0" anchor="ctr"/>
-          <a:lstStyle/>
-          <a:p>
-            <a:pPr indent="0" marL="0">
-              <a:buNone/>
-            </a:pPr>
-            <a:r>
-              <a:rPr lang="en-US" sz="1300" i="1" dirty="0">
-                <a:solidFill>
-                  <a:srgbClr val="9FB0C4"/>
-                </a:solidFill>
-                <a:latin typeface="Malgun Gothic" pitchFamily="34" charset="0"/>
-                <a:ea typeface="Malgun Gothic" pitchFamily="34" charset="-122"/>
-                <a:cs typeface="Malgun Gothic" pitchFamily="34" charset="-120"/>
-              </a:rPr>
-              <a:t>core.cu:189 — N개 반복으로 스레드 하나가 여러 word를 담당합니다.</a:t>
-            </a:r>
-            <a:endParaRPr lang="en-US" sz="1300" dirty="0"/>
+              <a:t>블록은 N·blockDim.x word씩 널찍이 떨어진 구역을 담당해 전체 영역을 빈틈없이 덮는다</a:t>
+            </a:r>
+            <a:endParaRPr lang="en-US" sz="1500" dirty="0"/>
           </a:p>
         </p:txBody>
       </p:sp>
@@ -2794,7 +3600,7 @@
                 <a:ea typeface="Courier New" pitchFamily="34" charset="-122"/>
                 <a:cs typeface="Courier New" pitchFamily="34" charset="-120"/>
               </a:rPr>
-              <a:t>8</a:t>
+              <a:t>7</a:t>
             </a:r>
             <a:endParaRPr lang="en-US" sz="2200" dirty="0"/>
           </a:p>
@@ -2833,7 +3639,7 @@
                 <a:ea typeface="Malgun Gothic" pitchFamily="34" charset="-122"/>
                 <a:cs typeface="Malgun Gothic" pitchFamily="34" charset="-120"/>
               </a:rPr>
-              <a:t>호스트가 커널을 부르는 법</a:t>
+              <a:t>첫 커널 완독 · deviceWriteConstant</a:t>
             </a:r>
             <a:endParaRPr lang="en-US" sz="2900" dirty="0"/>
           </a:p>
@@ -2847,12 +3653,12 @@
         </p:nvSpPr>
         <p:spPr>
           <a:xfrm>
-            <a:off x="548640" y="1554480"/>
-            <a:ext cx="11064240" cy="1234440"/>
+            <a:off x="548640" y="1508760"/>
+            <a:ext cx="11064240" cy="2651760"/>
           </a:xfrm>
           <a:prstGeom prst="roundRect">
             <a:avLst>
-              <a:gd name="adj" fmla="val 3704"/>
+              <a:gd name="adj" fmla="val 1724"/>
             </a:avLst>
           </a:prstGeom>
           <a:solidFill>
@@ -2874,8 +3680,8 @@
         </p:nvSpPr>
         <p:spPr>
           <a:xfrm>
-            <a:off x="768096" y="1700784"/>
-            <a:ext cx="10625328" cy="941832"/>
+            <a:off x="768096" y="1655064"/>
+            <a:ext cx="10625328" cy="2359152"/>
           </a:xfrm>
           <a:prstGeom prst="rect">
             <a:avLst/>
@@ -2894,17 +3700,17 @@
               <a:buNone/>
             </a:pPr>
             <a:r>
-              <a:rPr lang="en-US" sz="1350" dirty="0">
-                <a:solidFill>
-                  <a:srgbClr val="6B7D94"/>
+              <a:rPr lang="en-US" sz="1400" dirty="0">
+                <a:solidFill>
+                  <a:srgbClr val="E8A33D"/>
                 </a:solidFill>
                 <a:latin typeface="Courier New" pitchFamily="34" charset="0"/>
                 <a:ea typeface="Courier New" pitchFamily="34" charset="-122"/>
                 <a:cs typeface="Courier New" pitchFamily="34" charset="-120"/>
               </a:rPr>
-              <a:t>// core.cu:185 — gpuWriteConstant (호스트 함수)</a:t>
-            </a:r>
-            <a:endParaRPr lang="en-US" sz="1350" dirty="0"/>
+              <a:t>__global__ void</a:t>
+            </a:r>
+            <a:endParaRPr lang="en-US" sz="1400" dirty="0"/>
           </a:p>
           <a:p>
             <a:pPr algn="l" indent="0" marL="0">
@@ -2914,16 +3720,19 @@
               <a:buNone/>
             </a:pPr>
             <a:r>
-              <a:rPr lang="en-US" sz="1350" dirty="0">
-                <a:solidFill>
-                  <a:srgbClr val="E8A33D"/>
+              <a:rPr lang="en-US" sz="1400" dirty="0">
+                <a:solidFill>
+                  <a:srgbClr val="E7EDF5"/>
                 </a:solidFill>
                 <a:latin typeface="Courier New" pitchFamily="34" charset="0"/>
                 <a:ea typeface="Courier New" pitchFamily="34" charset="-122"/>
                 <a:cs typeface="Courier New" pitchFamily="34" charset="-120"/>
               </a:rPr>
-              <a:t>deviceWriteConstant</a:t>
-            </a:r>
+              <a:t>deviceWriteConstant(uint* base, uint N, const uint constant) {</a:t>
+            </a:r>
+            <a:endParaRPr lang="en-US" sz="1400" dirty="0"/>
+          </a:p>
+          <a:p>
             <a:pPr algn="l" indent="0" marL="0">
               <a:lnSpc>
                 <a:spcPct val="110000"/>
@@ -2931,16 +3740,19 @@
               <a:buNone/>
             </a:pPr>
             <a:r>
-              <a:rPr lang="en-US" sz="1350" b="1" dirty="0">
-                <a:solidFill>
-                  <a:srgbClr val="3FB8C4"/>
+              <a:rPr lang="en-US" sz="1400" dirty="0">
+                <a:solidFill>
+                  <a:srgbClr val="E7EDF5"/>
                 </a:solidFill>
                 <a:latin typeface="Courier New" pitchFamily="34" charset="0"/>
                 <a:ea typeface="Courier New" pitchFamily="34" charset="-122"/>
                 <a:cs typeface="Courier New" pitchFamily="34" charset="-120"/>
               </a:rPr>
-              <a:t>&lt;&lt;&lt;nBlocks, nThreads&gt;&gt;&gt;</a:t>
-            </a:r>
+              <a:t>    for (uint i = 0; i &lt; N; i++) {</a:t>
+            </a:r>
+            <a:endParaRPr lang="en-US" sz="1400" dirty="0"/>
+          </a:p>
+          <a:p>
             <a:pPr algn="l" indent="0" marL="0">
               <a:lnSpc>
                 <a:spcPct val="110000"/>
@@ -2948,17 +3760,17 @@
               <a:buNone/>
             </a:pPr>
             <a:r>
-              <a:rPr lang="en-US" sz="1350" dirty="0">
-                <a:solidFill>
-                  <a:srgbClr val="E7EDF5"/>
+              <a:rPr lang="en-US" sz="1400" dirty="0">
+                <a:solidFill>
+                  <a:srgbClr val="F2C079"/>
                 </a:solidFill>
                 <a:latin typeface="Courier New" pitchFamily="34" charset="0"/>
                 <a:ea typeface="Courier New" pitchFamily="34" charset="-122"/>
                 <a:cs typeface="Courier New" pitchFamily="34" charset="-120"/>
               </a:rPr>
-              <a:t>(base, N, constant);</a:t>
-            </a:r>
-            <a:endParaRPr lang="en-US" sz="1350" dirty="0"/>
+              <a:t>        *(THREAD_ADDRESS(base, N, i)) = constant;   // 각 스레드가 자기 word들을 채움</a:t>
+            </a:r>
+            <a:endParaRPr lang="en-US" sz="1400" dirty="0"/>
           </a:p>
           <a:p>
             <a:pPr algn="l" indent="0" marL="0">
@@ -2968,87 +3780,54 @@
               <a:buNone/>
             </a:pPr>
             <a:r>
-              <a:rPr lang="en-US" sz="1350" dirty="0">
-                <a:solidFill>
-                  <a:srgbClr val="6B7D94"/>
+              <a:rPr lang="en-US" sz="1400" dirty="0">
+                <a:solidFill>
+                  <a:srgbClr val="E7EDF5"/>
                 </a:solidFill>
                 <a:latin typeface="Courier New" pitchFamily="34" charset="0"/>
                 <a:ea typeface="Courier New" pitchFamily="34" charset="-122"/>
                 <a:cs typeface="Courier New" pitchFamily="34" charset="-120"/>
               </a:rPr>
-              <a:t>//         ▲ 1024      ▲ 512</a:t>
-            </a:r>
-            <a:endParaRPr lang="en-US" sz="1350" dirty="0"/>
-          </a:p>
-        </p:txBody>
-      </p:sp>
-      <p:sp>
-        <p:nvSpPr>
-          <p:cNvPr id="6" name="Text 4"/>
-          <p:cNvSpPr/>
-          <p:nvPr/>
-        </p:nvSpPr>
-        <p:spPr>
-          <a:xfrm>
-            <a:off x="548640" y="3017520"/>
-            <a:ext cx="11064240" cy="822960"/>
-          </a:xfrm>
-          <a:prstGeom prst="rect">
-            <a:avLst/>
-          </a:prstGeom>
-          <a:noFill/>
-          <a:ln/>
-        </p:spPr>
-        <p:txBody>
-          <a:bodyPr wrap="square" lIns="0" tIns="0" rIns="0" bIns="0" rtlCol="0" anchor="t"/>
-          <a:lstStyle/>
-          <a:p>
-            <a:pPr indent="0" marL="0">
-              <a:buNone/>
-            </a:pPr>
-            <a:r>
-              <a:rPr lang="en-US" sz="1700" b="1" dirty="0">
-                <a:solidFill>
-                  <a:srgbClr val="3FB8C4"/>
-                </a:solidFill>
-                <a:latin typeface="Malgun Gothic" pitchFamily="34" charset="0"/>
-                <a:ea typeface="Malgun Gothic" pitchFamily="34" charset="-122"/>
-                <a:cs typeface="Malgun Gothic" pitchFamily="34" charset="-120"/>
-              </a:rPr>
-              <a:t>&lt;&lt;&lt;nBlocks, nThreads&gt;&gt;&gt;</a:t>
-            </a:r>
-            <a:pPr indent="0" marL="0">
-              <a:buNone/>
-            </a:pPr>
-            <a:r>
-              <a:rPr lang="en-US" sz="1700" dirty="0">
+              <a:t>    }</a:t>
+            </a:r>
+            <a:endParaRPr lang="en-US" sz="1400" dirty="0"/>
+          </a:p>
+          <a:p>
+            <a:pPr algn="l" indent="0" marL="0">
+              <a:lnSpc>
+                <a:spcPct val="110000"/>
+              </a:lnSpc>
+              <a:buNone/>
+            </a:pPr>
+            <a:r>
+              <a:rPr lang="en-US" sz="1400" dirty="0">
                 <a:solidFill>
                   <a:srgbClr val="E7EDF5"/>
                 </a:solidFill>
-                <a:latin typeface="Malgun Gothic" pitchFamily="34" charset="0"/>
-                <a:ea typeface="Malgun Gothic" pitchFamily="34" charset="-122"/>
-                <a:cs typeface="Malgun Gothic" pitchFamily="34" charset="-120"/>
-              </a:rPr>
-              <a:t> 삼중 꺾쇠가 실행 구성입니다. CPU 코드 한 줄이지만, 이 호출로 GPU에서 52만 개 스레드가 깨어납니다.</a:t>
-            </a:r>
-            <a:endParaRPr lang="en-US" sz="1700" dirty="0"/>
-          </a:p>
-        </p:txBody>
-      </p:sp>
-      <p:sp>
-        <p:nvSpPr>
-          <p:cNvPr id="7" name="Shape 5"/>
-          <p:cNvSpPr/>
-          <p:nvPr/>
-        </p:nvSpPr>
-        <p:spPr>
-          <a:xfrm>
-            <a:off x="548640" y="3977640"/>
-            <a:ext cx="11064240" cy="1737360"/>
+                <a:latin typeface="Courier New" pitchFamily="34" charset="0"/>
+                <a:ea typeface="Courier New" pitchFamily="34" charset="-122"/>
+                <a:cs typeface="Courier New" pitchFamily="34" charset="-120"/>
+              </a:rPr>
+              <a:t>}</a:t>
+            </a:r>
+            <a:endParaRPr lang="en-US" sz="1400" dirty="0"/>
+          </a:p>
+        </p:txBody>
+      </p:sp>
+      <p:sp>
+        <p:nvSpPr>
+          <p:cNvPr id="6" name="Shape 4"/>
+          <p:cNvSpPr/>
+          <p:nvPr/>
+        </p:nvSpPr>
+        <p:spPr>
+          <a:xfrm>
+            <a:off x="548640" y="4343400"/>
+            <a:ext cx="11064240" cy="1371600"/>
           </a:xfrm>
           <a:prstGeom prst="roundRect">
             <a:avLst>
-              <a:gd name="adj" fmla="val 4211"/>
+              <a:gd name="adj" fmla="val 5333"/>
             </a:avLst>
           </a:prstGeom>
           <a:solidFill>
@@ -3064,129 +3843,116 @@
       </p:sp>
       <p:sp>
         <p:nvSpPr>
-          <p:cNvPr id="8" name="Text 6"/>
-          <p:cNvSpPr/>
-          <p:nvPr/>
-        </p:nvSpPr>
-        <p:spPr>
-          <a:xfrm>
-            <a:off x="822960" y="4160520"/>
-            <a:ext cx="10515600" cy="365760"/>
-          </a:xfrm>
-          <a:prstGeom prst="rect">
-            <a:avLst/>
-          </a:prstGeom>
-          <a:noFill/>
-          <a:ln/>
-        </p:spPr>
-        <p:txBody>
-          <a:bodyPr wrap="square" lIns="0" tIns="0" rIns="0" bIns="0" rtlCol="0" anchor="ctr"/>
+          <p:cNvPr id="7" name="Text 5"/>
+          <p:cNvSpPr/>
+          <p:nvPr/>
+        </p:nvSpPr>
+        <p:spPr>
+          <a:xfrm>
+            <a:off x="822960" y="4480560"/>
+            <a:ext cx="10515600" cy="1097280"/>
+          </a:xfrm>
+          <a:prstGeom prst="rect">
+            <a:avLst/>
+          </a:prstGeom>
+          <a:noFill/>
+          <a:ln/>
+        </p:spPr>
+        <p:txBody>
+          <a:bodyPr wrap="square" lIns="0" tIns="0" rIns="0" bIns="0" rtlCol="0" anchor="t"/>
           <a:lstStyle/>
           <a:p>
             <a:pPr indent="0" marL="0">
-              <a:buNone/>
-            </a:pPr>
-            <a:r>
-              <a:rPr lang="en-US" sz="1600" b="1" dirty="0">
-                <a:solidFill>
-                  <a:srgbClr val="E8A33D"/>
+              <a:lnSpc>
+                <a:spcPct val="115000"/>
+              </a:lnSpc>
+              <a:buNone/>
+            </a:pPr>
+            <a:r>
+              <a:rPr lang="en-US" sz="1550" dirty="0">
+                <a:solidFill>
+                  <a:srgbClr val="E7EDF5"/>
                 </a:solidFill>
                 <a:latin typeface="Malgun Gothic" pitchFamily="34" charset="0"/>
                 <a:ea typeface="Malgun Gothic" pitchFamily="34" charset="-122"/>
                 <a:cs typeface="Malgun Gothic" pitchFamily="34" charset="-120"/>
               </a:rPr>
-              <a:t>nBlocks·nThreads는 어디서 오나?</a:t>
-            </a:r>
-            <a:endParaRPr lang="en-US" sz="1600" dirty="0"/>
-          </a:p>
-        </p:txBody>
-      </p:sp>
-      <p:sp>
-        <p:nvSpPr>
-          <p:cNvPr id="9" name="Shape 7"/>
-          <p:cNvSpPr/>
-          <p:nvPr/>
-        </p:nvSpPr>
-        <p:spPr>
-          <a:xfrm>
-            <a:off x="822960" y="4572000"/>
-            <a:ext cx="10515600" cy="1005840"/>
-          </a:xfrm>
-          <a:prstGeom prst="roundRect">
-            <a:avLst>
-              <a:gd name="adj" fmla="val 4545"/>
-            </a:avLst>
-          </a:prstGeom>
-          <a:solidFill>
-            <a:srgbClr val="0B1119"/>
-          </a:solidFill>
-          <a:ln w="12700">
-            <a:solidFill>
-              <a:srgbClr val="2C3A4E"/>
-            </a:solidFill>
-            <a:prstDash val="solid"/>
-          </a:ln>
-        </p:spPr>
-      </p:sp>
-      <p:sp>
-        <p:nvSpPr>
-          <p:cNvPr id="10" name="Text 8"/>
-          <p:cNvSpPr/>
-          <p:nvPr/>
-        </p:nvSpPr>
-        <p:spPr>
-          <a:xfrm>
-            <a:off x="1042416" y="4718304"/>
-            <a:ext cx="10076688" cy="713232"/>
-          </a:xfrm>
-          <a:prstGeom prst="rect">
-            <a:avLst/>
-          </a:prstGeom>
-          <a:noFill/>
-          <a:ln/>
-        </p:spPr>
-        <p:txBody>
-          <a:bodyPr wrap="square" lIns="0" tIns="0" rIns="0" bIns="0" rtlCol="0" anchor="t"/>
-          <a:lstStyle/>
-          <a:p>
-            <a:pPr algn="l" indent="0" marL="0">
+              <a:t>놀랍도록 단순합니다. </a:t>
+            </a:r>
+            <a:pPr indent="0" marL="0">
               <a:lnSpc>
-                <a:spcPct val="110000"/>
+                <a:spcPct val="115000"/>
               </a:lnSpc>
               <a:buNone/>
             </a:pPr>
             <a:r>
-              <a:rPr lang="en-US" sz="1250" dirty="0">
-                <a:solidFill>
-                  <a:srgbClr val="6B7D94"/>
-                </a:solidFill>
-                <a:latin typeface="Courier New" pitchFamily="34" charset="0"/>
-                <a:ea typeface="Courier New" pitchFamily="34" charset="-122"/>
-                <a:cs typeface="Courier New" pitchFamily="34" charset="-120"/>
-              </a:rPr>
-              <a:t>// core.h:78 — memtestState 클래스의 상수 멤버</a:t>
-            </a:r>
-            <a:endParaRPr lang="en-US" sz="1250" dirty="0"/>
-          </a:p>
-          <a:p>
-            <a:pPr algn="l" indent="0" marL="0">
+              <a:rPr lang="en-US" sz="1550" b="1" dirty="0">
+                <a:solidFill>
+                  <a:srgbClr val="E8A33D"/>
+                </a:solidFill>
+                <a:latin typeface="Malgun Gothic" pitchFamily="34" charset="0"/>
+                <a:ea typeface="Malgun Gothic" pitchFamily="34" charset="-122"/>
+                <a:cs typeface="Malgun Gothic" pitchFamily="34" charset="-120"/>
+              </a:rPr>
+              <a:t>경계 검사가 없는 이유</a:t>
+            </a:r>
+            <a:pPr indent="0" marL="0">
               <a:lnSpc>
-                <a:spcPct val="110000"/>
+                <a:spcPct val="115000"/>
               </a:lnSpc>
               <a:buNone/>
             </a:pPr>
             <a:r>
-              <a:rPr lang="en-US" sz="1250" dirty="0">
+              <a:rPr lang="en-US" sz="1550" dirty="0">
                 <a:solidFill>
                   <a:srgbClr val="E7EDF5"/>
                 </a:solidFill>
-                <a:latin typeface="Courier New" pitchFamily="34" charset="0"/>
-                <a:ea typeface="Courier New" pitchFamily="34" charset="-122"/>
-                <a:cs typeface="Courier New" pitchFamily="34" charset="-120"/>
-              </a:rPr>
-              <a:t>memtestState() : nBlocks(1024), nThreads(512), ... {};</a:t>
-            </a:r>
-            <a:endParaRPr lang="en-US" sz="1250" dirty="0"/>
+                <a:latin typeface="Malgun Gothic" pitchFamily="34" charset="0"/>
+                <a:ea typeface="Malgun Gothic" pitchFamily="34" charset="-122"/>
+                <a:cs typeface="Malgun Gothic" pitchFamily="34" charset="-120"/>
+              </a:rPr>
+              <a:t>: 테스트 영역은 항상 2·N MiB의 배수로 할당되어 그리드에 딱 맞으므로, 범위를 벗어나는 스레드가 없습니다. 복잡함은 THREAD_ADDRESS 매크로가 모두 흡수했습니다.</a:t>
+            </a:r>
+            <a:endParaRPr lang="en-US" sz="1550" dirty="0"/>
+          </a:p>
+        </p:txBody>
+      </p:sp>
+      <p:sp>
+        <p:nvSpPr>
+          <p:cNvPr id="8" name="Text 6"/>
+          <p:cNvSpPr/>
+          <p:nvPr/>
+        </p:nvSpPr>
+        <p:spPr>
+          <a:xfrm>
+            <a:off x="548640" y="5852160"/>
+            <a:ext cx="11064240" cy="365760"/>
+          </a:xfrm>
+          <a:prstGeom prst="rect">
+            <a:avLst/>
+          </a:prstGeom>
+          <a:noFill/>
+          <a:ln/>
+        </p:spPr>
+        <p:txBody>
+          <a:bodyPr wrap="square" lIns="0" tIns="0" rIns="0" bIns="0" rtlCol="0" anchor="ctr"/>
+          <a:lstStyle/>
+          <a:p>
+            <a:pPr indent="0" marL="0">
+              <a:buNone/>
+            </a:pPr>
+            <a:r>
+              <a:rPr lang="en-US" sz="1300" i="1" dirty="0">
+                <a:solidFill>
+                  <a:srgbClr val="9FB0C4"/>
+                </a:solidFill>
+                <a:latin typeface="Malgun Gothic" pitchFamily="34" charset="0"/>
+                <a:ea typeface="Malgun Gothic" pitchFamily="34" charset="-122"/>
+                <a:cs typeface="Malgun Gothic" pitchFamily="34" charset="-120"/>
+              </a:rPr>
+              <a:t>core.cu:189 — N개 반복으로 스레드 하나가 여러 word를 담당합니다.</a:t>
+            </a:r>
+            <a:endParaRPr lang="en-US" sz="1300" dirty="0"/>
           </a:p>
         </p:txBody>
       </p:sp>
@@ -3239,7 +4005,7 @@
             </a:avLst>
           </a:prstGeom>
           <a:solidFill>
-            <a:srgbClr val="3FB8C4"/>
+            <a:srgbClr val="E8A33D"/>
           </a:solidFill>
           <a:ln/>
         </p:spPr>
@@ -3298,7 +4064,7 @@
                 <a:ea typeface="Malgun Gothic" pitchFamily="34" charset="-122"/>
                 <a:cs typeface="Malgun Gothic" pitchFamily="34" charset="-120"/>
               </a:rPr>
-              <a:t>커널 launch 흐름 · 호출에서 완료까지</a:t>
+              <a:t>호스트가 커널을 부르는 법</a:t>
             </a:r>
             <a:endParaRPr lang="en-US" sz="2900" dirty="0"/>
           </a:p>
@@ -3306,190 +4072,218 @@
       </p:sp>
       <p:sp>
         <p:nvSpPr>
-          <p:cNvPr id="4" name="Text 2"/>
-          <p:cNvSpPr/>
-          <p:nvPr/>
-        </p:nvSpPr>
-        <p:spPr>
-          <a:xfrm>
-            <a:off x="548640" y="1371600"/>
-            <a:ext cx="11064240" cy="411480"/>
-          </a:xfrm>
-          <a:prstGeom prst="rect">
-            <a:avLst/>
-          </a:prstGeom>
-          <a:noFill/>
-          <a:ln/>
-        </p:spPr>
-        <p:txBody>
-          <a:bodyPr wrap="square" lIns="0" tIns="0" rIns="0" bIns="0" rtlCol="0" anchor="ctr"/>
+          <p:cNvPr id="4" name="Shape 2"/>
+          <p:cNvSpPr/>
+          <p:nvPr/>
+        </p:nvSpPr>
+        <p:spPr>
+          <a:xfrm>
+            <a:off x="548640" y="1554480"/>
+            <a:ext cx="11064240" cy="1234440"/>
+          </a:xfrm>
+          <a:prstGeom prst="roundRect">
+            <a:avLst>
+              <a:gd name="adj" fmla="val 3704"/>
+            </a:avLst>
+          </a:prstGeom>
+          <a:solidFill>
+            <a:srgbClr val="0B1119"/>
+          </a:solidFill>
+          <a:ln w="12700">
+            <a:solidFill>
+              <a:srgbClr val="2C3A4E"/>
+            </a:solidFill>
+            <a:prstDash val="solid"/>
+          </a:ln>
+        </p:spPr>
+      </p:sp>
+      <p:sp>
+        <p:nvSpPr>
+          <p:cNvPr id="5" name="Text 3"/>
+          <p:cNvSpPr/>
+          <p:nvPr/>
+        </p:nvSpPr>
+        <p:spPr>
+          <a:xfrm>
+            <a:off x="768096" y="1700784"/>
+            <a:ext cx="10625328" cy="941832"/>
+          </a:xfrm>
+          <a:prstGeom prst="rect">
+            <a:avLst/>
+          </a:prstGeom>
+          <a:noFill/>
+          <a:ln/>
+        </p:spPr>
+        <p:txBody>
+          <a:bodyPr wrap="square" lIns="0" tIns="0" rIns="0" bIns="0" rtlCol="0" anchor="t"/>
+          <a:lstStyle/>
+          <a:p>
+            <a:pPr algn="l" indent="0" marL="0">
+              <a:lnSpc>
+                <a:spcPct val="110000"/>
+              </a:lnSpc>
+              <a:buNone/>
+            </a:pPr>
+            <a:r>
+              <a:rPr lang="en-US" sz="1350" dirty="0">
+                <a:solidFill>
+                  <a:srgbClr val="6B7D94"/>
+                </a:solidFill>
+                <a:latin typeface="Courier New" pitchFamily="34" charset="0"/>
+                <a:ea typeface="Courier New" pitchFamily="34" charset="-122"/>
+                <a:cs typeface="Courier New" pitchFamily="34" charset="-120"/>
+              </a:rPr>
+              <a:t>// core.cu:185 — gpuWriteConstant (호스트 함수)</a:t>
+            </a:r>
+            <a:endParaRPr lang="en-US" sz="1350" dirty="0"/>
+          </a:p>
+          <a:p>
+            <a:pPr algn="l" indent="0" marL="0">
+              <a:lnSpc>
+                <a:spcPct val="110000"/>
+              </a:lnSpc>
+              <a:buNone/>
+            </a:pPr>
+            <a:r>
+              <a:rPr lang="en-US" sz="1350" dirty="0">
+                <a:solidFill>
+                  <a:srgbClr val="E8A33D"/>
+                </a:solidFill>
+                <a:latin typeface="Courier New" pitchFamily="34" charset="0"/>
+                <a:ea typeface="Courier New" pitchFamily="34" charset="-122"/>
+                <a:cs typeface="Courier New" pitchFamily="34" charset="-120"/>
+              </a:rPr>
+              <a:t>deviceWriteConstant</a:t>
+            </a:r>
+            <a:pPr algn="l" indent="0" marL="0">
+              <a:lnSpc>
+                <a:spcPct val="110000"/>
+              </a:lnSpc>
+              <a:buNone/>
+            </a:pPr>
+            <a:r>
+              <a:rPr lang="en-US" sz="1350" b="1" dirty="0">
+                <a:solidFill>
+                  <a:srgbClr val="3FB8C4"/>
+                </a:solidFill>
+                <a:latin typeface="Courier New" pitchFamily="34" charset="0"/>
+                <a:ea typeface="Courier New" pitchFamily="34" charset="-122"/>
+                <a:cs typeface="Courier New" pitchFamily="34" charset="-120"/>
+              </a:rPr>
+              <a:t>&lt;&lt;&lt;nBlocks, nThreads&gt;&gt;&gt;</a:t>
+            </a:r>
+            <a:pPr algn="l" indent="0" marL="0">
+              <a:lnSpc>
+                <a:spcPct val="110000"/>
+              </a:lnSpc>
+              <a:buNone/>
+            </a:pPr>
+            <a:r>
+              <a:rPr lang="en-US" sz="1350" dirty="0">
+                <a:solidFill>
+                  <a:srgbClr val="E7EDF5"/>
+                </a:solidFill>
+                <a:latin typeface="Courier New" pitchFamily="34" charset="0"/>
+                <a:ea typeface="Courier New" pitchFamily="34" charset="-122"/>
+                <a:cs typeface="Courier New" pitchFamily="34" charset="-120"/>
+              </a:rPr>
+              <a:t>(base, N, constant);</a:t>
+            </a:r>
+            <a:endParaRPr lang="en-US" sz="1350" dirty="0"/>
+          </a:p>
+          <a:p>
+            <a:pPr algn="l" indent="0" marL="0">
+              <a:lnSpc>
+                <a:spcPct val="110000"/>
+              </a:lnSpc>
+              <a:buNone/>
+            </a:pPr>
+            <a:r>
+              <a:rPr lang="en-US" sz="1350" dirty="0">
+                <a:solidFill>
+                  <a:srgbClr val="6B7D94"/>
+                </a:solidFill>
+                <a:latin typeface="Courier New" pitchFamily="34" charset="0"/>
+                <a:ea typeface="Courier New" pitchFamily="34" charset="-122"/>
+                <a:cs typeface="Courier New" pitchFamily="34" charset="-120"/>
+              </a:rPr>
+              <a:t>//         ▲ 1024      ▲ 512</a:t>
+            </a:r>
+            <a:endParaRPr lang="en-US" sz="1350" dirty="0"/>
+          </a:p>
+        </p:txBody>
+      </p:sp>
+      <p:sp>
+        <p:nvSpPr>
+          <p:cNvPr id="6" name="Text 4"/>
+          <p:cNvSpPr/>
+          <p:nvPr/>
+        </p:nvSpPr>
+        <p:spPr>
+          <a:xfrm>
+            <a:off x="548640" y="3017520"/>
+            <a:ext cx="11064240" cy="822960"/>
+          </a:xfrm>
+          <a:prstGeom prst="rect">
+            <a:avLst/>
+          </a:prstGeom>
+          <a:noFill/>
+          <a:ln/>
+        </p:spPr>
+        <p:txBody>
+          <a:bodyPr wrap="square" lIns="0" tIns="0" rIns="0" bIns="0" rtlCol="0" anchor="t"/>
           <a:lstStyle/>
           <a:p>
             <a:pPr indent="0" marL="0">
               <a:buNone/>
             </a:pPr>
             <a:r>
-              <a:rPr lang="en-US" sz="1450" dirty="0">
-                <a:solidFill>
-                  <a:srgbClr val="9FB0C4"/>
+              <a:rPr lang="en-US" sz="1700" b="1" dirty="0">
+                <a:solidFill>
+                  <a:srgbClr val="3FB8C4"/>
                 </a:solidFill>
                 <a:latin typeface="Malgun Gothic" pitchFamily="34" charset="0"/>
                 <a:ea typeface="Malgun Gothic" pitchFamily="34" charset="-122"/>
                 <a:cs typeface="Malgun Gothic" pitchFamily="34" charset="-120"/>
               </a:rPr>
-              <a:t>&lt;&lt;&lt;&gt;&gt;&gt; 한 줄을 실행하면, 요청이 GPU로 넘어가 블록이 SM에 분배되고 워프 단위로 실행됩니다.</a:t>
-            </a:r>
-            <a:endParaRPr lang="en-US" sz="1450" dirty="0"/>
-          </a:p>
-        </p:txBody>
-      </p:sp>
-      <p:sp>
-        <p:nvSpPr>
-          <p:cNvPr id="5" name="Shape 3"/>
-          <p:cNvSpPr/>
-          <p:nvPr/>
-        </p:nvSpPr>
-        <p:spPr>
-          <a:xfrm>
-            <a:off x="548640" y="1874520"/>
-            <a:ext cx="7040880" cy="841248"/>
-          </a:xfrm>
-          <a:prstGeom prst="roundRect">
-            <a:avLst>
-              <a:gd name="adj" fmla="val 8696"/>
-            </a:avLst>
-          </a:prstGeom>
-          <a:solidFill>
-            <a:srgbClr val="16242C"/>
-          </a:solidFill>
-          <a:ln w="19050">
-            <a:solidFill>
-              <a:srgbClr val="3FB8C4"/>
-            </a:solidFill>
-            <a:prstDash val="solid"/>
-          </a:ln>
-        </p:spPr>
-      </p:sp>
-      <p:sp>
-        <p:nvSpPr>
-          <p:cNvPr id="6" name="Text 4"/>
-          <p:cNvSpPr/>
-          <p:nvPr/>
-        </p:nvSpPr>
-        <p:spPr>
-          <a:xfrm>
-            <a:off x="804672" y="1984248"/>
-            <a:ext cx="6583680" cy="365760"/>
-          </a:xfrm>
-          <a:prstGeom prst="rect">
-            <a:avLst/>
-          </a:prstGeom>
-          <a:noFill/>
-          <a:ln/>
-        </p:spPr>
-        <p:txBody>
-          <a:bodyPr wrap="square" lIns="0" tIns="0" rIns="0" bIns="0" rtlCol="0" anchor="ctr"/>
-          <a:lstStyle/>
-          <a:p>
+              <a:t>&lt;&lt;&lt;nBlocks, nThreads&gt;&gt;&gt;</a:t>
+            </a:r>
             <a:pPr indent="0" marL="0">
               <a:buNone/>
             </a:pPr>
             <a:r>
-              <a:rPr lang="en-US" sz="1500" b="1" dirty="0">
-                <a:solidFill>
-                  <a:srgbClr val="3FB8C4"/>
+              <a:rPr lang="en-US" sz="1700" dirty="0">
+                <a:solidFill>
+                  <a:srgbClr val="E7EDF5"/>
                 </a:solidFill>
                 <a:latin typeface="Malgun Gothic" pitchFamily="34" charset="0"/>
                 <a:ea typeface="Malgun Gothic" pitchFamily="34" charset="-122"/>
                 <a:cs typeface="Malgun Gothic" pitchFamily="34" charset="-120"/>
               </a:rPr>
-              <a:t>① 호스트(CPU) — 커널 실행 요청</a:t>
-            </a:r>
-            <a:endParaRPr lang="en-US" sz="1500" dirty="0"/>
-          </a:p>
-        </p:txBody>
-      </p:sp>
-      <p:sp>
-        <p:nvSpPr>
-          <p:cNvPr id="7" name="Text 5"/>
-          <p:cNvSpPr/>
-          <p:nvPr/>
-        </p:nvSpPr>
-        <p:spPr>
-          <a:xfrm>
-            <a:off x="804672" y="2331720"/>
-            <a:ext cx="6583680" cy="292608"/>
-          </a:xfrm>
-          <a:prstGeom prst="rect">
-            <a:avLst/>
-          </a:prstGeom>
-          <a:noFill/>
-          <a:ln/>
-        </p:spPr>
-        <p:txBody>
-          <a:bodyPr wrap="square" lIns="0" tIns="0" rIns="0" bIns="0" rtlCol="0" anchor="ctr"/>
-          <a:lstStyle/>
-          <a:p>
-            <a:pPr indent="0" marL="0">
-              <a:buNone/>
-            </a:pPr>
-            <a:r>
-              <a:rPr lang="en-US" sz="1100" dirty="0">
-                <a:solidFill>
-                  <a:srgbClr val="9FB0C4"/>
-                </a:solidFill>
-                <a:latin typeface="Courier New" pitchFamily="34" charset="0"/>
-                <a:ea typeface="Courier New" pitchFamily="34" charset="-122"/>
-                <a:cs typeface="Courier New" pitchFamily="34" charset="-120"/>
-              </a:rPr>
-              <a:t>deviceWriteConstant&lt;&lt;&lt;1024, 512&gt;&gt;&gt;(...)</a:t>
-            </a:r>
-            <a:endParaRPr lang="en-US" sz="1100" dirty="0"/>
-          </a:p>
-        </p:txBody>
-      </p:sp>
-      <p:sp>
-        <p:nvSpPr>
-          <p:cNvPr id="8" name="Shape 6"/>
-          <p:cNvSpPr/>
-          <p:nvPr/>
-        </p:nvSpPr>
-        <p:spPr>
-          <a:xfrm>
-            <a:off x="4069080" y="2734056"/>
-            <a:ext cx="0" cy="146304"/>
-          </a:xfrm>
-          <a:prstGeom prst="line">
-            <a:avLst/>
-          </a:prstGeom>
-          <a:noFill/>
-          <a:ln w="25400">
-            <a:solidFill>
-              <a:srgbClr val="6B7D94"/>
-            </a:solidFill>
-            <a:prstDash val="solid"/>
-            <a:tailEnd type="triangle"/>
-          </a:ln>
-        </p:spPr>
-      </p:sp>
-      <p:sp>
-        <p:nvSpPr>
-          <p:cNvPr id="9" name="Shape 7"/>
-          <p:cNvSpPr/>
-          <p:nvPr/>
-        </p:nvSpPr>
-        <p:spPr>
-          <a:xfrm>
-            <a:off x="548640" y="2898648"/>
-            <a:ext cx="7040880" cy="841248"/>
+              <a:t> 삼중 꺾쇠가 실행 구성입니다. CPU 코드 한 줄이지만, 이 호출로 GPU에서 52만 개 스레드가 깨어납니다.</a:t>
+            </a:r>
+            <a:endParaRPr lang="en-US" sz="1700" dirty="0"/>
+          </a:p>
+        </p:txBody>
+      </p:sp>
+      <p:sp>
+        <p:nvSpPr>
+          <p:cNvPr id="7" name="Shape 5"/>
+          <p:cNvSpPr/>
+          <p:nvPr/>
+        </p:nvSpPr>
+        <p:spPr>
+          <a:xfrm>
+            <a:off x="548640" y="3977640"/>
+            <a:ext cx="11064240" cy="1737360"/>
           </a:xfrm>
           <a:prstGeom prst="roundRect">
             <a:avLst>
-              <a:gd name="adj" fmla="val 8696"/>
+              <a:gd name="adj" fmla="val 4211"/>
             </a:avLst>
           </a:prstGeom>
           <a:solidFill>
-            <a:srgbClr val="241A16"/>
+            <a:srgbClr val="18212E"/>
           </a:solidFill>
           <a:ln w="19050">
             <a:solidFill>
@@ -3501,14 +4295,14 @@
       </p:sp>
       <p:sp>
         <p:nvSpPr>
-          <p:cNvPr id="10" name="Text 8"/>
-          <p:cNvSpPr/>
-          <p:nvPr/>
-        </p:nvSpPr>
-        <p:spPr>
-          <a:xfrm>
-            <a:off x="804672" y="3008376"/>
-            <a:ext cx="6583680" cy="365760"/>
+          <p:cNvPr id="8" name="Text 6"/>
+          <p:cNvSpPr/>
+          <p:nvPr/>
+        </p:nvSpPr>
+        <p:spPr>
+          <a:xfrm>
+            <a:off x="822960" y="4160520"/>
+            <a:ext cx="10515600" cy="365760"/>
           </a:xfrm>
           <a:prstGeom prst="rect">
             <a:avLst/>
@@ -3524,7 +4318,7 @@
               <a:buNone/>
             </a:pPr>
             <a:r>
-              <a:rPr lang="en-US" sz="1500" b="1" dirty="0">
+              <a:rPr lang="en-US" sz="1600" b="1" dirty="0">
                 <a:solidFill>
                   <a:srgbClr val="E8A33D"/>
                 </a:solidFill>
@@ -3532,538 +4326,98 @@
                 <a:ea typeface="Malgun Gothic" pitchFamily="34" charset="-122"/>
                 <a:cs typeface="Malgun Gothic" pitchFamily="34" charset="-120"/>
               </a:rPr>
-              <a:t>② GPU 스케줄러 — 블록을 SM에 분배</a:t>
-            </a:r>
-            <a:endParaRPr lang="en-US" sz="1500" dirty="0"/>
-          </a:p>
-        </p:txBody>
-      </p:sp>
-      <p:sp>
-        <p:nvSpPr>
-          <p:cNvPr id="11" name="Text 9"/>
-          <p:cNvSpPr/>
-          <p:nvPr/>
-        </p:nvSpPr>
-        <p:spPr>
-          <a:xfrm>
-            <a:off x="804672" y="3355848"/>
-            <a:ext cx="6583680" cy="292608"/>
-          </a:xfrm>
-          <a:prstGeom prst="rect">
-            <a:avLst/>
-          </a:prstGeom>
-          <a:noFill/>
-          <a:ln/>
-        </p:spPr>
-        <p:txBody>
-          <a:bodyPr wrap="square" lIns="0" tIns="0" rIns="0" bIns="0" rtlCol="0" anchor="ctr"/>
-          <a:lstStyle/>
-          <a:p>
-            <a:pPr indent="0" marL="0">
-              <a:buNone/>
-            </a:pPr>
-            <a:r>
-              <a:rPr lang="en-US" sz="1100" dirty="0">
-                <a:solidFill>
-                  <a:srgbClr val="9FB0C4"/>
+              <a:t>nBlocks·nThreads는 어디서 오나?</a:t>
+            </a:r>
+            <a:endParaRPr lang="en-US" sz="1600" dirty="0"/>
+          </a:p>
+        </p:txBody>
+      </p:sp>
+      <p:sp>
+        <p:nvSpPr>
+          <p:cNvPr id="9" name="Shape 7"/>
+          <p:cNvSpPr/>
+          <p:nvPr/>
+        </p:nvSpPr>
+        <p:spPr>
+          <a:xfrm>
+            <a:off x="822960" y="4572000"/>
+            <a:ext cx="10515600" cy="1005840"/>
+          </a:xfrm>
+          <a:prstGeom prst="roundRect">
+            <a:avLst>
+              <a:gd name="adj" fmla="val 4545"/>
+            </a:avLst>
+          </a:prstGeom>
+          <a:solidFill>
+            <a:srgbClr val="0B1119"/>
+          </a:solidFill>
+          <a:ln w="12700">
+            <a:solidFill>
+              <a:srgbClr val="2C3A4E"/>
+            </a:solidFill>
+            <a:prstDash val="solid"/>
+          </a:ln>
+        </p:spPr>
+      </p:sp>
+      <p:sp>
+        <p:nvSpPr>
+          <p:cNvPr id="10" name="Text 8"/>
+          <p:cNvSpPr/>
+          <p:nvPr/>
+        </p:nvSpPr>
+        <p:spPr>
+          <a:xfrm>
+            <a:off x="1042416" y="4718304"/>
+            <a:ext cx="10076688" cy="713232"/>
+          </a:xfrm>
+          <a:prstGeom prst="rect">
+            <a:avLst/>
+          </a:prstGeom>
+          <a:noFill/>
+          <a:ln/>
+        </p:spPr>
+        <p:txBody>
+          <a:bodyPr wrap="square" lIns="0" tIns="0" rIns="0" bIns="0" rtlCol="0" anchor="t"/>
+          <a:lstStyle/>
+          <a:p>
+            <a:pPr algn="l" indent="0" marL="0">
+              <a:lnSpc>
+                <a:spcPct val="110000"/>
+              </a:lnSpc>
+              <a:buNone/>
+            </a:pPr>
+            <a:r>
+              <a:rPr lang="en-US" sz="1250" dirty="0">
+                <a:solidFill>
+                  <a:srgbClr val="6B7D94"/>
                 </a:solidFill>
                 <a:latin typeface="Courier New" pitchFamily="34" charset="0"/>
                 <a:ea typeface="Courier New" pitchFamily="34" charset="-122"/>
                 <a:cs typeface="Courier New" pitchFamily="34" charset="-120"/>
               </a:rPr>
-              <a:t>블록 1024개 → 여러 SM에 나눠 배정</a:t>
-            </a:r>
-            <a:endParaRPr lang="en-US" sz="1100" dirty="0"/>
-          </a:p>
-        </p:txBody>
-      </p:sp>
-      <p:sp>
-        <p:nvSpPr>
-          <p:cNvPr id="12" name="Shape 10"/>
-          <p:cNvSpPr/>
-          <p:nvPr/>
-        </p:nvSpPr>
-        <p:spPr>
-          <a:xfrm>
-            <a:off x="4069080" y="3758184"/>
-            <a:ext cx="0" cy="146304"/>
-          </a:xfrm>
-          <a:prstGeom prst="line">
-            <a:avLst/>
-          </a:prstGeom>
-          <a:noFill/>
-          <a:ln w="25400">
-            <a:solidFill>
-              <a:srgbClr val="6B7D94"/>
-            </a:solidFill>
-            <a:prstDash val="solid"/>
-            <a:tailEnd type="triangle"/>
-          </a:ln>
-        </p:spPr>
-      </p:sp>
-      <p:sp>
-        <p:nvSpPr>
-          <p:cNvPr id="13" name="Shape 11"/>
-          <p:cNvSpPr/>
-          <p:nvPr/>
-        </p:nvSpPr>
-        <p:spPr>
-          <a:xfrm>
-            <a:off x="548640" y="3922776"/>
-            <a:ext cx="7040880" cy="841248"/>
-          </a:xfrm>
-          <a:prstGeom prst="roundRect">
-            <a:avLst>
-              <a:gd name="adj" fmla="val 8696"/>
-            </a:avLst>
-          </a:prstGeom>
-          <a:solidFill>
-            <a:srgbClr val="241A16"/>
-          </a:solidFill>
-          <a:ln w="19050">
-            <a:solidFill>
-              <a:srgbClr val="E8A33D"/>
-            </a:solidFill>
-            <a:prstDash val="solid"/>
-          </a:ln>
-        </p:spPr>
-      </p:sp>
-      <p:sp>
-        <p:nvSpPr>
-          <p:cNvPr id="14" name="Text 12"/>
-          <p:cNvSpPr/>
-          <p:nvPr/>
-        </p:nvSpPr>
-        <p:spPr>
-          <a:xfrm>
-            <a:off x="804672" y="4032504"/>
-            <a:ext cx="6583680" cy="365760"/>
-          </a:xfrm>
-          <a:prstGeom prst="rect">
-            <a:avLst/>
-          </a:prstGeom>
-          <a:noFill/>
-          <a:ln/>
-        </p:spPr>
-        <p:txBody>
-          <a:bodyPr wrap="square" lIns="0" tIns="0" rIns="0" bIns="0" rtlCol="0" anchor="ctr"/>
-          <a:lstStyle/>
-          <a:p>
-            <a:pPr indent="0" marL="0">
-              <a:buNone/>
-            </a:pPr>
-            <a:r>
-              <a:rPr lang="en-US" sz="1500" b="1" dirty="0">
-                <a:solidFill>
-                  <a:srgbClr val="E8A33D"/>
-                </a:solidFill>
-                <a:latin typeface="Malgun Gothic" pitchFamily="34" charset="0"/>
-                <a:ea typeface="Malgun Gothic" pitchFamily="34" charset="-122"/>
-                <a:cs typeface="Malgun Gothic" pitchFamily="34" charset="-120"/>
-              </a:rPr>
-              <a:t>③ 각 SM — 워프(32 스레드) 단위로 실행</a:t>
-            </a:r>
-            <a:endParaRPr lang="en-US" sz="1500" dirty="0"/>
-          </a:p>
-        </p:txBody>
-      </p:sp>
-      <p:sp>
-        <p:nvSpPr>
-          <p:cNvPr id="15" name="Text 13"/>
-          <p:cNvSpPr/>
-          <p:nvPr/>
-        </p:nvSpPr>
-        <p:spPr>
-          <a:xfrm>
-            <a:off x="804672" y="4379976"/>
-            <a:ext cx="6583680" cy="292608"/>
-          </a:xfrm>
-          <a:prstGeom prst="rect">
-            <a:avLst/>
-          </a:prstGeom>
-          <a:noFill/>
-          <a:ln/>
-        </p:spPr>
-        <p:txBody>
-          <a:bodyPr wrap="square" lIns="0" tIns="0" rIns="0" bIns="0" rtlCol="0" anchor="ctr"/>
-          <a:lstStyle/>
-          <a:p>
-            <a:pPr indent="0" marL="0">
-              <a:buNone/>
-            </a:pPr>
-            <a:r>
-              <a:rPr lang="en-US" sz="1100" dirty="0">
-                <a:solidFill>
-                  <a:srgbClr val="9FB0C4"/>
+              <a:t>// core.h:78 — memtestState 클래스의 상수 멤버</a:t>
+            </a:r>
+            <a:endParaRPr lang="en-US" sz="1250" dirty="0"/>
+          </a:p>
+          <a:p>
+            <a:pPr algn="l" indent="0" marL="0">
+              <a:lnSpc>
+                <a:spcPct val="110000"/>
+              </a:lnSpc>
+              <a:buNone/>
+            </a:pPr>
+            <a:r>
+              <a:rPr lang="en-US" sz="1250" dirty="0">
+                <a:solidFill>
+                  <a:srgbClr val="E7EDF5"/>
                 </a:solidFill>
                 <a:latin typeface="Courier New" pitchFamily="34" charset="0"/>
                 <a:ea typeface="Courier New" pitchFamily="34" charset="-122"/>
                 <a:cs typeface="Courier New" pitchFamily="34" charset="-120"/>
               </a:rPr>
-              <a:t>블록 안 512 스레드가 실제 연산 수행</a:t>
-            </a:r>
-            <a:endParaRPr lang="en-US" sz="1100" dirty="0"/>
-          </a:p>
-        </p:txBody>
-      </p:sp>
-      <p:sp>
-        <p:nvSpPr>
-          <p:cNvPr id="16" name="Shape 14"/>
-          <p:cNvSpPr/>
-          <p:nvPr/>
-        </p:nvSpPr>
-        <p:spPr>
-          <a:xfrm>
-            <a:off x="4069080" y="4782312"/>
-            <a:ext cx="0" cy="146304"/>
-          </a:xfrm>
-          <a:prstGeom prst="line">
-            <a:avLst/>
-          </a:prstGeom>
-          <a:noFill/>
-          <a:ln w="25400">
-            <a:solidFill>
-              <a:srgbClr val="6B7D94"/>
-            </a:solidFill>
-            <a:prstDash val="solid"/>
-            <a:tailEnd type="triangle"/>
-          </a:ln>
-        </p:spPr>
-      </p:sp>
-      <p:sp>
-        <p:nvSpPr>
-          <p:cNvPr id="17" name="Shape 15"/>
-          <p:cNvSpPr/>
-          <p:nvPr/>
-        </p:nvSpPr>
-        <p:spPr>
-          <a:xfrm>
-            <a:off x="548640" y="4946904"/>
-            <a:ext cx="7040880" cy="841248"/>
-          </a:xfrm>
-          <a:prstGeom prst="roundRect">
-            <a:avLst>
-              <a:gd name="adj" fmla="val 8696"/>
-            </a:avLst>
-          </a:prstGeom>
-          <a:solidFill>
-            <a:srgbClr val="241A16"/>
-          </a:solidFill>
-          <a:ln w="19050">
-            <a:solidFill>
-              <a:srgbClr val="E8A33D"/>
-            </a:solidFill>
-            <a:prstDash val="solid"/>
-          </a:ln>
-        </p:spPr>
-      </p:sp>
-      <p:sp>
-        <p:nvSpPr>
-          <p:cNvPr id="18" name="Text 16"/>
-          <p:cNvSpPr/>
-          <p:nvPr/>
-        </p:nvSpPr>
-        <p:spPr>
-          <a:xfrm>
-            <a:off x="804672" y="5056632"/>
-            <a:ext cx="6583680" cy="365760"/>
-          </a:xfrm>
-          <a:prstGeom prst="rect">
-            <a:avLst/>
-          </a:prstGeom>
-          <a:noFill/>
-          <a:ln/>
-        </p:spPr>
-        <p:txBody>
-          <a:bodyPr wrap="square" lIns="0" tIns="0" rIns="0" bIns="0" rtlCol="0" anchor="ctr"/>
-          <a:lstStyle/>
-          <a:p>
-            <a:pPr indent="0" marL="0">
-              <a:buNone/>
-            </a:pPr>
-            <a:r>
-              <a:rPr lang="en-US" sz="1500" b="1" dirty="0">
-                <a:solidFill>
-                  <a:srgbClr val="E8A33D"/>
-                </a:solidFill>
-                <a:latin typeface="Malgun Gothic" pitchFamily="34" charset="0"/>
-                <a:ea typeface="Malgun Gothic" pitchFamily="34" charset="-122"/>
-                <a:cs typeface="Malgun Gothic" pitchFamily="34" charset="-120"/>
-              </a:rPr>
-              <a:t>④ 커널 완료 — 결과는 전역 메모리에</a:t>
-            </a:r>
-            <a:endParaRPr lang="en-US" sz="1500" dirty="0"/>
-          </a:p>
-        </p:txBody>
-      </p:sp>
-      <p:sp>
-        <p:nvSpPr>
-          <p:cNvPr id="19" name="Text 17"/>
-          <p:cNvSpPr/>
-          <p:nvPr/>
-        </p:nvSpPr>
-        <p:spPr>
-          <a:xfrm>
-            <a:off x="804672" y="5404104"/>
-            <a:ext cx="6583680" cy="292608"/>
-          </a:xfrm>
-          <a:prstGeom prst="rect">
-            <a:avLst/>
-          </a:prstGeom>
-          <a:noFill/>
-          <a:ln/>
-        </p:spPr>
-        <p:txBody>
-          <a:bodyPr wrap="square" lIns="0" tIns="0" rIns="0" bIns="0" rtlCol="0" anchor="ctr"/>
-          <a:lstStyle/>
-          <a:p>
-            <a:pPr indent="0" marL="0">
-              <a:buNone/>
-            </a:pPr>
-            <a:r>
-              <a:rPr lang="en-US" sz="1100" dirty="0">
-                <a:solidFill>
-                  <a:srgbClr val="9FB0C4"/>
-                </a:solidFill>
-                <a:latin typeface="Courier New" pitchFamily="34" charset="0"/>
-                <a:ea typeface="Courier New" pitchFamily="34" charset="-122"/>
-                <a:cs typeface="Courier New" pitchFamily="34" charset="-120"/>
-              </a:rPr>
-              <a:t>호스트는 SOFTWAIT로 완료를 기다림</a:t>
-            </a:r>
-            <a:endParaRPr lang="en-US" sz="1100" dirty="0"/>
-          </a:p>
-        </p:txBody>
-      </p:sp>
-      <p:sp>
-        <p:nvSpPr>
-          <p:cNvPr id="20" name="Text 18"/>
-          <p:cNvSpPr/>
-          <p:nvPr/>
-        </p:nvSpPr>
-        <p:spPr>
-          <a:xfrm>
-            <a:off x="7726680" y="2057400"/>
-            <a:ext cx="1371600" cy="365760"/>
-          </a:xfrm>
-          <a:prstGeom prst="rect">
-            <a:avLst/>
-          </a:prstGeom>
-          <a:noFill/>
-          <a:ln/>
-        </p:spPr>
-        <p:txBody>
-          <a:bodyPr wrap="square" lIns="0" tIns="0" rIns="0" bIns="0" rtlCol="0" anchor="ctr"/>
-          <a:lstStyle/>
-          <a:p>
-            <a:pPr indent="0" marL="0">
-              <a:buNone/>
-            </a:pPr>
-            <a:r>
-              <a:rPr lang="en-US" sz="1200" b="1" dirty="0">
-                <a:solidFill>
-                  <a:srgbClr val="3FB8C4"/>
-                </a:solidFill>
-                <a:latin typeface="Malgun Gothic" pitchFamily="34" charset="0"/>
-                <a:ea typeface="Malgun Gothic" pitchFamily="34" charset="-122"/>
-                <a:cs typeface="Malgun Gothic" pitchFamily="34" charset="-120"/>
-              </a:rPr>
-              <a:t>호스트</a:t>
-            </a:r>
-            <a:endParaRPr lang="en-US" sz="1200" dirty="0"/>
-          </a:p>
-        </p:txBody>
-      </p:sp>
-      <p:sp>
-        <p:nvSpPr>
-          <p:cNvPr id="21" name="Text 19"/>
-          <p:cNvSpPr/>
-          <p:nvPr/>
-        </p:nvSpPr>
-        <p:spPr>
-          <a:xfrm>
-            <a:off x="7726680" y="3108960"/>
-            <a:ext cx="1737360" cy="365760"/>
-          </a:xfrm>
-          <a:prstGeom prst="rect">
-            <a:avLst/>
-          </a:prstGeom>
-          <a:noFill/>
-          <a:ln/>
-        </p:spPr>
-        <p:txBody>
-          <a:bodyPr wrap="square" lIns="0" tIns="0" rIns="0" bIns="0" rtlCol="0" anchor="ctr"/>
-          <a:lstStyle/>
-          <a:p>
-            <a:pPr indent="0" marL="0">
-              <a:buNone/>
-            </a:pPr>
-            <a:r>
-              <a:rPr lang="en-US" sz="1200" b="1" dirty="0">
-                <a:solidFill>
-                  <a:srgbClr val="E8A33D"/>
-                </a:solidFill>
-                <a:latin typeface="Malgun Gothic" pitchFamily="34" charset="0"/>
-                <a:ea typeface="Malgun Gothic" pitchFamily="34" charset="-122"/>
-                <a:cs typeface="Malgun Gothic" pitchFamily="34" charset="-120"/>
-              </a:rPr>
-              <a:t>디바이스(GPU)</a:t>
-            </a:r>
-            <a:endParaRPr lang="en-US" sz="1200" dirty="0"/>
-          </a:p>
-        </p:txBody>
-      </p:sp>
-      <p:sp>
-        <p:nvSpPr>
-          <p:cNvPr id="22" name="Shape 20"/>
-          <p:cNvSpPr/>
-          <p:nvPr/>
-        </p:nvSpPr>
-        <p:spPr>
-          <a:xfrm>
-            <a:off x="9692640" y="1874520"/>
-            <a:ext cx="1920240" cy="3977640"/>
-          </a:xfrm>
-          <a:prstGeom prst="roundRect">
-            <a:avLst>
-              <a:gd name="adj" fmla="val 3810"/>
-            </a:avLst>
-          </a:prstGeom>
-          <a:solidFill>
-            <a:srgbClr val="18212E"/>
-          </a:solidFill>
-          <a:ln w="19050">
-            <a:solidFill>
-              <a:srgbClr val="E6604F"/>
-            </a:solidFill>
-            <a:prstDash val="solid"/>
-          </a:ln>
-        </p:spPr>
-      </p:sp>
-      <p:sp>
-        <p:nvSpPr>
-          <p:cNvPr id="23" name="Text 21"/>
-          <p:cNvSpPr/>
-          <p:nvPr/>
-        </p:nvSpPr>
-        <p:spPr>
-          <a:xfrm>
-            <a:off x="9921240" y="2057400"/>
-            <a:ext cx="1463040" cy="411480"/>
-          </a:xfrm>
-          <a:prstGeom prst="rect">
-            <a:avLst/>
-          </a:prstGeom>
-          <a:noFill/>
-          <a:ln/>
-        </p:spPr>
-        <p:txBody>
-          <a:bodyPr wrap="square" lIns="0" tIns="0" rIns="0" bIns="0" rtlCol="0" anchor="ctr"/>
-          <a:lstStyle/>
-          <a:p>
-            <a:pPr indent="0" marL="0">
-              <a:buNone/>
-            </a:pPr>
-            <a:r>
-              <a:rPr lang="en-US" sz="1600" b="1" dirty="0">
-                <a:solidFill>
-                  <a:srgbClr val="E6604F"/>
-                </a:solidFill>
-                <a:latin typeface="Malgun Gothic" pitchFamily="34" charset="0"/>
-                <a:ea typeface="Malgun Gothic" pitchFamily="34" charset="-122"/>
-                <a:cs typeface="Malgun Gothic" pitchFamily="34" charset="-120"/>
-              </a:rPr>
-              <a:t>비동기(async)</a:t>
-            </a:r>
-            <a:endParaRPr lang="en-US" sz="1600" dirty="0"/>
-          </a:p>
-        </p:txBody>
-      </p:sp>
-      <p:sp>
-        <p:nvSpPr>
-          <p:cNvPr id="24" name="Text 22"/>
-          <p:cNvSpPr/>
-          <p:nvPr/>
-        </p:nvSpPr>
-        <p:spPr>
-          <a:xfrm>
-            <a:off x="9921240" y="2606040"/>
-            <a:ext cx="1463040" cy="3063240"/>
-          </a:xfrm>
-          <a:prstGeom prst="rect">
-            <a:avLst/>
-          </a:prstGeom>
-          <a:noFill/>
-          <a:ln/>
-        </p:spPr>
-        <p:txBody>
-          <a:bodyPr wrap="square" lIns="0" tIns="0" rIns="0" bIns="0" rtlCol="0" anchor="t"/>
-          <a:lstStyle/>
-          <a:p>
-            <a:pPr indent="0" marL="0">
-              <a:lnSpc>
-                <a:spcPct val="115000"/>
-              </a:lnSpc>
-              <a:spcAft>
-                <a:spcPts val="1000"/>
-              </a:spcAft>
-              <a:buNone/>
-            </a:pPr>
-            <a:r>
-              <a:rPr lang="en-US" sz="1350" dirty="0">
-                <a:solidFill>
-                  <a:srgbClr val="E7EDF5"/>
-                </a:solidFill>
-                <a:latin typeface="Malgun Gothic" pitchFamily="34" charset="0"/>
-                <a:ea typeface="Malgun Gothic" pitchFamily="34" charset="-122"/>
-                <a:cs typeface="Malgun Gothic" pitchFamily="34" charset="-120"/>
-              </a:rPr>
-              <a:t>호스트는 ① 요청 후 곧바로 다음 코드로 갑니다.</a:t>
-            </a:r>
-            <a:endParaRPr lang="en-US" sz="1350" dirty="0"/>
-          </a:p>
-          <a:p>
-            <a:pPr indent="0" marL="0">
-              <a:lnSpc>
-                <a:spcPct val="115000"/>
-              </a:lnSpc>
-              <a:spcAft>
-                <a:spcPts val="1000"/>
-              </a:spcAft>
-              <a:buNone/>
-            </a:pPr>
-            <a:r>
-              <a:rPr lang="en-US" sz="1350" dirty="0">
-                <a:solidFill>
-                  <a:srgbClr val="E7EDF5"/>
-                </a:solidFill>
-                <a:latin typeface="Malgun Gothic" pitchFamily="34" charset="0"/>
-                <a:ea typeface="Malgun Gothic" pitchFamily="34" charset="-122"/>
-                <a:cs typeface="Malgun Gothic" pitchFamily="34" charset="-120"/>
-              </a:rPr>
-              <a:t>결과가 필요하면 SOFTWAIT로 GPU 완료를 기다립니다.</a:t>
-            </a:r>
-            <a:endParaRPr lang="en-US" sz="1350" dirty="0"/>
-          </a:p>
-          <a:p>
-            <a:pPr indent="0" marL="0">
-              <a:lnSpc>
-                <a:spcPct val="115000"/>
-              </a:lnSpc>
-              <a:buNone/>
-            </a:pPr>
-            <a:r>
-              <a:rPr lang="en-US" sz="1350" i="1" dirty="0">
-                <a:solidFill>
-                  <a:srgbClr val="9FB0C4"/>
-                </a:solidFill>
-                <a:latin typeface="Malgun Gothic" pitchFamily="34" charset="0"/>
-                <a:ea typeface="Malgun Gothic" pitchFamily="34" charset="-122"/>
-                <a:cs typeface="Malgun Gothic" pitchFamily="34" charset="-120"/>
-              </a:rPr>
-              <a:t>→ 이 비동기 특성은 세션 2(검증)·세션 4(타이밍)에서 자세히.</a:t>
-            </a:r>
-            <a:endParaRPr lang="en-US" sz="1350" dirty="0"/>
+              <a:t>memtestState() : nBlocks(1024), nThreads(512), ... {};</a:t>
+            </a:r>
+            <a:endParaRPr lang="en-US" sz="1250" dirty="0"/>
           </a:p>
         </p:txBody>
       </p:sp>
@@ -4116,7 +4470,7 @@
             </a:avLst>
           </a:prstGeom>
           <a:solidFill>
-            <a:srgbClr val="E8A33D"/>
+            <a:srgbClr val="3FB8C4"/>
           </a:solidFill>
           <a:ln/>
         </p:spPr>
@@ -4136,7 +4490,7 @@
                 <a:ea typeface="Courier New" pitchFamily="34" charset="-122"/>
                 <a:cs typeface="Courier New" pitchFamily="34" charset="-120"/>
               </a:rPr>
-              <a:t>9</a:t>
+              <a:t>8</a:t>
             </a:r>
             <a:endParaRPr lang="en-US" sz="2200" dirty="0"/>
           </a:p>
@@ -4175,7 +4529,7 @@
                 <a:ea typeface="Malgun Gothic" pitchFamily="34" charset="-122"/>
                 <a:cs typeface="Malgun Gothic" pitchFamily="34" charset="-120"/>
               </a:rPr>
-              <a:t>핵심 정리 &amp; 자주 하는 실수</a:t>
+              <a:t>커널 launch 흐름 · 호출에서 완료까지</a:t>
             </a:r>
             <a:endParaRPr lang="en-US" sz="2900" dirty="0"/>
           </a:p>
@@ -4183,36 +4537,650 @@
       </p:sp>
       <p:sp>
         <p:nvSpPr>
-          <p:cNvPr id="4" name="Shape 2"/>
-          <p:cNvSpPr/>
-          <p:nvPr/>
-        </p:nvSpPr>
-        <p:spPr>
-          <a:xfrm>
-            <a:off x="548640" y="1600200"/>
-            <a:ext cx="5349240" cy="4114800"/>
+          <p:cNvPr id="4" name="Text 2"/>
+          <p:cNvSpPr/>
+          <p:nvPr/>
+        </p:nvSpPr>
+        <p:spPr>
+          <a:xfrm>
+            <a:off x="548640" y="1371600"/>
+            <a:ext cx="11064240" cy="411480"/>
+          </a:xfrm>
+          <a:prstGeom prst="rect">
+            <a:avLst/>
+          </a:prstGeom>
+          <a:noFill/>
+          <a:ln/>
+        </p:spPr>
+        <p:txBody>
+          <a:bodyPr wrap="square" lIns="0" tIns="0" rIns="0" bIns="0" rtlCol="0" anchor="ctr"/>
+          <a:lstStyle/>
+          <a:p>
+            <a:pPr indent="0" marL="0">
+              <a:buNone/>
+            </a:pPr>
+            <a:r>
+              <a:rPr lang="en-US" sz="1450" dirty="0">
+                <a:solidFill>
+                  <a:srgbClr val="9FB0C4"/>
+                </a:solidFill>
+                <a:latin typeface="Malgun Gothic" pitchFamily="34" charset="0"/>
+                <a:ea typeface="Malgun Gothic" pitchFamily="34" charset="-122"/>
+                <a:cs typeface="Malgun Gothic" pitchFamily="34" charset="-120"/>
+              </a:rPr>
+              <a:t>&lt;&lt;&lt;&gt;&gt;&gt; 한 줄을 실행하면, 요청이 GPU로 넘어가 블록이 SM에 분배되고 워프 단위로 실행됩니다.</a:t>
+            </a:r>
+            <a:endParaRPr lang="en-US" sz="1450" dirty="0"/>
+          </a:p>
+        </p:txBody>
+      </p:sp>
+      <p:sp>
+        <p:nvSpPr>
+          <p:cNvPr id="5" name="Shape 3"/>
+          <p:cNvSpPr/>
+          <p:nvPr/>
+        </p:nvSpPr>
+        <p:spPr>
+          <a:xfrm>
+            <a:off x="548640" y="1874520"/>
+            <a:ext cx="7040880" cy="841248"/>
           </a:xfrm>
           <a:prstGeom prst="roundRect">
             <a:avLst>
-              <a:gd name="adj" fmla="val 1778"/>
+              <a:gd name="adj" fmla="val 8696"/>
+            </a:avLst>
+          </a:prstGeom>
+          <a:solidFill>
+            <a:srgbClr val="16242C"/>
+          </a:solidFill>
+          <a:ln w="19050">
+            <a:solidFill>
+              <a:srgbClr val="3FB8C4"/>
+            </a:solidFill>
+            <a:prstDash val="solid"/>
+          </a:ln>
+        </p:spPr>
+      </p:sp>
+      <p:sp>
+        <p:nvSpPr>
+          <p:cNvPr id="6" name="Text 4"/>
+          <p:cNvSpPr/>
+          <p:nvPr/>
+        </p:nvSpPr>
+        <p:spPr>
+          <a:xfrm>
+            <a:off x="804672" y="1984248"/>
+            <a:ext cx="6583680" cy="365760"/>
+          </a:xfrm>
+          <a:prstGeom prst="rect">
+            <a:avLst/>
+          </a:prstGeom>
+          <a:noFill/>
+          <a:ln/>
+        </p:spPr>
+        <p:txBody>
+          <a:bodyPr wrap="square" lIns="0" tIns="0" rIns="0" bIns="0" rtlCol="0" anchor="ctr"/>
+          <a:lstStyle/>
+          <a:p>
+            <a:pPr indent="0" marL="0">
+              <a:buNone/>
+            </a:pPr>
+            <a:r>
+              <a:rPr lang="en-US" sz="1500" b="1" dirty="0">
+                <a:solidFill>
+                  <a:srgbClr val="3FB8C4"/>
+                </a:solidFill>
+                <a:latin typeface="Malgun Gothic" pitchFamily="34" charset="0"/>
+                <a:ea typeface="Malgun Gothic" pitchFamily="34" charset="-122"/>
+                <a:cs typeface="Malgun Gothic" pitchFamily="34" charset="-120"/>
+              </a:rPr>
+              <a:t>① 호스트(CPU) — 커널 실행 요청</a:t>
+            </a:r>
+            <a:endParaRPr lang="en-US" sz="1500" dirty="0"/>
+          </a:p>
+        </p:txBody>
+      </p:sp>
+      <p:sp>
+        <p:nvSpPr>
+          <p:cNvPr id="7" name="Text 5"/>
+          <p:cNvSpPr/>
+          <p:nvPr/>
+        </p:nvSpPr>
+        <p:spPr>
+          <a:xfrm>
+            <a:off x="804672" y="2331720"/>
+            <a:ext cx="6583680" cy="292608"/>
+          </a:xfrm>
+          <a:prstGeom prst="rect">
+            <a:avLst/>
+          </a:prstGeom>
+          <a:noFill/>
+          <a:ln/>
+        </p:spPr>
+        <p:txBody>
+          <a:bodyPr wrap="square" lIns="0" tIns="0" rIns="0" bIns="0" rtlCol="0" anchor="ctr"/>
+          <a:lstStyle/>
+          <a:p>
+            <a:pPr indent="0" marL="0">
+              <a:buNone/>
+            </a:pPr>
+            <a:r>
+              <a:rPr lang="en-US" sz="1100" dirty="0">
+                <a:solidFill>
+                  <a:srgbClr val="9FB0C4"/>
+                </a:solidFill>
+                <a:latin typeface="Courier New" pitchFamily="34" charset="0"/>
+                <a:ea typeface="Courier New" pitchFamily="34" charset="-122"/>
+                <a:cs typeface="Courier New" pitchFamily="34" charset="-120"/>
+              </a:rPr>
+              <a:t>deviceWriteConstant&lt;&lt;&lt;1024, 512&gt;&gt;&gt;(...)</a:t>
+            </a:r>
+            <a:endParaRPr lang="en-US" sz="1100" dirty="0"/>
+          </a:p>
+        </p:txBody>
+      </p:sp>
+      <p:sp>
+        <p:nvSpPr>
+          <p:cNvPr id="8" name="Shape 6"/>
+          <p:cNvSpPr/>
+          <p:nvPr/>
+        </p:nvSpPr>
+        <p:spPr>
+          <a:xfrm>
+            <a:off x="4069080" y="2734056"/>
+            <a:ext cx="0" cy="146304"/>
+          </a:xfrm>
+          <a:prstGeom prst="line">
+            <a:avLst/>
+          </a:prstGeom>
+          <a:noFill/>
+          <a:ln w="25400">
+            <a:solidFill>
+              <a:srgbClr val="6B7D94"/>
+            </a:solidFill>
+            <a:prstDash val="solid"/>
+            <a:tailEnd type="triangle"/>
+          </a:ln>
+        </p:spPr>
+      </p:sp>
+      <p:sp>
+        <p:nvSpPr>
+          <p:cNvPr id="9" name="Shape 7"/>
+          <p:cNvSpPr/>
+          <p:nvPr/>
+        </p:nvSpPr>
+        <p:spPr>
+          <a:xfrm>
+            <a:off x="548640" y="2898648"/>
+            <a:ext cx="7040880" cy="841248"/>
+          </a:xfrm>
+          <a:prstGeom prst="roundRect">
+            <a:avLst>
+              <a:gd name="adj" fmla="val 8696"/>
+            </a:avLst>
+          </a:prstGeom>
+          <a:solidFill>
+            <a:srgbClr val="241A16"/>
+          </a:solidFill>
+          <a:ln w="19050">
+            <a:solidFill>
+              <a:srgbClr val="E8A33D"/>
+            </a:solidFill>
+            <a:prstDash val="solid"/>
+          </a:ln>
+        </p:spPr>
+      </p:sp>
+      <p:sp>
+        <p:nvSpPr>
+          <p:cNvPr id="10" name="Text 8"/>
+          <p:cNvSpPr/>
+          <p:nvPr/>
+        </p:nvSpPr>
+        <p:spPr>
+          <a:xfrm>
+            <a:off x="804672" y="3008376"/>
+            <a:ext cx="6583680" cy="365760"/>
+          </a:xfrm>
+          <a:prstGeom prst="rect">
+            <a:avLst/>
+          </a:prstGeom>
+          <a:noFill/>
+          <a:ln/>
+        </p:spPr>
+        <p:txBody>
+          <a:bodyPr wrap="square" lIns="0" tIns="0" rIns="0" bIns="0" rtlCol="0" anchor="ctr"/>
+          <a:lstStyle/>
+          <a:p>
+            <a:pPr indent="0" marL="0">
+              <a:buNone/>
+            </a:pPr>
+            <a:r>
+              <a:rPr lang="en-US" sz="1500" b="1" dirty="0">
+                <a:solidFill>
+                  <a:srgbClr val="E8A33D"/>
+                </a:solidFill>
+                <a:latin typeface="Malgun Gothic" pitchFamily="34" charset="0"/>
+                <a:ea typeface="Malgun Gothic" pitchFamily="34" charset="-122"/>
+                <a:cs typeface="Malgun Gothic" pitchFamily="34" charset="-120"/>
+              </a:rPr>
+              <a:t>② GPU 스케줄러 — 블록을 SM에 분배</a:t>
+            </a:r>
+            <a:endParaRPr lang="en-US" sz="1500" dirty="0"/>
+          </a:p>
+        </p:txBody>
+      </p:sp>
+      <p:sp>
+        <p:nvSpPr>
+          <p:cNvPr id="11" name="Text 9"/>
+          <p:cNvSpPr/>
+          <p:nvPr/>
+        </p:nvSpPr>
+        <p:spPr>
+          <a:xfrm>
+            <a:off x="804672" y="3355848"/>
+            <a:ext cx="6583680" cy="292608"/>
+          </a:xfrm>
+          <a:prstGeom prst="rect">
+            <a:avLst/>
+          </a:prstGeom>
+          <a:noFill/>
+          <a:ln/>
+        </p:spPr>
+        <p:txBody>
+          <a:bodyPr wrap="square" lIns="0" tIns="0" rIns="0" bIns="0" rtlCol="0" anchor="ctr"/>
+          <a:lstStyle/>
+          <a:p>
+            <a:pPr indent="0" marL="0">
+              <a:buNone/>
+            </a:pPr>
+            <a:r>
+              <a:rPr lang="en-US" sz="1100" dirty="0">
+                <a:solidFill>
+                  <a:srgbClr val="9FB0C4"/>
+                </a:solidFill>
+                <a:latin typeface="Courier New" pitchFamily="34" charset="0"/>
+                <a:ea typeface="Courier New" pitchFamily="34" charset="-122"/>
+                <a:cs typeface="Courier New" pitchFamily="34" charset="-120"/>
+              </a:rPr>
+              <a:t>블록 1024개 → 여러 SM에 나눠 배정</a:t>
+            </a:r>
+            <a:endParaRPr lang="en-US" sz="1100" dirty="0"/>
+          </a:p>
+        </p:txBody>
+      </p:sp>
+      <p:sp>
+        <p:nvSpPr>
+          <p:cNvPr id="12" name="Shape 10"/>
+          <p:cNvSpPr/>
+          <p:nvPr/>
+        </p:nvSpPr>
+        <p:spPr>
+          <a:xfrm>
+            <a:off x="4069080" y="3758184"/>
+            <a:ext cx="0" cy="146304"/>
+          </a:xfrm>
+          <a:prstGeom prst="line">
+            <a:avLst/>
+          </a:prstGeom>
+          <a:noFill/>
+          <a:ln w="25400">
+            <a:solidFill>
+              <a:srgbClr val="6B7D94"/>
+            </a:solidFill>
+            <a:prstDash val="solid"/>
+            <a:tailEnd type="triangle"/>
+          </a:ln>
+        </p:spPr>
+      </p:sp>
+      <p:sp>
+        <p:nvSpPr>
+          <p:cNvPr id="13" name="Shape 11"/>
+          <p:cNvSpPr/>
+          <p:nvPr/>
+        </p:nvSpPr>
+        <p:spPr>
+          <a:xfrm>
+            <a:off x="548640" y="3922776"/>
+            <a:ext cx="7040880" cy="841248"/>
+          </a:xfrm>
+          <a:prstGeom prst="roundRect">
+            <a:avLst>
+              <a:gd name="adj" fmla="val 8696"/>
+            </a:avLst>
+          </a:prstGeom>
+          <a:solidFill>
+            <a:srgbClr val="241A16"/>
+          </a:solidFill>
+          <a:ln w="19050">
+            <a:solidFill>
+              <a:srgbClr val="E8A33D"/>
+            </a:solidFill>
+            <a:prstDash val="solid"/>
+          </a:ln>
+        </p:spPr>
+      </p:sp>
+      <p:sp>
+        <p:nvSpPr>
+          <p:cNvPr id="14" name="Text 12"/>
+          <p:cNvSpPr/>
+          <p:nvPr/>
+        </p:nvSpPr>
+        <p:spPr>
+          <a:xfrm>
+            <a:off x="804672" y="4032504"/>
+            <a:ext cx="6583680" cy="365760"/>
+          </a:xfrm>
+          <a:prstGeom prst="rect">
+            <a:avLst/>
+          </a:prstGeom>
+          <a:noFill/>
+          <a:ln/>
+        </p:spPr>
+        <p:txBody>
+          <a:bodyPr wrap="square" lIns="0" tIns="0" rIns="0" bIns="0" rtlCol="0" anchor="ctr"/>
+          <a:lstStyle/>
+          <a:p>
+            <a:pPr indent="0" marL="0">
+              <a:buNone/>
+            </a:pPr>
+            <a:r>
+              <a:rPr lang="en-US" sz="1500" b="1" dirty="0">
+                <a:solidFill>
+                  <a:srgbClr val="E8A33D"/>
+                </a:solidFill>
+                <a:latin typeface="Malgun Gothic" pitchFamily="34" charset="0"/>
+                <a:ea typeface="Malgun Gothic" pitchFamily="34" charset="-122"/>
+                <a:cs typeface="Malgun Gothic" pitchFamily="34" charset="-120"/>
+              </a:rPr>
+              <a:t>③ 각 SM — 워프(32 스레드) 단위로 실행</a:t>
+            </a:r>
+            <a:endParaRPr lang="en-US" sz="1500" dirty="0"/>
+          </a:p>
+        </p:txBody>
+      </p:sp>
+      <p:sp>
+        <p:nvSpPr>
+          <p:cNvPr id="15" name="Text 13"/>
+          <p:cNvSpPr/>
+          <p:nvPr/>
+        </p:nvSpPr>
+        <p:spPr>
+          <a:xfrm>
+            <a:off x="804672" y="4379976"/>
+            <a:ext cx="6583680" cy="292608"/>
+          </a:xfrm>
+          <a:prstGeom prst="rect">
+            <a:avLst/>
+          </a:prstGeom>
+          <a:noFill/>
+          <a:ln/>
+        </p:spPr>
+        <p:txBody>
+          <a:bodyPr wrap="square" lIns="0" tIns="0" rIns="0" bIns="0" rtlCol="0" anchor="ctr"/>
+          <a:lstStyle/>
+          <a:p>
+            <a:pPr indent="0" marL="0">
+              <a:buNone/>
+            </a:pPr>
+            <a:r>
+              <a:rPr lang="en-US" sz="1100" dirty="0">
+                <a:solidFill>
+                  <a:srgbClr val="9FB0C4"/>
+                </a:solidFill>
+                <a:latin typeface="Courier New" pitchFamily="34" charset="0"/>
+                <a:ea typeface="Courier New" pitchFamily="34" charset="-122"/>
+                <a:cs typeface="Courier New" pitchFamily="34" charset="-120"/>
+              </a:rPr>
+              <a:t>블록 안 512 스레드가 실제 연산 수행</a:t>
+            </a:r>
+            <a:endParaRPr lang="en-US" sz="1100" dirty="0"/>
+          </a:p>
+        </p:txBody>
+      </p:sp>
+      <p:sp>
+        <p:nvSpPr>
+          <p:cNvPr id="16" name="Shape 14"/>
+          <p:cNvSpPr/>
+          <p:nvPr/>
+        </p:nvSpPr>
+        <p:spPr>
+          <a:xfrm>
+            <a:off x="4069080" y="4782312"/>
+            <a:ext cx="0" cy="146304"/>
+          </a:xfrm>
+          <a:prstGeom prst="line">
+            <a:avLst/>
+          </a:prstGeom>
+          <a:noFill/>
+          <a:ln w="25400">
+            <a:solidFill>
+              <a:srgbClr val="6B7D94"/>
+            </a:solidFill>
+            <a:prstDash val="solid"/>
+            <a:tailEnd type="triangle"/>
+          </a:ln>
+        </p:spPr>
+      </p:sp>
+      <p:sp>
+        <p:nvSpPr>
+          <p:cNvPr id="17" name="Shape 15"/>
+          <p:cNvSpPr/>
+          <p:nvPr/>
+        </p:nvSpPr>
+        <p:spPr>
+          <a:xfrm>
+            <a:off x="548640" y="4946904"/>
+            <a:ext cx="7040880" cy="841248"/>
+          </a:xfrm>
+          <a:prstGeom prst="roundRect">
+            <a:avLst>
+              <a:gd name="adj" fmla="val 8696"/>
+            </a:avLst>
+          </a:prstGeom>
+          <a:solidFill>
+            <a:srgbClr val="241A16"/>
+          </a:solidFill>
+          <a:ln w="19050">
+            <a:solidFill>
+              <a:srgbClr val="E8A33D"/>
+            </a:solidFill>
+            <a:prstDash val="solid"/>
+          </a:ln>
+        </p:spPr>
+      </p:sp>
+      <p:sp>
+        <p:nvSpPr>
+          <p:cNvPr id="18" name="Text 16"/>
+          <p:cNvSpPr/>
+          <p:nvPr/>
+        </p:nvSpPr>
+        <p:spPr>
+          <a:xfrm>
+            <a:off x="804672" y="5056632"/>
+            <a:ext cx="6583680" cy="365760"/>
+          </a:xfrm>
+          <a:prstGeom prst="rect">
+            <a:avLst/>
+          </a:prstGeom>
+          <a:noFill/>
+          <a:ln/>
+        </p:spPr>
+        <p:txBody>
+          <a:bodyPr wrap="square" lIns="0" tIns="0" rIns="0" bIns="0" rtlCol="0" anchor="ctr"/>
+          <a:lstStyle/>
+          <a:p>
+            <a:pPr indent="0" marL="0">
+              <a:buNone/>
+            </a:pPr>
+            <a:r>
+              <a:rPr lang="en-US" sz="1500" b="1" dirty="0">
+                <a:solidFill>
+                  <a:srgbClr val="E8A33D"/>
+                </a:solidFill>
+                <a:latin typeface="Malgun Gothic" pitchFamily="34" charset="0"/>
+                <a:ea typeface="Malgun Gothic" pitchFamily="34" charset="-122"/>
+                <a:cs typeface="Malgun Gothic" pitchFamily="34" charset="-120"/>
+              </a:rPr>
+              <a:t>④ 커널 완료 — 결과는 전역 메모리에</a:t>
+            </a:r>
+            <a:endParaRPr lang="en-US" sz="1500" dirty="0"/>
+          </a:p>
+        </p:txBody>
+      </p:sp>
+      <p:sp>
+        <p:nvSpPr>
+          <p:cNvPr id="19" name="Text 17"/>
+          <p:cNvSpPr/>
+          <p:nvPr/>
+        </p:nvSpPr>
+        <p:spPr>
+          <a:xfrm>
+            <a:off x="804672" y="5404104"/>
+            <a:ext cx="6583680" cy="292608"/>
+          </a:xfrm>
+          <a:prstGeom prst="rect">
+            <a:avLst/>
+          </a:prstGeom>
+          <a:noFill/>
+          <a:ln/>
+        </p:spPr>
+        <p:txBody>
+          <a:bodyPr wrap="square" lIns="0" tIns="0" rIns="0" bIns="0" rtlCol="0" anchor="ctr"/>
+          <a:lstStyle/>
+          <a:p>
+            <a:pPr indent="0" marL="0">
+              <a:buNone/>
+            </a:pPr>
+            <a:r>
+              <a:rPr lang="en-US" sz="1100" dirty="0">
+                <a:solidFill>
+                  <a:srgbClr val="9FB0C4"/>
+                </a:solidFill>
+                <a:latin typeface="Courier New" pitchFamily="34" charset="0"/>
+                <a:ea typeface="Courier New" pitchFamily="34" charset="-122"/>
+                <a:cs typeface="Courier New" pitchFamily="34" charset="-120"/>
+              </a:rPr>
+              <a:t>호스트는 SOFTWAIT로 완료를 기다림</a:t>
+            </a:r>
+            <a:endParaRPr lang="en-US" sz="1100" dirty="0"/>
+          </a:p>
+        </p:txBody>
+      </p:sp>
+      <p:sp>
+        <p:nvSpPr>
+          <p:cNvPr id="20" name="Text 18"/>
+          <p:cNvSpPr/>
+          <p:nvPr/>
+        </p:nvSpPr>
+        <p:spPr>
+          <a:xfrm>
+            <a:off x="7726680" y="2057400"/>
+            <a:ext cx="1371600" cy="365760"/>
+          </a:xfrm>
+          <a:prstGeom prst="rect">
+            <a:avLst/>
+          </a:prstGeom>
+          <a:noFill/>
+          <a:ln/>
+        </p:spPr>
+        <p:txBody>
+          <a:bodyPr wrap="square" lIns="0" tIns="0" rIns="0" bIns="0" rtlCol="0" anchor="ctr"/>
+          <a:lstStyle/>
+          <a:p>
+            <a:pPr indent="0" marL="0">
+              <a:buNone/>
+            </a:pPr>
+            <a:r>
+              <a:rPr lang="en-US" sz="1200" b="1" dirty="0">
+                <a:solidFill>
+                  <a:srgbClr val="3FB8C4"/>
+                </a:solidFill>
+                <a:latin typeface="Malgun Gothic" pitchFamily="34" charset="0"/>
+                <a:ea typeface="Malgun Gothic" pitchFamily="34" charset="-122"/>
+                <a:cs typeface="Malgun Gothic" pitchFamily="34" charset="-120"/>
+              </a:rPr>
+              <a:t>호스트</a:t>
+            </a:r>
+            <a:endParaRPr lang="en-US" sz="1200" dirty="0"/>
+          </a:p>
+        </p:txBody>
+      </p:sp>
+      <p:sp>
+        <p:nvSpPr>
+          <p:cNvPr id="21" name="Text 19"/>
+          <p:cNvSpPr/>
+          <p:nvPr/>
+        </p:nvSpPr>
+        <p:spPr>
+          <a:xfrm>
+            <a:off x="7726680" y="3108960"/>
+            <a:ext cx="1737360" cy="365760"/>
+          </a:xfrm>
+          <a:prstGeom prst="rect">
+            <a:avLst/>
+          </a:prstGeom>
+          <a:noFill/>
+          <a:ln/>
+        </p:spPr>
+        <p:txBody>
+          <a:bodyPr wrap="square" lIns="0" tIns="0" rIns="0" bIns="0" rtlCol="0" anchor="ctr"/>
+          <a:lstStyle/>
+          <a:p>
+            <a:pPr indent="0" marL="0">
+              <a:buNone/>
+            </a:pPr>
+            <a:r>
+              <a:rPr lang="en-US" sz="1200" b="1" dirty="0">
+                <a:solidFill>
+                  <a:srgbClr val="E8A33D"/>
+                </a:solidFill>
+                <a:latin typeface="Malgun Gothic" pitchFamily="34" charset="0"/>
+                <a:ea typeface="Malgun Gothic" pitchFamily="34" charset="-122"/>
+                <a:cs typeface="Malgun Gothic" pitchFamily="34" charset="-120"/>
+              </a:rPr>
+              <a:t>디바이스(GPU)</a:t>
+            </a:r>
+            <a:endParaRPr lang="en-US" sz="1200" dirty="0"/>
+          </a:p>
+        </p:txBody>
+      </p:sp>
+      <p:sp>
+        <p:nvSpPr>
+          <p:cNvPr id="22" name="Shape 20"/>
+          <p:cNvSpPr/>
+          <p:nvPr/>
+        </p:nvSpPr>
+        <p:spPr>
+          <a:xfrm>
+            <a:off x="9692640" y="1874520"/>
+            <a:ext cx="1920240" cy="3977640"/>
+          </a:xfrm>
+          <a:prstGeom prst="roundRect">
+            <a:avLst>
+              <a:gd name="adj" fmla="val 3810"/>
             </a:avLst>
           </a:prstGeom>
           <a:solidFill>
             <a:srgbClr val="18212E"/>
           </a:solidFill>
-          <a:ln/>
-        </p:spPr>
-      </p:sp>
-      <p:sp>
-        <p:nvSpPr>
-          <p:cNvPr id="5" name="Text 3"/>
-          <p:cNvSpPr/>
-          <p:nvPr/>
-        </p:nvSpPr>
-        <p:spPr>
-          <a:xfrm>
-            <a:off x="822960" y="1828800"/>
-            <a:ext cx="4800600" cy="457200"/>
+          <a:ln w="19050">
+            <a:solidFill>
+              <a:srgbClr val="E6604F"/>
+            </a:solidFill>
+            <a:prstDash val="solid"/>
+          </a:ln>
+        </p:spPr>
+      </p:sp>
+      <p:sp>
+        <p:nvSpPr>
+          <p:cNvPr id="23" name="Text 21"/>
+          <p:cNvSpPr/>
+          <p:nvPr/>
+        </p:nvSpPr>
+        <p:spPr>
+          <a:xfrm>
+            <a:off x="9921240" y="2057400"/>
+            <a:ext cx="1463040" cy="411480"/>
           </a:xfrm>
           <a:prstGeom prst="rect">
             <a:avLst/>
@@ -4228,30 +5196,30 @@
               <a:buNone/>
             </a:pPr>
             <a:r>
-              <a:rPr lang="en-US" sz="2000" b="1" dirty="0">
-                <a:solidFill>
-                  <a:srgbClr val="E8A33D"/>
+              <a:rPr lang="en-US" sz="1600" b="1" dirty="0">
+                <a:solidFill>
+                  <a:srgbClr val="E6604F"/>
                 </a:solidFill>
                 <a:latin typeface="Malgun Gothic" pitchFamily="34" charset="0"/>
                 <a:ea typeface="Malgun Gothic" pitchFamily="34" charset="-122"/>
                 <a:cs typeface="Malgun Gothic" pitchFamily="34" charset="-120"/>
               </a:rPr>
-              <a:t>기억할 것</a:t>
-            </a:r>
-            <a:endParaRPr lang="en-US" sz="2000" dirty="0"/>
-          </a:p>
-        </p:txBody>
-      </p:sp>
-      <p:sp>
-        <p:nvSpPr>
-          <p:cNvPr id="6" name="Text 4"/>
-          <p:cNvSpPr/>
-          <p:nvPr/>
-        </p:nvSpPr>
-        <p:spPr>
-          <a:xfrm>
-            <a:off x="822960" y="2423160"/>
-            <a:ext cx="4800600" cy="3108960"/>
+              <a:t>비동기(async)</a:t>
+            </a:r>
+            <a:endParaRPr lang="en-US" sz="1600" dirty="0"/>
+          </a:p>
+        </p:txBody>
+      </p:sp>
+      <p:sp>
+        <p:nvSpPr>
+          <p:cNvPr id="24" name="Text 22"/>
+          <p:cNvSpPr/>
+          <p:nvPr/>
+        </p:nvSpPr>
+        <p:spPr>
+          <a:xfrm>
+            <a:off x="9921240" y="2606040"/>
+            <a:ext cx="1463040" cy="3063240"/>
           </a:xfrm>
           <a:prstGeom prst="rect">
             <a:avLst/>
@@ -4263,18 +5231,17 @@
           <a:bodyPr wrap="square" lIns="0" tIns="0" rIns="0" bIns="0" rtlCol="0" anchor="t"/>
           <a:lstStyle/>
           <a:p>
-            <a:pPr marL="342900" indent="-342900">
+            <a:pPr indent="0" marL="0">
               <a:lnSpc>
-                <a:spcPct val="105000"/>
+                <a:spcPct val="115000"/>
               </a:lnSpc>
               <a:spcAft>
-                <a:spcPts val="1200"/>
+                <a:spcPts val="1000"/>
               </a:spcAft>
-              <a:buSzPct val="100000"/>
-              <a:buChar char="✓"/>
-            </a:pPr>
-            <a:r>
-              <a:rPr lang="en-US" sz="1600" dirty="0">
+              <a:buNone/>
+            </a:pPr>
+            <a:r>
+              <a:rPr lang="en-US" sz="1350" dirty="0">
                 <a:solidFill>
                   <a:srgbClr val="E7EDF5"/>
                 </a:solidFill>
@@ -4282,23 +5249,22 @@
                 <a:ea typeface="Malgun Gothic" pitchFamily="34" charset="-122"/>
                 <a:cs typeface="Malgun Gothic" pitchFamily="34" charset="-120"/>
               </a:rPr>
-              <a:t>커널 = __global__, 반환형 void</a:t>
-            </a:r>
-            <a:endParaRPr lang="en-US" sz="1600" dirty="0"/>
-          </a:p>
-          <a:p>
-            <a:pPr marL="342900" indent="-342900">
+              <a:t>호스트는 ① 요청 후 곧바로 다음 코드로 갑니다.</a:t>
+            </a:r>
+            <a:endParaRPr lang="en-US" sz="1350" dirty="0"/>
+          </a:p>
+          <a:p>
+            <a:pPr indent="0" marL="0">
               <a:lnSpc>
-                <a:spcPct val="105000"/>
+                <a:spcPct val="115000"/>
               </a:lnSpc>
               <a:spcAft>
-                <a:spcPts val="1200"/>
+                <a:spcPts val="1000"/>
               </a:spcAft>
-              <a:buSzPct val="100000"/>
-              <a:buChar char="✓"/>
-            </a:pPr>
-            <a:r>
-              <a:rPr lang="en-US" sz="1600" dirty="0">
+              <a:buNone/>
+            </a:pPr>
+            <a:r>
+              <a:rPr lang="en-US" sz="1350" dirty="0">
                 <a:solidFill>
                   <a:srgbClr val="E7EDF5"/>
                 </a:solidFill>
@@ -4306,236 +5272,29 @@
                 <a:ea typeface="Malgun Gothic" pitchFamily="34" charset="-122"/>
                 <a:cs typeface="Malgun Gothic" pitchFamily="34" charset="-120"/>
               </a:rPr>
-              <a:t>&lt;&lt;&lt;1024, 512&gt;&gt;&gt; = 블록수, 블록당 스레드수</a:t>
-            </a:r>
-            <a:endParaRPr lang="en-US" sz="1600" dirty="0"/>
-          </a:p>
-          <a:p>
-            <a:pPr marL="342900" indent="-342900">
+              <a:t>결과가 필요하면 SOFTWAIT로 GPU 완료를 기다립니다.</a:t>
+            </a:r>
+            <a:endParaRPr lang="en-US" sz="1350" dirty="0"/>
+          </a:p>
+          <a:p>
+            <a:pPr indent="0" marL="0">
               <a:lnSpc>
-                <a:spcPct val="105000"/>
+                <a:spcPct val="115000"/>
               </a:lnSpc>
-              <a:spcAft>
-                <a:spcPts val="1200"/>
-              </a:spcAft>
-              <a:buSzPct val="100000"/>
-              <a:buChar char="✓"/>
-            </a:pPr>
-            <a:r>
-              <a:rPr lang="en-US" sz="1600" dirty="0">
-                <a:solidFill>
-                  <a:srgbClr val="E7EDF5"/>
+              <a:buNone/>
+            </a:pPr>
+            <a:r>
+              <a:rPr lang="en-US" sz="1350" i="1" dirty="0">
+                <a:solidFill>
+                  <a:srgbClr val="9FB0C4"/>
                 </a:solidFill>
                 <a:latin typeface="Malgun Gothic" pitchFamily="34" charset="0"/>
                 <a:ea typeface="Malgun Gothic" pitchFamily="34" charset="-122"/>
                 <a:cs typeface="Malgun Gothic" pitchFamily="34" charset="-120"/>
               </a:rPr>
-              <a:t>THREAD_ADDRESS로 겹치지 않는 자기 word 계산</a:t>
-            </a:r>
-            <a:endParaRPr lang="en-US" sz="1600" dirty="0"/>
-          </a:p>
-          <a:p>
-            <a:pPr marL="342900" indent="-342900">
-              <a:lnSpc>
-                <a:spcPct val="105000"/>
-              </a:lnSpc>
-              <a:spcAft>
-                <a:spcPts val="1200"/>
-              </a:spcAft>
-              <a:buSzPct val="100000"/>
-              <a:buChar char="✓"/>
-            </a:pPr>
-            <a:r>
-              <a:rPr lang="en-US" sz="1600" dirty="0">
-                <a:solidFill>
-                  <a:srgbClr val="E7EDF5"/>
-                </a:solidFill>
-                <a:latin typeface="Malgun Gothic" pitchFamily="34" charset="0"/>
-                <a:ea typeface="Malgun Gothic" pitchFamily="34" charset="-122"/>
-                <a:cs typeface="Malgun Gothic" pitchFamily="34" charset="-120"/>
-              </a:rPr>
-              <a:t>이웃 스레드 = 이웃 주소 → coalescing</a:t>
-            </a:r>
-            <a:endParaRPr lang="en-US" sz="1600" dirty="0"/>
-          </a:p>
-        </p:txBody>
-      </p:sp>
-      <p:sp>
-        <p:nvSpPr>
-          <p:cNvPr id="7" name="Shape 5"/>
-          <p:cNvSpPr/>
-          <p:nvPr/>
-        </p:nvSpPr>
-        <p:spPr>
-          <a:xfrm>
-            <a:off x="6263640" y="1600200"/>
-            <a:ext cx="5349240" cy="4114800"/>
-          </a:xfrm>
-          <a:prstGeom prst="roundRect">
-            <a:avLst>
-              <a:gd name="adj" fmla="val 1778"/>
-            </a:avLst>
-          </a:prstGeom>
-          <a:solidFill>
-            <a:srgbClr val="18212E"/>
-          </a:solidFill>
-          <a:ln/>
-        </p:spPr>
-      </p:sp>
-      <p:sp>
-        <p:nvSpPr>
-          <p:cNvPr id="8" name="Text 6"/>
-          <p:cNvSpPr/>
-          <p:nvPr/>
-        </p:nvSpPr>
-        <p:spPr>
-          <a:xfrm>
-            <a:off x="6537960" y="1828800"/>
-            <a:ext cx="4800600" cy="457200"/>
-          </a:xfrm>
-          <a:prstGeom prst="rect">
-            <a:avLst/>
-          </a:prstGeom>
-          <a:noFill/>
-          <a:ln/>
-        </p:spPr>
-        <p:txBody>
-          <a:bodyPr wrap="square" lIns="0" tIns="0" rIns="0" bIns="0" rtlCol="0" anchor="ctr"/>
-          <a:lstStyle/>
-          <a:p>
-            <a:pPr indent="0" marL="0">
-              <a:buNone/>
-            </a:pPr>
-            <a:r>
-              <a:rPr lang="en-US" sz="2000" b="1" dirty="0">
-                <a:solidFill>
-                  <a:srgbClr val="E6604F"/>
-                </a:solidFill>
-                <a:latin typeface="Malgun Gothic" pitchFamily="34" charset="0"/>
-                <a:ea typeface="Malgun Gothic" pitchFamily="34" charset="-122"/>
-                <a:cs typeface="Malgun Gothic" pitchFamily="34" charset="-120"/>
-              </a:rPr>
-              <a:t>입문자 함정</a:t>
-            </a:r>
-            <a:endParaRPr lang="en-US" sz="2000" dirty="0"/>
-          </a:p>
-        </p:txBody>
-      </p:sp>
-      <p:sp>
-        <p:nvSpPr>
-          <p:cNvPr id="9" name="Text 7"/>
-          <p:cNvSpPr/>
-          <p:nvPr/>
-        </p:nvSpPr>
-        <p:spPr>
-          <a:xfrm>
-            <a:off x="6537960" y="2423160"/>
-            <a:ext cx="4800600" cy="3108960"/>
-          </a:xfrm>
-          <a:prstGeom prst="rect">
-            <a:avLst/>
-          </a:prstGeom>
-          <a:noFill/>
-          <a:ln/>
-        </p:spPr>
-        <p:txBody>
-          <a:bodyPr wrap="square" lIns="0" tIns="0" rIns="0" bIns="0" rtlCol="0" anchor="t"/>
-          <a:lstStyle/>
-          <a:p>
-            <a:pPr marL="342900" indent="-342900">
-              <a:lnSpc>
-                <a:spcPct val="105000"/>
-              </a:lnSpc>
-              <a:spcAft>
-                <a:spcPts val="1200"/>
-              </a:spcAft>
-              <a:buSzPct val="100000"/>
-              <a:buChar char="✗"/>
-            </a:pPr>
-            <a:r>
-              <a:rPr lang="en-US" sz="1550" dirty="0">
-                <a:solidFill>
-                  <a:srgbClr val="E7EDF5"/>
-                </a:solidFill>
-                <a:latin typeface="Malgun Gothic" pitchFamily="34" charset="0"/>
-                <a:ea typeface="Malgun Gothic" pitchFamily="34" charset="-122"/>
-                <a:cs typeface="Malgun Gothic" pitchFamily="34" charset="-120"/>
-              </a:rPr>
-              <a:t>커널을 일반 함수처럼 () 로 호출 → &lt;&lt;&lt;&gt;&gt;&gt; 필수</a:t>
-            </a:r>
-            <a:endParaRPr lang="en-US" sz="1550" dirty="0"/>
-          </a:p>
-          <a:p>
-            <a:pPr marL="342900" indent="-342900">
-              <a:lnSpc>
-                <a:spcPct val="105000"/>
-              </a:lnSpc>
-              <a:spcAft>
-                <a:spcPts val="1200"/>
-              </a:spcAft>
-              <a:buSzPct val="100000"/>
-              <a:buChar char="✗"/>
-            </a:pPr>
-            <a:r>
-              <a:rPr lang="en-US" sz="1550" dirty="0">
-                <a:solidFill>
-                  <a:srgbClr val="E7EDF5"/>
-                </a:solidFill>
-                <a:latin typeface="Malgun Gothic" pitchFamily="34" charset="0"/>
-                <a:ea typeface="Malgun Gothic" pitchFamily="34" charset="-122"/>
-                <a:cs typeface="Malgun Gothic" pitchFamily="34" charset="-120"/>
-              </a:rPr>
-              <a:t>커널에서 값을 return 하려 함 → void, 결과는 메모리로</a:t>
-            </a:r>
-            <a:endParaRPr lang="en-US" sz="1550" dirty="0"/>
-          </a:p>
-          <a:p>
-            <a:pPr marL="342900" indent="-342900">
-              <a:lnSpc>
-                <a:spcPct val="105000"/>
-              </a:lnSpc>
-              <a:spcAft>
-                <a:spcPts val="1200"/>
-              </a:spcAft>
-              <a:buSzPct val="100000"/>
-              <a:buChar char="✗"/>
-            </a:pPr>
-            <a:r>
-              <a:rPr lang="en-US" sz="1550" dirty="0">
-                <a:solidFill>
-                  <a:srgbClr val="E7EDF5"/>
-                </a:solidFill>
-                <a:latin typeface="Malgun Gothic" pitchFamily="34" charset="0"/>
-                <a:ea typeface="Malgun Gothic" pitchFamily="34" charset="-122"/>
-                <a:cs typeface="Malgun Gothic" pitchFamily="34" charset="-120"/>
-              </a:rPr>
-              <a:t>호스트 포인터를 커널에 그대로 전달 → 디바이스 포인터여야</a:t>
-            </a:r>
-            <a:endParaRPr lang="en-US" sz="1550" dirty="0"/>
-          </a:p>
-          <a:p>
-            <a:pPr marL="342900" indent="-342900">
-              <a:lnSpc>
-                <a:spcPct val="105000"/>
-              </a:lnSpc>
-              <a:spcAft>
-                <a:spcPts val="1200"/>
-              </a:spcAft>
-              <a:buSzPct val="100000"/>
-              <a:buChar char="✗"/>
-            </a:pPr>
-            <a:r>
-              <a:rPr lang="en-US" sz="1550" dirty="0">
-                <a:solidFill>
-                  <a:srgbClr val="E7EDF5"/>
-                </a:solidFill>
-                <a:latin typeface="Malgun Gothic" pitchFamily="34" charset="0"/>
-                <a:ea typeface="Malgun Gothic" pitchFamily="34" charset="-122"/>
-                <a:cs typeface="Malgun Gothic" pitchFamily="34" charset="-120"/>
-              </a:rPr>
-              <a:t>blockDim을 스레드마다 다르다고 착각 → 모두 같은 값</a:t>
-            </a:r>
-            <a:endParaRPr lang="en-US" sz="1550" dirty="0"/>
+              <a:t>→ 이 비동기 특성은 세션 2(검증)·세션 4(타이밍)에서 자세히.</a:t>
+            </a:r>
+            <a:endParaRPr lang="en-US" sz="1350" dirty="0"/>
           </a:p>
         </p:txBody>
       </p:sp>
@@ -4579,6 +5338,478 @@
         </p:nvSpPr>
         <p:spPr>
           <a:xfrm>
+            <a:off x="548640" y="411480"/>
+            <a:ext cx="658368" cy="658368"/>
+          </a:xfrm>
+          <a:prstGeom prst="roundRect">
+            <a:avLst>
+              <a:gd name="adj" fmla="val 13889"/>
+            </a:avLst>
+          </a:prstGeom>
+          <a:solidFill>
+            <a:srgbClr val="E8A33D"/>
+          </a:solidFill>
+          <a:ln/>
+        </p:spPr>
+        <p:txBody>
+          <a:bodyPr wrap="square" rtlCol="0" anchor="ctr"/>
+          <a:lstStyle/>
+          <a:p>
+            <a:pPr algn="ctr" indent="0" marL="0">
+              <a:buNone/>
+            </a:pPr>
+            <a:r>
+              <a:rPr lang="en-US" sz="2200" b="1" dirty="0">
+                <a:solidFill>
+                  <a:srgbClr val="101722"/>
+                </a:solidFill>
+                <a:latin typeface="Courier New" pitchFamily="34" charset="0"/>
+                <a:ea typeface="Courier New" pitchFamily="34" charset="-122"/>
+                <a:cs typeface="Courier New" pitchFamily="34" charset="-120"/>
+              </a:rPr>
+              <a:t>9</a:t>
+            </a:r>
+            <a:endParaRPr lang="en-US" sz="2200" dirty="0"/>
+          </a:p>
+        </p:txBody>
+      </p:sp>
+      <p:sp>
+        <p:nvSpPr>
+          <p:cNvPr id="3" name="Text 1"/>
+          <p:cNvSpPr/>
+          <p:nvPr/>
+        </p:nvSpPr>
+        <p:spPr>
+          <a:xfrm>
+            <a:off x="1371600" y="384048"/>
+            <a:ext cx="10241280" cy="713232"/>
+          </a:xfrm>
+          <a:prstGeom prst="rect">
+            <a:avLst/>
+          </a:prstGeom>
+          <a:noFill/>
+          <a:ln/>
+        </p:spPr>
+        <p:txBody>
+          <a:bodyPr wrap="square" lIns="0" tIns="0" rIns="0" bIns="0" rtlCol="0" anchor="ctr"/>
+          <a:lstStyle/>
+          <a:p>
+            <a:pPr algn="l" indent="0" marL="0">
+              <a:buNone/>
+            </a:pPr>
+            <a:r>
+              <a:rPr lang="en-US" sz="2900" b="1" dirty="0">
+                <a:solidFill>
+                  <a:srgbClr val="E7EDF5"/>
+                </a:solidFill>
+                <a:latin typeface="Malgun Gothic" pitchFamily="34" charset="0"/>
+                <a:ea typeface="Malgun Gothic" pitchFamily="34" charset="-122"/>
+                <a:cs typeface="Malgun Gothic" pitchFamily="34" charset="-120"/>
+              </a:rPr>
+              <a:t>핵심 정리 &amp; 자주 하는 실수</a:t>
+            </a:r>
+            <a:endParaRPr lang="en-US" sz="2900" dirty="0"/>
+          </a:p>
+        </p:txBody>
+      </p:sp>
+      <p:sp>
+        <p:nvSpPr>
+          <p:cNvPr id="4" name="Shape 2"/>
+          <p:cNvSpPr/>
+          <p:nvPr/>
+        </p:nvSpPr>
+        <p:spPr>
+          <a:xfrm>
+            <a:off x="548640" y="1600200"/>
+            <a:ext cx="5349240" cy="4114800"/>
+          </a:xfrm>
+          <a:prstGeom prst="roundRect">
+            <a:avLst>
+              <a:gd name="adj" fmla="val 1778"/>
+            </a:avLst>
+          </a:prstGeom>
+          <a:solidFill>
+            <a:srgbClr val="18212E"/>
+          </a:solidFill>
+          <a:ln/>
+        </p:spPr>
+      </p:sp>
+      <p:sp>
+        <p:nvSpPr>
+          <p:cNvPr id="5" name="Text 3"/>
+          <p:cNvSpPr/>
+          <p:nvPr/>
+        </p:nvSpPr>
+        <p:spPr>
+          <a:xfrm>
+            <a:off x="822960" y="1828800"/>
+            <a:ext cx="4800600" cy="457200"/>
+          </a:xfrm>
+          <a:prstGeom prst="rect">
+            <a:avLst/>
+          </a:prstGeom>
+          <a:noFill/>
+          <a:ln/>
+        </p:spPr>
+        <p:txBody>
+          <a:bodyPr wrap="square" lIns="0" tIns="0" rIns="0" bIns="0" rtlCol="0" anchor="ctr"/>
+          <a:lstStyle/>
+          <a:p>
+            <a:pPr indent="0" marL="0">
+              <a:buNone/>
+            </a:pPr>
+            <a:r>
+              <a:rPr lang="en-US" sz="2000" b="1" dirty="0">
+                <a:solidFill>
+                  <a:srgbClr val="E8A33D"/>
+                </a:solidFill>
+                <a:latin typeface="Malgun Gothic" pitchFamily="34" charset="0"/>
+                <a:ea typeface="Malgun Gothic" pitchFamily="34" charset="-122"/>
+                <a:cs typeface="Malgun Gothic" pitchFamily="34" charset="-120"/>
+              </a:rPr>
+              <a:t>기억할 것</a:t>
+            </a:r>
+            <a:endParaRPr lang="en-US" sz="2000" dirty="0"/>
+          </a:p>
+        </p:txBody>
+      </p:sp>
+      <p:sp>
+        <p:nvSpPr>
+          <p:cNvPr id="6" name="Text 4"/>
+          <p:cNvSpPr/>
+          <p:nvPr/>
+        </p:nvSpPr>
+        <p:spPr>
+          <a:xfrm>
+            <a:off x="822960" y="2423160"/>
+            <a:ext cx="4800600" cy="3108960"/>
+          </a:xfrm>
+          <a:prstGeom prst="rect">
+            <a:avLst/>
+          </a:prstGeom>
+          <a:noFill/>
+          <a:ln/>
+        </p:spPr>
+        <p:txBody>
+          <a:bodyPr wrap="square" lIns="0" tIns="0" rIns="0" bIns="0" rtlCol="0" anchor="t"/>
+          <a:lstStyle/>
+          <a:p>
+            <a:pPr marL="342900" indent="-342900">
+              <a:lnSpc>
+                <a:spcPct val="105000"/>
+              </a:lnSpc>
+              <a:spcAft>
+                <a:spcPts val="1200"/>
+              </a:spcAft>
+              <a:buSzPct val="100000"/>
+              <a:buChar char="✓"/>
+            </a:pPr>
+            <a:r>
+              <a:rPr lang="en-US" sz="1600" dirty="0">
+                <a:solidFill>
+                  <a:srgbClr val="E7EDF5"/>
+                </a:solidFill>
+                <a:latin typeface="Malgun Gothic" pitchFamily="34" charset="0"/>
+                <a:ea typeface="Malgun Gothic" pitchFamily="34" charset="-122"/>
+                <a:cs typeface="Malgun Gothic" pitchFamily="34" charset="-120"/>
+              </a:rPr>
+              <a:t>커널 = __global__, 반환형 void</a:t>
+            </a:r>
+            <a:endParaRPr lang="en-US" sz="1600" dirty="0"/>
+          </a:p>
+          <a:p>
+            <a:pPr marL="342900" indent="-342900">
+              <a:lnSpc>
+                <a:spcPct val="105000"/>
+              </a:lnSpc>
+              <a:spcAft>
+                <a:spcPts val="1200"/>
+              </a:spcAft>
+              <a:buSzPct val="100000"/>
+              <a:buChar char="✓"/>
+            </a:pPr>
+            <a:r>
+              <a:rPr lang="en-US" sz="1600" dirty="0">
+                <a:solidFill>
+                  <a:srgbClr val="E7EDF5"/>
+                </a:solidFill>
+                <a:latin typeface="Malgun Gothic" pitchFamily="34" charset="0"/>
+                <a:ea typeface="Malgun Gothic" pitchFamily="34" charset="-122"/>
+                <a:cs typeface="Malgun Gothic" pitchFamily="34" charset="-120"/>
+              </a:rPr>
+              <a:t>&lt;&lt;&lt;1024, 512&gt;&gt;&gt; = 블록수, 블록당 스레드수</a:t>
+            </a:r>
+            <a:endParaRPr lang="en-US" sz="1600" dirty="0"/>
+          </a:p>
+          <a:p>
+            <a:pPr marL="342900" indent="-342900">
+              <a:lnSpc>
+                <a:spcPct val="105000"/>
+              </a:lnSpc>
+              <a:spcAft>
+                <a:spcPts val="1200"/>
+              </a:spcAft>
+              <a:buSzPct val="100000"/>
+              <a:buChar char="✓"/>
+            </a:pPr>
+            <a:r>
+              <a:rPr lang="en-US" sz="1600" dirty="0">
+                <a:solidFill>
+                  <a:srgbClr val="E7EDF5"/>
+                </a:solidFill>
+                <a:latin typeface="Malgun Gothic" pitchFamily="34" charset="0"/>
+                <a:ea typeface="Malgun Gothic" pitchFamily="34" charset="-122"/>
+                <a:cs typeface="Malgun Gothic" pitchFamily="34" charset="-120"/>
+              </a:rPr>
+              <a:t>THREAD_ADDRESS로 겹치지 않는 자기 word 계산</a:t>
+            </a:r>
+            <a:endParaRPr lang="en-US" sz="1600" dirty="0"/>
+          </a:p>
+          <a:p>
+            <a:pPr marL="342900" indent="-342900">
+              <a:lnSpc>
+                <a:spcPct val="105000"/>
+              </a:lnSpc>
+              <a:spcAft>
+                <a:spcPts val="1200"/>
+              </a:spcAft>
+              <a:buSzPct val="100000"/>
+              <a:buChar char="✓"/>
+            </a:pPr>
+            <a:r>
+              <a:rPr lang="en-US" sz="1600" dirty="0">
+                <a:solidFill>
+                  <a:srgbClr val="E7EDF5"/>
+                </a:solidFill>
+                <a:latin typeface="Malgun Gothic" pitchFamily="34" charset="0"/>
+                <a:ea typeface="Malgun Gothic" pitchFamily="34" charset="-122"/>
+                <a:cs typeface="Malgun Gothic" pitchFamily="34" charset="-120"/>
+              </a:rPr>
+              <a:t>이웃 스레드 = 이웃 주소 → coalescing</a:t>
+            </a:r>
+            <a:endParaRPr lang="en-US" sz="1600" dirty="0"/>
+          </a:p>
+        </p:txBody>
+      </p:sp>
+      <p:sp>
+        <p:nvSpPr>
+          <p:cNvPr id="7" name="Shape 5"/>
+          <p:cNvSpPr/>
+          <p:nvPr/>
+        </p:nvSpPr>
+        <p:spPr>
+          <a:xfrm>
+            <a:off x="6263640" y="1600200"/>
+            <a:ext cx="5349240" cy="4114800"/>
+          </a:xfrm>
+          <a:prstGeom prst="roundRect">
+            <a:avLst>
+              <a:gd name="adj" fmla="val 1778"/>
+            </a:avLst>
+          </a:prstGeom>
+          <a:solidFill>
+            <a:srgbClr val="18212E"/>
+          </a:solidFill>
+          <a:ln/>
+        </p:spPr>
+      </p:sp>
+      <p:sp>
+        <p:nvSpPr>
+          <p:cNvPr id="8" name="Text 6"/>
+          <p:cNvSpPr/>
+          <p:nvPr/>
+        </p:nvSpPr>
+        <p:spPr>
+          <a:xfrm>
+            <a:off x="6537960" y="1828800"/>
+            <a:ext cx="4800600" cy="457200"/>
+          </a:xfrm>
+          <a:prstGeom prst="rect">
+            <a:avLst/>
+          </a:prstGeom>
+          <a:noFill/>
+          <a:ln/>
+        </p:spPr>
+        <p:txBody>
+          <a:bodyPr wrap="square" lIns="0" tIns="0" rIns="0" bIns="0" rtlCol="0" anchor="ctr"/>
+          <a:lstStyle/>
+          <a:p>
+            <a:pPr indent="0" marL="0">
+              <a:buNone/>
+            </a:pPr>
+            <a:r>
+              <a:rPr lang="en-US" sz="2000" b="1" dirty="0">
+                <a:solidFill>
+                  <a:srgbClr val="E6604F"/>
+                </a:solidFill>
+                <a:latin typeface="Malgun Gothic" pitchFamily="34" charset="0"/>
+                <a:ea typeface="Malgun Gothic" pitchFamily="34" charset="-122"/>
+                <a:cs typeface="Malgun Gothic" pitchFamily="34" charset="-120"/>
+              </a:rPr>
+              <a:t>입문자 함정</a:t>
+            </a:r>
+            <a:endParaRPr lang="en-US" sz="2000" dirty="0"/>
+          </a:p>
+        </p:txBody>
+      </p:sp>
+      <p:sp>
+        <p:nvSpPr>
+          <p:cNvPr id="9" name="Text 7"/>
+          <p:cNvSpPr/>
+          <p:nvPr/>
+        </p:nvSpPr>
+        <p:spPr>
+          <a:xfrm>
+            <a:off x="6537960" y="2423160"/>
+            <a:ext cx="4800600" cy="3108960"/>
+          </a:xfrm>
+          <a:prstGeom prst="rect">
+            <a:avLst/>
+          </a:prstGeom>
+          <a:noFill/>
+          <a:ln/>
+        </p:spPr>
+        <p:txBody>
+          <a:bodyPr wrap="square" lIns="0" tIns="0" rIns="0" bIns="0" rtlCol="0" anchor="t"/>
+          <a:lstStyle/>
+          <a:p>
+            <a:pPr marL="342900" indent="-342900">
+              <a:lnSpc>
+                <a:spcPct val="105000"/>
+              </a:lnSpc>
+              <a:spcAft>
+                <a:spcPts val="1200"/>
+              </a:spcAft>
+              <a:buSzPct val="100000"/>
+              <a:buChar char="✗"/>
+            </a:pPr>
+            <a:r>
+              <a:rPr lang="en-US" sz="1550" dirty="0">
+                <a:solidFill>
+                  <a:srgbClr val="E7EDF5"/>
+                </a:solidFill>
+                <a:latin typeface="Malgun Gothic" pitchFamily="34" charset="0"/>
+                <a:ea typeface="Malgun Gothic" pitchFamily="34" charset="-122"/>
+                <a:cs typeface="Malgun Gothic" pitchFamily="34" charset="-120"/>
+              </a:rPr>
+              <a:t>커널을 일반 함수처럼 () 로 호출 → &lt;&lt;&lt;&gt;&gt;&gt; 필수</a:t>
+            </a:r>
+            <a:endParaRPr lang="en-US" sz="1550" dirty="0"/>
+          </a:p>
+          <a:p>
+            <a:pPr marL="342900" indent="-342900">
+              <a:lnSpc>
+                <a:spcPct val="105000"/>
+              </a:lnSpc>
+              <a:spcAft>
+                <a:spcPts val="1200"/>
+              </a:spcAft>
+              <a:buSzPct val="100000"/>
+              <a:buChar char="✗"/>
+            </a:pPr>
+            <a:r>
+              <a:rPr lang="en-US" sz="1550" dirty="0">
+                <a:solidFill>
+                  <a:srgbClr val="E7EDF5"/>
+                </a:solidFill>
+                <a:latin typeface="Malgun Gothic" pitchFamily="34" charset="0"/>
+                <a:ea typeface="Malgun Gothic" pitchFamily="34" charset="-122"/>
+                <a:cs typeface="Malgun Gothic" pitchFamily="34" charset="-120"/>
+              </a:rPr>
+              <a:t>커널에서 값을 return 하려 함 → void, 결과는 메모리로</a:t>
+            </a:r>
+            <a:endParaRPr lang="en-US" sz="1550" dirty="0"/>
+          </a:p>
+          <a:p>
+            <a:pPr marL="342900" indent="-342900">
+              <a:lnSpc>
+                <a:spcPct val="105000"/>
+              </a:lnSpc>
+              <a:spcAft>
+                <a:spcPts val="1200"/>
+              </a:spcAft>
+              <a:buSzPct val="100000"/>
+              <a:buChar char="✗"/>
+            </a:pPr>
+            <a:r>
+              <a:rPr lang="en-US" sz="1550" dirty="0">
+                <a:solidFill>
+                  <a:srgbClr val="E7EDF5"/>
+                </a:solidFill>
+                <a:latin typeface="Malgun Gothic" pitchFamily="34" charset="0"/>
+                <a:ea typeface="Malgun Gothic" pitchFamily="34" charset="-122"/>
+                <a:cs typeface="Malgun Gothic" pitchFamily="34" charset="-120"/>
+              </a:rPr>
+              <a:t>호스트 포인터를 커널에 그대로 전달 → 디바이스 포인터여야</a:t>
+            </a:r>
+            <a:endParaRPr lang="en-US" sz="1550" dirty="0"/>
+          </a:p>
+          <a:p>
+            <a:pPr marL="342900" indent="-342900">
+              <a:lnSpc>
+                <a:spcPct val="105000"/>
+              </a:lnSpc>
+              <a:spcAft>
+                <a:spcPts val="1200"/>
+              </a:spcAft>
+              <a:buSzPct val="100000"/>
+              <a:buChar char="✗"/>
+            </a:pPr>
+            <a:r>
+              <a:rPr lang="en-US" sz="1550" dirty="0">
+                <a:solidFill>
+                  <a:srgbClr val="E7EDF5"/>
+                </a:solidFill>
+                <a:latin typeface="Malgun Gothic" pitchFamily="34" charset="0"/>
+                <a:ea typeface="Malgun Gothic" pitchFamily="34" charset="-122"/>
+                <a:cs typeface="Malgun Gothic" pitchFamily="34" charset="-120"/>
+              </a:rPr>
+              <a:t>blockDim을 스레드마다 다르다고 착각 → 모두 같은 값</a:t>
+            </a:r>
+            <a:endParaRPr lang="en-US" sz="1550" dirty="0"/>
+          </a:p>
+        </p:txBody>
+      </p:sp>
+    </p:spTree>
+  </p:cSld>
+  <p:clrMapOvr>
+    <a:masterClrMapping/>
+  </p:clrMapOvr>
+</p:sld>
+</file>
+
+<file path=ppt/slides/slide15.xml><?xml version="1.0" encoding="utf-8"?>
+<p:sld xmlns:a="http://schemas.openxmlformats.org/drawingml/2006/main" xmlns:r="http://schemas.openxmlformats.org/officeDocument/2006/relationships" xmlns:p="http://schemas.openxmlformats.org/presentationml/2006/main">
+  <p:cSld name="Slide 15">
+    <p:bg>
+      <p:bgPr>
+        <a:solidFill>
+          <a:srgbClr val="101722"/>
+        </a:solidFill>
+      </p:bgPr>
+    </p:bg>
+    <p:spTree>
+      <p:nvGrpSpPr>
+        <p:cNvPr id="1" name=""/>
+        <p:cNvGrpSpPr/>
+        <p:nvPr/>
+      </p:nvGrpSpPr>
+      <p:grpSpPr>
+        <a:xfrm>
+          <a:off x="0" y="0"/>
+          <a:ext cx="0" cy="0"/>
+          <a:chOff x="0" y="0"/>
+          <a:chExt cx="0" cy="0"/>
+        </a:xfrm>
+      </p:grpSpPr>
+      <p:sp>
+        <p:nvSpPr>
+          <p:cNvPr id="2" name="Text 0"/>
+          <p:cNvSpPr/>
+          <p:nvPr/>
+        </p:nvSpPr>
+        <p:spPr>
+          <a:xfrm>
             <a:off x="548640" y="1463040"/>
             <a:ext cx="10058400" cy="457200"/>
           </a:xfrm>
@@ -13742,7 +14973,7 @@
             </a:avLst>
           </a:prstGeom>
           <a:solidFill>
-            <a:srgbClr val="E8A33D"/>
+            <a:srgbClr val="3FB8C4"/>
           </a:solidFill>
           <a:ln/>
         </p:spPr>
@@ -13762,7 +14993,7 @@
                 <a:ea typeface="Courier New" pitchFamily="34" charset="-122"/>
                 <a:cs typeface="Courier New" pitchFamily="34" charset="-120"/>
               </a:rPr>
-              <a:t>5</a:t>
+              <a:t>4</a:t>
             </a:r>
             <a:endParaRPr lang="en-US" sz="2200" dirty="0"/>
           </a:p>
@@ -13801,7 +15032,7 @@
                 <a:ea typeface="Malgun Gothic" pitchFamily="34" charset="-122"/>
                 <a:cs typeface="Malgun Gothic" pitchFamily="34" charset="-120"/>
               </a:rPr>
-              <a:t>★ THREAD_ADDRESS · 모든 테스트의 심장</a:t>
+              <a:t>스레드 레이아웃 &amp; 인덱싱 · 524,288개의 좌표계</a:t>
             </a:r>
             <a:endParaRPr lang="en-US" sz="2900" dirty="0"/>
           </a:p>
@@ -13809,18 +15040,1254 @@
       </p:sp>
       <p:sp>
         <p:nvSpPr>
-          <p:cNvPr id="4" name="Shape 2"/>
-          <p:cNvSpPr/>
-          <p:nvPr/>
-        </p:nvSpPr>
-        <p:spPr>
-          <a:xfrm>
-            <a:off x="548640" y="1463040"/>
-            <a:ext cx="11064240" cy="1371600"/>
+          <p:cNvPr id="4" name="Text 2"/>
+          <p:cNvSpPr/>
+          <p:nvPr/>
+        </p:nvSpPr>
+        <p:spPr>
+          <a:xfrm>
+            <a:off x="548640" y="1298448"/>
+            <a:ext cx="11064240" cy="365760"/>
+          </a:xfrm>
+          <a:prstGeom prst="rect">
+            <a:avLst/>
+          </a:prstGeom>
+          <a:noFill/>
+          <a:ln/>
+        </p:spPr>
+        <p:txBody>
+          <a:bodyPr wrap="square" lIns="0" tIns="0" rIns="0" bIns="0" rtlCol="0" anchor="ctr"/>
+          <a:lstStyle/>
+          <a:p>
+            <a:pPr indent="0" marL="0">
+              <a:buNone/>
+            </a:pPr>
+            <a:r>
+              <a:rPr lang="en-US" sz="1350" dirty="0">
+                <a:solidFill>
+                  <a:srgbClr val="9FB0C4"/>
+                </a:solidFill>
+                <a:latin typeface="Malgun Gothic" pitchFamily="34" charset="0"/>
+                <a:ea typeface="Malgun Gothic" pitchFamily="34" charset="-122"/>
+                <a:cs typeface="Malgun Gothic" pitchFamily="34" charset="-120"/>
+              </a:rPr>
+              <a:t>그리드는 2단(블록→스레드) 구조. 앞의 내장 변수로 각 스레드는 전체에서 자기 번호(globalIdx)를 계산합니다.</a:t>
+            </a:r>
+            <a:endParaRPr lang="en-US" sz="1350" dirty="0"/>
+          </a:p>
+        </p:txBody>
+      </p:sp>
+      <p:sp>
+        <p:nvSpPr>
+          <p:cNvPr id="5" name="Text 3"/>
+          <p:cNvSpPr/>
+          <p:nvPr/>
+        </p:nvSpPr>
+        <p:spPr>
+          <a:xfrm>
+            <a:off x="548640" y="1673352"/>
+            <a:ext cx="11064240" cy="274320"/>
+          </a:xfrm>
+          <a:prstGeom prst="rect">
+            <a:avLst/>
+          </a:prstGeom>
+          <a:noFill/>
+          <a:ln/>
+        </p:spPr>
+        <p:txBody>
+          <a:bodyPr wrap="square" lIns="0" tIns="0" rIns="0" bIns="0" rtlCol="0" anchor="ctr"/>
+          <a:lstStyle/>
+          <a:p>
+            <a:pPr indent="0" marL="0">
+              <a:buNone/>
+            </a:pPr>
+            <a:r>
+              <a:rPr lang="en-US" sz="1200" b="1" dirty="0">
+                <a:solidFill>
+                  <a:srgbClr val="E8A33D"/>
+                </a:solidFill>
+                <a:latin typeface="Malgun Gothic" pitchFamily="34" charset="0"/>
+                <a:ea typeface="Malgun Gothic" pitchFamily="34" charset="-122"/>
+                <a:cs typeface="Malgun Gothic" pitchFamily="34" charset="-120"/>
+              </a:rPr>
+              <a:t>그리드 (gridDim.x = 1024 블록)</a:t>
+            </a:r>
+            <a:endParaRPr lang="en-US" sz="1200" dirty="0"/>
+          </a:p>
+        </p:txBody>
+      </p:sp>
+      <p:sp>
+        <p:nvSpPr>
+          <p:cNvPr id="6" name="Shape 4"/>
+          <p:cNvSpPr/>
+          <p:nvPr/>
+        </p:nvSpPr>
+        <p:spPr>
+          <a:xfrm>
+            <a:off x="576072" y="1965960"/>
+            <a:ext cx="1328166" cy="658368"/>
           </a:xfrm>
           <a:prstGeom prst="roundRect">
             <a:avLst>
-              <a:gd name="adj" fmla="val 3333"/>
+              <a:gd name="adj" fmla="val 5556"/>
+            </a:avLst>
+          </a:prstGeom>
+          <a:solidFill>
+            <a:srgbClr val="0B1119"/>
+          </a:solidFill>
+          <a:ln w="12700">
+            <a:solidFill>
+              <a:srgbClr val="E8A33D"/>
+            </a:solidFill>
+            <a:prstDash val="solid"/>
+          </a:ln>
+        </p:spPr>
+      </p:sp>
+      <p:sp>
+        <p:nvSpPr>
+          <p:cNvPr id="7" name="Text 5"/>
+          <p:cNvSpPr/>
+          <p:nvPr/>
+        </p:nvSpPr>
+        <p:spPr>
+          <a:xfrm>
+            <a:off x="548640" y="1965960"/>
+            <a:ext cx="1383030" cy="658368"/>
+          </a:xfrm>
+          <a:prstGeom prst="rect">
+            <a:avLst/>
+          </a:prstGeom>
+          <a:noFill/>
+          <a:ln/>
+        </p:spPr>
+        <p:txBody>
+          <a:bodyPr wrap="square" lIns="0" tIns="0" rIns="0" bIns="0" rtlCol="0" anchor="ctr"/>
+          <a:lstStyle/>
+          <a:p>
+            <a:pPr algn="ctr" indent="0" marL="0">
+              <a:buNone/>
+            </a:pPr>
+            <a:r>
+              <a:rPr lang="en-US" sz="1200" dirty="0">
+                <a:solidFill>
+                  <a:srgbClr val="E7EDF5"/>
+                </a:solidFill>
+                <a:latin typeface="Courier New" pitchFamily="34" charset="0"/>
+                <a:ea typeface="Courier New" pitchFamily="34" charset="-122"/>
+                <a:cs typeface="Courier New" pitchFamily="34" charset="-120"/>
+              </a:rPr>
+              <a:t>블록 0</a:t>
+            </a:r>
+            <a:endParaRPr lang="en-US" sz="1200" dirty="0"/>
+          </a:p>
+        </p:txBody>
+      </p:sp>
+      <p:sp>
+        <p:nvSpPr>
+          <p:cNvPr id="8" name="Shape 6"/>
+          <p:cNvSpPr/>
+          <p:nvPr/>
+        </p:nvSpPr>
+        <p:spPr>
+          <a:xfrm>
+            <a:off x="1959102" y="1965960"/>
+            <a:ext cx="1328166" cy="658368"/>
+          </a:xfrm>
+          <a:prstGeom prst="roundRect">
+            <a:avLst>
+              <a:gd name="adj" fmla="val 5556"/>
+            </a:avLst>
+          </a:prstGeom>
+          <a:solidFill>
+            <a:srgbClr val="241A16"/>
+          </a:solidFill>
+          <a:ln w="25400">
+            <a:solidFill>
+              <a:srgbClr val="F2C079"/>
+            </a:solidFill>
+            <a:prstDash val="solid"/>
+          </a:ln>
+        </p:spPr>
+      </p:sp>
+      <p:sp>
+        <p:nvSpPr>
+          <p:cNvPr id="9" name="Text 7"/>
+          <p:cNvSpPr/>
+          <p:nvPr/>
+        </p:nvSpPr>
+        <p:spPr>
+          <a:xfrm>
+            <a:off x="1931670" y="1965960"/>
+            <a:ext cx="1383030" cy="658368"/>
+          </a:xfrm>
+          <a:prstGeom prst="rect">
+            <a:avLst/>
+          </a:prstGeom>
+          <a:noFill/>
+          <a:ln/>
+        </p:spPr>
+        <p:txBody>
+          <a:bodyPr wrap="square" lIns="0" tIns="0" rIns="0" bIns="0" rtlCol="0" anchor="ctr"/>
+          <a:lstStyle/>
+          <a:p>
+            <a:pPr algn="ctr" indent="0" marL="0">
+              <a:buNone/>
+            </a:pPr>
+            <a:r>
+              <a:rPr lang="en-US" sz="1200" b="1" dirty="0">
+                <a:solidFill>
+                  <a:srgbClr val="F2C079"/>
+                </a:solidFill>
+                <a:latin typeface="Courier New" pitchFamily="34" charset="0"/>
+                <a:ea typeface="Courier New" pitchFamily="34" charset="-122"/>
+                <a:cs typeface="Courier New" pitchFamily="34" charset="-120"/>
+              </a:rPr>
+              <a:t>블록 1</a:t>
+            </a:r>
+            <a:endParaRPr lang="en-US" sz="1200" dirty="0"/>
+          </a:p>
+        </p:txBody>
+      </p:sp>
+      <p:sp>
+        <p:nvSpPr>
+          <p:cNvPr id="10" name="Shape 8"/>
+          <p:cNvSpPr/>
+          <p:nvPr/>
+        </p:nvSpPr>
+        <p:spPr>
+          <a:xfrm>
+            <a:off x="3342132" y="1965960"/>
+            <a:ext cx="1328166" cy="658368"/>
+          </a:xfrm>
+          <a:prstGeom prst="roundRect">
+            <a:avLst>
+              <a:gd name="adj" fmla="val 5556"/>
+            </a:avLst>
+          </a:prstGeom>
+          <a:solidFill>
+            <a:srgbClr val="0B1119"/>
+          </a:solidFill>
+          <a:ln w="12700">
+            <a:solidFill>
+              <a:srgbClr val="E8A33D"/>
+            </a:solidFill>
+            <a:prstDash val="solid"/>
+          </a:ln>
+        </p:spPr>
+      </p:sp>
+      <p:sp>
+        <p:nvSpPr>
+          <p:cNvPr id="11" name="Text 9"/>
+          <p:cNvSpPr/>
+          <p:nvPr/>
+        </p:nvSpPr>
+        <p:spPr>
+          <a:xfrm>
+            <a:off x="3314700" y="1965960"/>
+            <a:ext cx="1383030" cy="658368"/>
+          </a:xfrm>
+          <a:prstGeom prst="rect">
+            <a:avLst/>
+          </a:prstGeom>
+          <a:noFill/>
+          <a:ln/>
+        </p:spPr>
+        <p:txBody>
+          <a:bodyPr wrap="square" lIns="0" tIns="0" rIns="0" bIns="0" rtlCol="0" anchor="ctr"/>
+          <a:lstStyle/>
+          <a:p>
+            <a:pPr algn="ctr" indent="0" marL="0">
+              <a:buNone/>
+            </a:pPr>
+            <a:r>
+              <a:rPr lang="en-US" sz="1200" dirty="0">
+                <a:solidFill>
+                  <a:srgbClr val="E7EDF5"/>
+                </a:solidFill>
+                <a:latin typeface="Courier New" pitchFamily="34" charset="0"/>
+                <a:ea typeface="Courier New" pitchFamily="34" charset="-122"/>
+                <a:cs typeface="Courier New" pitchFamily="34" charset="-120"/>
+              </a:rPr>
+              <a:t>블록 2</a:t>
+            </a:r>
+            <a:endParaRPr lang="en-US" sz="1200" dirty="0"/>
+          </a:p>
+        </p:txBody>
+      </p:sp>
+      <p:sp>
+        <p:nvSpPr>
+          <p:cNvPr id="12" name="Shape 10"/>
+          <p:cNvSpPr/>
+          <p:nvPr/>
+        </p:nvSpPr>
+        <p:spPr>
+          <a:xfrm>
+            <a:off x="4725162" y="1965960"/>
+            <a:ext cx="1328166" cy="658368"/>
+          </a:xfrm>
+          <a:prstGeom prst="roundRect">
+            <a:avLst>
+              <a:gd name="adj" fmla="val 5556"/>
+            </a:avLst>
+          </a:prstGeom>
+          <a:solidFill>
+            <a:srgbClr val="0B1119"/>
+          </a:solidFill>
+          <a:ln w="12700">
+            <a:solidFill>
+              <a:srgbClr val="E8A33D"/>
+            </a:solidFill>
+            <a:prstDash val="solid"/>
+          </a:ln>
+        </p:spPr>
+      </p:sp>
+      <p:sp>
+        <p:nvSpPr>
+          <p:cNvPr id="13" name="Text 11"/>
+          <p:cNvSpPr/>
+          <p:nvPr/>
+        </p:nvSpPr>
+        <p:spPr>
+          <a:xfrm>
+            <a:off x="4697730" y="1965960"/>
+            <a:ext cx="1383030" cy="658368"/>
+          </a:xfrm>
+          <a:prstGeom prst="rect">
+            <a:avLst/>
+          </a:prstGeom>
+          <a:noFill/>
+          <a:ln/>
+        </p:spPr>
+        <p:txBody>
+          <a:bodyPr wrap="square" lIns="0" tIns="0" rIns="0" bIns="0" rtlCol="0" anchor="ctr"/>
+          <a:lstStyle/>
+          <a:p>
+            <a:pPr algn="ctr" indent="0" marL="0">
+              <a:buNone/>
+            </a:pPr>
+            <a:r>
+              <a:rPr lang="en-US" sz="1200" dirty="0">
+                <a:solidFill>
+                  <a:srgbClr val="E7EDF5"/>
+                </a:solidFill>
+                <a:latin typeface="Courier New" pitchFamily="34" charset="0"/>
+                <a:ea typeface="Courier New" pitchFamily="34" charset="-122"/>
+                <a:cs typeface="Courier New" pitchFamily="34" charset="-120"/>
+              </a:rPr>
+              <a:t>블록 3</a:t>
+            </a:r>
+            <a:endParaRPr lang="en-US" sz="1200" dirty="0"/>
+          </a:p>
+        </p:txBody>
+      </p:sp>
+      <p:sp>
+        <p:nvSpPr>
+          <p:cNvPr id="14" name="Shape 12"/>
+          <p:cNvSpPr/>
+          <p:nvPr/>
+        </p:nvSpPr>
+        <p:spPr>
+          <a:xfrm>
+            <a:off x="6108192" y="1965960"/>
+            <a:ext cx="1328166" cy="658368"/>
+          </a:xfrm>
+          <a:prstGeom prst="roundRect">
+            <a:avLst>
+              <a:gd name="adj" fmla="val 5556"/>
+            </a:avLst>
+          </a:prstGeom>
+          <a:solidFill>
+            <a:srgbClr val="0B1119"/>
+          </a:solidFill>
+          <a:ln w="12700">
+            <a:solidFill>
+              <a:srgbClr val="E8A33D"/>
+            </a:solidFill>
+            <a:prstDash val="solid"/>
+          </a:ln>
+        </p:spPr>
+      </p:sp>
+      <p:sp>
+        <p:nvSpPr>
+          <p:cNvPr id="15" name="Text 13"/>
+          <p:cNvSpPr/>
+          <p:nvPr/>
+        </p:nvSpPr>
+        <p:spPr>
+          <a:xfrm>
+            <a:off x="6080760" y="1965960"/>
+            <a:ext cx="1383030" cy="658368"/>
+          </a:xfrm>
+          <a:prstGeom prst="rect">
+            <a:avLst/>
+          </a:prstGeom>
+          <a:noFill/>
+          <a:ln/>
+        </p:spPr>
+        <p:txBody>
+          <a:bodyPr wrap="square" lIns="0" tIns="0" rIns="0" bIns="0" rtlCol="0" anchor="ctr"/>
+          <a:lstStyle/>
+          <a:p>
+            <a:pPr algn="ctr" indent="0" marL="0">
+              <a:buNone/>
+            </a:pPr>
+            <a:r>
+              <a:rPr lang="en-US" sz="1200" dirty="0">
+                <a:solidFill>
+                  <a:srgbClr val="E7EDF5"/>
+                </a:solidFill>
+                <a:latin typeface="Courier New" pitchFamily="34" charset="0"/>
+                <a:ea typeface="Courier New" pitchFamily="34" charset="-122"/>
+                <a:cs typeface="Courier New" pitchFamily="34" charset="-120"/>
+              </a:rPr>
+              <a:t>블록 4</a:t>
+            </a:r>
+            <a:endParaRPr lang="en-US" sz="1200" dirty="0"/>
+          </a:p>
+        </p:txBody>
+      </p:sp>
+      <p:sp>
+        <p:nvSpPr>
+          <p:cNvPr id="16" name="Shape 14"/>
+          <p:cNvSpPr/>
+          <p:nvPr/>
+        </p:nvSpPr>
+        <p:spPr>
+          <a:xfrm>
+            <a:off x="7491222" y="1965960"/>
+            <a:ext cx="1328166" cy="658368"/>
+          </a:xfrm>
+          <a:prstGeom prst="roundRect">
+            <a:avLst>
+              <a:gd name="adj" fmla="val 5556"/>
+            </a:avLst>
+          </a:prstGeom>
+          <a:solidFill>
+            <a:srgbClr val="0B1119"/>
+          </a:solidFill>
+          <a:ln w="12700">
+            <a:solidFill>
+              <a:srgbClr val="E8A33D"/>
+            </a:solidFill>
+            <a:prstDash val="solid"/>
+          </a:ln>
+        </p:spPr>
+      </p:sp>
+      <p:sp>
+        <p:nvSpPr>
+          <p:cNvPr id="17" name="Text 15"/>
+          <p:cNvSpPr/>
+          <p:nvPr/>
+        </p:nvSpPr>
+        <p:spPr>
+          <a:xfrm>
+            <a:off x="7463790" y="1965960"/>
+            <a:ext cx="1383030" cy="658368"/>
+          </a:xfrm>
+          <a:prstGeom prst="rect">
+            <a:avLst/>
+          </a:prstGeom>
+          <a:noFill/>
+          <a:ln/>
+        </p:spPr>
+        <p:txBody>
+          <a:bodyPr wrap="square" lIns="0" tIns="0" rIns="0" bIns="0" rtlCol="0" anchor="ctr"/>
+          <a:lstStyle/>
+          <a:p>
+            <a:pPr algn="ctr" indent="0" marL="0">
+              <a:buNone/>
+            </a:pPr>
+            <a:r>
+              <a:rPr lang="en-US" sz="1200" dirty="0">
+                <a:solidFill>
+                  <a:srgbClr val="E7EDF5"/>
+                </a:solidFill>
+                <a:latin typeface="Courier New" pitchFamily="34" charset="0"/>
+                <a:ea typeface="Courier New" pitchFamily="34" charset="-122"/>
+                <a:cs typeface="Courier New" pitchFamily="34" charset="-120"/>
+              </a:rPr>
+              <a:t>블록 5</a:t>
+            </a:r>
+            <a:endParaRPr lang="en-US" sz="1200" dirty="0"/>
+          </a:p>
+        </p:txBody>
+      </p:sp>
+      <p:sp>
+        <p:nvSpPr>
+          <p:cNvPr id="18" name="Shape 16"/>
+          <p:cNvSpPr/>
+          <p:nvPr/>
+        </p:nvSpPr>
+        <p:spPr>
+          <a:xfrm>
+            <a:off x="8874252" y="1965960"/>
+            <a:ext cx="1328166" cy="658368"/>
+          </a:xfrm>
+          <a:prstGeom prst="roundRect">
+            <a:avLst>
+              <a:gd name="adj" fmla="val 5556"/>
+            </a:avLst>
+          </a:prstGeom>
+          <a:solidFill>
+            <a:srgbClr val="0B1119"/>
+          </a:solidFill>
+          <a:ln w="12700">
+            <a:solidFill>
+              <a:srgbClr val="E8A33D"/>
+            </a:solidFill>
+            <a:prstDash val="solid"/>
+          </a:ln>
+        </p:spPr>
+      </p:sp>
+      <p:sp>
+        <p:nvSpPr>
+          <p:cNvPr id="19" name="Text 17"/>
+          <p:cNvSpPr/>
+          <p:nvPr/>
+        </p:nvSpPr>
+        <p:spPr>
+          <a:xfrm>
+            <a:off x="8846820" y="1965960"/>
+            <a:ext cx="1383030" cy="658368"/>
+          </a:xfrm>
+          <a:prstGeom prst="rect">
+            <a:avLst/>
+          </a:prstGeom>
+          <a:noFill/>
+          <a:ln/>
+        </p:spPr>
+        <p:txBody>
+          <a:bodyPr wrap="square" lIns="0" tIns="0" rIns="0" bIns="0" rtlCol="0" anchor="ctr"/>
+          <a:lstStyle/>
+          <a:p>
+            <a:pPr algn="ctr" indent="0" marL="0">
+              <a:buNone/>
+            </a:pPr>
+            <a:r>
+              <a:rPr lang="en-US" sz="1200" dirty="0">
+                <a:solidFill>
+                  <a:srgbClr val="E7EDF5"/>
+                </a:solidFill>
+                <a:latin typeface="Courier New" pitchFamily="34" charset="0"/>
+                <a:ea typeface="Courier New" pitchFamily="34" charset="-122"/>
+                <a:cs typeface="Courier New" pitchFamily="34" charset="-120"/>
+              </a:rPr>
+              <a:t>블록 6</a:t>
+            </a:r>
+            <a:endParaRPr lang="en-US" sz="1200" dirty="0"/>
+          </a:p>
+        </p:txBody>
+      </p:sp>
+      <p:sp>
+        <p:nvSpPr>
+          <p:cNvPr id="20" name="Shape 18"/>
+          <p:cNvSpPr/>
+          <p:nvPr/>
+        </p:nvSpPr>
+        <p:spPr>
+          <a:xfrm>
+            <a:off x="10257282" y="1965960"/>
+            <a:ext cx="1328166" cy="658368"/>
+          </a:xfrm>
+          <a:prstGeom prst="roundRect">
+            <a:avLst>
+              <a:gd name="adj" fmla="val 5556"/>
+            </a:avLst>
+          </a:prstGeom>
+          <a:solidFill>
+            <a:srgbClr val="0B1119"/>
+          </a:solidFill>
+          <a:ln w="12700">
+            <a:solidFill>
+              <a:srgbClr val="E8A33D"/>
+            </a:solidFill>
+            <a:prstDash val="solid"/>
+          </a:ln>
+        </p:spPr>
+      </p:sp>
+      <p:sp>
+        <p:nvSpPr>
+          <p:cNvPr id="21" name="Text 19"/>
+          <p:cNvSpPr/>
+          <p:nvPr/>
+        </p:nvSpPr>
+        <p:spPr>
+          <a:xfrm>
+            <a:off x="10229850" y="1965960"/>
+            <a:ext cx="1383030" cy="658368"/>
+          </a:xfrm>
+          <a:prstGeom prst="rect">
+            <a:avLst/>
+          </a:prstGeom>
+          <a:noFill/>
+          <a:ln/>
+        </p:spPr>
+        <p:txBody>
+          <a:bodyPr wrap="square" lIns="0" tIns="0" rIns="0" bIns="0" rtlCol="0" anchor="ctr"/>
+          <a:lstStyle/>
+          <a:p>
+            <a:pPr algn="ctr" indent="0" marL="0">
+              <a:buNone/>
+            </a:pPr>
+            <a:r>
+              <a:rPr lang="en-US" sz="1200" dirty="0">
+                <a:solidFill>
+                  <a:srgbClr val="E7EDF5"/>
+                </a:solidFill>
+                <a:latin typeface="Courier New" pitchFamily="34" charset="0"/>
+                <a:ea typeface="Courier New" pitchFamily="34" charset="-122"/>
+                <a:cs typeface="Courier New" pitchFamily="34" charset="-120"/>
+              </a:rPr>
+              <a:t>…  1023</a:t>
+            </a:r>
+            <a:endParaRPr lang="en-US" sz="1200" dirty="0"/>
+          </a:p>
+        </p:txBody>
+      </p:sp>
+      <p:sp>
+        <p:nvSpPr>
+          <p:cNvPr id="22" name="Shape 20"/>
+          <p:cNvSpPr/>
+          <p:nvPr/>
+        </p:nvSpPr>
+        <p:spPr>
+          <a:xfrm>
+            <a:off x="2623185" y="2624328"/>
+            <a:ext cx="0" cy="384048"/>
+          </a:xfrm>
+          <a:prstGeom prst="line">
+            <a:avLst/>
+          </a:prstGeom>
+          <a:noFill/>
+          <a:ln w="25400">
+            <a:solidFill>
+              <a:srgbClr val="9FB0C4"/>
+            </a:solidFill>
+            <a:prstDash val="solid"/>
+            <a:tailEnd type="triangle"/>
+          </a:ln>
+        </p:spPr>
+      </p:sp>
+      <p:sp>
+        <p:nvSpPr>
+          <p:cNvPr id="23" name="Text 21"/>
+          <p:cNvSpPr/>
+          <p:nvPr/>
+        </p:nvSpPr>
+        <p:spPr>
+          <a:xfrm>
+            <a:off x="2806065" y="2642616"/>
+            <a:ext cx="3840480" cy="320040"/>
+          </a:xfrm>
+          <a:prstGeom prst="rect">
+            <a:avLst/>
+          </a:prstGeom>
+          <a:noFill/>
+          <a:ln/>
+        </p:spPr>
+        <p:txBody>
+          <a:bodyPr wrap="square" lIns="0" tIns="0" rIns="0" bIns="0" rtlCol="0" anchor="ctr"/>
+          <a:lstStyle/>
+          <a:p>
+            <a:pPr indent="0" marL="0">
+              <a:buNone/>
+            </a:pPr>
+            <a:r>
+              <a:rPr lang="en-US" sz="1150" i="1" dirty="0">
+                <a:solidFill>
+                  <a:srgbClr val="9FB0C4"/>
+                </a:solidFill>
+                <a:latin typeface="Malgun Gothic" pitchFamily="34" charset="0"/>
+                <a:ea typeface="Malgun Gothic" pitchFamily="34" charset="-122"/>
+                <a:cs typeface="Malgun Gothic" pitchFamily="34" charset="-120"/>
+              </a:rPr>
+              <a:t>블록 1개를 512 스레드로 확대</a:t>
+            </a:r>
+            <a:endParaRPr lang="en-US" sz="1150" dirty="0"/>
+          </a:p>
+        </p:txBody>
+      </p:sp>
+      <p:sp>
+        <p:nvSpPr>
+          <p:cNvPr id="24" name="Text 22"/>
+          <p:cNvSpPr/>
+          <p:nvPr/>
+        </p:nvSpPr>
+        <p:spPr>
+          <a:xfrm>
+            <a:off x="548640" y="2898648"/>
+            <a:ext cx="11064240" cy="274320"/>
+          </a:xfrm>
+          <a:prstGeom prst="rect">
+            <a:avLst/>
+          </a:prstGeom>
+          <a:noFill/>
+          <a:ln/>
+        </p:spPr>
+        <p:txBody>
+          <a:bodyPr wrap="square" lIns="0" tIns="0" rIns="0" bIns="0" rtlCol="0" anchor="ctr"/>
+          <a:lstStyle/>
+          <a:p>
+            <a:pPr indent="0" marL="0">
+              <a:buNone/>
+            </a:pPr>
+            <a:r>
+              <a:rPr lang="en-US" sz="1200" b="1" dirty="0">
+                <a:solidFill>
+                  <a:srgbClr val="3FB8C4"/>
+                </a:solidFill>
+                <a:latin typeface="Malgun Gothic" pitchFamily="34" charset="0"/>
+                <a:ea typeface="Malgun Gothic" pitchFamily="34" charset="-122"/>
+                <a:cs typeface="Malgun Gothic" pitchFamily="34" charset="-120"/>
+              </a:rPr>
+              <a:t>한 블록 (blockDim.x = 512 스레드)</a:t>
+            </a:r>
+            <a:endParaRPr lang="en-US" sz="1200" dirty="0"/>
+          </a:p>
+        </p:txBody>
+      </p:sp>
+      <p:sp>
+        <p:nvSpPr>
+          <p:cNvPr id="25" name="Shape 23"/>
+          <p:cNvSpPr/>
+          <p:nvPr/>
+        </p:nvSpPr>
+        <p:spPr>
+          <a:xfrm>
+            <a:off x="576072" y="3191256"/>
+            <a:ext cx="1328166" cy="658368"/>
+          </a:xfrm>
+          <a:prstGeom prst="roundRect">
+            <a:avLst>
+              <a:gd name="adj" fmla="val 5556"/>
+            </a:avLst>
+          </a:prstGeom>
+          <a:solidFill>
+            <a:srgbClr val="0B1119"/>
+          </a:solidFill>
+          <a:ln w="12700">
+            <a:solidFill>
+              <a:srgbClr val="3FB8C4"/>
+            </a:solidFill>
+            <a:prstDash val="solid"/>
+          </a:ln>
+        </p:spPr>
+      </p:sp>
+      <p:sp>
+        <p:nvSpPr>
+          <p:cNvPr id="26" name="Text 24"/>
+          <p:cNvSpPr/>
+          <p:nvPr/>
+        </p:nvSpPr>
+        <p:spPr>
+          <a:xfrm>
+            <a:off x="548640" y="3191256"/>
+            <a:ext cx="1383030" cy="658368"/>
+          </a:xfrm>
+          <a:prstGeom prst="rect">
+            <a:avLst/>
+          </a:prstGeom>
+          <a:noFill/>
+          <a:ln/>
+        </p:spPr>
+        <p:txBody>
+          <a:bodyPr wrap="square" lIns="0" tIns="0" rIns="0" bIns="0" rtlCol="0" anchor="ctr"/>
+          <a:lstStyle/>
+          <a:p>
+            <a:pPr algn="ctr" indent="0" marL="0">
+              <a:buNone/>
+            </a:pPr>
+            <a:r>
+              <a:rPr lang="en-US" sz="1300" b="1" dirty="0">
+                <a:solidFill>
+                  <a:srgbClr val="E7EDF5"/>
+                </a:solidFill>
+                <a:latin typeface="Courier New" pitchFamily="34" charset="0"/>
+                <a:ea typeface="Courier New" pitchFamily="34" charset="-122"/>
+                <a:cs typeface="Courier New" pitchFamily="34" charset="-120"/>
+              </a:rPr>
+              <a:t>T0</a:t>
+            </a:r>
+            <a:endParaRPr lang="en-US" sz="1300" dirty="0"/>
+          </a:p>
+        </p:txBody>
+      </p:sp>
+      <p:sp>
+        <p:nvSpPr>
+          <p:cNvPr id="27" name="Shape 25"/>
+          <p:cNvSpPr/>
+          <p:nvPr/>
+        </p:nvSpPr>
+        <p:spPr>
+          <a:xfrm>
+            <a:off x="1959102" y="3191256"/>
+            <a:ext cx="1328166" cy="658368"/>
+          </a:xfrm>
+          <a:prstGeom prst="roundRect">
+            <a:avLst>
+              <a:gd name="adj" fmla="val 5556"/>
+            </a:avLst>
+          </a:prstGeom>
+          <a:solidFill>
+            <a:srgbClr val="0B1119"/>
+          </a:solidFill>
+          <a:ln w="12700">
+            <a:solidFill>
+              <a:srgbClr val="3FB8C4"/>
+            </a:solidFill>
+            <a:prstDash val="solid"/>
+          </a:ln>
+        </p:spPr>
+      </p:sp>
+      <p:sp>
+        <p:nvSpPr>
+          <p:cNvPr id="28" name="Text 26"/>
+          <p:cNvSpPr/>
+          <p:nvPr/>
+        </p:nvSpPr>
+        <p:spPr>
+          <a:xfrm>
+            <a:off x="1931670" y="3191256"/>
+            <a:ext cx="1383030" cy="658368"/>
+          </a:xfrm>
+          <a:prstGeom prst="rect">
+            <a:avLst/>
+          </a:prstGeom>
+          <a:noFill/>
+          <a:ln/>
+        </p:spPr>
+        <p:txBody>
+          <a:bodyPr wrap="square" lIns="0" tIns="0" rIns="0" bIns="0" rtlCol="0" anchor="ctr"/>
+          <a:lstStyle/>
+          <a:p>
+            <a:pPr algn="ctr" indent="0" marL="0">
+              <a:buNone/>
+            </a:pPr>
+            <a:r>
+              <a:rPr lang="en-US" sz="1300" b="1" dirty="0">
+                <a:solidFill>
+                  <a:srgbClr val="E7EDF5"/>
+                </a:solidFill>
+                <a:latin typeface="Courier New" pitchFamily="34" charset="0"/>
+                <a:ea typeface="Courier New" pitchFamily="34" charset="-122"/>
+                <a:cs typeface="Courier New" pitchFamily="34" charset="-120"/>
+              </a:rPr>
+              <a:t>T1</a:t>
+            </a:r>
+            <a:endParaRPr lang="en-US" sz="1300" dirty="0"/>
+          </a:p>
+        </p:txBody>
+      </p:sp>
+      <p:sp>
+        <p:nvSpPr>
+          <p:cNvPr id="29" name="Shape 27"/>
+          <p:cNvSpPr/>
+          <p:nvPr/>
+        </p:nvSpPr>
+        <p:spPr>
+          <a:xfrm>
+            <a:off x="3342132" y="3191256"/>
+            <a:ext cx="1328166" cy="658368"/>
+          </a:xfrm>
+          <a:prstGeom prst="roundRect">
+            <a:avLst>
+              <a:gd name="adj" fmla="val 5556"/>
+            </a:avLst>
+          </a:prstGeom>
+          <a:solidFill>
+            <a:srgbClr val="0B1119"/>
+          </a:solidFill>
+          <a:ln w="12700">
+            <a:solidFill>
+              <a:srgbClr val="3FB8C4"/>
+            </a:solidFill>
+            <a:prstDash val="solid"/>
+          </a:ln>
+        </p:spPr>
+      </p:sp>
+      <p:sp>
+        <p:nvSpPr>
+          <p:cNvPr id="30" name="Text 28"/>
+          <p:cNvSpPr/>
+          <p:nvPr/>
+        </p:nvSpPr>
+        <p:spPr>
+          <a:xfrm>
+            <a:off x="3314700" y="3191256"/>
+            <a:ext cx="1383030" cy="658368"/>
+          </a:xfrm>
+          <a:prstGeom prst="rect">
+            <a:avLst/>
+          </a:prstGeom>
+          <a:noFill/>
+          <a:ln/>
+        </p:spPr>
+        <p:txBody>
+          <a:bodyPr wrap="square" lIns="0" tIns="0" rIns="0" bIns="0" rtlCol="0" anchor="ctr"/>
+          <a:lstStyle/>
+          <a:p>
+            <a:pPr algn="ctr" indent="0" marL="0">
+              <a:buNone/>
+            </a:pPr>
+            <a:r>
+              <a:rPr lang="en-US" sz="1300" b="1" dirty="0">
+                <a:solidFill>
+                  <a:srgbClr val="E7EDF5"/>
+                </a:solidFill>
+                <a:latin typeface="Courier New" pitchFamily="34" charset="0"/>
+                <a:ea typeface="Courier New" pitchFamily="34" charset="-122"/>
+                <a:cs typeface="Courier New" pitchFamily="34" charset="-120"/>
+              </a:rPr>
+              <a:t>T2</a:t>
+            </a:r>
+            <a:endParaRPr lang="en-US" sz="1300" dirty="0"/>
+          </a:p>
+        </p:txBody>
+      </p:sp>
+      <p:sp>
+        <p:nvSpPr>
+          <p:cNvPr id="31" name="Shape 29"/>
+          <p:cNvSpPr/>
+          <p:nvPr/>
+        </p:nvSpPr>
+        <p:spPr>
+          <a:xfrm>
+            <a:off x="4725162" y="3191256"/>
+            <a:ext cx="1328166" cy="658368"/>
+          </a:xfrm>
+          <a:prstGeom prst="roundRect">
+            <a:avLst>
+              <a:gd name="adj" fmla="val 5556"/>
+            </a:avLst>
+          </a:prstGeom>
+          <a:solidFill>
+            <a:srgbClr val="0B1119"/>
+          </a:solidFill>
+          <a:ln w="12700">
+            <a:solidFill>
+              <a:srgbClr val="3FB8C4"/>
+            </a:solidFill>
+            <a:prstDash val="solid"/>
+          </a:ln>
+        </p:spPr>
+      </p:sp>
+      <p:sp>
+        <p:nvSpPr>
+          <p:cNvPr id="32" name="Text 30"/>
+          <p:cNvSpPr/>
+          <p:nvPr/>
+        </p:nvSpPr>
+        <p:spPr>
+          <a:xfrm>
+            <a:off x="4697730" y="3191256"/>
+            <a:ext cx="1383030" cy="658368"/>
+          </a:xfrm>
+          <a:prstGeom prst="rect">
+            <a:avLst/>
+          </a:prstGeom>
+          <a:noFill/>
+          <a:ln/>
+        </p:spPr>
+        <p:txBody>
+          <a:bodyPr wrap="square" lIns="0" tIns="0" rIns="0" bIns="0" rtlCol="0" anchor="ctr"/>
+          <a:lstStyle/>
+          <a:p>
+            <a:pPr algn="ctr" indent="0" marL="0">
+              <a:buNone/>
+            </a:pPr>
+            <a:r>
+              <a:rPr lang="en-US" sz="1300" b="1" dirty="0">
+                <a:solidFill>
+                  <a:srgbClr val="E7EDF5"/>
+                </a:solidFill>
+                <a:latin typeface="Courier New" pitchFamily="34" charset="0"/>
+                <a:ea typeface="Courier New" pitchFamily="34" charset="-122"/>
+                <a:cs typeface="Courier New" pitchFamily="34" charset="-120"/>
+              </a:rPr>
+              <a:t>T3</a:t>
+            </a:r>
+            <a:endParaRPr lang="en-US" sz="1300" dirty="0"/>
+          </a:p>
+        </p:txBody>
+      </p:sp>
+      <p:sp>
+        <p:nvSpPr>
+          <p:cNvPr id="33" name="Shape 31"/>
+          <p:cNvSpPr/>
+          <p:nvPr/>
+        </p:nvSpPr>
+        <p:spPr>
+          <a:xfrm>
+            <a:off x="6108192" y="3191256"/>
+            <a:ext cx="1328166" cy="658368"/>
+          </a:xfrm>
+          <a:prstGeom prst="roundRect">
+            <a:avLst>
+              <a:gd name="adj" fmla="val 5556"/>
+            </a:avLst>
+          </a:prstGeom>
+          <a:solidFill>
+            <a:srgbClr val="0B1119"/>
+          </a:solidFill>
+          <a:ln w="12700">
+            <a:solidFill>
+              <a:srgbClr val="3FB8C4"/>
+            </a:solidFill>
+            <a:prstDash val="solid"/>
+          </a:ln>
+        </p:spPr>
+      </p:sp>
+      <p:sp>
+        <p:nvSpPr>
+          <p:cNvPr id="34" name="Text 32"/>
+          <p:cNvSpPr/>
+          <p:nvPr/>
+        </p:nvSpPr>
+        <p:spPr>
+          <a:xfrm>
+            <a:off x="6080760" y="3191256"/>
+            <a:ext cx="1383030" cy="658368"/>
+          </a:xfrm>
+          <a:prstGeom prst="rect">
+            <a:avLst/>
+          </a:prstGeom>
+          <a:noFill/>
+          <a:ln/>
+        </p:spPr>
+        <p:txBody>
+          <a:bodyPr wrap="square" lIns="0" tIns="0" rIns="0" bIns="0" rtlCol="0" anchor="ctr"/>
+          <a:lstStyle/>
+          <a:p>
+            <a:pPr algn="ctr" indent="0" marL="0">
+              <a:buNone/>
+            </a:pPr>
+            <a:r>
+              <a:rPr lang="en-US" sz="1300" b="1" dirty="0">
+                <a:solidFill>
+                  <a:srgbClr val="E7EDF5"/>
+                </a:solidFill>
+                <a:latin typeface="Courier New" pitchFamily="34" charset="0"/>
+                <a:ea typeface="Courier New" pitchFamily="34" charset="-122"/>
+                <a:cs typeface="Courier New" pitchFamily="34" charset="-120"/>
+              </a:rPr>
+              <a:t>T4</a:t>
+            </a:r>
+            <a:endParaRPr lang="en-US" sz="1300" dirty="0"/>
+          </a:p>
+        </p:txBody>
+      </p:sp>
+      <p:sp>
+        <p:nvSpPr>
+          <p:cNvPr id="35" name="Shape 33"/>
+          <p:cNvSpPr/>
+          <p:nvPr/>
+        </p:nvSpPr>
+        <p:spPr>
+          <a:xfrm>
+            <a:off x="7491222" y="3191256"/>
+            <a:ext cx="1328166" cy="658368"/>
+          </a:xfrm>
+          <a:prstGeom prst="roundRect">
+            <a:avLst>
+              <a:gd name="adj" fmla="val 5556"/>
+            </a:avLst>
+          </a:prstGeom>
+          <a:solidFill>
+            <a:srgbClr val="0B1119"/>
+          </a:solidFill>
+          <a:ln w="12700">
+            <a:solidFill>
+              <a:srgbClr val="3FB8C4"/>
+            </a:solidFill>
+            <a:prstDash val="solid"/>
+          </a:ln>
+        </p:spPr>
+      </p:sp>
+      <p:sp>
+        <p:nvSpPr>
+          <p:cNvPr id="36" name="Text 34"/>
+          <p:cNvSpPr/>
+          <p:nvPr/>
+        </p:nvSpPr>
+        <p:spPr>
+          <a:xfrm>
+            <a:off x="7463790" y="3191256"/>
+            <a:ext cx="1383030" cy="658368"/>
+          </a:xfrm>
+          <a:prstGeom prst="rect">
+            <a:avLst/>
+          </a:prstGeom>
+          <a:noFill/>
+          <a:ln/>
+        </p:spPr>
+        <p:txBody>
+          <a:bodyPr wrap="square" lIns="0" tIns="0" rIns="0" bIns="0" rtlCol="0" anchor="ctr"/>
+          <a:lstStyle/>
+          <a:p>
+            <a:pPr algn="ctr" indent="0" marL="0">
+              <a:buNone/>
+            </a:pPr>
+            <a:r>
+              <a:rPr lang="en-US" sz="1300" b="1" dirty="0">
+                <a:solidFill>
+                  <a:srgbClr val="E7EDF5"/>
+                </a:solidFill>
+                <a:latin typeface="Courier New" pitchFamily="34" charset="0"/>
+                <a:ea typeface="Courier New" pitchFamily="34" charset="-122"/>
+                <a:cs typeface="Courier New" pitchFamily="34" charset="-120"/>
+              </a:rPr>
+              <a:t>T5</a:t>
+            </a:r>
+            <a:endParaRPr lang="en-US" sz="1300" dirty="0"/>
+          </a:p>
+        </p:txBody>
+      </p:sp>
+      <p:sp>
+        <p:nvSpPr>
+          <p:cNvPr id="37" name="Shape 35"/>
+          <p:cNvSpPr/>
+          <p:nvPr/>
+        </p:nvSpPr>
+        <p:spPr>
+          <a:xfrm>
+            <a:off x="8874252" y="3191256"/>
+            <a:ext cx="1328166" cy="658368"/>
+          </a:xfrm>
+          <a:prstGeom prst="roundRect">
+            <a:avLst>
+              <a:gd name="adj" fmla="val 5556"/>
+            </a:avLst>
+          </a:prstGeom>
+          <a:solidFill>
+            <a:srgbClr val="0B1119"/>
+          </a:solidFill>
+          <a:ln w="12700">
+            <a:solidFill>
+              <a:srgbClr val="3FB8C4"/>
+            </a:solidFill>
+            <a:prstDash val="solid"/>
+          </a:ln>
+        </p:spPr>
+      </p:sp>
+      <p:sp>
+        <p:nvSpPr>
+          <p:cNvPr id="38" name="Text 36"/>
+          <p:cNvSpPr/>
+          <p:nvPr/>
+        </p:nvSpPr>
+        <p:spPr>
+          <a:xfrm>
+            <a:off x="8846820" y="3191256"/>
+            <a:ext cx="1383030" cy="658368"/>
+          </a:xfrm>
+          <a:prstGeom prst="rect">
+            <a:avLst/>
+          </a:prstGeom>
+          <a:noFill/>
+          <a:ln/>
+        </p:spPr>
+        <p:txBody>
+          <a:bodyPr wrap="square" lIns="0" tIns="0" rIns="0" bIns="0" rtlCol="0" anchor="ctr"/>
+          <a:lstStyle/>
+          <a:p>
+            <a:pPr algn="ctr" indent="0" marL="0">
+              <a:buNone/>
+            </a:pPr>
+            <a:r>
+              <a:rPr lang="en-US" sz="1300" b="1" dirty="0">
+                <a:solidFill>
+                  <a:srgbClr val="E7EDF5"/>
+                </a:solidFill>
+                <a:latin typeface="Courier New" pitchFamily="34" charset="0"/>
+                <a:ea typeface="Courier New" pitchFamily="34" charset="-122"/>
+                <a:cs typeface="Courier New" pitchFamily="34" charset="-120"/>
+              </a:rPr>
+              <a:t>T6</a:t>
+            </a:r>
+            <a:endParaRPr lang="en-US" sz="1300" dirty="0"/>
+          </a:p>
+        </p:txBody>
+      </p:sp>
+      <p:sp>
+        <p:nvSpPr>
+          <p:cNvPr id="39" name="Shape 37"/>
+          <p:cNvSpPr/>
+          <p:nvPr/>
+        </p:nvSpPr>
+        <p:spPr>
+          <a:xfrm>
+            <a:off x="10257282" y="3191256"/>
+            <a:ext cx="1328166" cy="658368"/>
+          </a:xfrm>
+          <a:prstGeom prst="roundRect">
+            <a:avLst>
+              <a:gd name="adj" fmla="val 5556"/>
+            </a:avLst>
+          </a:prstGeom>
+          <a:solidFill>
+            <a:srgbClr val="0B1119"/>
+          </a:solidFill>
+          <a:ln w="12700">
+            <a:solidFill>
+              <a:srgbClr val="3FB8C4"/>
+            </a:solidFill>
+            <a:prstDash val="solid"/>
+          </a:ln>
+        </p:spPr>
+      </p:sp>
+      <p:sp>
+        <p:nvSpPr>
+          <p:cNvPr id="40" name="Text 38"/>
+          <p:cNvSpPr/>
+          <p:nvPr/>
+        </p:nvSpPr>
+        <p:spPr>
+          <a:xfrm>
+            <a:off x="10229850" y="3191256"/>
+            <a:ext cx="1383030" cy="658368"/>
+          </a:xfrm>
+          <a:prstGeom prst="rect">
+            <a:avLst/>
+          </a:prstGeom>
+          <a:noFill/>
+          <a:ln/>
+        </p:spPr>
+        <p:txBody>
+          <a:bodyPr wrap="square" lIns="0" tIns="0" rIns="0" bIns="0" rtlCol="0" anchor="ctr"/>
+          <a:lstStyle/>
+          <a:p>
+            <a:pPr algn="ctr" indent="0" marL="0">
+              <a:buNone/>
+            </a:pPr>
+            <a:r>
+              <a:rPr lang="en-US" sz="1300" b="1" dirty="0">
+                <a:solidFill>
+                  <a:srgbClr val="E7EDF5"/>
+                </a:solidFill>
+                <a:latin typeface="Courier New" pitchFamily="34" charset="0"/>
+                <a:ea typeface="Courier New" pitchFamily="34" charset="-122"/>
+                <a:cs typeface="Courier New" pitchFamily="34" charset="-120"/>
+              </a:rPr>
+              <a:t>…  511</a:t>
+            </a:r>
+            <a:endParaRPr lang="en-US" sz="1300" dirty="0"/>
+          </a:p>
+        </p:txBody>
+      </p:sp>
+      <p:sp>
+        <p:nvSpPr>
+          <p:cNvPr id="41" name="Shape 39"/>
+          <p:cNvSpPr/>
+          <p:nvPr/>
+        </p:nvSpPr>
+        <p:spPr>
+          <a:xfrm>
+            <a:off x="548640" y="4169664"/>
+            <a:ext cx="11064240" cy="841248"/>
+          </a:xfrm>
+          <a:prstGeom prst="roundRect">
+            <a:avLst>
+              <a:gd name="adj" fmla="val 5435"/>
             </a:avLst>
           </a:prstGeom>
           <a:solidFill>
@@ -13836,14 +16303,14 @@
       </p:sp>
       <p:sp>
         <p:nvSpPr>
-          <p:cNvPr id="5" name="Text 3"/>
-          <p:cNvSpPr/>
-          <p:nvPr/>
-        </p:nvSpPr>
-        <p:spPr>
-          <a:xfrm>
-            <a:off x="768096" y="1609344"/>
-            <a:ext cx="10625328" cy="1078992"/>
+          <p:cNvPr id="42" name="Text 40"/>
+          <p:cNvSpPr/>
+          <p:nvPr/>
+        </p:nvSpPr>
+        <p:spPr>
+          <a:xfrm>
+            <a:off x="768096" y="4315968"/>
+            <a:ext cx="10625328" cy="548640"/>
           </a:xfrm>
           <a:prstGeom prst="rect">
             <a:avLst/>
@@ -13857,12 +16324,12 @@
           <a:p>
             <a:pPr algn="l" indent="0" marL="0">
               <a:lnSpc>
-                <a:spcPct val="110000"/>
+                <a:spcPct val="115000"/>
               </a:lnSpc>
               <a:buNone/>
             </a:pPr>
             <a:r>
-              <a:rPr lang="en-US" sz="1400" dirty="0">
+              <a:rPr lang="en-US" sz="1350" dirty="0">
                 <a:solidFill>
                   <a:srgbClr val="F2C079"/>
                 </a:solidFill>
@@ -13870,233 +16337,108 @@
                 <a:ea typeface="Courier New" pitchFamily="34" charset="-122"/>
                 <a:cs typeface="Courier New" pitchFamily="34" charset="-120"/>
               </a:rPr>
-              <a:t>#define THREAD_ADDRESS(base, N, i)   \</a:t>
-            </a:r>
-            <a:endParaRPr lang="en-US" sz="1400" dirty="0"/>
+              <a:t>globalIdx = blockIdx.x * blockDim.x + threadIdx.x</a:t>
+            </a:r>
+            <a:endParaRPr lang="en-US" sz="1350" dirty="0"/>
           </a:p>
           <a:p>
             <a:pPr algn="l" indent="0" marL="0">
               <a:lnSpc>
-                <a:spcPct val="110000"/>
+                <a:spcPct val="115000"/>
               </a:lnSpc>
               <a:buNone/>
             </a:pPr>
             <a:r>
-              <a:rPr lang="en-US" sz="1400" dirty="0">
-                <a:solidFill>
-                  <a:srgbClr val="E7EDF5"/>
+              <a:rPr lang="en-US" sz="1350" dirty="0">
+                <a:solidFill>
+                  <a:srgbClr val="3FB8C4"/>
                 </a:solidFill>
                 <a:latin typeface="Courier New" pitchFamily="34" charset="0"/>
                 <a:ea typeface="Courier New" pitchFamily="34" charset="-122"/>
                 <a:cs typeface="Courier New" pitchFamily="34" charset="-120"/>
               </a:rPr>
-              <a:t>   ( base</a:t>
-            </a:r>
-            <a:pPr algn="l" indent="0" marL="0">
-              <a:lnSpc>
-                <a:spcPct val="110000"/>
-              </a:lnSpc>
-              <a:buNone/>
-            </a:pPr>
-            <a:r>
-              <a:rPr lang="en-US" sz="1400" dirty="0">
-                <a:solidFill>
-                  <a:srgbClr val="E8A33D"/>
-                </a:solidFill>
-                <a:latin typeface="Courier New" pitchFamily="34" charset="0"/>
-                <a:ea typeface="Courier New" pitchFamily="34" charset="-122"/>
-                <a:cs typeface="Courier New" pitchFamily="34" charset="-120"/>
-              </a:rPr>
-              <a:t> + blockIdx.x * N * blockDim.x</a:t>
-            </a:r>
-            <a:pPr algn="l" indent="0" marL="0">
-              <a:lnSpc>
-                <a:spcPct val="110000"/>
-              </a:lnSpc>
-              <a:buNone/>
-            </a:pPr>
-            <a:r>
-              <a:rPr lang="en-US" sz="1400" dirty="0">
+              <a:t>예) 블록 1, 스레드 2  →  1 * 512 + 2 = 514      (전체 524,288개 중 514번째 스레드)</a:t>
+            </a:r>
+            <a:endParaRPr lang="en-US" sz="1350" dirty="0"/>
+          </a:p>
+        </p:txBody>
+      </p:sp>
+      <p:sp>
+        <p:nvSpPr>
+          <p:cNvPr id="43" name="Shape 41"/>
+          <p:cNvSpPr/>
+          <p:nvPr/>
+        </p:nvSpPr>
+        <p:spPr>
+          <a:xfrm>
+            <a:off x="548640" y="5175504"/>
+            <a:ext cx="5349240" cy="1325880"/>
+          </a:xfrm>
+          <a:prstGeom prst="roundRect">
+            <a:avLst>
+              <a:gd name="adj" fmla="val 5517"/>
+            </a:avLst>
+          </a:prstGeom>
+          <a:solidFill>
+            <a:srgbClr val="18212E"/>
+          </a:solidFill>
+          <a:ln w="19050">
+            <a:solidFill>
+              <a:srgbClr val="3FB8C4"/>
+            </a:solidFill>
+            <a:prstDash val="solid"/>
+          </a:ln>
+        </p:spPr>
+      </p:sp>
+      <p:sp>
+        <p:nvSpPr>
+          <p:cNvPr id="44" name="Text 42"/>
+          <p:cNvSpPr/>
+          <p:nvPr/>
+        </p:nvSpPr>
+        <p:spPr>
+          <a:xfrm>
+            <a:off x="731520" y="5266944"/>
+            <a:ext cx="4983480" cy="292608"/>
+          </a:xfrm>
+          <a:prstGeom prst="rect">
+            <a:avLst/>
+          </a:prstGeom>
+          <a:noFill/>
+          <a:ln/>
+        </p:spPr>
+        <p:txBody>
+          <a:bodyPr wrap="square" lIns="0" tIns="0" rIns="0" bIns="0" rtlCol="0" anchor="ctr"/>
+          <a:lstStyle/>
+          <a:p>
+            <a:pPr indent="0" marL="0">
+              <a:buNone/>
+            </a:pPr>
+            <a:r>
+              <a:rPr lang="en-US" sz="1300" b="1" dirty="0">
                 <a:solidFill>
                   <a:srgbClr val="3FB8C4"/>
-                </a:solidFill>
-                <a:latin typeface="Courier New" pitchFamily="34" charset="0"/>
-                <a:ea typeface="Courier New" pitchFamily="34" charset="-122"/>
-                <a:cs typeface="Courier New" pitchFamily="34" charset="-120"/>
-              </a:rPr>
-              <a:t> + i * blockDim.x</a:t>
-            </a:r>
-            <a:pPr algn="l" indent="0" marL="0">
-              <a:lnSpc>
-                <a:spcPct val="110000"/>
-              </a:lnSpc>
-              <a:buNone/>
-            </a:pPr>
-            <a:r>
-              <a:rPr lang="en-US" sz="1400" dirty="0">
-                <a:solidFill>
-                  <a:srgbClr val="F2C079"/>
-                </a:solidFill>
-                <a:latin typeface="Courier New" pitchFamily="34" charset="0"/>
-                <a:ea typeface="Courier New" pitchFamily="34" charset="-122"/>
-                <a:cs typeface="Courier New" pitchFamily="34" charset="-120"/>
-              </a:rPr>
-              <a:t> + threadIdx.x )</a:t>
-            </a:r>
-            <a:endParaRPr lang="en-US" sz="1400" dirty="0"/>
-          </a:p>
-          <a:p>
-            <a:pPr algn="l" indent="0" marL="0">
-              <a:lnSpc>
-                <a:spcPct val="110000"/>
-              </a:lnSpc>
-              <a:buNone/>
-            </a:pPr>
-            <a:r>
-              <a:rPr lang="en-US" sz="1400" dirty="0">
-                <a:solidFill>
-                  <a:srgbClr val="6B7D94"/>
-                </a:solidFill>
-                <a:latin typeface="Courier New" pitchFamily="34" charset="0"/>
-                <a:ea typeface="Courier New" pitchFamily="34" charset="-122"/>
-                <a:cs typeface="Courier New" pitchFamily="34" charset="-120"/>
-              </a:rPr>
-              <a:t>// core.cu:26 — 스레드 t가 i번째 반복에 건드릴 word 주소</a:t>
-            </a:r>
-            <a:endParaRPr lang="en-US" sz="1400" dirty="0"/>
-          </a:p>
-        </p:txBody>
-      </p:sp>
-      <p:sp>
-        <p:nvSpPr>
-          <p:cNvPr id="6" name="Text 4"/>
-          <p:cNvSpPr/>
-          <p:nvPr/>
-        </p:nvSpPr>
-        <p:spPr>
-          <a:xfrm>
-            <a:off x="548640" y="3108960"/>
-            <a:ext cx="4206240" cy="640080"/>
-          </a:xfrm>
-          <a:prstGeom prst="rect">
-            <a:avLst/>
-          </a:prstGeom>
-          <a:noFill/>
-          <a:ln/>
-        </p:spPr>
-        <p:txBody>
-          <a:bodyPr wrap="square" lIns="0" tIns="0" rIns="0" bIns="0" rtlCol="0" anchor="t"/>
-          <a:lstStyle/>
-          <a:p>
-            <a:pPr indent="0" marL="0">
-              <a:buNone/>
-            </a:pPr>
-            <a:r>
-              <a:rPr lang="en-US" sz="1400" b="1" dirty="0">
-                <a:solidFill>
-                  <a:srgbClr val="E7EDF5"/>
-                </a:solidFill>
-                <a:latin typeface="Courier New" pitchFamily="34" charset="0"/>
-                <a:ea typeface="Courier New" pitchFamily="34" charset="-122"/>
-                <a:cs typeface="Courier New" pitchFamily="34" charset="-120"/>
-              </a:rPr>
-              <a:t>base</a:t>
-            </a:r>
-            <a:endParaRPr lang="en-US" sz="1400" dirty="0"/>
-          </a:p>
-        </p:txBody>
-      </p:sp>
-      <p:sp>
-        <p:nvSpPr>
-          <p:cNvPr id="7" name="Text 5"/>
-          <p:cNvSpPr/>
-          <p:nvPr/>
-        </p:nvSpPr>
-        <p:spPr>
-          <a:xfrm>
-            <a:off x="4937760" y="3108960"/>
-            <a:ext cx="6675120" cy="640080"/>
-          </a:xfrm>
-          <a:prstGeom prst="rect">
-            <a:avLst/>
-          </a:prstGeom>
-          <a:noFill/>
-          <a:ln/>
-        </p:spPr>
-        <p:txBody>
-          <a:bodyPr wrap="square" lIns="0" tIns="0" rIns="0" bIns="0" rtlCol="0" anchor="t"/>
-          <a:lstStyle/>
-          <a:p>
-            <a:pPr indent="0" marL="0">
-              <a:lnSpc>
-                <a:spcPct val="105000"/>
-              </a:lnSpc>
-              <a:buNone/>
-            </a:pPr>
-            <a:r>
-              <a:rPr lang="en-US" sz="1500" dirty="0">
-                <a:solidFill>
-                  <a:srgbClr val="E7EDF5"/>
                 </a:solidFill>
                 <a:latin typeface="Malgun Gothic" pitchFamily="34" charset="0"/>
                 <a:ea typeface="Malgun Gothic" pitchFamily="34" charset="-122"/>
                 <a:cs typeface="Malgun Gothic" pitchFamily="34" charset="-120"/>
               </a:rPr>
-              <a:t>테스트 영역의 시작 주소</a:t>
-            </a:r>
-            <a:endParaRPr lang="en-US" sz="1500" dirty="0"/>
-          </a:p>
-        </p:txBody>
-      </p:sp>
-      <p:sp>
-        <p:nvSpPr>
-          <p:cNvPr id="8" name="Text 6"/>
-          <p:cNvSpPr/>
-          <p:nvPr/>
-        </p:nvSpPr>
-        <p:spPr>
-          <a:xfrm>
-            <a:off x="548640" y="3822192"/>
-            <a:ext cx="4206240" cy="640080"/>
-          </a:xfrm>
-          <a:prstGeom prst="rect">
-            <a:avLst/>
-          </a:prstGeom>
-          <a:noFill/>
-          <a:ln/>
-        </p:spPr>
-        <p:txBody>
-          <a:bodyPr wrap="square" lIns="0" tIns="0" rIns="0" bIns="0" rtlCol="0" anchor="t"/>
-          <a:lstStyle/>
-          <a:p>
-            <a:pPr indent="0" marL="0">
-              <a:buNone/>
-            </a:pPr>
-            <a:r>
-              <a:rPr lang="en-US" sz="1400" b="1" dirty="0">
-                <a:solidFill>
-                  <a:srgbClr val="E8A33D"/>
-                </a:solidFill>
-                <a:latin typeface="Courier New" pitchFamily="34" charset="0"/>
-                <a:ea typeface="Courier New" pitchFamily="34" charset="-122"/>
-                <a:cs typeface="Courier New" pitchFamily="34" charset="-120"/>
-              </a:rPr>
-              <a:t>blockIdx.x * N * blockDim.x</a:t>
-            </a:r>
-            <a:endParaRPr lang="en-US" sz="1400" dirty="0"/>
-          </a:p>
-        </p:txBody>
-      </p:sp>
-      <p:sp>
-        <p:nvSpPr>
-          <p:cNvPr id="9" name="Text 7"/>
-          <p:cNvSpPr/>
-          <p:nvPr/>
-        </p:nvSpPr>
-        <p:spPr>
-          <a:xfrm>
-            <a:off x="4937760" y="3822192"/>
-            <a:ext cx="6675120" cy="640080"/>
+              <a:t>인덱싱 규칙</a:t>
+            </a:r>
+            <a:endParaRPr lang="en-US" sz="1300" dirty="0"/>
+          </a:p>
+        </p:txBody>
+      </p:sp>
+      <p:sp>
+        <p:nvSpPr>
+          <p:cNvPr id="45" name="Text 43"/>
+          <p:cNvSpPr/>
+          <p:nvPr/>
+        </p:nvSpPr>
+        <p:spPr>
+          <a:xfrm>
+            <a:off x="731520" y="5614416"/>
+            <a:ext cx="4983480" cy="822960"/>
           </a:xfrm>
           <a:prstGeom prst="rect">
             <a:avLst/>
@@ -14110,93 +16452,29 @@
           <a:p>
             <a:pPr indent="0" marL="0">
               <a:lnSpc>
-                <a:spcPct val="105000"/>
+                <a:spcPct val="115000"/>
               </a:lnSpc>
               <a:buNone/>
             </a:pPr>
             <a:r>
-              <a:rPr lang="en-US" sz="1500" dirty="0">
-                <a:solidFill>
-                  <a:srgbClr val="E7EDF5"/>
+              <a:rPr lang="en-US" sz="1250" dirty="0">
+                <a:solidFill>
+                  <a:srgbClr val="E8A33D"/>
                 </a:solidFill>
                 <a:latin typeface="Malgun Gothic" pitchFamily="34" charset="0"/>
                 <a:ea typeface="Malgun Gothic" pitchFamily="34" charset="-122"/>
                 <a:cs typeface="Malgun Gothic" pitchFamily="34" charset="-120"/>
               </a:rPr>
-              <a:t>이 블록이 담당하는 큰 구역의 시작 (블록마다 N·512 word씩 떨어짐)</a:t>
-            </a:r>
-            <a:endParaRPr lang="en-US" sz="1500" dirty="0"/>
-          </a:p>
-        </p:txBody>
-      </p:sp>
-      <p:sp>
-        <p:nvSpPr>
-          <p:cNvPr id="10" name="Text 8"/>
-          <p:cNvSpPr/>
-          <p:nvPr/>
-        </p:nvSpPr>
-        <p:spPr>
-          <a:xfrm>
-            <a:off x="548640" y="4535424"/>
-            <a:ext cx="4206240" cy="640080"/>
-          </a:xfrm>
-          <a:prstGeom prst="rect">
-            <a:avLst/>
-          </a:prstGeom>
-          <a:noFill/>
-          <a:ln/>
-        </p:spPr>
-        <p:txBody>
-          <a:bodyPr wrap="square" lIns="0" tIns="0" rIns="0" bIns="0" rtlCol="0" anchor="t"/>
-          <a:lstStyle/>
-          <a:p>
-            <a:pPr indent="0" marL="0">
-              <a:buNone/>
-            </a:pPr>
-            <a:r>
-              <a:rPr lang="en-US" sz="1400" b="1" dirty="0">
-                <a:solidFill>
-                  <a:srgbClr val="3FB8C4"/>
-                </a:solidFill>
-                <a:latin typeface="Courier New" pitchFamily="34" charset="0"/>
-                <a:ea typeface="Courier New" pitchFamily="34" charset="-122"/>
-                <a:cs typeface="Courier New" pitchFamily="34" charset="-120"/>
-              </a:rPr>
-              <a:t>i * blockDim.x</a:t>
-            </a:r>
-            <a:endParaRPr lang="en-US" sz="1400" dirty="0"/>
-          </a:p>
-        </p:txBody>
-      </p:sp>
-      <p:sp>
-        <p:nvSpPr>
-          <p:cNvPr id="11" name="Text 9"/>
-          <p:cNvSpPr/>
-          <p:nvPr/>
-        </p:nvSpPr>
-        <p:spPr>
-          <a:xfrm>
-            <a:off x="4937760" y="4535424"/>
-            <a:ext cx="6675120" cy="640080"/>
-          </a:xfrm>
-          <a:prstGeom prst="rect">
-            <a:avLst/>
-          </a:prstGeom>
-          <a:noFill/>
-          <a:ln/>
-        </p:spPr>
-        <p:txBody>
-          <a:bodyPr wrap="square" lIns="0" tIns="0" rIns="0" bIns="0" rtlCol="0" anchor="t"/>
-          <a:lstStyle/>
-          <a:p>
+              <a:t>blockIdx.x</a:t>
+            </a:r>
             <a:pPr indent="0" marL="0">
               <a:lnSpc>
-                <a:spcPct val="105000"/>
+                <a:spcPct val="115000"/>
               </a:lnSpc>
               <a:buNone/>
             </a:pPr>
             <a:r>
-              <a:rPr lang="en-US" sz="1500" dirty="0">
+              <a:rPr lang="en-US" sz="1250" dirty="0">
                 <a:solidFill>
                   <a:srgbClr val="E7EDF5"/>
                 </a:solidFill>
@@ -14204,90 +16482,333 @@
                 <a:ea typeface="Malgun Gothic" pitchFamily="34" charset="-122"/>
                 <a:cs typeface="Malgun Gothic" pitchFamily="34" charset="-120"/>
               </a:rPr>
-              <a:t>블록 안에서 i번째 반복의 오프셋 (한 스레드가 N개 word 담당)</a:t>
-            </a:r>
-            <a:endParaRPr lang="en-US" sz="1500" dirty="0"/>
-          </a:p>
-        </p:txBody>
-      </p:sp>
-      <p:sp>
-        <p:nvSpPr>
-          <p:cNvPr id="12" name="Text 10"/>
-          <p:cNvSpPr/>
-          <p:nvPr/>
-        </p:nvSpPr>
-        <p:spPr>
-          <a:xfrm>
-            <a:off x="548640" y="5248656"/>
-            <a:ext cx="4206240" cy="640080"/>
-          </a:xfrm>
-          <a:prstGeom prst="rect">
-            <a:avLst/>
-          </a:prstGeom>
-          <a:noFill/>
-          <a:ln/>
-        </p:spPr>
-        <p:txBody>
-          <a:bodyPr wrap="square" lIns="0" tIns="0" rIns="0" bIns="0" rtlCol="0" anchor="t"/>
-          <a:lstStyle/>
-          <a:p>
-            <a:pPr indent="0" marL="0">
-              <a:buNone/>
-            </a:pPr>
-            <a:r>
-              <a:rPr lang="en-US" sz="1400" b="1" dirty="0">
-                <a:solidFill>
-                  <a:srgbClr val="F2C079"/>
-                </a:solidFill>
-                <a:latin typeface="Courier New" pitchFamily="34" charset="0"/>
-                <a:ea typeface="Courier New" pitchFamily="34" charset="-122"/>
-                <a:cs typeface="Courier New" pitchFamily="34" charset="-120"/>
-              </a:rPr>
-              <a:t>threadIdx.x</a:t>
-            </a:r>
-            <a:endParaRPr lang="en-US" sz="1400" dirty="0"/>
-          </a:p>
-        </p:txBody>
-      </p:sp>
-      <p:sp>
-        <p:nvSpPr>
-          <p:cNvPr id="13" name="Text 11"/>
-          <p:cNvSpPr/>
-          <p:nvPr/>
-        </p:nvSpPr>
-        <p:spPr>
-          <a:xfrm>
-            <a:off x="4937760" y="5248656"/>
-            <a:ext cx="6675120" cy="640080"/>
-          </a:xfrm>
-          <a:prstGeom prst="rect">
-            <a:avLst/>
-          </a:prstGeom>
-          <a:noFill/>
-          <a:ln/>
-        </p:spPr>
-        <p:txBody>
-          <a:bodyPr wrap="square" lIns="0" tIns="0" rIns="0" bIns="0" rtlCol="0" anchor="t"/>
-          <a:lstStyle/>
-          <a:p>
+              <a:t> 내 블록(0~1023) · </a:t>
+            </a:r>
             <a:pPr indent="0" marL="0">
               <a:lnSpc>
-                <a:spcPct val="105000"/>
+                <a:spcPct val="115000"/>
               </a:lnSpc>
               <a:buNone/>
             </a:pPr>
             <a:r>
-              <a:rPr lang="en-US" sz="1500" dirty="0">
-                <a:solidFill>
-                  <a:srgbClr val="E7EDF5"/>
+              <a:rPr lang="en-US" sz="1250" dirty="0">
+                <a:solidFill>
+                  <a:srgbClr val="E8A33D"/>
                 </a:solidFill>
                 <a:latin typeface="Malgun Gothic" pitchFamily="34" charset="0"/>
                 <a:ea typeface="Malgun Gothic" pitchFamily="34" charset="-122"/>
                 <a:cs typeface="Malgun Gothic" pitchFamily="34" charset="-120"/>
               </a:rPr>
-              <a:t>그 안에서 내 스레드의 위치 (0~511)</a:t>
-            </a:r>
-            <a:endParaRPr lang="en-US" sz="1500" dirty="0"/>
+              <a:t>threadIdx.x</a:t>
+            </a:r>
+            <a:pPr indent="0" marL="0">
+              <a:lnSpc>
+                <a:spcPct val="115000"/>
+              </a:lnSpc>
+              <a:buNone/>
+            </a:pPr>
+            <a:r>
+              <a:rPr lang="en-US" sz="1250" dirty="0">
+                <a:solidFill>
+                  <a:srgbClr val="E7EDF5"/>
+                </a:solidFill>
+                <a:latin typeface="Malgun Gothic" pitchFamily="34" charset="0"/>
+                <a:ea typeface="Malgun Gothic" pitchFamily="34" charset="-122"/>
+                <a:cs typeface="Malgun Gothic" pitchFamily="34" charset="-120"/>
+              </a:rPr>
+              <a:t> 블록 내(0~511)
+</a:t>
+            </a:r>
+            <a:endParaRPr lang="en-US" sz="1250" dirty="0"/>
+          </a:p>
+          <a:p>
+            <a:pPr indent="0" marL="0">
+              <a:lnSpc>
+                <a:spcPct val="115000"/>
+              </a:lnSpc>
+              <a:buNone/>
+            </a:pPr>
+            <a:r>
+              <a:rPr lang="en-US" sz="1250" dirty="0">
+                <a:solidFill>
+                  <a:srgbClr val="E7EDF5"/>
+                </a:solidFill>
+                <a:latin typeface="Malgun Gothic" pitchFamily="34" charset="0"/>
+                <a:ea typeface="Malgun Gothic" pitchFamily="34" charset="-122"/>
+                <a:cs typeface="Malgun Gothic" pitchFamily="34" charset="-120"/>
+              </a:rPr>
+              <a:t>1024 블록 × 512 스레드 = </a:t>
+            </a:r>
+            <a:pPr indent="0" marL="0">
+              <a:lnSpc>
+                <a:spcPct val="115000"/>
+              </a:lnSpc>
+              <a:buNone/>
+            </a:pPr>
+            <a:r>
+              <a:rPr lang="en-US" sz="1250" b="1" dirty="0">
+                <a:solidFill>
+                  <a:srgbClr val="F2C079"/>
+                </a:solidFill>
+                <a:latin typeface="Malgun Gothic" pitchFamily="34" charset="0"/>
+                <a:ea typeface="Malgun Gothic" pitchFamily="34" charset="-122"/>
+                <a:cs typeface="Malgun Gothic" pitchFamily="34" charset="-120"/>
+              </a:rPr>
+              <a:t>524,288 스레드</a:t>
+            </a:r>
+            <a:endParaRPr lang="en-US" sz="1250" dirty="0"/>
+          </a:p>
+        </p:txBody>
+      </p:sp>
+      <p:sp>
+        <p:nvSpPr>
+          <p:cNvPr id="46" name="Shape 44"/>
+          <p:cNvSpPr/>
+          <p:nvPr/>
+        </p:nvSpPr>
+        <p:spPr>
+          <a:xfrm>
+            <a:off x="6263640" y="5175504"/>
+            <a:ext cx="5349240" cy="1325880"/>
+          </a:xfrm>
+          <a:prstGeom prst="roundRect">
+            <a:avLst>
+              <a:gd name="adj" fmla="val 5517"/>
+            </a:avLst>
+          </a:prstGeom>
+          <a:solidFill>
+            <a:srgbClr val="18212E"/>
+          </a:solidFill>
+          <a:ln w="19050">
+            <a:solidFill>
+              <a:srgbClr val="E8A33D"/>
+            </a:solidFill>
+            <a:prstDash val="solid"/>
+          </a:ln>
+        </p:spPr>
+      </p:sp>
+      <p:sp>
+        <p:nvSpPr>
+          <p:cNvPr id="47" name="Text 45"/>
+          <p:cNvSpPr/>
+          <p:nvPr/>
+        </p:nvSpPr>
+        <p:spPr>
+          <a:xfrm>
+            <a:off x="6446520" y="5266944"/>
+            <a:ext cx="4983480" cy="292608"/>
+          </a:xfrm>
+          <a:prstGeom prst="rect">
+            <a:avLst/>
+          </a:prstGeom>
+          <a:noFill/>
+          <a:ln/>
+        </p:spPr>
+        <p:txBody>
+          <a:bodyPr wrap="square" lIns="0" tIns="0" rIns="0" bIns="0" rtlCol="0" anchor="ctr"/>
+          <a:lstStyle/>
+          <a:p>
+            <a:pPr indent="0" marL="0">
+              <a:buNone/>
+            </a:pPr>
+            <a:r>
+              <a:rPr lang="en-US" sz="1300" b="1" dirty="0">
+                <a:solidFill>
+                  <a:srgbClr val="E8A33D"/>
+                </a:solidFill>
+                <a:latin typeface="Malgun Gothic" pitchFamily="34" charset="0"/>
+                <a:ea typeface="Malgun Gothic" pitchFamily="34" charset="-122"/>
+                <a:cs typeface="Malgun Gothic" pitchFamily="34" charset="-120"/>
+              </a:rPr>
+              <a:t>메모리 분할 (다음 슬라이드로 연결)</a:t>
+            </a:r>
+            <a:endParaRPr lang="en-US" sz="1300" dirty="0"/>
+          </a:p>
+        </p:txBody>
+      </p:sp>
+      <p:sp>
+        <p:nvSpPr>
+          <p:cNvPr id="48" name="Text 46"/>
+          <p:cNvSpPr/>
+          <p:nvPr/>
+        </p:nvSpPr>
+        <p:spPr>
+          <a:xfrm>
+            <a:off x="6446520" y="5614416"/>
+            <a:ext cx="4983480" cy="822960"/>
+          </a:xfrm>
+          <a:prstGeom prst="rect">
+            <a:avLst/>
+          </a:prstGeom>
+          <a:noFill/>
+          <a:ln/>
+        </p:spPr>
+        <p:txBody>
+          <a:bodyPr wrap="square" lIns="0" tIns="0" rIns="0" bIns="0" rtlCol="0" anchor="t"/>
+          <a:lstStyle/>
+          <a:p>
+            <a:pPr indent="0" marL="0">
+              <a:lnSpc>
+                <a:spcPct val="112000"/>
+              </a:lnSpc>
+              <a:buNone/>
+            </a:pPr>
+            <a:r>
+              <a:rPr lang="en-US" sz="1250" dirty="0">
+                <a:solidFill>
+                  <a:srgbClr val="E7EDF5"/>
+                </a:solidFill>
+                <a:latin typeface="Malgun Gothic" pitchFamily="34" charset="0"/>
+                <a:ea typeface="Malgun Gothic" pitchFamily="34" charset="-122"/>
+                <a:cs typeface="Malgun Gothic" pitchFamily="34" charset="-120"/>
+              </a:rPr>
+              <a:t>블록 b 는 </a:t>
+            </a:r>
+            <a:pPr indent="0" marL="0">
+              <a:lnSpc>
+                <a:spcPct val="112000"/>
+              </a:lnSpc>
+              <a:buNone/>
+            </a:pPr>
+            <a:r>
+              <a:rPr lang="en-US" sz="1250" dirty="0">
+                <a:solidFill>
+                  <a:srgbClr val="F2C079"/>
+                </a:solidFill>
+                <a:latin typeface="Malgun Gothic" pitchFamily="34" charset="0"/>
+                <a:ea typeface="Malgun Gothic" pitchFamily="34" charset="-122"/>
+                <a:cs typeface="Malgun Gothic" pitchFamily="34" charset="-120"/>
+              </a:rPr>
+              <a:t>N·512 word</a:t>
+            </a:r>
+            <a:pPr indent="0" marL="0">
+              <a:lnSpc>
+                <a:spcPct val="112000"/>
+              </a:lnSpc>
+              <a:buNone/>
+            </a:pPr>
+            <a:r>
+              <a:rPr lang="en-US" sz="1250" dirty="0">
+                <a:solidFill>
+                  <a:srgbClr val="E7EDF5"/>
+                </a:solidFill>
+                <a:latin typeface="Malgun Gothic" pitchFamily="34" charset="0"/>
+                <a:ea typeface="Malgun Gothic" pitchFamily="34" charset="-122"/>
+                <a:cs typeface="Malgun Gothic" pitchFamily="34" charset="-120"/>
+              </a:rPr>
+              <a:t> 구역을 담당
+</a:t>
+            </a:r>
+            <a:endParaRPr lang="en-US" sz="1250" dirty="0"/>
+          </a:p>
+          <a:p>
+            <a:pPr indent="0" marL="0">
+              <a:lnSpc>
+                <a:spcPct val="112000"/>
+              </a:lnSpc>
+              <a:buNone/>
+            </a:pPr>
+            <a:r>
+              <a:rPr lang="en-US" sz="1250" dirty="0">
+                <a:solidFill>
+                  <a:srgbClr val="E7EDF5"/>
+                </a:solidFill>
+                <a:latin typeface="Malgun Gothic" pitchFamily="34" charset="0"/>
+                <a:ea typeface="Malgun Gothic" pitchFamily="34" charset="-122"/>
+                <a:cs typeface="Malgun Gothic" pitchFamily="34" charset="-120"/>
+              </a:rPr>
+              <a:t>그 안에서 반복 </a:t>
+            </a:r>
+            <a:pPr indent="0" marL="0">
+              <a:lnSpc>
+                <a:spcPct val="112000"/>
+              </a:lnSpc>
+              <a:buNone/>
+            </a:pPr>
+            <a:r>
+              <a:rPr lang="en-US" sz="1250" dirty="0">
+                <a:solidFill>
+                  <a:srgbClr val="3FB8C4"/>
+                </a:solidFill>
+                <a:latin typeface="Malgun Gothic" pitchFamily="34" charset="0"/>
+                <a:ea typeface="Malgun Gothic" pitchFamily="34" charset="-122"/>
+                <a:cs typeface="Malgun Gothic" pitchFamily="34" charset="-120"/>
+              </a:rPr>
+              <a:t>i·512 + threadIdx.x</a:t>
+            </a:r>
+            <a:pPr indent="0" marL="0">
+              <a:lnSpc>
+                <a:spcPct val="112000"/>
+              </a:lnSpc>
+              <a:buNone/>
+            </a:pPr>
+            <a:r>
+              <a:rPr lang="en-US" sz="1250" dirty="0">
+                <a:solidFill>
+                  <a:srgbClr val="E7EDF5"/>
+                </a:solidFill>
+                <a:latin typeface="Malgun Gothic" pitchFamily="34" charset="0"/>
+                <a:ea typeface="Malgun Gothic" pitchFamily="34" charset="-122"/>
+                <a:cs typeface="Malgun Gothic" pitchFamily="34" charset="-120"/>
+              </a:rPr>
+              <a:t> 로 인터리빙
+</a:t>
+            </a:r>
+            <a:endParaRPr lang="en-US" sz="1250" dirty="0"/>
+          </a:p>
+          <a:p>
+            <a:pPr indent="0" marL="0">
+              <a:lnSpc>
+                <a:spcPct val="112000"/>
+              </a:lnSpc>
+              <a:buNone/>
+            </a:pPr>
+            <a:r>
+              <a:rPr lang="en-US" sz="1250" dirty="0">
+                <a:solidFill>
+                  <a:srgbClr val="E7EDF5"/>
+                </a:solidFill>
+                <a:latin typeface="Malgun Gothic" pitchFamily="34" charset="0"/>
+                <a:ea typeface="Malgun Gothic" pitchFamily="34" charset="-122"/>
+                <a:cs typeface="Malgun Gothic" pitchFamily="34" charset="-120"/>
+              </a:rPr>
+              <a:t>→ 이 좌표 계산이 곧 </a:t>
+            </a:r>
+            <a:pPr indent="0" marL="0">
+              <a:lnSpc>
+                <a:spcPct val="112000"/>
+              </a:lnSpc>
+              <a:buNone/>
+            </a:pPr>
+            <a:r>
+              <a:rPr lang="en-US" sz="1250" b="1" dirty="0">
+                <a:solidFill>
+                  <a:srgbClr val="E8A33D"/>
+                </a:solidFill>
+                <a:latin typeface="Malgun Gothic" pitchFamily="34" charset="0"/>
+                <a:ea typeface="Malgun Gothic" pitchFamily="34" charset="-122"/>
+                <a:cs typeface="Malgun Gothic" pitchFamily="34" charset="-120"/>
+              </a:rPr>
+              <a:t>THREAD_ADDRESS</a:t>
+            </a:r>
+            <a:pPr indent="0" marL="0">
+              <a:lnSpc>
+                <a:spcPct val="112000"/>
+              </a:lnSpc>
+              <a:buNone/>
+            </a:pPr>
+            <a:r>
+              <a:rPr lang="en-US" sz="1250" dirty="0">
+                <a:solidFill>
+                  <a:srgbClr val="E7EDF5"/>
+                </a:solidFill>
+                <a:latin typeface="Malgun Gothic" pitchFamily="34" charset="0"/>
+                <a:ea typeface="Malgun Gothic" pitchFamily="34" charset="-122"/>
+                <a:cs typeface="Malgun Gothic" pitchFamily="34" charset="-120"/>
+              </a:rPr>
+              <a:t> 매크로</a:t>
+            </a:r>
+            <a:endParaRPr lang="en-US" sz="1250" dirty="0"/>
           </a:p>
         </p:txBody>
       </p:sp>
@@ -14360,7 +16881,7 @@
                 <a:ea typeface="Courier New" pitchFamily="34" charset="-122"/>
                 <a:cs typeface="Courier New" pitchFamily="34" charset="-120"/>
               </a:rPr>
-              <a:t>6</a:t>
+              <a:t>5</a:t>
             </a:r>
             <a:endParaRPr lang="en-US" sz="2200" dirty="0"/>
           </a:p>
@@ -14399,7 +16920,7 @@
                 <a:ea typeface="Malgun Gothic" pitchFamily="34" charset="-122"/>
                 <a:cs typeface="Malgun Gothic" pitchFamily="34" charset="-120"/>
               </a:rPr>
-              <a:t>왜 이렇게 매핑하나 · 메모리 병합(coalescing)</a:t>
+              <a:t>★ THREAD_ADDRESS · 모든 테스트의 심장</a:t>
             </a:r>
             <a:endParaRPr lang="en-US" sz="2900" dirty="0"/>
           </a:p>
@@ -14407,57 +16928,18 @@
       </p:sp>
       <p:sp>
         <p:nvSpPr>
-          <p:cNvPr id="4" name="Text 2"/>
-          <p:cNvSpPr/>
-          <p:nvPr/>
-        </p:nvSpPr>
-        <p:spPr>
-          <a:xfrm>
-            <a:off x="548640" y="1417320"/>
-            <a:ext cx="11064240" cy="457200"/>
-          </a:xfrm>
-          <a:prstGeom prst="rect">
-            <a:avLst/>
-          </a:prstGeom>
-          <a:noFill/>
-          <a:ln/>
-        </p:spPr>
-        <p:txBody>
-          <a:bodyPr wrap="square" lIns="0" tIns="0" rIns="0" bIns="0" rtlCol="0" anchor="ctr"/>
-          <a:lstStyle/>
-          <a:p>
-            <a:pPr indent="0" marL="0">
-              <a:buNone/>
-            </a:pPr>
-            <a:r>
-              <a:rPr lang="en-US" sz="1550" dirty="0">
-                <a:solidFill>
-                  <a:srgbClr val="9FB0C4"/>
-                </a:solidFill>
-                <a:latin typeface="Malgun Gothic" pitchFamily="34" charset="0"/>
-                <a:ea typeface="Malgun Gothic" pitchFamily="34" charset="-122"/>
-                <a:cs typeface="Malgun Gothic" pitchFamily="34" charset="-120"/>
-              </a:rPr>
-              <a:t>같은 반복 i에서 이웃 스레드(threadIdx.x)가 이웃한 주소를 맡습니다. 이 '인터리빙'이 성능의 열쇠입니다.</a:t>
-            </a:r>
-            <a:endParaRPr lang="en-US" sz="1550" dirty="0"/>
-          </a:p>
-        </p:txBody>
-      </p:sp>
-      <p:sp>
-        <p:nvSpPr>
-          <p:cNvPr id="5" name="Shape 3"/>
-          <p:cNvSpPr/>
-          <p:nvPr/>
-        </p:nvSpPr>
-        <p:spPr>
-          <a:xfrm>
-            <a:off x="576072" y="2148840"/>
-            <a:ext cx="1328166" cy="868680"/>
+          <p:cNvPr id="4" name="Shape 2"/>
+          <p:cNvSpPr/>
+          <p:nvPr/>
+        </p:nvSpPr>
+        <p:spPr>
+          <a:xfrm>
+            <a:off x="548640" y="1463040"/>
+            <a:ext cx="11064240" cy="1371600"/>
           </a:xfrm>
           <a:prstGeom prst="roundRect">
             <a:avLst>
-              <a:gd name="adj" fmla="val 4211"/>
+              <a:gd name="adj" fmla="val 3333"/>
             </a:avLst>
           </a:prstGeom>
           <a:solidFill>
@@ -14465,7 +16947,7 @@
           </a:solidFill>
           <a:ln w="12700">
             <a:solidFill>
-              <a:srgbClr val="E8A33D"/>
+              <a:srgbClr val="2C3A4E"/>
             </a:solidFill>
             <a:prstDash val="solid"/>
           </a:ln>
@@ -14473,345 +16955,163 @@
       </p:sp>
       <p:sp>
         <p:nvSpPr>
-          <p:cNvPr id="6" name="Text 4"/>
-          <p:cNvSpPr/>
-          <p:nvPr/>
-        </p:nvSpPr>
-        <p:spPr>
-          <a:xfrm>
-            <a:off x="548640" y="2276856"/>
-            <a:ext cx="1383030" cy="365760"/>
-          </a:xfrm>
-          <a:prstGeom prst="rect">
-            <a:avLst/>
-          </a:prstGeom>
-          <a:noFill/>
-          <a:ln/>
-        </p:spPr>
-        <p:txBody>
-          <a:bodyPr wrap="square" lIns="0" tIns="0" rIns="0" bIns="0" rtlCol="0" anchor="ctr"/>
-          <a:lstStyle/>
-          <a:p>
-            <a:pPr algn="ctr" indent="0" marL="0">
-              <a:buNone/>
-            </a:pPr>
-            <a:r>
-              <a:rPr lang="en-US" sz="1600" b="1" dirty="0">
-                <a:solidFill>
-                  <a:srgbClr val="E7EDF5"/>
+          <p:cNvPr id="5" name="Text 3"/>
+          <p:cNvSpPr/>
+          <p:nvPr/>
+        </p:nvSpPr>
+        <p:spPr>
+          <a:xfrm>
+            <a:off x="768096" y="1609344"/>
+            <a:ext cx="10625328" cy="1078992"/>
+          </a:xfrm>
+          <a:prstGeom prst="rect">
+            <a:avLst/>
+          </a:prstGeom>
+          <a:noFill/>
+          <a:ln/>
+        </p:spPr>
+        <p:txBody>
+          <a:bodyPr wrap="square" lIns="0" tIns="0" rIns="0" bIns="0" rtlCol="0" anchor="t"/>
+          <a:lstStyle/>
+          <a:p>
+            <a:pPr algn="l" indent="0" marL="0">
+              <a:lnSpc>
+                <a:spcPct val="110000"/>
+              </a:lnSpc>
+              <a:buNone/>
+            </a:pPr>
+            <a:r>
+              <a:rPr lang="en-US" sz="1400" dirty="0">
+                <a:solidFill>
+                  <a:srgbClr val="F2C079"/>
                 </a:solidFill>
                 <a:latin typeface="Courier New" pitchFamily="34" charset="0"/>
                 <a:ea typeface="Courier New" pitchFamily="34" charset="-122"/>
                 <a:cs typeface="Courier New" pitchFamily="34" charset="-120"/>
               </a:rPr>
-              <a:t>T0</a:t>
-            </a:r>
-            <a:endParaRPr lang="en-US" sz="1600" dirty="0"/>
-          </a:p>
-        </p:txBody>
-      </p:sp>
-      <p:sp>
-        <p:nvSpPr>
-          <p:cNvPr id="7" name="Text 5"/>
-          <p:cNvSpPr/>
-          <p:nvPr/>
-        </p:nvSpPr>
-        <p:spPr>
-          <a:xfrm>
-            <a:off x="548640" y="2651760"/>
-            <a:ext cx="1383030" cy="274320"/>
-          </a:xfrm>
-          <a:prstGeom prst="rect">
-            <a:avLst/>
-          </a:prstGeom>
-          <a:noFill/>
-          <a:ln/>
-        </p:spPr>
-        <p:txBody>
-          <a:bodyPr wrap="square" lIns="0" tIns="0" rIns="0" bIns="0" rtlCol="0" anchor="ctr"/>
-          <a:lstStyle/>
-          <a:p>
-            <a:pPr algn="ctr" indent="0" marL="0">
-              <a:buNone/>
-            </a:pPr>
-            <a:r>
-              <a:rPr lang="en-US" sz="1050" dirty="0">
-                <a:solidFill>
-                  <a:srgbClr val="9FB0C4"/>
+              <a:t>#define THREAD_ADDRESS(base, N, i)   \</a:t>
+            </a:r>
+            <a:endParaRPr lang="en-US" sz="1400" dirty="0"/>
+          </a:p>
+          <a:p>
+            <a:pPr algn="l" indent="0" marL="0">
+              <a:lnSpc>
+                <a:spcPct val="110000"/>
+              </a:lnSpc>
+              <a:buNone/>
+            </a:pPr>
+            <a:r>
+              <a:rPr lang="en-US" sz="1400" dirty="0">
+                <a:solidFill>
+                  <a:srgbClr val="E7EDF5"/>
                 </a:solidFill>
                 <a:latin typeface="Courier New" pitchFamily="34" charset="0"/>
                 <a:ea typeface="Courier New" pitchFamily="34" charset="-122"/>
                 <a:cs typeface="Courier New" pitchFamily="34" charset="-120"/>
               </a:rPr>
-              <a:t>+0B</a:t>
-            </a:r>
-            <a:endParaRPr lang="en-US" sz="1050" dirty="0"/>
-          </a:p>
-        </p:txBody>
-      </p:sp>
-      <p:sp>
-        <p:nvSpPr>
-          <p:cNvPr id="8" name="Shape 6"/>
-          <p:cNvSpPr/>
-          <p:nvPr/>
-        </p:nvSpPr>
-        <p:spPr>
-          <a:xfrm>
-            <a:off x="1959102" y="2148840"/>
-            <a:ext cx="1328166" cy="868680"/>
-          </a:xfrm>
-          <a:prstGeom prst="roundRect">
-            <a:avLst>
-              <a:gd name="adj" fmla="val 4211"/>
-            </a:avLst>
-          </a:prstGeom>
-          <a:solidFill>
-            <a:srgbClr val="0B1119"/>
-          </a:solidFill>
-          <a:ln w="12700">
-            <a:solidFill>
-              <a:srgbClr val="3FB8C4"/>
-            </a:solidFill>
-            <a:prstDash val="solid"/>
-          </a:ln>
-        </p:spPr>
-      </p:sp>
-      <p:sp>
-        <p:nvSpPr>
-          <p:cNvPr id="9" name="Text 7"/>
-          <p:cNvSpPr/>
-          <p:nvPr/>
-        </p:nvSpPr>
-        <p:spPr>
-          <a:xfrm>
-            <a:off x="1931670" y="2276856"/>
-            <a:ext cx="1383030" cy="365760"/>
-          </a:xfrm>
-          <a:prstGeom prst="rect">
-            <a:avLst/>
-          </a:prstGeom>
-          <a:noFill/>
-          <a:ln/>
-        </p:spPr>
-        <p:txBody>
-          <a:bodyPr wrap="square" lIns="0" tIns="0" rIns="0" bIns="0" rtlCol="0" anchor="ctr"/>
-          <a:lstStyle/>
-          <a:p>
-            <a:pPr algn="ctr" indent="0" marL="0">
-              <a:buNone/>
-            </a:pPr>
-            <a:r>
-              <a:rPr lang="en-US" sz="1600" b="1" dirty="0">
-                <a:solidFill>
-                  <a:srgbClr val="E7EDF5"/>
+              <a:t>   ( base</a:t>
+            </a:r>
+            <a:pPr algn="l" indent="0" marL="0">
+              <a:lnSpc>
+                <a:spcPct val="110000"/>
+              </a:lnSpc>
+              <a:buNone/>
+            </a:pPr>
+            <a:r>
+              <a:rPr lang="en-US" sz="1400" dirty="0">
+                <a:solidFill>
+                  <a:srgbClr val="E8A33D"/>
                 </a:solidFill>
                 <a:latin typeface="Courier New" pitchFamily="34" charset="0"/>
                 <a:ea typeface="Courier New" pitchFamily="34" charset="-122"/>
                 <a:cs typeface="Courier New" pitchFamily="34" charset="-120"/>
               </a:rPr>
-              <a:t>T1</a:t>
-            </a:r>
-            <a:endParaRPr lang="en-US" sz="1600" dirty="0"/>
-          </a:p>
-        </p:txBody>
-      </p:sp>
-      <p:sp>
-        <p:nvSpPr>
-          <p:cNvPr id="10" name="Text 8"/>
-          <p:cNvSpPr/>
-          <p:nvPr/>
-        </p:nvSpPr>
-        <p:spPr>
-          <a:xfrm>
-            <a:off x="1931670" y="2651760"/>
-            <a:ext cx="1383030" cy="274320"/>
-          </a:xfrm>
-          <a:prstGeom prst="rect">
-            <a:avLst/>
-          </a:prstGeom>
-          <a:noFill/>
-          <a:ln/>
-        </p:spPr>
-        <p:txBody>
-          <a:bodyPr wrap="square" lIns="0" tIns="0" rIns="0" bIns="0" rtlCol="0" anchor="ctr"/>
-          <a:lstStyle/>
-          <a:p>
-            <a:pPr algn="ctr" indent="0" marL="0">
-              <a:buNone/>
-            </a:pPr>
-            <a:r>
-              <a:rPr lang="en-US" sz="1050" dirty="0">
-                <a:solidFill>
-                  <a:srgbClr val="9FB0C4"/>
+              <a:t> + blockIdx.x * N * blockDim.x</a:t>
+            </a:r>
+            <a:pPr algn="l" indent="0" marL="0">
+              <a:lnSpc>
+                <a:spcPct val="110000"/>
+              </a:lnSpc>
+              <a:buNone/>
+            </a:pPr>
+            <a:r>
+              <a:rPr lang="en-US" sz="1400" dirty="0">
+                <a:solidFill>
+                  <a:srgbClr val="3FB8C4"/>
                 </a:solidFill>
                 <a:latin typeface="Courier New" pitchFamily="34" charset="0"/>
                 <a:ea typeface="Courier New" pitchFamily="34" charset="-122"/>
                 <a:cs typeface="Courier New" pitchFamily="34" charset="-120"/>
               </a:rPr>
-              <a:t>+4B</a:t>
-            </a:r>
-            <a:endParaRPr lang="en-US" sz="1050" dirty="0"/>
-          </a:p>
-        </p:txBody>
-      </p:sp>
-      <p:sp>
-        <p:nvSpPr>
-          <p:cNvPr id="11" name="Shape 9"/>
-          <p:cNvSpPr/>
-          <p:nvPr/>
-        </p:nvSpPr>
-        <p:spPr>
-          <a:xfrm>
-            <a:off x="3342132" y="2148840"/>
-            <a:ext cx="1328166" cy="868680"/>
-          </a:xfrm>
-          <a:prstGeom prst="roundRect">
-            <a:avLst>
-              <a:gd name="adj" fmla="val 4211"/>
-            </a:avLst>
-          </a:prstGeom>
-          <a:solidFill>
-            <a:srgbClr val="0B1119"/>
-          </a:solidFill>
-          <a:ln w="12700">
-            <a:solidFill>
-              <a:srgbClr val="E8A33D"/>
-            </a:solidFill>
-            <a:prstDash val="solid"/>
-          </a:ln>
-        </p:spPr>
-      </p:sp>
-      <p:sp>
-        <p:nvSpPr>
-          <p:cNvPr id="12" name="Text 10"/>
-          <p:cNvSpPr/>
-          <p:nvPr/>
-        </p:nvSpPr>
-        <p:spPr>
-          <a:xfrm>
-            <a:off x="3314700" y="2276856"/>
-            <a:ext cx="1383030" cy="365760"/>
-          </a:xfrm>
-          <a:prstGeom prst="rect">
-            <a:avLst/>
-          </a:prstGeom>
-          <a:noFill/>
-          <a:ln/>
-        </p:spPr>
-        <p:txBody>
-          <a:bodyPr wrap="square" lIns="0" tIns="0" rIns="0" bIns="0" rtlCol="0" anchor="ctr"/>
-          <a:lstStyle/>
-          <a:p>
-            <a:pPr algn="ctr" indent="0" marL="0">
-              <a:buNone/>
-            </a:pPr>
-            <a:r>
-              <a:rPr lang="en-US" sz="1600" b="1" dirty="0">
-                <a:solidFill>
-                  <a:srgbClr val="E7EDF5"/>
+              <a:t> + i * blockDim.x</a:t>
+            </a:r>
+            <a:pPr algn="l" indent="0" marL="0">
+              <a:lnSpc>
+                <a:spcPct val="110000"/>
+              </a:lnSpc>
+              <a:buNone/>
+            </a:pPr>
+            <a:r>
+              <a:rPr lang="en-US" sz="1400" dirty="0">
+                <a:solidFill>
+                  <a:srgbClr val="F2C079"/>
                 </a:solidFill>
                 <a:latin typeface="Courier New" pitchFamily="34" charset="0"/>
                 <a:ea typeface="Courier New" pitchFamily="34" charset="-122"/>
                 <a:cs typeface="Courier New" pitchFamily="34" charset="-120"/>
               </a:rPr>
-              <a:t>T2</a:t>
-            </a:r>
-            <a:endParaRPr lang="en-US" sz="1600" dirty="0"/>
-          </a:p>
-        </p:txBody>
-      </p:sp>
-      <p:sp>
-        <p:nvSpPr>
-          <p:cNvPr id="13" name="Text 11"/>
-          <p:cNvSpPr/>
-          <p:nvPr/>
-        </p:nvSpPr>
-        <p:spPr>
-          <a:xfrm>
-            <a:off x="3314700" y="2651760"/>
-            <a:ext cx="1383030" cy="274320"/>
-          </a:xfrm>
-          <a:prstGeom prst="rect">
-            <a:avLst/>
-          </a:prstGeom>
-          <a:noFill/>
-          <a:ln/>
-        </p:spPr>
-        <p:txBody>
-          <a:bodyPr wrap="square" lIns="0" tIns="0" rIns="0" bIns="0" rtlCol="0" anchor="ctr"/>
-          <a:lstStyle/>
-          <a:p>
-            <a:pPr algn="ctr" indent="0" marL="0">
-              <a:buNone/>
-            </a:pPr>
-            <a:r>
-              <a:rPr lang="en-US" sz="1050" dirty="0">
-                <a:solidFill>
-                  <a:srgbClr val="9FB0C4"/>
+              <a:t> + threadIdx.x )</a:t>
+            </a:r>
+            <a:endParaRPr lang="en-US" sz="1400" dirty="0"/>
+          </a:p>
+          <a:p>
+            <a:pPr algn="l" indent="0" marL="0">
+              <a:lnSpc>
+                <a:spcPct val="110000"/>
+              </a:lnSpc>
+              <a:buNone/>
+            </a:pPr>
+            <a:r>
+              <a:rPr lang="en-US" sz="1400" dirty="0">
+                <a:solidFill>
+                  <a:srgbClr val="6B7D94"/>
                 </a:solidFill>
                 <a:latin typeface="Courier New" pitchFamily="34" charset="0"/>
                 <a:ea typeface="Courier New" pitchFamily="34" charset="-122"/>
                 <a:cs typeface="Courier New" pitchFamily="34" charset="-120"/>
               </a:rPr>
-              <a:t>+8B</a:t>
-            </a:r>
-            <a:endParaRPr lang="en-US" sz="1050" dirty="0"/>
-          </a:p>
-        </p:txBody>
-      </p:sp>
-      <p:sp>
-        <p:nvSpPr>
-          <p:cNvPr id="14" name="Shape 12"/>
-          <p:cNvSpPr/>
-          <p:nvPr/>
-        </p:nvSpPr>
-        <p:spPr>
-          <a:xfrm>
-            <a:off x="4725162" y="2148840"/>
-            <a:ext cx="1328166" cy="868680"/>
-          </a:xfrm>
-          <a:prstGeom prst="roundRect">
-            <a:avLst>
-              <a:gd name="adj" fmla="val 4211"/>
-            </a:avLst>
-          </a:prstGeom>
-          <a:solidFill>
-            <a:srgbClr val="0B1119"/>
-          </a:solidFill>
-          <a:ln w="12700">
-            <a:solidFill>
-              <a:srgbClr val="3FB8C4"/>
-            </a:solidFill>
-            <a:prstDash val="solid"/>
-          </a:ln>
-        </p:spPr>
-      </p:sp>
-      <p:sp>
-        <p:nvSpPr>
-          <p:cNvPr id="15" name="Text 13"/>
-          <p:cNvSpPr/>
-          <p:nvPr/>
-        </p:nvSpPr>
-        <p:spPr>
-          <a:xfrm>
-            <a:off x="4697730" y="2276856"/>
-            <a:ext cx="1383030" cy="365760"/>
-          </a:xfrm>
-          <a:prstGeom prst="rect">
-            <a:avLst/>
-          </a:prstGeom>
-          <a:noFill/>
-          <a:ln/>
-        </p:spPr>
-        <p:txBody>
-          <a:bodyPr wrap="square" lIns="0" tIns="0" rIns="0" bIns="0" rtlCol="0" anchor="ctr"/>
-          <a:lstStyle/>
-          <a:p>
-            <a:pPr algn="ctr" indent="0" marL="0">
-              <a:buNone/>
-            </a:pPr>
-            <a:r>
-              <a:rPr lang="en-US" sz="1600" b="1" dirty="0">
+              <a:t>// core.cu:26 — 스레드 t가 i번째 반복에 건드릴 word 주소</a:t>
+            </a:r>
+            <a:endParaRPr lang="en-US" sz="1400" dirty="0"/>
+          </a:p>
+        </p:txBody>
+      </p:sp>
+      <p:sp>
+        <p:nvSpPr>
+          <p:cNvPr id="6" name="Text 4"/>
+          <p:cNvSpPr/>
+          <p:nvPr/>
+        </p:nvSpPr>
+        <p:spPr>
+          <a:xfrm>
+            <a:off x="548640" y="3108960"/>
+            <a:ext cx="4206240" cy="640080"/>
+          </a:xfrm>
+          <a:prstGeom prst="rect">
+            <a:avLst/>
+          </a:prstGeom>
+          <a:noFill/>
+          <a:ln/>
+        </p:spPr>
+        <p:txBody>
+          <a:bodyPr wrap="square" lIns="0" tIns="0" rIns="0" bIns="0" rtlCol="0" anchor="t"/>
+          <a:lstStyle/>
+          <a:p>
+            <a:pPr indent="0" marL="0">
+              <a:buNone/>
+            </a:pPr>
+            <a:r>
+              <a:rPr lang="en-US" sz="1400" b="1" dirty="0">
                 <a:solidFill>
                   <a:srgbClr val="E7EDF5"/>
                 </a:solidFill>
@@ -14819,615 +17119,292 @@
                 <a:ea typeface="Courier New" pitchFamily="34" charset="-122"/>
                 <a:cs typeface="Courier New" pitchFamily="34" charset="-120"/>
               </a:rPr>
-              <a:t>T3</a:t>
-            </a:r>
-            <a:endParaRPr lang="en-US" sz="1600" dirty="0"/>
-          </a:p>
-        </p:txBody>
-      </p:sp>
-      <p:sp>
-        <p:nvSpPr>
-          <p:cNvPr id="16" name="Text 14"/>
-          <p:cNvSpPr/>
-          <p:nvPr/>
-        </p:nvSpPr>
-        <p:spPr>
-          <a:xfrm>
-            <a:off x="4697730" y="2651760"/>
-            <a:ext cx="1383030" cy="274320"/>
-          </a:xfrm>
-          <a:prstGeom prst="rect">
-            <a:avLst/>
-          </a:prstGeom>
-          <a:noFill/>
-          <a:ln/>
-        </p:spPr>
-        <p:txBody>
-          <a:bodyPr wrap="square" lIns="0" tIns="0" rIns="0" bIns="0" rtlCol="0" anchor="ctr"/>
-          <a:lstStyle/>
-          <a:p>
-            <a:pPr algn="ctr" indent="0" marL="0">
-              <a:buNone/>
-            </a:pPr>
-            <a:r>
-              <a:rPr lang="en-US" sz="1050" dirty="0">
-                <a:solidFill>
-                  <a:srgbClr val="9FB0C4"/>
+              <a:t>base</a:t>
+            </a:r>
+            <a:endParaRPr lang="en-US" sz="1400" dirty="0"/>
+          </a:p>
+        </p:txBody>
+      </p:sp>
+      <p:sp>
+        <p:nvSpPr>
+          <p:cNvPr id="7" name="Text 5"/>
+          <p:cNvSpPr/>
+          <p:nvPr/>
+        </p:nvSpPr>
+        <p:spPr>
+          <a:xfrm>
+            <a:off x="4937760" y="3108960"/>
+            <a:ext cx="6675120" cy="640080"/>
+          </a:xfrm>
+          <a:prstGeom prst="rect">
+            <a:avLst/>
+          </a:prstGeom>
+          <a:noFill/>
+          <a:ln/>
+        </p:spPr>
+        <p:txBody>
+          <a:bodyPr wrap="square" lIns="0" tIns="0" rIns="0" bIns="0" rtlCol="0" anchor="t"/>
+          <a:lstStyle/>
+          <a:p>
+            <a:pPr indent="0" marL="0">
+              <a:lnSpc>
+                <a:spcPct val="105000"/>
+              </a:lnSpc>
+              <a:buNone/>
+            </a:pPr>
+            <a:r>
+              <a:rPr lang="en-US" sz="1500" dirty="0">
+                <a:solidFill>
+                  <a:srgbClr val="E7EDF5"/>
+                </a:solidFill>
+                <a:latin typeface="Malgun Gothic" pitchFamily="34" charset="0"/>
+                <a:ea typeface="Malgun Gothic" pitchFamily="34" charset="-122"/>
+                <a:cs typeface="Malgun Gothic" pitchFamily="34" charset="-120"/>
+              </a:rPr>
+              <a:t>테스트 영역의 시작 주소</a:t>
+            </a:r>
+            <a:endParaRPr lang="en-US" sz="1500" dirty="0"/>
+          </a:p>
+        </p:txBody>
+      </p:sp>
+      <p:sp>
+        <p:nvSpPr>
+          <p:cNvPr id="8" name="Text 6"/>
+          <p:cNvSpPr/>
+          <p:nvPr/>
+        </p:nvSpPr>
+        <p:spPr>
+          <a:xfrm>
+            <a:off x="548640" y="3822192"/>
+            <a:ext cx="4206240" cy="640080"/>
+          </a:xfrm>
+          <a:prstGeom prst="rect">
+            <a:avLst/>
+          </a:prstGeom>
+          <a:noFill/>
+          <a:ln/>
+        </p:spPr>
+        <p:txBody>
+          <a:bodyPr wrap="square" lIns="0" tIns="0" rIns="0" bIns="0" rtlCol="0" anchor="t"/>
+          <a:lstStyle/>
+          <a:p>
+            <a:pPr indent="0" marL="0">
+              <a:buNone/>
+            </a:pPr>
+            <a:r>
+              <a:rPr lang="en-US" sz="1400" b="1" dirty="0">
+                <a:solidFill>
+                  <a:srgbClr val="E8A33D"/>
                 </a:solidFill>
                 <a:latin typeface="Courier New" pitchFamily="34" charset="0"/>
                 <a:ea typeface="Courier New" pitchFamily="34" charset="-122"/>
                 <a:cs typeface="Courier New" pitchFamily="34" charset="-120"/>
               </a:rPr>
-              <a:t>+12B</a:t>
-            </a:r>
-            <a:endParaRPr lang="en-US" sz="1050" dirty="0"/>
-          </a:p>
-        </p:txBody>
-      </p:sp>
-      <p:sp>
-        <p:nvSpPr>
-          <p:cNvPr id="17" name="Shape 15"/>
-          <p:cNvSpPr/>
-          <p:nvPr/>
-        </p:nvSpPr>
-        <p:spPr>
-          <a:xfrm>
-            <a:off x="6108192" y="2148840"/>
-            <a:ext cx="1328166" cy="868680"/>
-          </a:xfrm>
-          <a:prstGeom prst="roundRect">
-            <a:avLst>
-              <a:gd name="adj" fmla="val 4211"/>
-            </a:avLst>
-          </a:prstGeom>
-          <a:solidFill>
-            <a:srgbClr val="0B1119"/>
-          </a:solidFill>
-          <a:ln w="12700">
-            <a:solidFill>
-              <a:srgbClr val="E8A33D"/>
-            </a:solidFill>
-            <a:prstDash val="solid"/>
-          </a:ln>
-        </p:spPr>
-      </p:sp>
-      <p:sp>
-        <p:nvSpPr>
-          <p:cNvPr id="18" name="Text 16"/>
-          <p:cNvSpPr/>
-          <p:nvPr/>
-        </p:nvSpPr>
-        <p:spPr>
-          <a:xfrm>
-            <a:off x="6080760" y="2276856"/>
-            <a:ext cx="1383030" cy="365760"/>
-          </a:xfrm>
-          <a:prstGeom prst="rect">
-            <a:avLst/>
-          </a:prstGeom>
-          <a:noFill/>
-          <a:ln/>
-        </p:spPr>
-        <p:txBody>
-          <a:bodyPr wrap="square" lIns="0" tIns="0" rIns="0" bIns="0" rtlCol="0" anchor="ctr"/>
-          <a:lstStyle/>
-          <a:p>
-            <a:pPr algn="ctr" indent="0" marL="0">
-              <a:buNone/>
-            </a:pPr>
-            <a:r>
-              <a:rPr lang="en-US" sz="1600" b="1" dirty="0">
+              <a:t>blockIdx.x * N * blockDim.x</a:t>
+            </a:r>
+            <a:endParaRPr lang="en-US" sz="1400" dirty="0"/>
+          </a:p>
+        </p:txBody>
+      </p:sp>
+      <p:sp>
+        <p:nvSpPr>
+          <p:cNvPr id="9" name="Text 7"/>
+          <p:cNvSpPr/>
+          <p:nvPr/>
+        </p:nvSpPr>
+        <p:spPr>
+          <a:xfrm>
+            <a:off x="4937760" y="3822192"/>
+            <a:ext cx="6675120" cy="640080"/>
+          </a:xfrm>
+          <a:prstGeom prst="rect">
+            <a:avLst/>
+          </a:prstGeom>
+          <a:noFill/>
+          <a:ln/>
+        </p:spPr>
+        <p:txBody>
+          <a:bodyPr wrap="square" lIns="0" tIns="0" rIns="0" bIns="0" rtlCol="0" anchor="t"/>
+          <a:lstStyle/>
+          <a:p>
+            <a:pPr indent="0" marL="0">
+              <a:lnSpc>
+                <a:spcPct val="105000"/>
+              </a:lnSpc>
+              <a:buNone/>
+            </a:pPr>
+            <a:r>
+              <a:rPr lang="en-US" sz="1500" dirty="0">
                 <a:solidFill>
                   <a:srgbClr val="E7EDF5"/>
+                </a:solidFill>
+                <a:latin typeface="Malgun Gothic" pitchFamily="34" charset="0"/>
+                <a:ea typeface="Malgun Gothic" pitchFamily="34" charset="-122"/>
+                <a:cs typeface="Malgun Gothic" pitchFamily="34" charset="-120"/>
+              </a:rPr>
+              <a:t>이 블록이 담당하는 큰 구역의 시작 (블록마다 N·512 word씩 떨어짐)</a:t>
+            </a:r>
+            <a:endParaRPr lang="en-US" sz="1500" dirty="0"/>
+          </a:p>
+        </p:txBody>
+      </p:sp>
+      <p:sp>
+        <p:nvSpPr>
+          <p:cNvPr id="10" name="Text 8"/>
+          <p:cNvSpPr/>
+          <p:nvPr/>
+        </p:nvSpPr>
+        <p:spPr>
+          <a:xfrm>
+            <a:off x="548640" y="4535424"/>
+            <a:ext cx="4206240" cy="640080"/>
+          </a:xfrm>
+          <a:prstGeom prst="rect">
+            <a:avLst/>
+          </a:prstGeom>
+          <a:noFill/>
+          <a:ln/>
+        </p:spPr>
+        <p:txBody>
+          <a:bodyPr wrap="square" lIns="0" tIns="0" rIns="0" bIns="0" rtlCol="0" anchor="t"/>
+          <a:lstStyle/>
+          <a:p>
+            <a:pPr indent="0" marL="0">
+              <a:buNone/>
+            </a:pPr>
+            <a:r>
+              <a:rPr lang="en-US" sz="1400" b="1" dirty="0">
+                <a:solidFill>
+                  <a:srgbClr val="3FB8C4"/>
                 </a:solidFill>
                 <a:latin typeface="Courier New" pitchFamily="34" charset="0"/>
                 <a:ea typeface="Courier New" pitchFamily="34" charset="-122"/>
                 <a:cs typeface="Courier New" pitchFamily="34" charset="-120"/>
               </a:rPr>
-              <a:t>T4</a:t>
-            </a:r>
-            <a:endParaRPr lang="en-US" sz="1600" dirty="0"/>
-          </a:p>
-        </p:txBody>
-      </p:sp>
-      <p:sp>
-        <p:nvSpPr>
-          <p:cNvPr id="19" name="Text 17"/>
-          <p:cNvSpPr/>
-          <p:nvPr/>
-        </p:nvSpPr>
-        <p:spPr>
-          <a:xfrm>
-            <a:off x="6080760" y="2651760"/>
-            <a:ext cx="1383030" cy="274320"/>
-          </a:xfrm>
-          <a:prstGeom prst="rect">
-            <a:avLst/>
-          </a:prstGeom>
-          <a:noFill/>
-          <a:ln/>
-        </p:spPr>
-        <p:txBody>
-          <a:bodyPr wrap="square" lIns="0" tIns="0" rIns="0" bIns="0" rtlCol="0" anchor="ctr"/>
-          <a:lstStyle/>
-          <a:p>
-            <a:pPr algn="ctr" indent="0" marL="0">
-              <a:buNone/>
-            </a:pPr>
-            <a:r>
-              <a:rPr lang="en-US" sz="1050" dirty="0">
-                <a:solidFill>
-                  <a:srgbClr val="9FB0C4"/>
+              <a:t>i * blockDim.x</a:t>
+            </a:r>
+            <a:endParaRPr lang="en-US" sz="1400" dirty="0"/>
+          </a:p>
+        </p:txBody>
+      </p:sp>
+      <p:sp>
+        <p:nvSpPr>
+          <p:cNvPr id="11" name="Text 9"/>
+          <p:cNvSpPr/>
+          <p:nvPr/>
+        </p:nvSpPr>
+        <p:spPr>
+          <a:xfrm>
+            <a:off x="4937760" y="4535424"/>
+            <a:ext cx="6675120" cy="640080"/>
+          </a:xfrm>
+          <a:prstGeom prst="rect">
+            <a:avLst/>
+          </a:prstGeom>
+          <a:noFill/>
+          <a:ln/>
+        </p:spPr>
+        <p:txBody>
+          <a:bodyPr wrap="square" lIns="0" tIns="0" rIns="0" bIns="0" rtlCol="0" anchor="t"/>
+          <a:lstStyle/>
+          <a:p>
+            <a:pPr indent="0" marL="0">
+              <a:lnSpc>
+                <a:spcPct val="105000"/>
+              </a:lnSpc>
+              <a:buNone/>
+            </a:pPr>
+            <a:r>
+              <a:rPr lang="en-US" sz="1500" dirty="0">
+                <a:solidFill>
+                  <a:srgbClr val="E7EDF5"/>
+                </a:solidFill>
+                <a:latin typeface="Malgun Gothic" pitchFamily="34" charset="0"/>
+                <a:ea typeface="Malgun Gothic" pitchFamily="34" charset="-122"/>
+                <a:cs typeface="Malgun Gothic" pitchFamily="34" charset="-120"/>
+              </a:rPr>
+              <a:t>블록 안에서 i번째 반복의 오프셋 (한 스레드가 N개 word 담당)</a:t>
+            </a:r>
+            <a:endParaRPr lang="en-US" sz="1500" dirty="0"/>
+          </a:p>
+        </p:txBody>
+      </p:sp>
+      <p:sp>
+        <p:nvSpPr>
+          <p:cNvPr id="12" name="Text 10"/>
+          <p:cNvSpPr/>
+          <p:nvPr/>
+        </p:nvSpPr>
+        <p:spPr>
+          <a:xfrm>
+            <a:off x="548640" y="5248656"/>
+            <a:ext cx="4206240" cy="640080"/>
+          </a:xfrm>
+          <a:prstGeom prst="rect">
+            <a:avLst/>
+          </a:prstGeom>
+          <a:noFill/>
+          <a:ln/>
+        </p:spPr>
+        <p:txBody>
+          <a:bodyPr wrap="square" lIns="0" tIns="0" rIns="0" bIns="0" rtlCol="0" anchor="t"/>
+          <a:lstStyle/>
+          <a:p>
+            <a:pPr indent="0" marL="0">
+              <a:buNone/>
+            </a:pPr>
+            <a:r>
+              <a:rPr lang="en-US" sz="1400" b="1" dirty="0">
+                <a:solidFill>
+                  <a:srgbClr val="F2C079"/>
                 </a:solidFill>
                 <a:latin typeface="Courier New" pitchFamily="34" charset="0"/>
                 <a:ea typeface="Courier New" pitchFamily="34" charset="-122"/>
                 <a:cs typeface="Courier New" pitchFamily="34" charset="-120"/>
               </a:rPr>
-              <a:t>+16B</a:t>
-            </a:r>
-            <a:endParaRPr lang="en-US" sz="1050" dirty="0"/>
-          </a:p>
-        </p:txBody>
-      </p:sp>
-      <p:sp>
-        <p:nvSpPr>
-          <p:cNvPr id="20" name="Shape 18"/>
-          <p:cNvSpPr/>
-          <p:nvPr/>
-        </p:nvSpPr>
-        <p:spPr>
-          <a:xfrm>
-            <a:off x="7491222" y="2148840"/>
-            <a:ext cx="1328166" cy="868680"/>
-          </a:xfrm>
-          <a:prstGeom prst="roundRect">
-            <a:avLst>
-              <a:gd name="adj" fmla="val 4211"/>
-            </a:avLst>
-          </a:prstGeom>
-          <a:solidFill>
-            <a:srgbClr val="0B1119"/>
-          </a:solidFill>
-          <a:ln w="12700">
-            <a:solidFill>
-              <a:srgbClr val="3FB8C4"/>
-            </a:solidFill>
-            <a:prstDash val="solid"/>
-          </a:ln>
-        </p:spPr>
-      </p:sp>
-      <p:sp>
-        <p:nvSpPr>
-          <p:cNvPr id="21" name="Text 19"/>
-          <p:cNvSpPr/>
-          <p:nvPr/>
-        </p:nvSpPr>
-        <p:spPr>
-          <a:xfrm>
-            <a:off x="7463790" y="2276856"/>
-            <a:ext cx="1383030" cy="365760"/>
-          </a:xfrm>
-          <a:prstGeom prst="rect">
-            <a:avLst/>
-          </a:prstGeom>
-          <a:noFill/>
-          <a:ln/>
-        </p:spPr>
-        <p:txBody>
-          <a:bodyPr wrap="square" lIns="0" tIns="0" rIns="0" bIns="0" rtlCol="0" anchor="ctr"/>
-          <a:lstStyle/>
-          <a:p>
-            <a:pPr algn="ctr" indent="0" marL="0">
-              <a:buNone/>
-            </a:pPr>
-            <a:r>
-              <a:rPr lang="en-US" sz="1600" b="1" dirty="0">
+              <a:t>threadIdx.x</a:t>
+            </a:r>
+            <a:endParaRPr lang="en-US" sz="1400" dirty="0"/>
+          </a:p>
+        </p:txBody>
+      </p:sp>
+      <p:sp>
+        <p:nvSpPr>
+          <p:cNvPr id="13" name="Text 11"/>
+          <p:cNvSpPr/>
+          <p:nvPr/>
+        </p:nvSpPr>
+        <p:spPr>
+          <a:xfrm>
+            <a:off x="4937760" y="5248656"/>
+            <a:ext cx="6675120" cy="640080"/>
+          </a:xfrm>
+          <a:prstGeom prst="rect">
+            <a:avLst/>
+          </a:prstGeom>
+          <a:noFill/>
+          <a:ln/>
+        </p:spPr>
+        <p:txBody>
+          <a:bodyPr wrap="square" lIns="0" tIns="0" rIns="0" bIns="0" rtlCol="0" anchor="t"/>
+          <a:lstStyle/>
+          <a:p>
+            <a:pPr indent="0" marL="0">
+              <a:lnSpc>
+                <a:spcPct val="105000"/>
+              </a:lnSpc>
+              <a:buNone/>
+            </a:pPr>
+            <a:r>
+              <a:rPr lang="en-US" sz="1500" dirty="0">
                 <a:solidFill>
                   <a:srgbClr val="E7EDF5"/>
-                </a:solidFill>
-                <a:latin typeface="Courier New" pitchFamily="34" charset="0"/>
-                <a:ea typeface="Courier New" pitchFamily="34" charset="-122"/>
-                <a:cs typeface="Courier New" pitchFamily="34" charset="-120"/>
-              </a:rPr>
-              <a:t>T5</a:t>
-            </a:r>
-            <a:endParaRPr lang="en-US" sz="1600" dirty="0"/>
-          </a:p>
-        </p:txBody>
-      </p:sp>
-      <p:sp>
-        <p:nvSpPr>
-          <p:cNvPr id="22" name="Text 20"/>
-          <p:cNvSpPr/>
-          <p:nvPr/>
-        </p:nvSpPr>
-        <p:spPr>
-          <a:xfrm>
-            <a:off x="7463790" y="2651760"/>
-            <a:ext cx="1383030" cy="274320"/>
-          </a:xfrm>
-          <a:prstGeom prst="rect">
-            <a:avLst/>
-          </a:prstGeom>
-          <a:noFill/>
-          <a:ln/>
-        </p:spPr>
-        <p:txBody>
-          <a:bodyPr wrap="square" lIns="0" tIns="0" rIns="0" bIns="0" rtlCol="0" anchor="ctr"/>
-          <a:lstStyle/>
-          <a:p>
-            <a:pPr algn="ctr" indent="0" marL="0">
-              <a:buNone/>
-            </a:pPr>
-            <a:r>
-              <a:rPr lang="en-US" sz="1050" dirty="0">
-                <a:solidFill>
-                  <a:srgbClr val="9FB0C4"/>
-                </a:solidFill>
-                <a:latin typeface="Courier New" pitchFamily="34" charset="0"/>
-                <a:ea typeface="Courier New" pitchFamily="34" charset="-122"/>
-                <a:cs typeface="Courier New" pitchFamily="34" charset="-120"/>
-              </a:rPr>
-              <a:t>+20B</a:t>
-            </a:r>
-            <a:endParaRPr lang="en-US" sz="1050" dirty="0"/>
-          </a:p>
-        </p:txBody>
-      </p:sp>
-      <p:sp>
-        <p:nvSpPr>
-          <p:cNvPr id="23" name="Shape 21"/>
-          <p:cNvSpPr/>
-          <p:nvPr/>
-        </p:nvSpPr>
-        <p:spPr>
-          <a:xfrm>
-            <a:off x="8874252" y="2148840"/>
-            <a:ext cx="1328166" cy="868680"/>
-          </a:xfrm>
-          <a:prstGeom prst="roundRect">
-            <a:avLst>
-              <a:gd name="adj" fmla="val 4211"/>
-            </a:avLst>
-          </a:prstGeom>
-          <a:solidFill>
-            <a:srgbClr val="0B1119"/>
-          </a:solidFill>
-          <a:ln w="12700">
-            <a:solidFill>
-              <a:srgbClr val="E8A33D"/>
-            </a:solidFill>
-            <a:prstDash val="solid"/>
-          </a:ln>
-        </p:spPr>
-      </p:sp>
-      <p:sp>
-        <p:nvSpPr>
-          <p:cNvPr id="24" name="Text 22"/>
-          <p:cNvSpPr/>
-          <p:nvPr/>
-        </p:nvSpPr>
-        <p:spPr>
-          <a:xfrm>
-            <a:off x="8846820" y="2276856"/>
-            <a:ext cx="1383030" cy="365760"/>
-          </a:xfrm>
-          <a:prstGeom prst="rect">
-            <a:avLst/>
-          </a:prstGeom>
-          <a:noFill/>
-          <a:ln/>
-        </p:spPr>
-        <p:txBody>
-          <a:bodyPr wrap="square" lIns="0" tIns="0" rIns="0" bIns="0" rtlCol="0" anchor="ctr"/>
-          <a:lstStyle/>
-          <a:p>
-            <a:pPr algn="ctr" indent="0" marL="0">
-              <a:buNone/>
-            </a:pPr>
-            <a:r>
-              <a:rPr lang="en-US" sz="1600" b="1" dirty="0">
-                <a:solidFill>
-                  <a:srgbClr val="E7EDF5"/>
-                </a:solidFill>
-                <a:latin typeface="Courier New" pitchFamily="34" charset="0"/>
-                <a:ea typeface="Courier New" pitchFamily="34" charset="-122"/>
-                <a:cs typeface="Courier New" pitchFamily="34" charset="-120"/>
-              </a:rPr>
-              <a:t>T6</a:t>
-            </a:r>
-            <a:endParaRPr lang="en-US" sz="1600" dirty="0"/>
-          </a:p>
-        </p:txBody>
-      </p:sp>
-      <p:sp>
-        <p:nvSpPr>
-          <p:cNvPr id="25" name="Text 23"/>
-          <p:cNvSpPr/>
-          <p:nvPr/>
-        </p:nvSpPr>
-        <p:spPr>
-          <a:xfrm>
-            <a:off x="8846820" y="2651760"/>
-            <a:ext cx="1383030" cy="274320"/>
-          </a:xfrm>
-          <a:prstGeom prst="rect">
-            <a:avLst/>
-          </a:prstGeom>
-          <a:noFill/>
-          <a:ln/>
-        </p:spPr>
-        <p:txBody>
-          <a:bodyPr wrap="square" lIns="0" tIns="0" rIns="0" bIns="0" rtlCol="0" anchor="ctr"/>
-          <a:lstStyle/>
-          <a:p>
-            <a:pPr algn="ctr" indent="0" marL="0">
-              <a:buNone/>
-            </a:pPr>
-            <a:r>
-              <a:rPr lang="en-US" sz="1050" dirty="0">
-                <a:solidFill>
-                  <a:srgbClr val="9FB0C4"/>
-                </a:solidFill>
-                <a:latin typeface="Courier New" pitchFamily="34" charset="0"/>
-                <a:ea typeface="Courier New" pitchFamily="34" charset="-122"/>
-                <a:cs typeface="Courier New" pitchFamily="34" charset="-120"/>
-              </a:rPr>
-              <a:t>+24B</a:t>
-            </a:r>
-            <a:endParaRPr lang="en-US" sz="1050" dirty="0"/>
-          </a:p>
-        </p:txBody>
-      </p:sp>
-      <p:sp>
-        <p:nvSpPr>
-          <p:cNvPr id="26" name="Shape 24"/>
-          <p:cNvSpPr/>
-          <p:nvPr/>
-        </p:nvSpPr>
-        <p:spPr>
-          <a:xfrm>
-            <a:off x="10257282" y="2148840"/>
-            <a:ext cx="1328166" cy="868680"/>
-          </a:xfrm>
-          <a:prstGeom prst="roundRect">
-            <a:avLst>
-              <a:gd name="adj" fmla="val 4211"/>
-            </a:avLst>
-          </a:prstGeom>
-          <a:solidFill>
-            <a:srgbClr val="0B1119"/>
-          </a:solidFill>
-          <a:ln w="12700">
-            <a:solidFill>
-              <a:srgbClr val="3FB8C4"/>
-            </a:solidFill>
-            <a:prstDash val="solid"/>
-          </a:ln>
-        </p:spPr>
-      </p:sp>
-      <p:sp>
-        <p:nvSpPr>
-          <p:cNvPr id="27" name="Text 25"/>
-          <p:cNvSpPr/>
-          <p:nvPr/>
-        </p:nvSpPr>
-        <p:spPr>
-          <a:xfrm>
-            <a:off x="10229850" y="2276856"/>
-            <a:ext cx="1383030" cy="365760"/>
-          </a:xfrm>
-          <a:prstGeom prst="rect">
-            <a:avLst/>
-          </a:prstGeom>
-          <a:noFill/>
-          <a:ln/>
-        </p:spPr>
-        <p:txBody>
-          <a:bodyPr wrap="square" lIns="0" tIns="0" rIns="0" bIns="0" rtlCol="0" anchor="ctr"/>
-          <a:lstStyle/>
-          <a:p>
-            <a:pPr algn="ctr" indent="0" marL="0">
-              <a:buNone/>
-            </a:pPr>
-            <a:r>
-              <a:rPr lang="en-US" sz="1600" b="1" dirty="0">
-                <a:solidFill>
-                  <a:srgbClr val="E7EDF5"/>
-                </a:solidFill>
-                <a:latin typeface="Courier New" pitchFamily="34" charset="0"/>
-                <a:ea typeface="Courier New" pitchFamily="34" charset="-122"/>
-                <a:cs typeface="Courier New" pitchFamily="34" charset="-120"/>
-              </a:rPr>
-              <a:t>…</a:t>
-            </a:r>
-            <a:endParaRPr lang="en-US" sz="1600" dirty="0"/>
-          </a:p>
-        </p:txBody>
-      </p:sp>
-      <p:sp>
-        <p:nvSpPr>
-          <p:cNvPr id="28" name="Text 26"/>
-          <p:cNvSpPr/>
-          <p:nvPr/>
-        </p:nvSpPr>
-        <p:spPr>
-          <a:xfrm>
-            <a:off x="10229850" y="2651760"/>
-            <a:ext cx="1383030" cy="274320"/>
-          </a:xfrm>
-          <a:prstGeom prst="rect">
-            <a:avLst/>
-          </a:prstGeom>
-          <a:noFill/>
-          <a:ln/>
-        </p:spPr>
-        <p:txBody>
-          <a:bodyPr wrap="square" lIns="0" tIns="0" rIns="0" bIns="0" rtlCol="0" anchor="ctr"/>
-          <a:lstStyle/>
-          <a:p>
-            <a:pPr algn="ctr" indent="0" marL="0">
-              <a:buNone/>
-            </a:pPr>
-            <a:endParaRPr lang="en-US" sz="1050" dirty="0"/>
-          </a:p>
-        </p:txBody>
-      </p:sp>
-      <p:sp>
-        <p:nvSpPr>
-          <p:cNvPr id="29" name="Text 27"/>
-          <p:cNvSpPr/>
-          <p:nvPr/>
-        </p:nvSpPr>
-        <p:spPr>
-          <a:xfrm>
-            <a:off x="548640" y="3108960"/>
-            <a:ext cx="11064240" cy="274320"/>
-          </a:xfrm>
-          <a:prstGeom prst="rect">
-            <a:avLst/>
-          </a:prstGeom>
-          <a:noFill/>
-          <a:ln/>
-        </p:spPr>
-        <p:txBody>
-          <a:bodyPr wrap="square" lIns="0" tIns="0" rIns="0" bIns="0" rtlCol="0" anchor="ctr"/>
-          <a:lstStyle/>
-          <a:p>
-            <a:pPr algn="ctr" indent="0" marL="0">
-              <a:buNone/>
-            </a:pPr>
-            <a:r>
-              <a:rPr lang="en-US" sz="1200" i="1" dirty="0">
-                <a:solidFill>
-                  <a:srgbClr val="9FB0C4"/>
                 </a:solidFill>
                 <a:latin typeface="Malgun Gothic" pitchFamily="34" charset="0"/>
                 <a:ea typeface="Malgun Gothic" pitchFamily="34" charset="-122"/>
                 <a:cs typeface="Malgun Gothic" pitchFamily="34" charset="-120"/>
               </a:rPr>
-              <a:t>연속된 메모리 주소 →</a:t>
-            </a:r>
-            <a:endParaRPr lang="en-US" sz="1200" dirty="0"/>
-          </a:p>
-        </p:txBody>
-      </p:sp>
-      <p:sp>
-        <p:nvSpPr>
-          <p:cNvPr id="30" name="Shape 28"/>
-          <p:cNvSpPr/>
-          <p:nvPr/>
-        </p:nvSpPr>
-        <p:spPr>
-          <a:xfrm>
-            <a:off x="548640" y="3794760"/>
-            <a:ext cx="11064240" cy="1920240"/>
-          </a:xfrm>
-          <a:prstGeom prst="roundRect">
-            <a:avLst>
-              <a:gd name="adj" fmla="val 3810"/>
-            </a:avLst>
-          </a:prstGeom>
-          <a:solidFill>
-            <a:srgbClr val="18212E"/>
-          </a:solidFill>
-          <a:ln w="19050">
-            <a:solidFill>
-              <a:srgbClr val="3FB8C4"/>
-            </a:solidFill>
-            <a:prstDash val="solid"/>
-          </a:ln>
-        </p:spPr>
-      </p:sp>
-      <p:sp>
-        <p:nvSpPr>
-          <p:cNvPr id="31" name="Text 29"/>
-          <p:cNvSpPr/>
-          <p:nvPr/>
-        </p:nvSpPr>
-        <p:spPr>
-          <a:xfrm>
-            <a:off x="868680" y="4023360"/>
-            <a:ext cx="10424160" cy="1554480"/>
-          </a:xfrm>
-          <a:prstGeom prst="rect">
-            <a:avLst/>
-          </a:prstGeom>
-          <a:noFill/>
-          <a:ln/>
-        </p:spPr>
-        <p:txBody>
-          <a:bodyPr wrap="square" lIns="0" tIns="0" rIns="0" bIns="0" rtlCol="0" anchor="t"/>
-          <a:lstStyle/>
-          <a:p>
-            <a:pPr marL="342900" indent="-342900">
-              <a:lnSpc>
-                <a:spcPct val="105000"/>
-              </a:lnSpc>
-              <a:spcAft>
-                <a:spcPts val="900"/>
-              </a:spcAft>
-              <a:buSzPct val="100000"/>
-              <a:buChar char="•"/>
-            </a:pPr>
-            <a:r>
-              <a:rPr lang="en-US" sz="1500" dirty="0">
-                <a:solidFill>
-                  <a:srgbClr val="E7EDF5"/>
-                </a:solidFill>
-                <a:latin typeface="Malgun Gothic" pitchFamily="34" charset="0"/>
-                <a:ea typeface="Malgun Gothic" pitchFamily="34" charset="-122"/>
-                <a:cs typeface="Malgun Gothic" pitchFamily="34" charset="-120"/>
-              </a:rPr>
-              <a:t>워프(warp, 32스레드)의 접근이 하나의 메모리 트랜잭션으로 묶인다 → 대역폭 최대 활용</a:t>
-            </a:r>
-            <a:endParaRPr lang="en-US" sz="1500" dirty="0"/>
-          </a:p>
-          <a:p>
-            <a:pPr marL="342900" indent="-342900">
-              <a:lnSpc>
-                <a:spcPct val="105000"/>
-              </a:lnSpc>
-              <a:spcAft>
-                <a:spcPts val="900"/>
-              </a:spcAft>
-              <a:buSzPct val="100000"/>
-              <a:buChar char="•"/>
-            </a:pPr>
-            <a:r>
-              <a:rPr lang="en-US" sz="1500" dirty="0">
-                <a:solidFill>
-                  <a:srgbClr val="E7EDF5"/>
-                </a:solidFill>
-                <a:latin typeface="Malgun Gothic" pitchFamily="34" charset="0"/>
-                <a:ea typeface="Malgun Gothic" pitchFamily="34" charset="-122"/>
-                <a:cs typeface="Malgun Gothic" pitchFamily="34" charset="-120"/>
-              </a:rPr>
-              <a:t>만약 스레드가 큰 간격으로 흩어지면 트랜잭션이 쪼개져 느려진다 (uncoalesced)</a:t>
-            </a:r>
-            <a:endParaRPr lang="en-US" sz="1500" dirty="0"/>
-          </a:p>
-          <a:p>
-            <a:pPr marL="342900" indent="-342900">
-              <a:lnSpc>
-                <a:spcPct val="105000"/>
-              </a:lnSpc>
-              <a:spcAft>
-                <a:spcPts val="900"/>
-              </a:spcAft>
-              <a:buSzPct val="100000"/>
-              <a:buChar char="•"/>
-            </a:pPr>
-            <a:r>
-              <a:rPr lang="en-US" sz="1500" dirty="0">
-                <a:solidFill>
-                  <a:srgbClr val="E7EDF5"/>
-                </a:solidFill>
-                <a:latin typeface="Malgun Gothic" pitchFamily="34" charset="0"/>
-                <a:ea typeface="Malgun Gothic" pitchFamily="34" charset="-122"/>
-                <a:cs typeface="Malgun Gothic" pitchFamily="34" charset="-120"/>
-              </a:rPr>
-              <a:t>블록은 N·blockDim.x word씩 널찍이 떨어진 구역을 담당해 전체 영역을 빈틈없이 덮는다</a:t>
+              <a:t>그 안에서 내 스레드의 위치 (0~511)</a:t>
             </a:r>
             <a:endParaRPr lang="en-US" sz="1500" dirty="0"/>
           </a:p>
